--- a/GameStore with Visual Studio Code.pptx
+++ b/GameStore with Visual Studio Code.pptx
@@ -25,6 +25,23 @@
     <p:sldId id="275" r:id="rId19"/>
     <p:sldId id="276" r:id="rId20"/>
     <p:sldId id="277" r:id="rId21"/>
+    <p:sldId id="278" r:id="rId22"/>
+    <p:sldId id="279" r:id="rId23"/>
+    <p:sldId id="280" r:id="rId24"/>
+    <p:sldId id="281" r:id="rId25"/>
+    <p:sldId id="282" r:id="rId26"/>
+    <p:sldId id="283" r:id="rId27"/>
+    <p:sldId id="284" r:id="rId28"/>
+    <p:sldId id="285" r:id="rId29"/>
+    <p:sldId id="286" r:id="rId30"/>
+    <p:sldId id="287" r:id="rId31"/>
+    <p:sldId id="288" r:id="rId32"/>
+    <p:sldId id="289" r:id="rId33"/>
+    <p:sldId id="290" r:id="rId34"/>
+    <p:sldId id="291" r:id="rId35"/>
+    <p:sldId id="292" r:id="rId36"/>
+    <p:sldId id="293" r:id="rId37"/>
+    <p:sldId id="294" r:id="rId38"/>
   </p:sldIdLst>
   <p:sldSz cx="12192000" cy="6858000"/>
   <p:notesSz cx="6858000" cy="9144000"/>
@@ -124,6 +141,67 @@
     </a:lvl9pPr>
   </p:defaultTextStyle>
   <p:extLst>
+    <p:ext uri="{521415D9-36F7-43E2-AB2F-B90AF26B5E84}">
+      <p14:sectionLst xmlns:p14="http://schemas.microsoft.com/office/powerpoint/2010/main">
+        <p14:section name="Title" id="{B216416E-8BD7-4289-8B69-8A1D7DD0A132}">
+          <p14:sldIdLst>
+            <p14:sldId id="256"/>
+          </p14:sldIdLst>
+        </p14:section>
+        <p14:section name="Environment Setup" id="{D8564707-ECA1-4A12-B740-DB61442E6872}">
+          <p14:sldIdLst>
+            <p14:sldId id="257"/>
+            <p14:sldId id="258"/>
+            <p14:sldId id="259"/>
+            <p14:sldId id="261"/>
+            <p14:sldId id="262"/>
+            <p14:sldId id="265"/>
+            <p14:sldId id="264"/>
+          </p14:sldIdLst>
+        </p14:section>
+        <p14:section name="Buidling and running" id="{831FDB76-1369-430C-AE4A-26704F567B80}">
+          <p14:sldIdLst>
+            <p14:sldId id="266"/>
+            <p14:sldId id="267"/>
+            <p14:sldId id="268"/>
+            <p14:sldId id="269"/>
+            <p14:sldId id="270"/>
+            <p14:sldId id="271"/>
+            <p14:sldId id="272"/>
+          </p14:sldIdLst>
+        </p14:section>
+        <p14:section name="Rest API" id="{1E10F4FE-508B-4B34-966D-60315EE37E6D}">
+          <p14:sldIdLst>
+            <p14:sldId id="273"/>
+            <p14:sldId id="274"/>
+            <p14:sldId id="275"/>
+            <p14:sldId id="276"/>
+            <p14:sldId id="277"/>
+            <p14:sldId id="278"/>
+            <p14:sldId id="279"/>
+            <p14:sldId id="280"/>
+            <p14:sldId id="281"/>
+            <p14:sldId id="282"/>
+          </p14:sldIdLst>
+        </p14:section>
+        <p14:section name="Implementing .Net REST API" id="{836F3CFC-D6B7-407D-BDC8-333E946CC035}">
+          <p14:sldIdLst>
+            <p14:sldId id="283"/>
+            <p14:sldId id="284"/>
+            <p14:sldId id="285"/>
+            <p14:sldId id="286"/>
+            <p14:sldId id="287"/>
+            <p14:sldId id="288"/>
+            <p14:sldId id="289"/>
+            <p14:sldId id="290"/>
+            <p14:sldId id="291"/>
+            <p14:sldId id="292"/>
+            <p14:sldId id="293"/>
+            <p14:sldId id="294"/>
+          </p14:sldIdLst>
+        </p14:section>
+      </p14:sectionLst>
+    </p:ext>
     <p:ext uri="{EFAFB233-063F-42B5-8137-9DF3F51BA10A}">
       <p15:sldGuideLst xmlns:p15="http://schemas.microsoft.com/office/powerpoint/2012/main"/>
     </p:ext>
@@ -181,7 +259,7 @@
           <a:noFill/>
           <a:extLst>
             <a:ext uri="{909E8E84-426E-40dd-AFC4-6F175D3DCCD1}">
-              <a14:hiddenFill xmlns="" xmlns:a14="http://schemas.microsoft.com/office/drawing/2010/main">
+              <a14:hiddenFill xmlns:a14="http://schemas.microsoft.com/office/drawing/2010/main" xmlns="">
                 <a:solidFill>
                   <a:srgbClr val="FFFFFF"/>
                 </a:solidFill>
@@ -241,7 +319,7 @@
             </a:ln>
             <a:extLst>
               <a:ext uri="{91240B29-F687-4f45-9708-019B960494DF}">
-                <a14:hiddenLine xmlns="" xmlns:a14="http://schemas.microsoft.com/office/drawing/2010/main" w="9525">
+                <a14:hiddenLine xmlns:a14="http://schemas.microsoft.com/office/drawing/2010/main" xmlns="" w="9525">
                   <a:solidFill>
                     <a:srgbClr val="000000"/>
                   </a:solidFill>
@@ -338,7 +416,7 @@
             </a:ln>
             <a:extLst>
               <a:ext uri="{91240B29-F687-4f45-9708-019B960494DF}">
-                <a14:hiddenLine xmlns="" xmlns:a14="http://schemas.microsoft.com/office/drawing/2010/main" w="9525">
+                <a14:hiddenLine xmlns:a14="http://schemas.microsoft.com/office/drawing/2010/main" xmlns="" w="9525">
                   <a:solidFill>
                     <a:srgbClr val="000000"/>
                   </a:solidFill>
@@ -435,7 +513,7 @@
             </a:ln>
             <a:extLst>
               <a:ext uri="{91240B29-F687-4f45-9708-019B960494DF}">
-                <a14:hiddenLine xmlns="" xmlns:a14="http://schemas.microsoft.com/office/drawing/2010/main" w="9525">
+                <a14:hiddenLine xmlns:a14="http://schemas.microsoft.com/office/drawing/2010/main" xmlns="" w="9525">
                   <a:solidFill>
                     <a:srgbClr val="000000"/>
                   </a:solidFill>
@@ -476,7 +554,7 @@
             </a:ln>
             <a:extLst>
               <a:ext uri="{91240B29-F687-4f45-9708-019B960494DF}">
-                <a14:hiddenLine xmlns="" xmlns:a14="http://schemas.microsoft.com/office/drawing/2010/main" w="9525">
+                <a14:hiddenLine xmlns:a14="http://schemas.microsoft.com/office/drawing/2010/main" xmlns="" w="9525">
                   <a:solidFill>
                     <a:srgbClr val="000000"/>
                   </a:solidFill>
@@ -573,7 +651,7 @@
             </a:ln>
             <a:extLst>
               <a:ext uri="{91240B29-F687-4f45-9708-019B960494DF}">
-                <a14:hiddenLine xmlns="" xmlns:a14="http://schemas.microsoft.com/office/drawing/2010/main" w="9525">
+                <a14:hiddenLine xmlns:a14="http://schemas.microsoft.com/office/drawing/2010/main" xmlns="" w="9525">
                   <a:solidFill>
                     <a:srgbClr val="000000"/>
                   </a:solidFill>
@@ -642,7 +720,7 @@
             </a:ln>
             <a:extLst>
               <a:ext uri="{91240B29-F687-4f45-9708-019B960494DF}">
-                <a14:hiddenLine xmlns="" xmlns:a14="http://schemas.microsoft.com/office/drawing/2010/main" w="9525">
+                <a14:hiddenLine xmlns:a14="http://schemas.microsoft.com/office/drawing/2010/main" xmlns="" w="9525">
                   <a:solidFill>
                     <a:srgbClr val="000000"/>
                   </a:solidFill>
@@ -711,7 +789,7 @@
             </a:ln>
             <a:extLst>
               <a:ext uri="{91240B29-F687-4f45-9708-019B960494DF}">
-                <a14:hiddenLine xmlns="" xmlns:a14="http://schemas.microsoft.com/office/drawing/2010/main" w="9525">
+                <a14:hiddenLine xmlns:a14="http://schemas.microsoft.com/office/drawing/2010/main" xmlns="" w="9525">
                   <a:solidFill>
                     <a:srgbClr val="000000"/>
                   </a:solidFill>
@@ -808,7 +886,7 @@
             </a:ln>
             <a:extLst>
               <a:ext uri="{91240B29-F687-4f45-9708-019B960494DF}">
-                <a14:hiddenLine xmlns="" xmlns:a14="http://schemas.microsoft.com/office/drawing/2010/main" w="9525">
+                <a14:hiddenLine xmlns:a14="http://schemas.microsoft.com/office/drawing/2010/main" xmlns="" w="9525">
                   <a:solidFill>
                     <a:srgbClr val="000000"/>
                   </a:solidFill>
@@ -877,7 +955,7 @@
             </a:ln>
             <a:extLst>
               <a:ext uri="{91240B29-F687-4f45-9708-019B960494DF}">
-                <a14:hiddenLine xmlns="" xmlns:a14="http://schemas.microsoft.com/office/drawing/2010/main" w="9525">
+                <a14:hiddenLine xmlns:a14="http://schemas.microsoft.com/office/drawing/2010/main" xmlns="" w="9525">
                   <a:solidFill>
                     <a:srgbClr val="000000"/>
                   </a:solidFill>
@@ -946,7 +1024,7 @@
             </a:ln>
             <a:extLst>
               <a:ext uri="{91240B29-F687-4f45-9708-019B960494DF}">
-                <a14:hiddenLine xmlns="" xmlns:a14="http://schemas.microsoft.com/office/drawing/2010/main" w="9525">
+                <a14:hiddenLine xmlns:a14="http://schemas.microsoft.com/office/drawing/2010/main" xmlns="" w="9525">
                   <a:solidFill>
                     <a:srgbClr val="000000"/>
                   </a:solidFill>
@@ -1043,7 +1121,7 @@
             </a:ln>
             <a:extLst>
               <a:ext uri="{91240B29-F687-4f45-9708-019B960494DF}">
-                <a14:hiddenLine xmlns="" xmlns:a14="http://schemas.microsoft.com/office/drawing/2010/main" w="9525">
+                <a14:hiddenLine xmlns:a14="http://schemas.microsoft.com/office/drawing/2010/main" xmlns="" w="9525">
                   <a:solidFill>
                     <a:srgbClr val="000000"/>
                   </a:solidFill>
@@ -1140,7 +1218,7 @@
             </a:ln>
             <a:extLst>
               <a:ext uri="{91240B29-F687-4f45-9708-019B960494DF}">
-                <a14:hiddenLine xmlns="" xmlns:a14="http://schemas.microsoft.com/office/drawing/2010/main" w="9525">
+                <a14:hiddenLine xmlns:a14="http://schemas.microsoft.com/office/drawing/2010/main" xmlns="" w="9525">
                   <a:solidFill>
                     <a:srgbClr val="000000"/>
                   </a:solidFill>
@@ -1209,7 +1287,7 @@
             </a:ln>
             <a:extLst>
               <a:ext uri="{91240B29-F687-4f45-9708-019B960494DF}">
-                <a14:hiddenLine xmlns="" xmlns:a14="http://schemas.microsoft.com/office/drawing/2010/main" w="9525">
+                <a14:hiddenLine xmlns:a14="http://schemas.microsoft.com/office/drawing/2010/main" xmlns="" w="9525">
                   <a:solidFill>
                     <a:srgbClr val="000000"/>
                   </a:solidFill>
@@ -1326,7 +1404,7 @@
             </a:ln>
             <a:extLst>
               <a:ext uri="{91240B29-F687-4f45-9708-019B960494DF}">
-                <a14:hiddenLine xmlns="" xmlns:a14="http://schemas.microsoft.com/office/drawing/2010/main" w="9525">
+                <a14:hiddenLine xmlns:a14="http://schemas.microsoft.com/office/drawing/2010/main" xmlns="" w="9525">
                   <a:solidFill>
                     <a:srgbClr val="000000"/>
                   </a:solidFill>
@@ -1395,7 +1473,7 @@
             </a:ln>
             <a:extLst>
               <a:ext uri="{91240B29-F687-4f45-9708-019B960494DF}">
-                <a14:hiddenLine xmlns="" xmlns:a14="http://schemas.microsoft.com/office/drawing/2010/main" w="9525">
+                <a14:hiddenLine xmlns:a14="http://schemas.microsoft.com/office/drawing/2010/main" xmlns="" w="9525">
                   <a:solidFill>
                     <a:srgbClr val="000000"/>
                   </a:solidFill>
@@ -1492,7 +1570,7 @@
             </a:ln>
             <a:extLst>
               <a:ext uri="{91240B29-F687-4f45-9708-019B960494DF}">
-                <a14:hiddenLine xmlns="" xmlns:a14="http://schemas.microsoft.com/office/drawing/2010/main" w="9525">
+                <a14:hiddenLine xmlns:a14="http://schemas.microsoft.com/office/drawing/2010/main" xmlns="" w="9525">
                   <a:solidFill>
                     <a:srgbClr val="000000"/>
                   </a:solidFill>
@@ -1589,7 +1667,7 @@
             </a:ln>
             <a:extLst>
               <a:ext uri="{91240B29-F687-4f45-9708-019B960494DF}">
-                <a14:hiddenLine xmlns="" xmlns:a14="http://schemas.microsoft.com/office/drawing/2010/main" w="9525">
+                <a14:hiddenLine xmlns:a14="http://schemas.microsoft.com/office/drawing/2010/main" xmlns="" w="9525">
                   <a:solidFill>
                     <a:srgbClr val="000000"/>
                   </a:solidFill>
@@ -1658,7 +1736,7 @@
             </a:ln>
             <a:extLst>
               <a:ext uri="{91240B29-F687-4f45-9708-019B960494DF}">
-                <a14:hiddenLine xmlns="" xmlns:a14="http://schemas.microsoft.com/office/drawing/2010/main" w="9525">
+                <a14:hiddenLine xmlns:a14="http://schemas.microsoft.com/office/drawing/2010/main" xmlns="" w="9525">
                   <a:solidFill>
                     <a:srgbClr val="000000"/>
                   </a:solidFill>
@@ -1755,7 +1833,7 @@
             </a:ln>
             <a:extLst>
               <a:ext uri="{91240B29-F687-4f45-9708-019B960494DF}">
-                <a14:hiddenLine xmlns="" xmlns:a14="http://schemas.microsoft.com/office/drawing/2010/main" w="9525">
+                <a14:hiddenLine xmlns:a14="http://schemas.microsoft.com/office/drawing/2010/main" xmlns="" w="9525">
                   <a:solidFill>
                     <a:srgbClr val="000000"/>
                   </a:solidFill>
@@ -1852,7 +1930,7 @@
             </a:ln>
             <a:extLst>
               <a:ext uri="{91240B29-F687-4f45-9708-019B960494DF}">
-                <a14:hiddenLine xmlns="" xmlns:a14="http://schemas.microsoft.com/office/drawing/2010/main" w="9525">
+                <a14:hiddenLine xmlns:a14="http://schemas.microsoft.com/office/drawing/2010/main" xmlns="" w="9525">
                   <a:solidFill>
                     <a:srgbClr val="000000"/>
                   </a:solidFill>
@@ -1915,7 +1993,7 @@
             </a:ln>
             <a:extLst>
               <a:ext uri="{91240B29-F687-4f45-9708-019B960494DF}">
-                <a14:hiddenLine xmlns="" xmlns:a14="http://schemas.microsoft.com/office/drawing/2010/main" w="9525">
+                <a14:hiddenLine xmlns:a14="http://schemas.microsoft.com/office/drawing/2010/main" xmlns="" w="9525">
                   <a:solidFill>
                     <a:srgbClr val="000000"/>
                   </a:solidFill>
@@ -2012,7 +2090,7 @@
             </a:ln>
             <a:extLst>
               <a:ext uri="{91240B29-F687-4f45-9708-019B960494DF}">
-                <a14:hiddenLine xmlns="" xmlns:a14="http://schemas.microsoft.com/office/drawing/2010/main" w="9525">
+                <a14:hiddenLine xmlns:a14="http://schemas.microsoft.com/office/drawing/2010/main" xmlns="" w="9525">
                   <a:solidFill>
                     <a:srgbClr val="000000"/>
                   </a:solidFill>
@@ -2075,7 +2153,7 @@
             </a:ln>
             <a:extLst>
               <a:ext uri="{91240B29-F687-4f45-9708-019B960494DF}">
-                <a14:hiddenLine xmlns="" xmlns:a14="http://schemas.microsoft.com/office/drawing/2010/main" w="9525">
+                <a14:hiddenLine xmlns:a14="http://schemas.microsoft.com/office/drawing/2010/main" xmlns="" w="9525">
                   <a:solidFill>
                     <a:srgbClr val="000000"/>
                   </a:solidFill>
@@ -2172,7 +2250,7 @@
             </a:ln>
             <a:extLst>
               <a:ext uri="{91240B29-F687-4f45-9708-019B960494DF}">
-                <a14:hiddenLine xmlns="" xmlns:a14="http://schemas.microsoft.com/office/drawing/2010/main" w="9525">
+                <a14:hiddenLine xmlns:a14="http://schemas.microsoft.com/office/drawing/2010/main" xmlns="" w="9525">
                   <a:solidFill>
                     <a:srgbClr val="000000"/>
                   </a:solidFill>
@@ -2247,7 +2325,7 @@
             </a:ln>
             <a:extLst>
               <a:ext uri="{91240B29-F687-4f45-9708-019B960494DF}">
-                <a14:hiddenLine xmlns="" xmlns:a14="http://schemas.microsoft.com/office/drawing/2010/main" w="9525">
+                <a14:hiddenLine xmlns:a14="http://schemas.microsoft.com/office/drawing/2010/main" xmlns="" w="9525">
                   <a:solidFill>
                     <a:srgbClr val="000000"/>
                   </a:solidFill>
@@ -2344,7 +2422,7 @@
             </a:ln>
             <a:extLst>
               <a:ext uri="{91240B29-F687-4f45-9708-019B960494DF}">
-                <a14:hiddenLine xmlns="" xmlns:a14="http://schemas.microsoft.com/office/drawing/2010/main" w="9525">
+                <a14:hiddenLine xmlns:a14="http://schemas.microsoft.com/office/drawing/2010/main" xmlns="" w="9525">
                   <a:solidFill>
                     <a:srgbClr val="000000"/>
                   </a:solidFill>
@@ -2419,7 +2497,7 @@
             </a:ln>
             <a:extLst>
               <a:ext uri="{91240B29-F687-4f45-9708-019B960494DF}">
-                <a14:hiddenLine xmlns="" xmlns:a14="http://schemas.microsoft.com/office/drawing/2010/main" w="9525">
+                <a14:hiddenLine xmlns:a14="http://schemas.microsoft.com/office/drawing/2010/main" xmlns="" w="9525">
                   <a:solidFill>
                     <a:srgbClr val="000000"/>
                   </a:solidFill>
@@ -2516,7 +2594,7 @@
             </a:ln>
             <a:extLst>
               <a:ext uri="{91240B29-F687-4f45-9708-019B960494DF}">
-                <a14:hiddenLine xmlns="" xmlns:a14="http://schemas.microsoft.com/office/drawing/2010/main" w="9525">
+                <a14:hiddenLine xmlns:a14="http://schemas.microsoft.com/office/drawing/2010/main" xmlns="" w="9525">
                   <a:solidFill>
                     <a:srgbClr val="000000"/>
                   </a:solidFill>
@@ -2557,7 +2635,7 @@
             </a:ln>
             <a:extLst>
               <a:ext uri="{91240B29-F687-4f45-9708-019B960494DF}">
-                <a14:hiddenLine xmlns="" xmlns:a14="http://schemas.microsoft.com/office/drawing/2010/main" w="9525">
+                <a14:hiddenLine xmlns:a14="http://schemas.microsoft.com/office/drawing/2010/main" xmlns="" w="9525">
                   <a:solidFill>
                     <a:srgbClr val="000000"/>
                   </a:solidFill>
@@ -2654,7 +2732,7 @@
             </a:ln>
             <a:extLst>
               <a:ext uri="{91240B29-F687-4f45-9708-019B960494DF}">
-                <a14:hiddenLine xmlns="" xmlns:a14="http://schemas.microsoft.com/office/drawing/2010/main" w="9525">
+                <a14:hiddenLine xmlns:a14="http://schemas.microsoft.com/office/drawing/2010/main" xmlns="" w="9525">
                   <a:solidFill>
                     <a:srgbClr val="000000"/>
                   </a:solidFill>
@@ -2723,7 +2801,7 @@
             </a:ln>
             <a:extLst>
               <a:ext uri="{91240B29-F687-4f45-9708-019B960494DF}">
-                <a14:hiddenLine xmlns="" xmlns:a14="http://schemas.microsoft.com/office/drawing/2010/main" w="9525">
+                <a14:hiddenLine xmlns:a14="http://schemas.microsoft.com/office/drawing/2010/main" xmlns="" w="9525">
                   <a:solidFill>
                     <a:srgbClr val="000000"/>
                   </a:solidFill>
@@ -2792,7 +2870,7 @@
             </a:ln>
             <a:extLst>
               <a:ext uri="{91240B29-F687-4f45-9708-019B960494DF}">
-                <a14:hiddenLine xmlns="" xmlns:a14="http://schemas.microsoft.com/office/drawing/2010/main" w="9525">
+                <a14:hiddenLine xmlns:a14="http://schemas.microsoft.com/office/drawing/2010/main" xmlns="" w="9525">
                   <a:solidFill>
                     <a:srgbClr val="000000"/>
                   </a:solidFill>
@@ -2889,7 +2967,7 @@
             </a:ln>
             <a:extLst>
               <a:ext uri="{91240B29-F687-4f45-9708-019B960494DF}">
-                <a14:hiddenLine xmlns="" xmlns:a14="http://schemas.microsoft.com/office/drawing/2010/main" w="9525">
+                <a14:hiddenLine xmlns:a14="http://schemas.microsoft.com/office/drawing/2010/main" xmlns="" w="9525">
                   <a:solidFill>
                     <a:srgbClr val="000000"/>
                   </a:solidFill>
@@ -2964,7 +3042,7 @@
             </a:ln>
             <a:extLst>
               <a:ext uri="{91240B29-F687-4f45-9708-019B960494DF}">
-                <a14:hiddenLine xmlns="" xmlns:a14="http://schemas.microsoft.com/office/drawing/2010/main" w="9525">
+                <a14:hiddenLine xmlns:a14="http://schemas.microsoft.com/office/drawing/2010/main" xmlns="" w="9525">
                   <a:solidFill>
                     <a:srgbClr val="000000"/>
                   </a:solidFill>
@@ -3033,7 +3111,7 @@
             </a:ln>
             <a:extLst>
               <a:ext uri="{91240B29-F687-4f45-9708-019B960494DF}">
-                <a14:hiddenLine xmlns="" xmlns:a14="http://schemas.microsoft.com/office/drawing/2010/main" w="9525">
+                <a14:hiddenLine xmlns:a14="http://schemas.microsoft.com/office/drawing/2010/main" xmlns="" w="9525">
                   <a:solidFill>
                     <a:srgbClr val="000000"/>
                   </a:solidFill>
@@ -3130,7 +3208,7 @@
             </a:ln>
             <a:extLst>
               <a:ext uri="{91240B29-F687-4f45-9708-019B960494DF}">
-                <a14:hiddenLine xmlns="" xmlns:a14="http://schemas.microsoft.com/office/drawing/2010/main" w="9525">
+                <a14:hiddenLine xmlns:a14="http://schemas.microsoft.com/office/drawing/2010/main" xmlns="" w="9525">
                   <a:solidFill>
                     <a:srgbClr val="000000"/>
                   </a:solidFill>
@@ -3199,7 +3277,7 @@
             </a:ln>
             <a:extLst>
               <a:ext uri="{91240B29-F687-4f45-9708-019B960494DF}">
-                <a14:hiddenLine xmlns="" xmlns:a14="http://schemas.microsoft.com/office/drawing/2010/main" w="9525">
+                <a14:hiddenLine xmlns:a14="http://schemas.microsoft.com/office/drawing/2010/main" xmlns="" w="9525">
                   <a:solidFill>
                     <a:srgbClr val="000000"/>
                   </a:solidFill>
@@ -3296,7 +3374,7 @@
             </a:ln>
             <a:extLst>
               <a:ext uri="{91240B29-F687-4f45-9708-019B960494DF}">
-                <a14:hiddenLine xmlns="" xmlns:a14="http://schemas.microsoft.com/office/drawing/2010/main" w="9525">
+                <a14:hiddenLine xmlns:a14="http://schemas.microsoft.com/office/drawing/2010/main" xmlns="" w="9525">
                   <a:solidFill>
                     <a:srgbClr val="000000"/>
                   </a:solidFill>
@@ -3365,7 +3443,7 @@
             </a:ln>
             <a:extLst>
               <a:ext uri="{91240B29-F687-4f45-9708-019B960494DF}">
-                <a14:hiddenLine xmlns="" xmlns:a14="http://schemas.microsoft.com/office/drawing/2010/main" w="9525">
+                <a14:hiddenLine xmlns:a14="http://schemas.microsoft.com/office/drawing/2010/main" xmlns="" w="9525">
                   <a:solidFill>
                     <a:srgbClr val="000000"/>
                   </a:solidFill>
@@ -3462,7 +3540,7 @@
             </a:ln>
             <a:extLst>
               <a:ext uri="{91240B29-F687-4f45-9708-019B960494DF}">
-                <a14:hiddenLine xmlns="" xmlns:a14="http://schemas.microsoft.com/office/drawing/2010/main" w="9525">
+                <a14:hiddenLine xmlns:a14="http://schemas.microsoft.com/office/drawing/2010/main" xmlns="" w="9525">
                   <a:solidFill>
                     <a:srgbClr val="000000"/>
                   </a:solidFill>
@@ -3503,7 +3581,7 @@
             </a:ln>
             <a:extLst>
               <a:ext uri="{91240B29-F687-4f45-9708-019B960494DF}">
-                <a14:hiddenLine xmlns="" xmlns:a14="http://schemas.microsoft.com/office/drawing/2010/main" w="9525">
+                <a14:hiddenLine xmlns:a14="http://schemas.microsoft.com/office/drawing/2010/main" xmlns="" w="9525">
                   <a:solidFill>
                     <a:srgbClr val="000000"/>
                   </a:solidFill>
@@ -3575,7 +3653,7 @@
             </a:ln>
             <a:extLst>
               <a:ext uri="{91240B29-F687-4f45-9708-019B960494DF}">
-                <a14:hiddenLine xmlns="" xmlns:a14="http://schemas.microsoft.com/office/drawing/2010/main" w="9525">
+                <a14:hiddenLine xmlns:a14="http://schemas.microsoft.com/office/drawing/2010/main" xmlns="" w="9525">
                   <a:solidFill>
                     <a:srgbClr val="000000"/>
                   </a:solidFill>
@@ -3672,7 +3750,7 @@
             </a:ln>
             <a:extLst>
               <a:ext uri="{91240B29-F687-4f45-9708-019B960494DF}">
-                <a14:hiddenLine xmlns="" xmlns:a14="http://schemas.microsoft.com/office/drawing/2010/main" w="9525">
+                <a14:hiddenLine xmlns:a14="http://schemas.microsoft.com/office/drawing/2010/main" xmlns="" w="9525">
                   <a:solidFill>
                     <a:srgbClr val="000000"/>
                   </a:solidFill>
@@ -3741,7 +3819,7 @@
             </a:ln>
             <a:extLst>
               <a:ext uri="{91240B29-F687-4f45-9708-019B960494DF}">
-                <a14:hiddenLine xmlns="" xmlns:a14="http://schemas.microsoft.com/office/drawing/2010/main" w="9525">
+                <a14:hiddenLine xmlns:a14="http://schemas.microsoft.com/office/drawing/2010/main" xmlns="" w="9525">
                   <a:solidFill>
                     <a:srgbClr val="000000"/>
                   </a:solidFill>
@@ -3838,7 +3916,7 @@
             </a:ln>
             <a:extLst>
               <a:ext uri="{91240B29-F687-4f45-9708-019B960494DF}">
-                <a14:hiddenLine xmlns="" xmlns:a14="http://schemas.microsoft.com/office/drawing/2010/main" w="9525">
+                <a14:hiddenLine xmlns:a14="http://schemas.microsoft.com/office/drawing/2010/main" xmlns="" w="9525">
                   <a:solidFill>
                     <a:srgbClr val="000000"/>
                   </a:solidFill>
@@ -3935,7 +4013,7 @@
             </a:ln>
             <a:extLst>
               <a:ext uri="{91240B29-F687-4f45-9708-019B960494DF}">
-                <a14:hiddenLine xmlns="" xmlns:a14="http://schemas.microsoft.com/office/drawing/2010/main" w="9525">
+                <a14:hiddenLine xmlns:a14="http://schemas.microsoft.com/office/drawing/2010/main" xmlns="" w="9525">
                   <a:solidFill>
                     <a:srgbClr val="000000"/>
                   </a:solidFill>
@@ -4007,7 +4085,7 @@
             </a:ln>
             <a:extLst>
               <a:ext uri="{91240B29-F687-4f45-9708-019B960494DF}">
-                <a14:hiddenLine xmlns="" xmlns:a14="http://schemas.microsoft.com/office/drawing/2010/main" w="9525">
+                <a14:hiddenLine xmlns:a14="http://schemas.microsoft.com/office/drawing/2010/main" xmlns="" w="9525">
                   <a:solidFill>
                     <a:srgbClr val="000000"/>
                   </a:solidFill>
@@ -4076,7 +4154,7 @@
             </a:ln>
             <a:extLst>
               <a:ext uri="{91240B29-F687-4f45-9708-019B960494DF}">
-                <a14:hiddenLine xmlns="" xmlns:a14="http://schemas.microsoft.com/office/drawing/2010/main" w="9525">
+                <a14:hiddenLine xmlns:a14="http://schemas.microsoft.com/office/drawing/2010/main" xmlns="" w="9525">
                   <a:solidFill>
                     <a:srgbClr val="000000"/>
                   </a:solidFill>
@@ -4173,7 +4251,7 @@
             </a:ln>
             <a:extLst>
               <a:ext uri="{91240B29-F687-4f45-9708-019B960494DF}">
-                <a14:hiddenLine xmlns="" xmlns:a14="http://schemas.microsoft.com/office/drawing/2010/main" w="9525">
+                <a14:hiddenLine xmlns:a14="http://schemas.microsoft.com/office/drawing/2010/main" xmlns="" w="9525">
                   <a:solidFill>
                     <a:srgbClr val="000000"/>
                   </a:solidFill>
@@ -4270,7 +4348,7 @@
             </a:ln>
             <a:extLst>
               <a:ext uri="{91240B29-F687-4f45-9708-019B960494DF}">
-                <a14:hiddenLine xmlns="" xmlns:a14="http://schemas.microsoft.com/office/drawing/2010/main" w="9525">
+                <a14:hiddenLine xmlns:a14="http://schemas.microsoft.com/office/drawing/2010/main" xmlns="" w="9525">
                   <a:solidFill>
                     <a:srgbClr val="000000"/>
                   </a:solidFill>
@@ -4339,7 +4417,7 @@
             </a:ln>
             <a:extLst>
               <a:ext uri="{91240B29-F687-4f45-9708-019B960494DF}">
-                <a14:hiddenLine xmlns="" xmlns:a14="http://schemas.microsoft.com/office/drawing/2010/main" w="9525">
+                <a14:hiddenLine xmlns:a14="http://schemas.microsoft.com/office/drawing/2010/main" xmlns="" w="9525">
                   <a:solidFill>
                     <a:srgbClr val="000000"/>
                   </a:solidFill>
@@ -4466,7 +4544,7 @@
             </a:ln>
             <a:extLst>
               <a:ext uri="{91240B29-F687-4f45-9708-019B960494DF}">
-                <a14:hiddenLine xmlns="" xmlns:a14="http://schemas.microsoft.com/office/drawing/2010/main" w="9525">
+                <a14:hiddenLine xmlns:a14="http://schemas.microsoft.com/office/drawing/2010/main" xmlns="" w="9525">
                   <a:solidFill>
                     <a:srgbClr val="000000"/>
                   </a:solidFill>
@@ -4541,7 +4619,7 @@
             </a:ln>
             <a:extLst>
               <a:ext uri="{91240B29-F687-4f45-9708-019B960494DF}">
-                <a14:hiddenLine xmlns="" xmlns:a14="http://schemas.microsoft.com/office/drawing/2010/main" w="9525">
+                <a14:hiddenLine xmlns:a14="http://schemas.microsoft.com/office/drawing/2010/main" xmlns="" w="9525">
                   <a:solidFill>
                     <a:srgbClr val="000000"/>
                   </a:solidFill>
@@ -4638,7 +4716,7 @@
             </a:ln>
             <a:extLst>
               <a:ext uri="{91240B29-F687-4f45-9708-019B960494DF}">
-                <a14:hiddenLine xmlns="" xmlns:a14="http://schemas.microsoft.com/office/drawing/2010/main" w="9525">
+                <a14:hiddenLine xmlns:a14="http://schemas.microsoft.com/office/drawing/2010/main" xmlns="" w="9525">
                   <a:solidFill>
                     <a:srgbClr val="000000"/>
                   </a:solidFill>
@@ -9452,7 +9530,7 @@
           <a:noFill/>
           <a:extLst>
             <a:ext uri="{909E8E84-426E-40dd-AFC4-6F175D3DCCD1}">
-              <a14:hiddenFill xmlns="" xmlns:a14="http://schemas.microsoft.com/office/drawing/2010/main">
+              <a14:hiddenFill xmlns:a14="http://schemas.microsoft.com/office/drawing/2010/main" xmlns="">
                 <a:solidFill>
                   <a:srgbClr val="FFFFFF"/>
                 </a:solidFill>
@@ -9526,7 +9604,7 @@
               </a:ln>
               <a:extLst>
                 <a:ext uri="{91240B29-F687-4f45-9708-019B960494DF}">
-                  <a14:hiddenLine xmlns="" xmlns:a14="http://schemas.microsoft.com/office/drawing/2010/main" w="9525">
+                  <a14:hiddenLine xmlns:a14="http://schemas.microsoft.com/office/drawing/2010/main" xmlns="" w="9525">
                     <a:solidFill>
                       <a:srgbClr val="000000"/>
                     </a:solidFill>
@@ -9623,7 +9701,7 @@
               </a:ln>
               <a:extLst>
                 <a:ext uri="{91240B29-F687-4f45-9708-019B960494DF}">
-                  <a14:hiddenLine xmlns="" xmlns:a14="http://schemas.microsoft.com/office/drawing/2010/main" w="9525">
+                  <a14:hiddenLine xmlns:a14="http://schemas.microsoft.com/office/drawing/2010/main" xmlns="" w="9525">
                     <a:solidFill>
                       <a:srgbClr val="000000"/>
                     </a:solidFill>
@@ -9720,7 +9798,7 @@
               </a:ln>
               <a:extLst>
                 <a:ext uri="{91240B29-F687-4f45-9708-019B960494DF}">
-                  <a14:hiddenLine xmlns="" xmlns:a14="http://schemas.microsoft.com/office/drawing/2010/main" w="9525">
+                  <a14:hiddenLine xmlns:a14="http://schemas.microsoft.com/office/drawing/2010/main" xmlns="" w="9525">
                     <a:solidFill>
                       <a:srgbClr val="000000"/>
                     </a:solidFill>
@@ -9789,7 +9867,7 @@
               </a:ln>
               <a:extLst>
                 <a:ext uri="{91240B29-F687-4f45-9708-019B960494DF}">
-                  <a14:hiddenLine xmlns="" xmlns:a14="http://schemas.microsoft.com/office/drawing/2010/main" w="9525">
+                  <a14:hiddenLine xmlns:a14="http://schemas.microsoft.com/office/drawing/2010/main" xmlns="" w="9525">
                     <a:solidFill>
                       <a:srgbClr val="000000"/>
                     </a:solidFill>
@@ -9886,7 +9964,7 @@
               </a:ln>
               <a:extLst>
                 <a:ext uri="{91240B29-F687-4f45-9708-019B960494DF}">
-                  <a14:hiddenLine xmlns="" xmlns:a14="http://schemas.microsoft.com/office/drawing/2010/main" w="9525">
+                  <a14:hiddenLine xmlns:a14="http://schemas.microsoft.com/office/drawing/2010/main" xmlns="" w="9525">
                     <a:solidFill>
                       <a:srgbClr val="000000"/>
                     </a:solidFill>
@@ -9955,7 +10033,7 @@
               </a:ln>
               <a:extLst>
                 <a:ext uri="{91240B29-F687-4f45-9708-019B960494DF}">
-                  <a14:hiddenLine xmlns="" xmlns:a14="http://schemas.microsoft.com/office/drawing/2010/main" w="9525">
+                  <a14:hiddenLine xmlns:a14="http://schemas.microsoft.com/office/drawing/2010/main" xmlns="" w="9525">
                     <a:solidFill>
                       <a:srgbClr val="000000"/>
                     </a:solidFill>
@@ -10024,7 +10102,7 @@
               </a:ln>
               <a:extLst>
                 <a:ext uri="{91240B29-F687-4f45-9708-019B960494DF}">
-                  <a14:hiddenLine xmlns="" xmlns:a14="http://schemas.microsoft.com/office/drawing/2010/main" w="9525">
+                  <a14:hiddenLine xmlns:a14="http://schemas.microsoft.com/office/drawing/2010/main" xmlns="" w="9525">
                     <a:solidFill>
                       <a:srgbClr val="000000"/>
                     </a:solidFill>
@@ -10121,7 +10199,7 @@
               </a:ln>
               <a:extLst>
                 <a:ext uri="{91240B29-F687-4f45-9708-019B960494DF}">
-                  <a14:hiddenLine xmlns="" xmlns:a14="http://schemas.microsoft.com/office/drawing/2010/main" w="9525">
+                  <a14:hiddenLine xmlns:a14="http://schemas.microsoft.com/office/drawing/2010/main" xmlns="" w="9525">
                     <a:solidFill>
                       <a:srgbClr val="000000"/>
                     </a:solidFill>
@@ -10218,7 +10296,7 @@
               </a:ln>
               <a:extLst>
                 <a:ext uri="{91240B29-F687-4f45-9708-019B960494DF}">
-                  <a14:hiddenLine xmlns="" xmlns:a14="http://schemas.microsoft.com/office/drawing/2010/main" w="9525">
+                  <a14:hiddenLine xmlns:a14="http://schemas.microsoft.com/office/drawing/2010/main" xmlns="" w="9525">
                     <a:solidFill>
                       <a:srgbClr val="000000"/>
                     </a:solidFill>
@@ -10287,7 +10365,7 @@
               </a:ln>
               <a:extLst>
                 <a:ext uri="{91240B29-F687-4f45-9708-019B960494DF}">
-                  <a14:hiddenLine xmlns="" xmlns:a14="http://schemas.microsoft.com/office/drawing/2010/main" w="9525">
+                  <a14:hiddenLine xmlns:a14="http://schemas.microsoft.com/office/drawing/2010/main" xmlns="" w="9525">
                     <a:solidFill>
                       <a:srgbClr val="000000"/>
                     </a:solidFill>
@@ -10404,7 +10482,7 @@
               </a:ln>
               <a:extLst>
                 <a:ext uri="{91240B29-F687-4f45-9708-019B960494DF}">
-                  <a14:hiddenLine xmlns="" xmlns:a14="http://schemas.microsoft.com/office/drawing/2010/main" w="9525">
+                  <a14:hiddenLine xmlns:a14="http://schemas.microsoft.com/office/drawing/2010/main" xmlns="" w="9525">
                     <a:solidFill>
                       <a:srgbClr val="000000"/>
                     </a:solidFill>
@@ -10502,7 +10580,7 @@
               </a:ln>
               <a:extLst>
                 <a:ext uri="{91240B29-F687-4f45-9708-019B960494DF}">
-                  <a14:hiddenLine xmlns="" xmlns:a14="http://schemas.microsoft.com/office/drawing/2010/main" w="9525">
+                  <a14:hiddenLine xmlns:a14="http://schemas.microsoft.com/office/drawing/2010/main" xmlns="" w="9525">
                     <a:solidFill>
                       <a:srgbClr val="000000"/>
                     </a:solidFill>
@@ -10571,7 +10649,7 @@
               </a:ln>
               <a:extLst>
                 <a:ext uri="{91240B29-F687-4f45-9708-019B960494DF}">
-                  <a14:hiddenLine xmlns="" xmlns:a14="http://schemas.microsoft.com/office/drawing/2010/main" w="9525">
+                  <a14:hiddenLine xmlns:a14="http://schemas.microsoft.com/office/drawing/2010/main" xmlns="" w="9525">
                     <a:solidFill>
                       <a:srgbClr val="000000"/>
                     </a:solidFill>
@@ -10640,7 +10718,7 @@
               </a:ln>
               <a:extLst>
                 <a:ext uri="{91240B29-F687-4f45-9708-019B960494DF}">
-                  <a14:hiddenLine xmlns="" xmlns:a14="http://schemas.microsoft.com/office/drawing/2010/main" w="9525">
+                  <a14:hiddenLine xmlns:a14="http://schemas.microsoft.com/office/drawing/2010/main" xmlns="" w="9525">
                     <a:solidFill>
                       <a:srgbClr val="000000"/>
                     </a:solidFill>
@@ -10737,7 +10815,7 @@
               </a:ln>
               <a:extLst>
                 <a:ext uri="{91240B29-F687-4f45-9708-019B960494DF}">
-                  <a14:hiddenLine xmlns="" xmlns:a14="http://schemas.microsoft.com/office/drawing/2010/main" w="9525">
+                  <a14:hiddenLine xmlns:a14="http://schemas.microsoft.com/office/drawing/2010/main" xmlns="" w="9525">
                     <a:solidFill>
                       <a:srgbClr val="000000"/>
                     </a:solidFill>
@@ -10778,7 +10856,7 @@
               </a:ln>
               <a:extLst>
                 <a:ext uri="{91240B29-F687-4f45-9708-019B960494DF}">
-                  <a14:hiddenLine xmlns="" xmlns:a14="http://schemas.microsoft.com/office/drawing/2010/main" w="9525">
+                  <a14:hiddenLine xmlns:a14="http://schemas.microsoft.com/office/drawing/2010/main" xmlns="" w="9525">
                     <a:solidFill>
                       <a:srgbClr val="000000"/>
                     </a:solidFill>
@@ -10850,7 +10928,7 @@
               </a:ln>
               <a:extLst>
                 <a:ext uri="{91240B29-F687-4f45-9708-019B960494DF}">
-                  <a14:hiddenLine xmlns="" xmlns:a14="http://schemas.microsoft.com/office/drawing/2010/main" w="9525">
+                  <a14:hiddenLine xmlns:a14="http://schemas.microsoft.com/office/drawing/2010/main" xmlns="" w="9525">
                     <a:solidFill>
                       <a:srgbClr val="000000"/>
                     </a:solidFill>
@@ -10947,7 +11025,7 @@
               </a:ln>
               <a:extLst>
                 <a:ext uri="{91240B29-F687-4f45-9708-019B960494DF}">
-                  <a14:hiddenLine xmlns="" xmlns:a14="http://schemas.microsoft.com/office/drawing/2010/main" w="9525">
+                  <a14:hiddenLine xmlns:a14="http://schemas.microsoft.com/office/drawing/2010/main" xmlns="" w="9525">
                     <a:solidFill>
                       <a:srgbClr val="000000"/>
                     </a:solidFill>
@@ -11016,7 +11094,7 @@
               </a:ln>
               <a:extLst>
                 <a:ext uri="{91240B29-F687-4f45-9708-019B960494DF}">
-                  <a14:hiddenLine xmlns="" xmlns:a14="http://schemas.microsoft.com/office/drawing/2010/main" w="9525">
+                  <a14:hiddenLine xmlns:a14="http://schemas.microsoft.com/office/drawing/2010/main" xmlns="" w="9525">
                     <a:solidFill>
                       <a:srgbClr val="000000"/>
                     </a:solidFill>
@@ -11113,7 +11191,7 @@
               </a:ln>
               <a:extLst>
                 <a:ext uri="{91240B29-F687-4f45-9708-019B960494DF}">
-                  <a14:hiddenLine xmlns="" xmlns:a14="http://schemas.microsoft.com/office/drawing/2010/main" w="9525">
+                  <a14:hiddenLine xmlns:a14="http://schemas.microsoft.com/office/drawing/2010/main" xmlns="" w="9525">
                     <a:solidFill>
                       <a:srgbClr val="000000"/>
                     </a:solidFill>
@@ -11185,7 +11263,7 @@
               </a:ln>
               <a:extLst>
                 <a:ext uri="{91240B29-F687-4f45-9708-019B960494DF}">
-                  <a14:hiddenLine xmlns="" xmlns:a14="http://schemas.microsoft.com/office/drawing/2010/main" w="9525">
+                  <a14:hiddenLine xmlns:a14="http://schemas.microsoft.com/office/drawing/2010/main" xmlns="" w="9525">
                     <a:solidFill>
                       <a:srgbClr val="000000"/>
                     </a:solidFill>
@@ -11254,7 +11332,7 @@
               </a:ln>
               <a:extLst>
                 <a:ext uri="{91240B29-F687-4f45-9708-019B960494DF}">
-                  <a14:hiddenLine xmlns="" xmlns:a14="http://schemas.microsoft.com/office/drawing/2010/main" w="9525">
+                  <a14:hiddenLine xmlns:a14="http://schemas.microsoft.com/office/drawing/2010/main" xmlns="" w="9525">
                     <a:solidFill>
                       <a:srgbClr val="000000"/>
                     </a:solidFill>
@@ -11351,7 +11429,7 @@
               </a:ln>
               <a:extLst>
                 <a:ext uri="{91240B29-F687-4f45-9708-019B960494DF}">
-                  <a14:hiddenLine xmlns="" xmlns:a14="http://schemas.microsoft.com/office/drawing/2010/main" w="9525">
+                  <a14:hiddenLine xmlns:a14="http://schemas.microsoft.com/office/drawing/2010/main" xmlns="" w="9525">
                     <a:solidFill>
                       <a:srgbClr val="000000"/>
                     </a:solidFill>
@@ -11448,7 +11526,7 @@
               </a:ln>
               <a:extLst>
                 <a:ext uri="{91240B29-F687-4f45-9708-019B960494DF}">
-                  <a14:hiddenLine xmlns="" xmlns:a14="http://schemas.microsoft.com/office/drawing/2010/main" w="9525">
+                  <a14:hiddenLine xmlns:a14="http://schemas.microsoft.com/office/drawing/2010/main" xmlns="" w="9525">
                     <a:solidFill>
                       <a:srgbClr val="000000"/>
                     </a:solidFill>
@@ -11520,7 +11598,7 @@
               </a:ln>
               <a:extLst>
                 <a:ext uri="{91240B29-F687-4f45-9708-019B960494DF}">
-                  <a14:hiddenLine xmlns="" xmlns:a14="http://schemas.microsoft.com/office/drawing/2010/main" w="9525">
+                  <a14:hiddenLine xmlns:a14="http://schemas.microsoft.com/office/drawing/2010/main" xmlns="" w="9525">
                     <a:solidFill>
                       <a:srgbClr val="000000"/>
                     </a:solidFill>
@@ -11647,7 +11725,7 @@
               </a:ln>
               <a:extLst>
                 <a:ext uri="{91240B29-F687-4f45-9708-019B960494DF}">
-                  <a14:hiddenLine xmlns="" xmlns:a14="http://schemas.microsoft.com/office/drawing/2010/main" w="9525">
+                  <a14:hiddenLine xmlns:a14="http://schemas.microsoft.com/office/drawing/2010/main" xmlns="" w="9525">
                     <a:solidFill>
                       <a:srgbClr val="000000"/>
                     </a:solidFill>
@@ -11752,7 +11830,7 @@
               </a:ln>
               <a:extLst>
                 <a:ext uri="{91240B29-F687-4f45-9708-019B960494DF}">
-                  <a14:hiddenLine xmlns="" xmlns:a14="http://schemas.microsoft.com/office/drawing/2010/main" w="9525">
+                  <a14:hiddenLine xmlns:a14="http://schemas.microsoft.com/office/drawing/2010/main" xmlns="" w="9525">
                     <a:solidFill>
                       <a:srgbClr val="000000"/>
                     </a:solidFill>
@@ -11874,7 +11952,7 @@
               </a:ln>
               <a:extLst>
                 <a:ext uri="{91240B29-F687-4f45-9708-019B960494DF}">
-                  <a14:hiddenLine xmlns="" xmlns:a14="http://schemas.microsoft.com/office/drawing/2010/main" w="9525">
+                  <a14:hiddenLine xmlns:a14="http://schemas.microsoft.com/office/drawing/2010/main" xmlns="" w="9525">
                     <a:solidFill>
                       <a:srgbClr val="000000"/>
                     </a:solidFill>
@@ -11971,7 +12049,7 @@
               </a:ln>
               <a:extLst>
                 <a:ext uri="{91240B29-F687-4f45-9708-019B960494DF}">
-                  <a14:hiddenLine xmlns="" xmlns:a14="http://schemas.microsoft.com/office/drawing/2010/main" w="9525">
+                  <a14:hiddenLine xmlns:a14="http://schemas.microsoft.com/office/drawing/2010/main" xmlns="" w="9525">
                     <a:solidFill>
                       <a:srgbClr val="000000"/>
                     </a:solidFill>
@@ -12043,7 +12121,7 @@
               </a:ln>
               <a:extLst>
                 <a:ext uri="{91240B29-F687-4f45-9708-019B960494DF}">
-                  <a14:hiddenLine xmlns="" xmlns:a14="http://schemas.microsoft.com/office/drawing/2010/main" w="9525">
+                  <a14:hiddenLine xmlns:a14="http://schemas.microsoft.com/office/drawing/2010/main" xmlns="" w="9525">
                     <a:solidFill>
                       <a:srgbClr val="000000"/>
                     </a:solidFill>
@@ -12140,7 +12218,7 @@
               </a:ln>
               <a:extLst>
                 <a:ext uri="{91240B29-F687-4f45-9708-019B960494DF}">
-                  <a14:hiddenLine xmlns="" xmlns:a14="http://schemas.microsoft.com/office/drawing/2010/main" w="9525">
+                  <a14:hiddenLine xmlns:a14="http://schemas.microsoft.com/office/drawing/2010/main" xmlns="" w="9525">
                     <a:solidFill>
                       <a:srgbClr val="000000"/>
                     </a:solidFill>
@@ -12215,7 +12293,7 @@
               </a:ln>
               <a:extLst>
                 <a:ext uri="{91240B29-F687-4f45-9708-019B960494DF}">
-                  <a14:hiddenLine xmlns="" xmlns:a14="http://schemas.microsoft.com/office/drawing/2010/main" w="9525">
+                  <a14:hiddenLine xmlns:a14="http://schemas.microsoft.com/office/drawing/2010/main" xmlns="" w="9525">
                     <a:solidFill>
                       <a:srgbClr val="000000"/>
                     </a:solidFill>
@@ -12312,7 +12390,7 @@
               </a:ln>
               <a:extLst>
                 <a:ext uri="{91240B29-F687-4f45-9708-019B960494DF}">
-                  <a14:hiddenLine xmlns="" xmlns:a14="http://schemas.microsoft.com/office/drawing/2010/main" w="9525">
+                  <a14:hiddenLine xmlns:a14="http://schemas.microsoft.com/office/drawing/2010/main" xmlns="" w="9525">
                     <a:solidFill>
                       <a:srgbClr val="000000"/>
                     </a:solidFill>
@@ -12387,7 +12465,7 @@
               </a:ln>
               <a:extLst>
                 <a:ext uri="{91240B29-F687-4f45-9708-019B960494DF}">
-                  <a14:hiddenLine xmlns="" xmlns:a14="http://schemas.microsoft.com/office/drawing/2010/main" w="9525">
+                  <a14:hiddenLine xmlns:a14="http://schemas.microsoft.com/office/drawing/2010/main" xmlns="" w="9525">
                     <a:solidFill>
                       <a:srgbClr val="000000"/>
                     </a:solidFill>
@@ -12484,7 +12562,7 @@
               </a:ln>
               <a:extLst>
                 <a:ext uri="{91240B29-F687-4f45-9708-019B960494DF}">
-                  <a14:hiddenLine xmlns="" xmlns:a14="http://schemas.microsoft.com/office/drawing/2010/main" w="9525">
+                  <a14:hiddenLine xmlns:a14="http://schemas.microsoft.com/office/drawing/2010/main" xmlns="" w="9525">
                     <a:solidFill>
                       <a:srgbClr val="000000"/>
                     </a:solidFill>
@@ -12525,7 +12603,7 @@
               </a:ln>
               <a:extLst>
                 <a:ext uri="{91240B29-F687-4f45-9708-019B960494DF}">
-                  <a14:hiddenLine xmlns="" xmlns:a14="http://schemas.microsoft.com/office/drawing/2010/main" w="9525">
+                  <a14:hiddenLine xmlns:a14="http://schemas.microsoft.com/office/drawing/2010/main" xmlns="" w="9525">
                     <a:solidFill>
                       <a:srgbClr val="000000"/>
                     </a:solidFill>
@@ -13260,7 +13338,7 @@
             <a:noFill/>
             <a:extLst>
               <a:ext uri="{909E8E84-426E-40dd-AFC4-6F175D3DCCD1}">
-                <a14:hiddenFill xmlns:p14="http://schemas.microsoft.com/office/powerpoint/2010/main" xmlns:a14="http://schemas.microsoft.com/office/drawing/2010/main" xmlns:a16="http://schemas.microsoft.com/office/drawing/2014/main" xmlns="">
+                <a14:hiddenFill xmlns="" xmlns:a16="http://schemas.microsoft.com/office/drawing/2014/main" xmlns:a14="http://schemas.microsoft.com/office/drawing/2010/main" xmlns:p14="http://schemas.microsoft.com/office/powerpoint/2010/main">
                   <a:solidFill>
                     <a:srgbClr val="FFFFFF"/>
                   </a:solidFill>
@@ -13471,7 +13549,7 @@
             </a:ln>
             <a:extLst>
               <a:ext uri="{91240B29-F687-4f45-9708-019B960494DF}">
-                <a14:hiddenLine xmlns:p14="http://schemas.microsoft.com/office/powerpoint/2010/main" xmlns:a14="http://schemas.microsoft.com/office/drawing/2010/main" xmlns:a16="http://schemas.microsoft.com/office/drawing/2014/main" xmlns="" w="9525">
+                <a14:hiddenLine xmlns="" xmlns:a16="http://schemas.microsoft.com/office/drawing/2014/main" xmlns:a14="http://schemas.microsoft.com/office/drawing/2010/main" xmlns:p14="http://schemas.microsoft.com/office/powerpoint/2010/main" w="9525">
                   <a:solidFill>
                     <a:srgbClr val="000000"/>
                   </a:solidFill>
@@ -13583,7 +13661,7 @@
             </a:ln>
             <a:extLst>
               <a:ext uri="{91240B29-F687-4f45-9708-019B960494DF}">
-                <a14:hiddenLine xmlns:p14="http://schemas.microsoft.com/office/powerpoint/2010/main" xmlns:a14="http://schemas.microsoft.com/office/drawing/2010/main" xmlns:a16="http://schemas.microsoft.com/office/drawing/2014/main" xmlns="" w="9525">
+                <a14:hiddenLine xmlns="" xmlns:a16="http://schemas.microsoft.com/office/drawing/2014/main" xmlns:a14="http://schemas.microsoft.com/office/drawing/2010/main" xmlns:p14="http://schemas.microsoft.com/office/powerpoint/2010/main" w="9525">
                   <a:solidFill>
                     <a:srgbClr val="000000"/>
                   </a:solidFill>
@@ -13695,7 +13773,7 @@
             </a:ln>
             <a:extLst>
               <a:ext uri="{91240B29-F687-4f45-9708-019B960494DF}">
-                <a14:hiddenLine xmlns:p14="http://schemas.microsoft.com/office/powerpoint/2010/main" xmlns:a14="http://schemas.microsoft.com/office/drawing/2010/main" xmlns:a16="http://schemas.microsoft.com/office/drawing/2014/main" xmlns="" w="9525">
+                <a14:hiddenLine xmlns="" xmlns:a16="http://schemas.microsoft.com/office/drawing/2014/main" xmlns:a14="http://schemas.microsoft.com/office/drawing/2010/main" xmlns:p14="http://schemas.microsoft.com/office/powerpoint/2010/main" w="9525">
                   <a:solidFill>
                     <a:srgbClr val="000000"/>
                   </a:solidFill>
@@ -13751,7 +13829,7 @@
             </a:ln>
             <a:extLst>
               <a:ext uri="{91240B29-F687-4f45-9708-019B960494DF}">
-                <a14:hiddenLine xmlns:p14="http://schemas.microsoft.com/office/powerpoint/2010/main" xmlns:a14="http://schemas.microsoft.com/office/drawing/2010/main" xmlns:a16="http://schemas.microsoft.com/office/drawing/2014/main" xmlns="" w="9525">
+                <a14:hiddenLine xmlns="" xmlns:a16="http://schemas.microsoft.com/office/drawing/2014/main" xmlns:a14="http://schemas.microsoft.com/office/drawing/2010/main" xmlns:p14="http://schemas.microsoft.com/office/powerpoint/2010/main" w="9525">
                   <a:solidFill>
                     <a:srgbClr val="000000"/>
                   </a:solidFill>
@@ -13863,7 +13941,7 @@
             </a:ln>
             <a:extLst>
               <a:ext uri="{91240B29-F687-4f45-9708-019B960494DF}">
-                <a14:hiddenLine xmlns:p14="http://schemas.microsoft.com/office/powerpoint/2010/main" xmlns:a14="http://schemas.microsoft.com/office/drawing/2010/main" xmlns:a16="http://schemas.microsoft.com/office/drawing/2014/main" xmlns="" w="9525">
+                <a14:hiddenLine xmlns="" xmlns:a16="http://schemas.microsoft.com/office/drawing/2014/main" xmlns:a14="http://schemas.microsoft.com/office/drawing/2010/main" xmlns:p14="http://schemas.microsoft.com/office/powerpoint/2010/main" w="9525">
                   <a:solidFill>
                     <a:srgbClr val="000000"/>
                   </a:solidFill>
@@ -13947,7 +14025,7 @@
             </a:ln>
             <a:extLst>
               <a:ext uri="{91240B29-F687-4f45-9708-019B960494DF}">
-                <a14:hiddenLine xmlns:p14="http://schemas.microsoft.com/office/powerpoint/2010/main" xmlns:a14="http://schemas.microsoft.com/office/drawing/2010/main" xmlns:a16="http://schemas.microsoft.com/office/drawing/2014/main" xmlns="" w="9525">
+                <a14:hiddenLine xmlns="" xmlns:a16="http://schemas.microsoft.com/office/drawing/2014/main" xmlns:a14="http://schemas.microsoft.com/office/drawing/2010/main" xmlns:p14="http://schemas.microsoft.com/office/powerpoint/2010/main" w="9525">
                   <a:solidFill>
                     <a:srgbClr val="000000"/>
                   </a:solidFill>
@@ -14031,7 +14109,7 @@
             </a:ln>
             <a:extLst>
               <a:ext uri="{91240B29-F687-4f45-9708-019B960494DF}">
-                <a14:hiddenLine xmlns:p14="http://schemas.microsoft.com/office/powerpoint/2010/main" xmlns:a14="http://schemas.microsoft.com/office/drawing/2010/main" xmlns:a16="http://schemas.microsoft.com/office/drawing/2014/main" xmlns="" w="9525">
+                <a14:hiddenLine xmlns="" xmlns:a16="http://schemas.microsoft.com/office/drawing/2014/main" xmlns:a14="http://schemas.microsoft.com/office/drawing/2010/main" xmlns:p14="http://schemas.microsoft.com/office/powerpoint/2010/main" w="9525">
                   <a:solidFill>
                     <a:srgbClr val="000000"/>
                   </a:solidFill>
@@ -14143,7 +14221,7 @@
             </a:ln>
             <a:extLst>
               <a:ext uri="{91240B29-F687-4f45-9708-019B960494DF}">
-                <a14:hiddenLine xmlns:p14="http://schemas.microsoft.com/office/powerpoint/2010/main" xmlns:a14="http://schemas.microsoft.com/office/drawing/2010/main" xmlns:a16="http://schemas.microsoft.com/office/drawing/2014/main" xmlns="" w="9525">
+                <a14:hiddenLine xmlns="" xmlns:a16="http://schemas.microsoft.com/office/drawing/2014/main" xmlns:a14="http://schemas.microsoft.com/office/drawing/2010/main" xmlns:p14="http://schemas.microsoft.com/office/powerpoint/2010/main" w="9525">
                   <a:solidFill>
                     <a:srgbClr val="000000"/>
                   </a:solidFill>
@@ -14227,7 +14305,7 @@
             </a:ln>
             <a:extLst>
               <a:ext uri="{91240B29-F687-4f45-9708-019B960494DF}">
-                <a14:hiddenLine xmlns:p14="http://schemas.microsoft.com/office/powerpoint/2010/main" xmlns:a14="http://schemas.microsoft.com/office/drawing/2010/main" xmlns:a16="http://schemas.microsoft.com/office/drawing/2014/main" xmlns="" w="9525">
+                <a14:hiddenLine xmlns="" xmlns:a16="http://schemas.microsoft.com/office/drawing/2014/main" xmlns:a14="http://schemas.microsoft.com/office/drawing/2010/main" xmlns:p14="http://schemas.microsoft.com/office/powerpoint/2010/main" w="9525">
                   <a:solidFill>
                     <a:srgbClr val="000000"/>
                   </a:solidFill>
@@ -14311,7 +14389,7 @@
             </a:ln>
             <a:extLst>
               <a:ext uri="{91240B29-F687-4f45-9708-019B960494DF}">
-                <a14:hiddenLine xmlns:p14="http://schemas.microsoft.com/office/powerpoint/2010/main" xmlns:a14="http://schemas.microsoft.com/office/drawing/2010/main" xmlns:a16="http://schemas.microsoft.com/office/drawing/2014/main" xmlns="" w="9525">
+                <a14:hiddenLine xmlns="" xmlns:a16="http://schemas.microsoft.com/office/drawing/2014/main" xmlns:a14="http://schemas.microsoft.com/office/drawing/2010/main" xmlns:p14="http://schemas.microsoft.com/office/powerpoint/2010/main" w="9525">
                   <a:solidFill>
                     <a:srgbClr val="000000"/>
                   </a:solidFill>
@@ -14423,7 +14501,7 @@
             </a:ln>
             <a:extLst>
               <a:ext uri="{91240B29-F687-4f45-9708-019B960494DF}">
-                <a14:hiddenLine xmlns:p14="http://schemas.microsoft.com/office/powerpoint/2010/main" xmlns:a14="http://schemas.microsoft.com/office/drawing/2010/main" xmlns:a16="http://schemas.microsoft.com/office/drawing/2014/main" xmlns="" w="9525">
+                <a14:hiddenLine xmlns="" xmlns:a16="http://schemas.microsoft.com/office/drawing/2014/main" xmlns:a14="http://schemas.microsoft.com/office/drawing/2010/main" xmlns:p14="http://schemas.microsoft.com/office/powerpoint/2010/main" w="9525">
                   <a:solidFill>
                     <a:srgbClr val="000000"/>
                   </a:solidFill>
@@ -14535,7 +14613,7 @@
             </a:ln>
             <a:extLst>
               <a:ext uri="{91240B29-F687-4f45-9708-019B960494DF}">
-                <a14:hiddenLine xmlns:p14="http://schemas.microsoft.com/office/powerpoint/2010/main" xmlns:a14="http://schemas.microsoft.com/office/drawing/2010/main" xmlns:a16="http://schemas.microsoft.com/office/drawing/2014/main" xmlns="" w="9525">
+                <a14:hiddenLine xmlns="" xmlns:a16="http://schemas.microsoft.com/office/drawing/2014/main" xmlns:a14="http://schemas.microsoft.com/office/drawing/2010/main" xmlns:p14="http://schemas.microsoft.com/office/powerpoint/2010/main" w="9525">
                   <a:solidFill>
                     <a:srgbClr val="000000"/>
                   </a:solidFill>
@@ -14619,7 +14697,7 @@
             </a:ln>
             <a:extLst>
               <a:ext uri="{91240B29-F687-4f45-9708-019B960494DF}">
-                <a14:hiddenLine xmlns:p14="http://schemas.microsoft.com/office/powerpoint/2010/main" xmlns:a14="http://schemas.microsoft.com/office/drawing/2010/main" xmlns:a16="http://schemas.microsoft.com/office/drawing/2014/main" xmlns="" w="9525">
+                <a14:hiddenLine xmlns="" xmlns:a16="http://schemas.microsoft.com/office/drawing/2014/main" xmlns:a14="http://schemas.microsoft.com/office/drawing/2010/main" xmlns:p14="http://schemas.microsoft.com/office/powerpoint/2010/main" w="9525">
                   <a:solidFill>
                     <a:srgbClr val="000000"/>
                   </a:solidFill>
@@ -14751,7 +14829,7 @@
             </a:ln>
             <a:extLst>
               <a:ext uri="{91240B29-F687-4f45-9708-019B960494DF}">
-                <a14:hiddenLine xmlns:p14="http://schemas.microsoft.com/office/powerpoint/2010/main" xmlns:a14="http://schemas.microsoft.com/office/drawing/2010/main" xmlns:a16="http://schemas.microsoft.com/office/drawing/2014/main" xmlns="" w="9525">
+                <a14:hiddenLine xmlns="" xmlns:a16="http://schemas.microsoft.com/office/drawing/2014/main" xmlns:a14="http://schemas.microsoft.com/office/drawing/2010/main" xmlns:p14="http://schemas.microsoft.com/office/powerpoint/2010/main" w="9525">
                   <a:solidFill>
                     <a:srgbClr val="000000"/>
                   </a:solidFill>
@@ -14835,7 +14913,7 @@
             </a:ln>
             <a:extLst>
               <a:ext uri="{91240B29-F687-4f45-9708-019B960494DF}">
-                <a14:hiddenLine xmlns:p14="http://schemas.microsoft.com/office/powerpoint/2010/main" xmlns:a14="http://schemas.microsoft.com/office/drawing/2010/main" xmlns:a16="http://schemas.microsoft.com/office/drawing/2014/main" xmlns="" w="9525">
+                <a14:hiddenLine xmlns="" xmlns:a16="http://schemas.microsoft.com/office/drawing/2014/main" xmlns:a14="http://schemas.microsoft.com/office/drawing/2010/main" xmlns:p14="http://schemas.microsoft.com/office/powerpoint/2010/main" w="9525">
                   <a:solidFill>
                     <a:srgbClr val="000000"/>
                   </a:solidFill>
@@ -14947,7 +15025,7 @@
             </a:ln>
             <a:extLst>
               <a:ext uri="{91240B29-F687-4f45-9708-019B960494DF}">
-                <a14:hiddenLine xmlns:p14="http://schemas.microsoft.com/office/powerpoint/2010/main" xmlns:a14="http://schemas.microsoft.com/office/drawing/2010/main" xmlns:a16="http://schemas.microsoft.com/office/drawing/2014/main" xmlns="" w="9525">
+                <a14:hiddenLine xmlns="" xmlns:a16="http://schemas.microsoft.com/office/drawing/2014/main" xmlns:a14="http://schemas.microsoft.com/office/drawing/2010/main" xmlns:p14="http://schemas.microsoft.com/office/powerpoint/2010/main" w="9525">
                   <a:solidFill>
                     <a:srgbClr val="000000"/>
                   </a:solidFill>
@@ -15059,7 +15137,7 @@
             </a:ln>
             <a:extLst>
               <a:ext uri="{91240B29-F687-4f45-9708-019B960494DF}">
-                <a14:hiddenLine xmlns:p14="http://schemas.microsoft.com/office/powerpoint/2010/main" xmlns:a14="http://schemas.microsoft.com/office/drawing/2010/main" xmlns:a16="http://schemas.microsoft.com/office/drawing/2014/main" xmlns="" w="9525">
+                <a14:hiddenLine xmlns="" xmlns:a16="http://schemas.microsoft.com/office/drawing/2014/main" xmlns:a14="http://schemas.microsoft.com/office/drawing/2010/main" xmlns:p14="http://schemas.microsoft.com/office/powerpoint/2010/main" w="9525">
                   <a:solidFill>
                     <a:srgbClr val="000000"/>
                   </a:solidFill>
@@ -15143,7 +15221,7 @@
             </a:ln>
             <a:extLst>
               <a:ext uri="{91240B29-F687-4f45-9708-019B960494DF}">
-                <a14:hiddenLine xmlns:p14="http://schemas.microsoft.com/office/powerpoint/2010/main" xmlns:a14="http://schemas.microsoft.com/office/drawing/2010/main" xmlns:a16="http://schemas.microsoft.com/office/drawing/2014/main" xmlns="" w="9525">
+                <a14:hiddenLine xmlns="" xmlns:a16="http://schemas.microsoft.com/office/drawing/2014/main" xmlns:a14="http://schemas.microsoft.com/office/drawing/2010/main" xmlns:p14="http://schemas.microsoft.com/office/powerpoint/2010/main" w="9525">
                   <a:solidFill>
                     <a:srgbClr val="000000"/>
                   </a:solidFill>
@@ -15255,7 +15333,7 @@
             </a:ln>
             <a:extLst>
               <a:ext uri="{91240B29-F687-4f45-9708-019B960494DF}">
-                <a14:hiddenLine xmlns:p14="http://schemas.microsoft.com/office/powerpoint/2010/main" xmlns:a14="http://schemas.microsoft.com/office/drawing/2010/main" xmlns:a16="http://schemas.microsoft.com/office/drawing/2014/main" xmlns="" w="9525">
+                <a14:hiddenLine xmlns="" xmlns:a16="http://schemas.microsoft.com/office/drawing/2014/main" xmlns:a14="http://schemas.microsoft.com/office/drawing/2010/main" xmlns:p14="http://schemas.microsoft.com/office/powerpoint/2010/main" w="9525">
                   <a:solidFill>
                     <a:srgbClr val="000000"/>
                   </a:solidFill>
@@ -15367,7 +15445,7 @@
             </a:ln>
             <a:extLst>
               <a:ext uri="{91240B29-F687-4f45-9708-019B960494DF}">
-                <a14:hiddenLine xmlns:p14="http://schemas.microsoft.com/office/powerpoint/2010/main" xmlns:a14="http://schemas.microsoft.com/office/drawing/2010/main" xmlns:a16="http://schemas.microsoft.com/office/drawing/2014/main" xmlns="" w="9525">
+                <a14:hiddenLine xmlns="" xmlns:a16="http://schemas.microsoft.com/office/drawing/2014/main" xmlns:a14="http://schemas.microsoft.com/office/drawing/2010/main" xmlns:p14="http://schemas.microsoft.com/office/powerpoint/2010/main" w="9525">
                   <a:solidFill>
                     <a:srgbClr val="000000"/>
                   </a:solidFill>
@@ -15445,7 +15523,7 @@
             </a:ln>
             <a:extLst>
               <a:ext uri="{91240B29-F687-4f45-9708-019B960494DF}">
-                <a14:hiddenLine xmlns:p14="http://schemas.microsoft.com/office/powerpoint/2010/main" xmlns:a14="http://schemas.microsoft.com/office/drawing/2010/main" xmlns:a16="http://schemas.microsoft.com/office/drawing/2014/main" xmlns="" w="9525">
+                <a14:hiddenLine xmlns="" xmlns:a16="http://schemas.microsoft.com/office/drawing/2014/main" xmlns:a14="http://schemas.microsoft.com/office/drawing/2010/main" xmlns:p14="http://schemas.microsoft.com/office/powerpoint/2010/main" w="9525">
                   <a:solidFill>
                     <a:srgbClr val="000000"/>
                   </a:solidFill>
@@ -15557,7 +15635,7 @@
             </a:ln>
             <a:extLst>
               <a:ext uri="{91240B29-F687-4f45-9708-019B960494DF}">
-                <a14:hiddenLine xmlns:p14="http://schemas.microsoft.com/office/powerpoint/2010/main" xmlns:a14="http://schemas.microsoft.com/office/drawing/2010/main" xmlns:a16="http://schemas.microsoft.com/office/drawing/2014/main" xmlns="" w="9525">
+                <a14:hiddenLine xmlns="" xmlns:a16="http://schemas.microsoft.com/office/drawing/2014/main" xmlns:a14="http://schemas.microsoft.com/office/drawing/2010/main" xmlns:p14="http://schemas.microsoft.com/office/powerpoint/2010/main" w="9525">
                   <a:solidFill>
                     <a:srgbClr val="000000"/>
                   </a:solidFill>
@@ -15635,7 +15713,7 @@
             </a:ln>
             <a:extLst>
               <a:ext uri="{91240B29-F687-4f45-9708-019B960494DF}">
-                <a14:hiddenLine xmlns:p14="http://schemas.microsoft.com/office/powerpoint/2010/main" xmlns:a14="http://schemas.microsoft.com/office/drawing/2010/main" xmlns:a16="http://schemas.microsoft.com/office/drawing/2014/main" xmlns="" w="9525">
+                <a14:hiddenLine xmlns="" xmlns:a16="http://schemas.microsoft.com/office/drawing/2014/main" xmlns:a14="http://schemas.microsoft.com/office/drawing/2010/main" xmlns:p14="http://schemas.microsoft.com/office/powerpoint/2010/main" w="9525">
                   <a:solidFill>
                     <a:srgbClr val="000000"/>
                   </a:solidFill>
@@ -15747,7 +15825,7 @@
             </a:ln>
             <a:extLst>
               <a:ext uri="{91240B29-F687-4f45-9708-019B960494DF}">
-                <a14:hiddenLine xmlns:p14="http://schemas.microsoft.com/office/powerpoint/2010/main" xmlns:a14="http://schemas.microsoft.com/office/drawing/2010/main" xmlns:a16="http://schemas.microsoft.com/office/drawing/2014/main" xmlns="" w="9525">
+                <a14:hiddenLine xmlns="" xmlns:a16="http://schemas.microsoft.com/office/drawing/2014/main" xmlns:a14="http://schemas.microsoft.com/office/drawing/2010/main" xmlns:p14="http://schemas.microsoft.com/office/powerpoint/2010/main" w="9525">
                   <a:solidFill>
                     <a:srgbClr val="000000"/>
                   </a:solidFill>
@@ -15837,7 +15915,7 @@
             </a:ln>
             <a:extLst>
               <a:ext uri="{91240B29-F687-4f45-9708-019B960494DF}">
-                <a14:hiddenLine xmlns:p14="http://schemas.microsoft.com/office/powerpoint/2010/main" xmlns:a14="http://schemas.microsoft.com/office/drawing/2010/main" xmlns:a16="http://schemas.microsoft.com/office/drawing/2014/main" xmlns="" w="9525">
+                <a14:hiddenLine xmlns="" xmlns:a16="http://schemas.microsoft.com/office/drawing/2014/main" xmlns:a14="http://schemas.microsoft.com/office/drawing/2010/main" xmlns:p14="http://schemas.microsoft.com/office/powerpoint/2010/main" w="9525">
                   <a:solidFill>
                     <a:srgbClr val="000000"/>
                   </a:solidFill>
@@ -15949,7 +16027,7 @@
             </a:ln>
             <a:extLst>
               <a:ext uri="{91240B29-F687-4f45-9708-019B960494DF}">
-                <a14:hiddenLine xmlns:p14="http://schemas.microsoft.com/office/powerpoint/2010/main" xmlns:a14="http://schemas.microsoft.com/office/drawing/2010/main" xmlns:a16="http://schemas.microsoft.com/office/drawing/2014/main" xmlns="" w="9525">
+                <a14:hiddenLine xmlns="" xmlns:a16="http://schemas.microsoft.com/office/drawing/2014/main" xmlns:a14="http://schemas.microsoft.com/office/drawing/2010/main" xmlns:p14="http://schemas.microsoft.com/office/powerpoint/2010/main" w="9525">
                   <a:solidFill>
                     <a:srgbClr val="000000"/>
                   </a:solidFill>
@@ -16039,7 +16117,7 @@
             </a:ln>
             <a:extLst>
               <a:ext uri="{91240B29-F687-4f45-9708-019B960494DF}">
-                <a14:hiddenLine xmlns:p14="http://schemas.microsoft.com/office/powerpoint/2010/main" xmlns:a14="http://schemas.microsoft.com/office/drawing/2010/main" xmlns:a16="http://schemas.microsoft.com/office/drawing/2014/main" xmlns="" w="9525">
+                <a14:hiddenLine xmlns="" xmlns:a16="http://schemas.microsoft.com/office/drawing/2014/main" xmlns:a14="http://schemas.microsoft.com/office/drawing/2010/main" xmlns:p14="http://schemas.microsoft.com/office/powerpoint/2010/main" w="9525">
                   <a:solidFill>
                     <a:srgbClr val="000000"/>
                   </a:solidFill>
@@ -16151,7 +16229,7 @@
             </a:ln>
             <a:extLst>
               <a:ext uri="{91240B29-F687-4f45-9708-019B960494DF}">
-                <a14:hiddenLine xmlns:p14="http://schemas.microsoft.com/office/powerpoint/2010/main" xmlns:a14="http://schemas.microsoft.com/office/drawing/2010/main" xmlns:a16="http://schemas.microsoft.com/office/drawing/2014/main" xmlns="" w="9525">
+                <a14:hiddenLine xmlns="" xmlns:a16="http://schemas.microsoft.com/office/drawing/2014/main" xmlns:a14="http://schemas.microsoft.com/office/drawing/2010/main" xmlns:p14="http://schemas.microsoft.com/office/powerpoint/2010/main" w="9525">
                   <a:solidFill>
                     <a:srgbClr val="000000"/>
                   </a:solidFill>
@@ -16207,7 +16285,7 @@
             </a:ln>
             <a:extLst>
               <a:ext uri="{91240B29-F687-4f45-9708-019B960494DF}">
-                <a14:hiddenLine xmlns:p14="http://schemas.microsoft.com/office/powerpoint/2010/main" xmlns:a14="http://schemas.microsoft.com/office/drawing/2010/main" xmlns:a16="http://schemas.microsoft.com/office/drawing/2014/main" xmlns="" w="9525">
+                <a14:hiddenLine xmlns="" xmlns:a16="http://schemas.microsoft.com/office/drawing/2014/main" xmlns:a14="http://schemas.microsoft.com/office/drawing/2010/main" xmlns:p14="http://schemas.microsoft.com/office/powerpoint/2010/main" w="9525">
                   <a:solidFill>
                     <a:srgbClr val="000000"/>
                   </a:solidFill>
@@ -16319,7 +16397,7 @@
             </a:ln>
             <a:extLst>
               <a:ext uri="{91240B29-F687-4f45-9708-019B960494DF}">
-                <a14:hiddenLine xmlns:p14="http://schemas.microsoft.com/office/powerpoint/2010/main" xmlns:a14="http://schemas.microsoft.com/office/drawing/2010/main" xmlns:a16="http://schemas.microsoft.com/office/drawing/2014/main" xmlns="" w="9525">
+                <a14:hiddenLine xmlns="" xmlns:a16="http://schemas.microsoft.com/office/drawing/2014/main" xmlns:a14="http://schemas.microsoft.com/office/drawing/2010/main" xmlns:p14="http://schemas.microsoft.com/office/powerpoint/2010/main" w="9525">
                   <a:solidFill>
                     <a:srgbClr val="000000"/>
                   </a:solidFill>
@@ -16403,7 +16481,7 @@
             </a:ln>
             <a:extLst>
               <a:ext uri="{91240B29-F687-4f45-9708-019B960494DF}">
-                <a14:hiddenLine xmlns:p14="http://schemas.microsoft.com/office/powerpoint/2010/main" xmlns:a14="http://schemas.microsoft.com/office/drawing/2010/main" xmlns:a16="http://schemas.microsoft.com/office/drawing/2014/main" xmlns="" w="9525">
+                <a14:hiddenLine xmlns="" xmlns:a16="http://schemas.microsoft.com/office/drawing/2014/main" xmlns:a14="http://schemas.microsoft.com/office/drawing/2010/main" xmlns:p14="http://schemas.microsoft.com/office/powerpoint/2010/main" w="9525">
                   <a:solidFill>
                     <a:srgbClr val="000000"/>
                   </a:solidFill>
@@ -16487,7 +16565,7 @@
             </a:ln>
             <a:extLst>
               <a:ext uri="{91240B29-F687-4f45-9708-019B960494DF}">
-                <a14:hiddenLine xmlns:p14="http://schemas.microsoft.com/office/powerpoint/2010/main" xmlns:a14="http://schemas.microsoft.com/office/drawing/2010/main" xmlns:a16="http://schemas.microsoft.com/office/drawing/2014/main" xmlns="" w="9525">
+                <a14:hiddenLine xmlns="" xmlns:a16="http://schemas.microsoft.com/office/drawing/2014/main" xmlns:a14="http://schemas.microsoft.com/office/drawing/2010/main" xmlns:p14="http://schemas.microsoft.com/office/powerpoint/2010/main" w="9525">
                   <a:solidFill>
                     <a:srgbClr val="000000"/>
                   </a:solidFill>
@@ -16599,7 +16677,7 @@
             </a:ln>
             <a:extLst>
               <a:ext uri="{91240B29-F687-4f45-9708-019B960494DF}">
-                <a14:hiddenLine xmlns:p14="http://schemas.microsoft.com/office/powerpoint/2010/main" xmlns:a14="http://schemas.microsoft.com/office/drawing/2010/main" xmlns:a16="http://schemas.microsoft.com/office/drawing/2014/main" xmlns="" w="9525">
+                <a14:hiddenLine xmlns="" xmlns:a16="http://schemas.microsoft.com/office/drawing/2014/main" xmlns:a14="http://schemas.microsoft.com/office/drawing/2010/main" xmlns:p14="http://schemas.microsoft.com/office/powerpoint/2010/main" w="9525">
                   <a:solidFill>
                     <a:srgbClr val="000000"/>
                   </a:solidFill>
@@ -16689,7 +16767,7 @@
             </a:ln>
             <a:extLst>
               <a:ext uri="{91240B29-F687-4f45-9708-019B960494DF}">
-                <a14:hiddenLine xmlns:p14="http://schemas.microsoft.com/office/powerpoint/2010/main" xmlns:a14="http://schemas.microsoft.com/office/drawing/2010/main" xmlns:a16="http://schemas.microsoft.com/office/drawing/2014/main" xmlns="" w="9525">
+                <a14:hiddenLine xmlns="" xmlns:a16="http://schemas.microsoft.com/office/drawing/2014/main" xmlns:a14="http://schemas.microsoft.com/office/drawing/2010/main" xmlns:p14="http://schemas.microsoft.com/office/powerpoint/2010/main" w="9525">
                   <a:solidFill>
                     <a:srgbClr val="000000"/>
                   </a:solidFill>
@@ -16773,7 +16851,7 @@
             </a:ln>
             <a:extLst>
               <a:ext uri="{91240B29-F687-4f45-9708-019B960494DF}">
-                <a14:hiddenLine xmlns:p14="http://schemas.microsoft.com/office/powerpoint/2010/main" xmlns:a14="http://schemas.microsoft.com/office/drawing/2010/main" xmlns:a16="http://schemas.microsoft.com/office/drawing/2014/main" xmlns="" w="9525">
+                <a14:hiddenLine xmlns="" xmlns:a16="http://schemas.microsoft.com/office/drawing/2014/main" xmlns:a14="http://schemas.microsoft.com/office/drawing/2010/main" xmlns:p14="http://schemas.microsoft.com/office/powerpoint/2010/main" w="9525">
                   <a:solidFill>
                     <a:srgbClr val="000000"/>
                   </a:solidFill>
@@ -16885,7 +16963,7 @@
             </a:ln>
             <a:extLst>
               <a:ext uri="{91240B29-F687-4f45-9708-019B960494DF}">
-                <a14:hiddenLine xmlns:p14="http://schemas.microsoft.com/office/powerpoint/2010/main" xmlns:a14="http://schemas.microsoft.com/office/drawing/2010/main" xmlns:a16="http://schemas.microsoft.com/office/drawing/2014/main" xmlns="" w="9525">
+                <a14:hiddenLine xmlns="" xmlns:a16="http://schemas.microsoft.com/office/drawing/2014/main" xmlns:a14="http://schemas.microsoft.com/office/drawing/2010/main" xmlns:p14="http://schemas.microsoft.com/office/powerpoint/2010/main" w="9525">
                   <a:solidFill>
                     <a:srgbClr val="000000"/>
                   </a:solidFill>
@@ -16969,7 +17047,7 @@
             </a:ln>
             <a:extLst>
               <a:ext uri="{91240B29-F687-4f45-9708-019B960494DF}">
-                <a14:hiddenLine xmlns:p14="http://schemas.microsoft.com/office/powerpoint/2010/main" xmlns:a14="http://schemas.microsoft.com/office/drawing/2010/main" xmlns:a16="http://schemas.microsoft.com/office/drawing/2014/main" xmlns="" w="9525">
+                <a14:hiddenLine xmlns="" xmlns:a16="http://schemas.microsoft.com/office/drawing/2014/main" xmlns:a14="http://schemas.microsoft.com/office/drawing/2010/main" xmlns:p14="http://schemas.microsoft.com/office/powerpoint/2010/main" w="9525">
                   <a:solidFill>
                     <a:srgbClr val="000000"/>
                   </a:solidFill>
@@ -17081,7 +17159,7 @@
             </a:ln>
             <a:extLst>
               <a:ext uri="{91240B29-F687-4f45-9708-019B960494DF}">
-                <a14:hiddenLine xmlns:p14="http://schemas.microsoft.com/office/powerpoint/2010/main" xmlns:a14="http://schemas.microsoft.com/office/drawing/2010/main" xmlns:a16="http://schemas.microsoft.com/office/drawing/2014/main" xmlns="" w="9525">
+                <a14:hiddenLine xmlns="" xmlns:a16="http://schemas.microsoft.com/office/drawing/2014/main" xmlns:a14="http://schemas.microsoft.com/office/drawing/2010/main" xmlns:p14="http://schemas.microsoft.com/office/powerpoint/2010/main" w="9525">
                   <a:solidFill>
                     <a:srgbClr val="000000"/>
                   </a:solidFill>
@@ -17165,7 +17243,7 @@
             </a:ln>
             <a:extLst>
               <a:ext uri="{91240B29-F687-4f45-9708-019B960494DF}">
-                <a14:hiddenLine xmlns:p14="http://schemas.microsoft.com/office/powerpoint/2010/main" xmlns:a14="http://schemas.microsoft.com/office/drawing/2010/main" xmlns:a16="http://schemas.microsoft.com/office/drawing/2014/main" xmlns="" w="9525">
+                <a14:hiddenLine xmlns="" xmlns:a16="http://schemas.microsoft.com/office/drawing/2014/main" xmlns:a14="http://schemas.microsoft.com/office/drawing/2010/main" xmlns:p14="http://schemas.microsoft.com/office/powerpoint/2010/main" w="9525">
                   <a:solidFill>
                     <a:srgbClr val="000000"/>
                   </a:solidFill>
@@ -17277,7 +17355,7 @@
             </a:ln>
             <a:extLst>
               <a:ext uri="{91240B29-F687-4f45-9708-019B960494DF}">
-                <a14:hiddenLine xmlns:p14="http://schemas.microsoft.com/office/powerpoint/2010/main" xmlns:a14="http://schemas.microsoft.com/office/drawing/2010/main" xmlns:a16="http://schemas.microsoft.com/office/drawing/2014/main" xmlns="" w="9525">
+                <a14:hiddenLine xmlns="" xmlns:a16="http://schemas.microsoft.com/office/drawing/2014/main" xmlns:a14="http://schemas.microsoft.com/office/drawing/2010/main" xmlns:p14="http://schemas.microsoft.com/office/powerpoint/2010/main" w="9525">
                   <a:solidFill>
                     <a:srgbClr val="000000"/>
                   </a:solidFill>
@@ -17333,7 +17411,7 @@
             </a:ln>
             <a:extLst>
               <a:ext uri="{91240B29-F687-4f45-9708-019B960494DF}">
-                <a14:hiddenLine xmlns:p14="http://schemas.microsoft.com/office/powerpoint/2010/main" xmlns:a14="http://schemas.microsoft.com/office/drawing/2010/main" xmlns:a16="http://schemas.microsoft.com/office/drawing/2014/main" xmlns="" w="9525">
+                <a14:hiddenLine xmlns="" xmlns:a16="http://schemas.microsoft.com/office/drawing/2014/main" xmlns:a14="http://schemas.microsoft.com/office/drawing/2010/main" xmlns:p14="http://schemas.microsoft.com/office/powerpoint/2010/main" w="9525">
                   <a:solidFill>
                     <a:srgbClr val="000000"/>
                   </a:solidFill>
@@ -17420,7 +17498,7 @@
             </a:ln>
             <a:extLst>
               <a:ext uri="{91240B29-F687-4f45-9708-019B960494DF}">
-                <a14:hiddenLine xmlns:p14="http://schemas.microsoft.com/office/powerpoint/2010/main" xmlns:a14="http://schemas.microsoft.com/office/drawing/2010/main" xmlns:a16="http://schemas.microsoft.com/office/drawing/2014/main" xmlns="" w="9525">
+                <a14:hiddenLine xmlns="" xmlns:a16="http://schemas.microsoft.com/office/drawing/2014/main" xmlns:a14="http://schemas.microsoft.com/office/drawing/2010/main" xmlns:p14="http://schemas.microsoft.com/office/powerpoint/2010/main" w="9525">
                   <a:solidFill>
                     <a:srgbClr val="000000"/>
                   </a:solidFill>
@@ -17532,7 +17610,7 @@
             </a:ln>
             <a:extLst>
               <a:ext uri="{91240B29-F687-4f45-9708-019B960494DF}">
-                <a14:hiddenLine xmlns:p14="http://schemas.microsoft.com/office/powerpoint/2010/main" xmlns:a14="http://schemas.microsoft.com/office/drawing/2010/main" xmlns:a16="http://schemas.microsoft.com/office/drawing/2014/main" xmlns="" w="9525">
+                <a14:hiddenLine xmlns="" xmlns:a16="http://schemas.microsoft.com/office/drawing/2014/main" xmlns:a14="http://schemas.microsoft.com/office/drawing/2010/main" xmlns:p14="http://schemas.microsoft.com/office/powerpoint/2010/main" w="9525">
                   <a:solidFill>
                     <a:srgbClr val="000000"/>
                   </a:solidFill>
@@ -17616,7 +17694,7 @@
             </a:ln>
             <a:extLst>
               <a:ext uri="{91240B29-F687-4f45-9708-019B960494DF}">
-                <a14:hiddenLine xmlns:p14="http://schemas.microsoft.com/office/powerpoint/2010/main" xmlns:a14="http://schemas.microsoft.com/office/drawing/2010/main" xmlns:a16="http://schemas.microsoft.com/office/drawing/2014/main" xmlns="" w="9525">
+                <a14:hiddenLine xmlns="" xmlns:a16="http://schemas.microsoft.com/office/drawing/2014/main" xmlns:a14="http://schemas.microsoft.com/office/drawing/2010/main" xmlns:p14="http://schemas.microsoft.com/office/powerpoint/2010/main" w="9525">
                   <a:solidFill>
                     <a:srgbClr val="000000"/>
                   </a:solidFill>
@@ -17728,7 +17806,7 @@
             </a:ln>
             <a:extLst>
               <a:ext uri="{91240B29-F687-4f45-9708-019B960494DF}">
-                <a14:hiddenLine xmlns:p14="http://schemas.microsoft.com/office/powerpoint/2010/main" xmlns:a14="http://schemas.microsoft.com/office/drawing/2010/main" xmlns:a16="http://schemas.microsoft.com/office/drawing/2014/main" xmlns="" w="9525">
+                <a14:hiddenLine xmlns="" xmlns:a16="http://schemas.microsoft.com/office/drawing/2014/main" xmlns:a14="http://schemas.microsoft.com/office/drawing/2010/main" xmlns:p14="http://schemas.microsoft.com/office/powerpoint/2010/main" w="9525">
                   <a:solidFill>
                     <a:srgbClr val="000000"/>
                   </a:solidFill>
@@ -17840,7 +17918,7 @@
             </a:ln>
             <a:extLst>
               <a:ext uri="{91240B29-F687-4f45-9708-019B960494DF}">
-                <a14:hiddenLine xmlns:p14="http://schemas.microsoft.com/office/powerpoint/2010/main" xmlns:a14="http://schemas.microsoft.com/office/drawing/2010/main" xmlns:a16="http://schemas.microsoft.com/office/drawing/2014/main" xmlns="" w="9525">
+                <a14:hiddenLine xmlns="" xmlns:a16="http://schemas.microsoft.com/office/drawing/2014/main" xmlns:a14="http://schemas.microsoft.com/office/drawing/2010/main" xmlns:p14="http://schemas.microsoft.com/office/powerpoint/2010/main" w="9525">
                   <a:solidFill>
                     <a:srgbClr val="000000"/>
                   </a:solidFill>
@@ -17927,7 +18005,7 @@
             </a:ln>
             <a:extLst>
               <a:ext uri="{91240B29-F687-4f45-9708-019B960494DF}">
-                <a14:hiddenLine xmlns:p14="http://schemas.microsoft.com/office/powerpoint/2010/main" xmlns:a14="http://schemas.microsoft.com/office/drawing/2010/main" xmlns:a16="http://schemas.microsoft.com/office/drawing/2014/main" xmlns="" w="9525">
+                <a14:hiddenLine xmlns="" xmlns:a16="http://schemas.microsoft.com/office/drawing/2014/main" xmlns:a14="http://schemas.microsoft.com/office/drawing/2010/main" xmlns:p14="http://schemas.microsoft.com/office/powerpoint/2010/main" w="9525">
                   <a:solidFill>
                     <a:srgbClr val="000000"/>
                   </a:solidFill>
@@ -18011,7 +18089,7 @@
             </a:ln>
             <a:extLst>
               <a:ext uri="{91240B29-F687-4f45-9708-019B960494DF}">
-                <a14:hiddenLine xmlns:p14="http://schemas.microsoft.com/office/powerpoint/2010/main" xmlns:a14="http://schemas.microsoft.com/office/drawing/2010/main" xmlns:a16="http://schemas.microsoft.com/office/drawing/2014/main" xmlns="" w="9525">
+                <a14:hiddenLine xmlns="" xmlns:a16="http://schemas.microsoft.com/office/drawing/2014/main" xmlns:a14="http://schemas.microsoft.com/office/drawing/2010/main" xmlns:p14="http://schemas.microsoft.com/office/powerpoint/2010/main" w="9525">
                   <a:solidFill>
                     <a:srgbClr val="000000"/>
                   </a:solidFill>
@@ -18123,7 +18201,7 @@
             </a:ln>
             <a:extLst>
               <a:ext uri="{91240B29-F687-4f45-9708-019B960494DF}">
-                <a14:hiddenLine xmlns:p14="http://schemas.microsoft.com/office/powerpoint/2010/main" xmlns:a14="http://schemas.microsoft.com/office/drawing/2010/main" xmlns:a16="http://schemas.microsoft.com/office/drawing/2014/main" xmlns="" w="9525">
+                <a14:hiddenLine xmlns="" xmlns:a16="http://schemas.microsoft.com/office/drawing/2014/main" xmlns:a14="http://schemas.microsoft.com/office/drawing/2010/main" xmlns:p14="http://schemas.microsoft.com/office/powerpoint/2010/main" w="9525">
                   <a:solidFill>
                     <a:srgbClr val="000000"/>
                   </a:solidFill>
@@ -18235,7 +18313,7 @@
             </a:ln>
             <a:extLst>
               <a:ext uri="{91240B29-F687-4f45-9708-019B960494DF}">
-                <a14:hiddenLine xmlns:p14="http://schemas.microsoft.com/office/powerpoint/2010/main" xmlns:a14="http://schemas.microsoft.com/office/drawing/2010/main" xmlns:a16="http://schemas.microsoft.com/office/drawing/2014/main" xmlns="" w="9525">
+                <a14:hiddenLine xmlns="" xmlns:a16="http://schemas.microsoft.com/office/drawing/2014/main" xmlns:a14="http://schemas.microsoft.com/office/drawing/2010/main" xmlns:p14="http://schemas.microsoft.com/office/powerpoint/2010/main" w="9525">
                   <a:solidFill>
                     <a:srgbClr val="000000"/>
                   </a:solidFill>
@@ -18319,7 +18397,7 @@
             </a:ln>
             <a:extLst>
               <a:ext uri="{91240B29-F687-4f45-9708-019B960494DF}">
-                <a14:hiddenLine xmlns:p14="http://schemas.microsoft.com/office/powerpoint/2010/main" xmlns:a14="http://schemas.microsoft.com/office/drawing/2010/main" xmlns:a16="http://schemas.microsoft.com/office/drawing/2014/main" xmlns="" w="9525">
+                <a14:hiddenLine xmlns="" xmlns:a16="http://schemas.microsoft.com/office/drawing/2014/main" xmlns:a14="http://schemas.microsoft.com/office/drawing/2010/main" xmlns:p14="http://schemas.microsoft.com/office/powerpoint/2010/main" w="9525">
                   <a:solidFill>
                     <a:srgbClr val="000000"/>
                   </a:solidFill>
@@ -18461,7 +18539,7 @@
             </a:ln>
             <a:extLst>
               <a:ext uri="{91240B29-F687-4f45-9708-019B960494DF}">
-                <a14:hiddenLine xmlns:p14="http://schemas.microsoft.com/office/powerpoint/2010/main" xmlns:a14="http://schemas.microsoft.com/office/drawing/2010/main" xmlns:a16="http://schemas.microsoft.com/office/drawing/2014/main" xmlns="" w="9525">
+                <a14:hiddenLine xmlns="" xmlns:a16="http://schemas.microsoft.com/office/drawing/2014/main" xmlns:a14="http://schemas.microsoft.com/office/drawing/2010/main" xmlns:p14="http://schemas.microsoft.com/office/powerpoint/2010/main" w="9525">
                   <a:solidFill>
                     <a:srgbClr val="000000"/>
                   </a:solidFill>
@@ -18551,7 +18629,7 @@
             </a:ln>
             <a:extLst>
               <a:ext uri="{91240B29-F687-4f45-9708-019B960494DF}">
-                <a14:hiddenLine xmlns:p14="http://schemas.microsoft.com/office/powerpoint/2010/main" xmlns:a14="http://schemas.microsoft.com/office/drawing/2010/main" xmlns:a16="http://schemas.microsoft.com/office/drawing/2014/main" xmlns="" w="9525">
+                <a14:hiddenLine xmlns="" xmlns:a16="http://schemas.microsoft.com/office/drawing/2014/main" xmlns:a14="http://schemas.microsoft.com/office/drawing/2010/main" xmlns:p14="http://schemas.microsoft.com/office/powerpoint/2010/main" w="9525">
                   <a:solidFill>
                     <a:srgbClr val="000000"/>
                   </a:solidFill>
@@ -18663,7 +18741,7 @@
             </a:ln>
             <a:extLst>
               <a:ext uri="{91240B29-F687-4f45-9708-019B960494DF}">
-                <a14:hiddenLine xmlns:p14="http://schemas.microsoft.com/office/powerpoint/2010/main" xmlns:a14="http://schemas.microsoft.com/office/drawing/2010/main" xmlns:a16="http://schemas.microsoft.com/office/drawing/2014/main" xmlns="" w="9525">
+                <a14:hiddenLine xmlns="" xmlns:a16="http://schemas.microsoft.com/office/drawing/2014/main" xmlns:a14="http://schemas.microsoft.com/office/drawing/2010/main" xmlns:p14="http://schemas.microsoft.com/office/powerpoint/2010/main" w="9525">
                   <a:solidFill>
                     <a:srgbClr val="000000"/>
                   </a:solidFill>
@@ -18800,7 +18878,7 @@
             </a:ln>
             <a:extLst>
               <a:ext uri="{91240B29-F687-4f45-9708-019B960494DF}">
-                <a14:hiddenLine xmlns:p14="http://schemas.microsoft.com/office/powerpoint/2010/main" xmlns:a14="http://schemas.microsoft.com/office/drawing/2010/main" xmlns:a16="http://schemas.microsoft.com/office/drawing/2014/main" xmlns="" w="9525">
+                <a14:hiddenLine xmlns="" xmlns:a16="http://schemas.microsoft.com/office/drawing/2014/main" xmlns:a14="http://schemas.microsoft.com/office/drawing/2010/main" xmlns:p14="http://schemas.microsoft.com/office/powerpoint/2010/main" w="9525">
                   <a:solidFill>
                     <a:srgbClr val="000000"/>
                   </a:solidFill>
@@ -18937,7 +19015,7 @@
             </a:ln>
             <a:extLst>
               <a:ext uri="{91240B29-F687-4f45-9708-019B960494DF}">
-                <a14:hiddenLine xmlns:p14="http://schemas.microsoft.com/office/powerpoint/2010/main" xmlns:a14="http://schemas.microsoft.com/office/drawing/2010/main" xmlns:a16="http://schemas.microsoft.com/office/drawing/2014/main" xmlns="" w="9525">
+                <a14:hiddenLine xmlns="" xmlns:a16="http://schemas.microsoft.com/office/drawing/2014/main" xmlns:a14="http://schemas.microsoft.com/office/drawing/2010/main" xmlns:p14="http://schemas.microsoft.com/office/powerpoint/2010/main" w="9525">
                   <a:solidFill>
                     <a:srgbClr val="000000"/>
                   </a:solidFill>
@@ -19049,7 +19127,7 @@
             </a:ln>
             <a:extLst>
               <a:ext uri="{91240B29-F687-4f45-9708-019B960494DF}">
-                <a14:hiddenLine xmlns:p14="http://schemas.microsoft.com/office/powerpoint/2010/main" xmlns:a14="http://schemas.microsoft.com/office/drawing/2010/main" xmlns:a16="http://schemas.microsoft.com/office/drawing/2014/main" xmlns="" w="9525">
+                <a14:hiddenLine xmlns="" xmlns:a16="http://schemas.microsoft.com/office/drawing/2014/main" xmlns:a14="http://schemas.microsoft.com/office/drawing/2010/main" xmlns:p14="http://schemas.microsoft.com/office/powerpoint/2010/main" w="9525">
                   <a:solidFill>
                     <a:srgbClr val="000000"/>
                   </a:solidFill>
@@ -19136,7 +19214,7 @@
             </a:ln>
             <a:extLst>
               <a:ext uri="{91240B29-F687-4f45-9708-019B960494DF}">
-                <a14:hiddenLine xmlns:p14="http://schemas.microsoft.com/office/powerpoint/2010/main" xmlns:a14="http://schemas.microsoft.com/office/drawing/2010/main" xmlns:a16="http://schemas.microsoft.com/office/drawing/2014/main" xmlns="" w="9525">
+                <a14:hiddenLine xmlns="" xmlns:a16="http://schemas.microsoft.com/office/drawing/2014/main" xmlns:a14="http://schemas.microsoft.com/office/drawing/2010/main" xmlns:p14="http://schemas.microsoft.com/office/powerpoint/2010/main" w="9525">
                   <a:solidFill>
                     <a:srgbClr val="000000"/>
                   </a:solidFill>
@@ -19248,7 +19326,7 @@
             </a:ln>
             <a:extLst>
               <a:ext uri="{91240B29-F687-4f45-9708-019B960494DF}">
-                <a14:hiddenLine xmlns:p14="http://schemas.microsoft.com/office/powerpoint/2010/main" xmlns:a14="http://schemas.microsoft.com/office/drawing/2010/main" xmlns:a16="http://schemas.microsoft.com/office/drawing/2014/main" xmlns="" w="9525">
+                <a14:hiddenLine xmlns="" xmlns:a16="http://schemas.microsoft.com/office/drawing/2014/main" xmlns:a14="http://schemas.microsoft.com/office/drawing/2010/main" xmlns:p14="http://schemas.microsoft.com/office/powerpoint/2010/main" w="9525">
                   <a:solidFill>
                     <a:srgbClr val="000000"/>
                   </a:solidFill>
@@ -19338,7 +19416,7 @@
             </a:ln>
             <a:extLst>
               <a:ext uri="{91240B29-F687-4f45-9708-019B960494DF}">
-                <a14:hiddenLine xmlns:p14="http://schemas.microsoft.com/office/powerpoint/2010/main" xmlns:a14="http://schemas.microsoft.com/office/drawing/2010/main" xmlns:a16="http://schemas.microsoft.com/office/drawing/2014/main" xmlns="" w="9525">
+                <a14:hiddenLine xmlns="" xmlns:a16="http://schemas.microsoft.com/office/drawing/2014/main" xmlns:a14="http://schemas.microsoft.com/office/drawing/2010/main" xmlns:p14="http://schemas.microsoft.com/office/powerpoint/2010/main" w="9525">
                   <a:solidFill>
                     <a:srgbClr val="000000"/>
                   </a:solidFill>
@@ -19450,7 +19528,7 @@
             </a:ln>
             <a:extLst>
               <a:ext uri="{91240B29-F687-4f45-9708-019B960494DF}">
-                <a14:hiddenLine xmlns:p14="http://schemas.microsoft.com/office/powerpoint/2010/main" xmlns:a14="http://schemas.microsoft.com/office/drawing/2010/main" xmlns:a16="http://schemas.microsoft.com/office/drawing/2014/main" xmlns="" w="9525">
+                <a14:hiddenLine xmlns="" xmlns:a16="http://schemas.microsoft.com/office/drawing/2014/main" xmlns:a14="http://schemas.microsoft.com/office/drawing/2010/main" xmlns:p14="http://schemas.microsoft.com/office/powerpoint/2010/main" w="9525">
                   <a:solidFill>
                     <a:srgbClr val="000000"/>
                   </a:solidFill>
@@ -19540,7 +19618,7 @@
             </a:ln>
             <a:extLst>
               <a:ext uri="{91240B29-F687-4f45-9708-019B960494DF}">
-                <a14:hiddenLine xmlns:p14="http://schemas.microsoft.com/office/powerpoint/2010/main" xmlns:a14="http://schemas.microsoft.com/office/drawing/2010/main" xmlns:a16="http://schemas.microsoft.com/office/drawing/2014/main" xmlns="" w="9525">
+                <a14:hiddenLine xmlns="" xmlns:a16="http://schemas.microsoft.com/office/drawing/2014/main" xmlns:a14="http://schemas.microsoft.com/office/drawing/2010/main" xmlns:p14="http://schemas.microsoft.com/office/powerpoint/2010/main" w="9525">
                   <a:solidFill>
                     <a:srgbClr val="000000"/>
                   </a:solidFill>
@@ -19652,7 +19730,7 @@
             </a:ln>
             <a:extLst>
               <a:ext uri="{91240B29-F687-4f45-9708-019B960494DF}">
-                <a14:hiddenLine xmlns:p14="http://schemas.microsoft.com/office/powerpoint/2010/main" xmlns:a14="http://schemas.microsoft.com/office/drawing/2010/main" xmlns:a16="http://schemas.microsoft.com/office/drawing/2014/main" xmlns="" w="9525">
+                <a14:hiddenLine xmlns="" xmlns:a16="http://schemas.microsoft.com/office/drawing/2014/main" xmlns:a14="http://schemas.microsoft.com/office/drawing/2010/main" xmlns:p14="http://schemas.microsoft.com/office/powerpoint/2010/main" w="9525">
                   <a:solidFill>
                     <a:srgbClr val="000000"/>
                   </a:solidFill>
@@ -19708,7 +19786,7 @@
             </a:ln>
             <a:extLst>
               <a:ext uri="{91240B29-F687-4f45-9708-019B960494DF}">
-                <a14:hiddenLine xmlns:p14="http://schemas.microsoft.com/office/powerpoint/2010/main" xmlns:a14="http://schemas.microsoft.com/office/drawing/2010/main" xmlns:a16="http://schemas.microsoft.com/office/drawing/2014/main" xmlns="" w="9525">
+                <a14:hiddenLine xmlns="" xmlns:a16="http://schemas.microsoft.com/office/drawing/2014/main" xmlns:a14="http://schemas.microsoft.com/office/drawing/2010/main" xmlns:p14="http://schemas.microsoft.com/office/powerpoint/2010/main" w="9525">
                   <a:solidFill>
                     <a:srgbClr val="000000"/>
                   </a:solidFill>
@@ -22551,7 +22629,7 @@
           <a:noFill/>
           <a:extLst>
             <a:ext uri="{909E8E84-426E-40dd-AFC4-6F175D3DCCD1}">
-              <a14:hiddenFill xmlns:a14="http://schemas.microsoft.com/office/drawing/2010/main" xmlns:p14="http://schemas.microsoft.com/office/powerpoint/2010/main" xmlns:a16="http://schemas.microsoft.com/office/drawing/2014/main" xmlns="">
+              <a14:hiddenFill xmlns="" xmlns:a16="http://schemas.microsoft.com/office/drawing/2014/main" xmlns:p14="http://schemas.microsoft.com/office/powerpoint/2010/main" xmlns:a14="http://schemas.microsoft.com/office/drawing/2010/main">
                 <a:solidFill>
                   <a:srgbClr val="FFFFFF"/>
                 </a:solidFill>
@@ -22633,7 +22711,7 @@
             </a:ln>
             <a:extLst>
               <a:ext uri="{91240B29-F687-4f45-9708-019B960494DF}">
-                <a14:hiddenLine xmlns:a14="http://schemas.microsoft.com/office/drawing/2010/main" xmlns:p14="http://schemas.microsoft.com/office/powerpoint/2010/main" xmlns:a16="http://schemas.microsoft.com/office/drawing/2014/main" xmlns="" w="9525">
+                <a14:hiddenLine xmlns="" xmlns:a16="http://schemas.microsoft.com/office/drawing/2014/main" xmlns:p14="http://schemas.microsoft.com/office/powerpoint/2010/main" xmlns:a14="http://schemas.microsoft.com/office/drawing/2010/main" w="9525">
                   <a:solidFill>
                     <a:srgbClr val="000000"/>
                   </a:solidFill>
@@ -22745,7 +22823,7 @@
             </a:ln>
             <a:extLst>
               <a:ext uri="{91240B29-F687-4f45-9708-019B960494DF}">
-                <a14:hiddenLine xmlns:a14="http://schemas.microsoft.com/office/drawing/2010/main" xmlns:p14="http://schemas.microsoft.com/office/powerpoint/2010/main" xmlns:a16="http://schemas.microsoft.com/office/drawing/2014/main" xmlns="" w="9525">
+                <a14:hiddenLine xmlns="" xmlns:a16="http://schemas.microsoft.com/office/drawing/2014/main" xmlns:p14="http://schemas.microsoft.com/office/powerpoint/2010/main" xmlns:a14="http://schemas.microsoft.com/office/drawing/2010/main" w="9525">
                   <a:solidFill>
                     <a:srgbClr val="000000"/>
                   </a:solidFill>
@@ -22857,7 +22935,7 @@
             </a:ln>
             <a:extLst>
               <a:ext uri="{91240B29-F687-4f45-9708-019B960494DF}">
-                <a14:hiddenLine xmlns:a14="http://schemas.microsoft.com/office/drawing/2010/main" xmlns:p14="http://schemas.microsoft.com/office/powerpoint/2010/main" xmlns:a16="http://schemas.microsoft.com/office/drawing/2014/main" xmlns="" w="9525">
+                <a14:hiddenLine xmlns="" xmlns:a16="http://schemas.microsoft.com/office/drawing/2014/main" xmlns:p14="http://schemas.microsoft.com/office/powerpoint/2010/main" xmlns:a14="http://schemas.microsoft.com/office/drawing/2010/main" w="9525">
                   <a:solidFill>
                     <a:srgbClr val="000000"/>
                   </a:solidFill>
@@ -22941,7 +23019,7 @@
             </a:ln>
             <a:extLst>
               <a:ext uri="{91240B29-F687-4f45-9708-019B960494DF}">
-                <a14:hiddenLine xmlns:a14="http://schemas.microsoft.com/office/drawing/2010/main" xmlns:p14="http://schemas.microsoft.com/office/powerpoint/2010/main" xmlns:a16="http://schemas.microsoft.com/office/drawing/2014/main" xmlns="" w="9525">
+                <a14:hiddenLine xmlns="" xmlns:a16="http://schemas.microsoft.com/office/drawing/2014/main" xmlns:p14="http://schemas.microsoft.com/office/powerpoint/2010/main" xmlns:a14="http://schemas.microsoft.com/office/drawing/2010/main" w="9525">
                   <a:solidFill>
                     <a:srgbClr val="000000"/>
                   </a:solidFill>
@@ -23053,7 +23131,7 @@
             </a:ln>
             <a:extLst>
               <a:ext uri="{91240B29-F687-4f45-9708-019B960494DF}">
-                <a14:hiddenLine xmlns:a14="http://schemas.microsoft.com/office/drawing/2010/main" xmlns:p14="http://schemas.microsoft.com/office/powerpoint/2010/main" xmlns:a16="http://schemas.microsoft.com/office/drawing/2014/main" xmlns="" w="9525">
+                <a14:hiddenLine xmlns="" xmlns:a16="http://schemas.microsoft.com/office/drawing/2014/main" xmlns:p14="http://schemas.microsoft.com/office/powerpoint/2010/main" xmlns:a14="http://schemas.microsoft.com/office/drawing/2010/main" w="9525">
                   <a:solidFill>
                     <a:srgbClr val="000000"/>
                   </a:solidFill>
@@ -23137,7 +23215,7 @@
             </a:ln>
             <a:extLst>
               <a:ext uri="{91240B29-F687-4f45-9708-019B960494DF}">
-                <a14:hiddenLine xmlns:a14="http://schemas.microsoft.com/office/drawing/2010/main" xmlns:p14="http://schemas.microsoft.com/office/powerpoint/2010/main" xmlns:a16="http://schemas.microsoft.com/office/drawing/2014/main" xmlns="" w="9525">
+                <a14:hiddenLine xmlns="" xmlns:a16="http://schemas.microsoft.com/office/drawing/2014/main" xmlns:p14="http://schemas.microsoft.com/office/powerpoint/2010/main" xmlns:a14="http://schemas.microsoft.com/office/drawing/2010/main" w="9525">
                   <a:solidFill>
                     <a:srgbClr val="000000"/>
                   </a:solidFill>
@@ -23221,7 +23299,7 @@
             </a:ln>
             <a:extLst>
               <a:ext uri="{91240B29-F687-4f45-9708-019B960494DF}">
-                <a14:hiddenLine xmlns:a14="http://schemas.microsoft.com/office/drawing/2010/main" xmlns:p14="http://schemas.microsoft.com/office/powerpoint/2010/main" xmlns:a16="http://schemas.microsoft.com/office/drawing/2014/main" xmlns="" w="9525">
+                <a14:hiddenLine xmlns="" xmlns:a16="http://schemas.microsoft.com/office/drawing/2014/main" xmlns:p14="http://schemas.microsoft.com/office/powerpoint/2010/main" xmlns:a14="http://schemas.microsoft.com/office/drawing/2010/main" w="9525">
                   <a:solidFill>
                     <a:srgbClr val="000000"/>
                   </a:solidFill>
@@ -23333,7 +23411,7 @@
             </a:ln>
             <a:extLst>
               <a:ext uri="{91240B29-F687-4f45-9708-019B960494DF}">
-                <a14:hiddenLine xmlns:a14="http://schemas.microsoft.com/office/drawing/2010/main" xmlns:p14="http://schemas.microsoft.com/office/powerpoint/2010/main" xmlns:a16="http://schemas.microsoft.com/office/drawing/2014/main" xmlns="" w="9525">
+                <a14:hiddenLine xmlns="" xmlns:a16="http://schemas.microsoft.com/office/drawing/2014/main" xmlns:p14="http://schemas.microsoft.com/office/powerpoint/2010/main" xmlns:a14="http://schemas.microsoft.com/office/drawing/2010/main" w="9525">
                   <a:solidFill>
                     <a:srgbClr val="000000"/>
                   </a:solidFill>
@@ -23445,7 +23523,7 @@
             </a:ln>
             <a:extLst>
               <a:ext uri="{91240B29-F687-4f45-9708-019B960494DF}">
-                <a14:hiddenLine xmlns:a14="http://schemas.microsoft.com/office/drawing/2010/main" xmlns:p14="http://schemas.microsoft.com/office/powerpoint/2010/main" xmlns:a16="http://schemas.microsoft.com/office/drawing/2014/main" xmlns="" w="9525">
+                <a14:hiddenLine xmlns="" xmlns:a16="http://schemas.microsoft.com/office/drawing/2014/main" xmlns:p14="http://schemas.microsoft.com/office/powerpoint/2010/main" xmlns:a14="http://schemas.microsoft.com/office/drawing/2010/main" w="9525">
                   <a:solidFill>
                     <a:srgbClr val="000000"/>
                   </a:solidFill>
@@ -23529,7 +23607,7 @@
             </a:ln>
             <a:extLst>
               <a:ext uri="{91240B29-F687-4f45-9708-019B960494DF}">
-                <a14:hiddenLine xmlns:a14="http://schemas.microsoft.com/office/drawing/2010/main" xmlns:p14="http://schemas.microsoft.com/office/powerpoint/2010/main" xmlns:a16="http://schemas.microsoft.com/office/drawing/2014/main" xmlns="" w="9525">
+                <a14:hiddenLine xmlns="" xmlns:a16="http://schemas.microsoft.com/office/drawing/2014/main" xmlns:p14="http://schemas.microsoft.com/office/powerpoint/2010/main" xmlns:a14="http://schemas.microsoft.com/office/drawing/2010/main" w="9525">
                   <a:solidFill>
                     <a:srgbClr val="000000"/>
                   </a:solidFill>
@@ -23661,7 +23739,7 @@
             </a:ln>
             <a:extLst>
               <a:ext uri="{91240B29-F687-4f45-9708-019B960494DF}">
-                <a14:hiddenLine xmlns:a14="http://schemas.microsoft.com/office/drawing/2010/main" xmlns:p14="http://schemas.microsoft.com/office/powerpoint/2010/main" xmlns:a16="http://schemas.microsoft.com/office/drawing/2014/main" xmlns="" w="9525">
+                <a14:hiddenLine xmlns="" xmlns:a16="http://schemas.microsoft.com/office/drawing/2014/main" xmlns:p14="http://schemas.microsoft.com/office/powerpoint/2010/main" xmlns:a14="http://schemas.microsoft.com/office/drawing/2010/main" w="9525">
                   <a:solidFill>
                     <a:srgbClr val="000000"/>
                   </a:solidFill>
@@ -23789,7 +23867,7 @@
             </a:ln>
             <a:extLst>
               <a:ext uri="{91240B29-F687-4f45-9708-019B960494DF}">
-                <a14:hiddenLine xmlns:a14="http://schemas.microsoft.com/office/drawing/2010/main" xmlns:p14="http://schemas.microsoft.com/office/powerpoint/2010/main" xmlns:a16="http://schemas.microsoft.com/office/drawing/2014/main" xmlns="" w="9525">
+                <a14:hiddenLine xmlns="" xmlns:a16="http://schemas.microsoft.com/office/drawing/2014/main" xmlns:p14="http://schemas.microsoft.com/office/powerpoint/2010/main" xmlns:a14="http://schemas.microsoft.com/office/drawing/2010/main" w="9525">
                   <a:solidFill>
                     <a:srgbClr val="000000"/>
                   </a:solidFill>
@@ -23873,7 +23951,7 @@
             </a:ln>
             <a:extLst>
               <a:ext uri="{91240B29-F687-4f45-9708-019B960494DF}">
-                <a14:hiddenLine xmlns:a14="http://schemas.microsoft.com/office/drawing/2010/main" xmlns:p14="http://schemas.microsoft.com/office/powerpoint/2010/main" xmlns:a16="http://schemas.microsoft.com/office/drawing/2014/main" xmlns="" w="9525">
+                <a14:hiddenLine xmlns="" xmlns:a16="http://schemas.microsoft.com/office/drawing/2014/main" xmlns:p14="http://schemas.microsoft.com/office/powerpoint/2010/main" xmlns:a14="http://schemas.microsoft.com/office/drawing/2010/main" w="9525">
                   <a:solidFill>
                     <a:srgbClr val="000000"/>
                   </a:solidFill>
@@ -23957,7 +24035,7 @@
             </a:ln>
             <a:extLst>
               <a:ext uri="{91240B29-F687-4f45-9708-019B960494DF}">
-                <a14:hiddenLine xmlns:a14="http://schemas.microsoft.com/office/drawing/2010/main" xmlns:p14="http://schemas.microsoft.com/office/powerpoint/2010/main" xmlns:a16="http://schemas.microsoft.com/office/drawing/2014/main" xmlns="" w="9525">
+                <a14:hiddenLine xmlns="" xmlns:a16="http://schemas.microsoft.com/office/drawing/2014/main" xmlns:p14="http://schemas.microsoft.com/office/powerpoint/2010/main" xmlns:a14="http://schemas.microsoft.com/office/drawing/2010/main" w="9525">
                   <a:solidFill>
                     <a:srgbClr val="000000"/>
                   </a:solidFill>
@@ -24069,7 +24147,7 @@
             </a:ln>
             <a:extLst>
               <a:ext uri="{91240B29-F687-4f45-9708-019B960494DF}">
-                <a14:hiddenLine xmlns:a14="http://schemas.microsoft.com/office/drawing/2010/main" xmlns:p14="http://schemas.microsoft.com/office/powerpoint/2010/main" xmlns:a16="http://schemas.microsoft.com/office/drawing/2014/main" xmlns="" w="9525">
+                <a14:hiddenLine xmlns="" xmlns:a16="http://schemas.microsoft.com/office/drawing/2014/main" xmlns:p14="http://schemas.microsoft.com/office/powerpoint/2010/main" xmlns:a14="http://schemas.microsoft.com/office/drawing/2010/main" w="9525">
                   <a:solidFill>
                     <a:srgbClr val="000000"/>
                   </a:solidFill>
@@ -24125,7 +24203,7 @@
             </a:ln>
             <a:extLst>
               <a:ext uri="{91240B29-F687-4f45-9708-019B960494DF}">
-                <a14:hiddenLine xmlns:a14="http://schemas.microsoft.com/office/drawing/2010/main" xmlns:p14="http://schemas.microsoft.com/office/powerpoint/2010/main" xmlns:a16="http://schemas.microsoft.com/office/drawing/2014/main" xmlns="" w="9525">
+                <a14:hiddenLine xmlns="" xmlns:a16="http://schemas.microsoft.com/office/drawing/2014/main" xmlns:p14="http://schemas.microsoft.com/office/powerpoint/2010/main" xmlns:a14="http://schemas.microsoft.com/office/drawing/2010/main" w="9525">
                   <a:solidFill>
                     <a:srgbClr val="000000"/>
                   </a:solidFill>
@@ -24212,7 +24290,7 @@
             </a:ln>
             <a:extLst>
               <a:ext uri="{91240B29-F687-4f45-9708-019B960494DF}">
-                <a14:hiddenLine xmlns:a14="http://schemas.microsoft.com/office/drawing/2010/main" xmlns:p14="http://schemas.microsoft.com/office/powerpoint/2010/main" xmlns:a16="http://schemas.microsoft.com/office/drawing/2014/main" xmlns="" w="9525">
+                <a14:hiddenLine xmlns="" xmlns:a16="http://schemas.microsoft.com/office/drawing/2014/main" xmlns:p14="http://schemas.microsoft.com/office/powerpoint/2010/main" xmlns:a14="http://schemas.microsoft.com/office/drawing/2010/main" w="9525">
                   <a:solidFill>
                     <a:srgbClr val="000000"/>
                   </a:solidFill>
@@ -24324,7 +24402,7 @@
             </a:ln>
             <a:extLst>
               <a:ext uri="{91240B29-F687-4f45-9708-019B960494DF}">
-                <a14:hiddenLine xmlns:a14="http://schemas.microsoft.com/office/drawing/2010/main" xmlns:p14="http://schemas.microsoft.com/office/powerpoint/2010/main" xmlns:a16="http://schemas.microsoft.com/office/drawing/2014/main" xmlns="" w="9525">
+                <a14:hiddenLine xmlns="" xmlns:a16="http://schemas.microsoft.com/office/drawing/2014/main" xmlns:p14="http://schemas.microsoft.com/office/powerpoint/2010/main" xmlns:a14="http://schemas.microsoft.com/office/drawing/2010/main" w="9525">
                   <a:solidFill>
                     <a:srgbClr val="000000"/>
                   </a:solidFill>
@@ -24408,7 +24486,7 @@
             </a:ln>
             <a:extLst>
               <a:ext uri="{91240B29-F687-4f45-9708-019B960494DF}">
-                <a14:hiddenLine xmlns:a14="http://schemas.microsoft.com/office/drawing/2010/main" xmlns:p14="http://schemas.microsoft.com/office/powerpoint/2010/main" xmlns:a16="http://schemas.microsoft.com/office/drawing/2014/main" xmlns="" w="9525">
+                <a14:hiddenLine xmlns="" xmlns:a16="http://schemas.microsoft.com/office/drawing/2014/main" xmlns:p14="http://schemas.microsoft.com/office/powerpoint/2010/main" xmlns:a14="http://schemas.microsoft.com/office/drawing/2010/main" w="9525">
                   <a:solidFill>
                     <a:srgbClr val="000000"/>
                   </a:solidFill>
@@ -24520,7 +24598,7 @@
             </a:ln>
             <a:extLst>
               <a:ext uri="{91240B29-F687-4f45-9708-019B960494DF}">
-                <a14:hiddenLine xmlns:a14="http://schemas.microsoft.com/office/drawing/2010/main" xmlns:p14="http://schemas.microsoft.com/office/powerpoint/2010/main" xmlns:a16="http://schemas.microsoft.com/office/drawing/2014/main" xmlns="" w="9525">
+                <a14:hiddenLine xmlns="" xmlns:a16="http://schemas.microsoft.com/office/drawing/2014/main" xmlns:p14="http://schemas.microsoft.com/office/powerpoint/2010/main" xmlns:a14="http://schemas.microsoft.com/office/drawing/2010/main" w="9525">
                   <a:solidFill>
                     <a:srgbClr val="000000"/>
                   </a:solidFill>
@@ -24607,7 +24685,7 @@
             </a:ln>
             <a:extLst>
               <a:ext uri="{91240B29-F687-4f45-9708-019B960494DF}">
-                <a14:hiddenLine xmlns:a14="http://schemas.microsoft.com/office/drawing/2010/main" xmlns:p14="http://schemas.microsoft.com/office/powerpoint/2010/main" xmlns:a16="http://schemas.microsoft.com/office/drawing/2014/main" xmlns="" w="9525">
+                <a14:hiddenLine xmlns="" xmlns:a16="http://schemas.microsoft.com/office/drawing/2014/main" xmlns:p14="http://schemas.microsoft.com/office/powerpoint/2010/main" xmlns:a14="http://schemas.microsoft.com/office/drawing/2010/main" w="9525">
                   <a:solidFill>
                     <a:srgbClr val="000000"/>
                   </a:solidFill>
@@ -24691,7 +24769,7 @@
             </a:ln>
             <a:extLst>
               <a:ext uri="{91240B29-F687-4f45-9708-019B960494DF}">
-                <a14:hiddenLine xmlns:a14="http://schemas.microsoft.com/office/drawing/2010/main" xmlns:p14="http://schemas.microsoft.com/office/powerpoint/2010/main" xmlns:a16="http://schemas.microsoft.com/office/drawing/2014/main" xmlns="" w="9525">
+                <a14:hiddenLine xmlns="" xmlns:a16="http://schemas.microsoft.com/office/drawing/2014/main" xmlns:p14="http://schemas.microsoft.com/office/powerpoint/2010/main" xmlns:a14="http://schemas.microsoft.com/office/drawing/2010/main" w="9525">
                   <a:solidFill>
                     <a:srgbClr val="000000"/>
                   </a:solidFill>
@@ -24803,7 +24881,7 @@
             </a:ln>
             <a:extLst>
               <a:ext uri="{91240B29-F687-4f45-9708-019B960494DF}">
-                <a14:hiddenLine xmlns:a14="http://schemas.microsoft.com/office/drawing/2010/main" xmlns:p14="http://schemas.microsoft.com/office/powerpoint/2010/main" xmlns:a16="http://schemas.microsoft.com/office/drawing/2014/main" xmlns="" w="9525">
+                <a14:hiddenLine xmlns="" xmlns:a16="http://schemas.microsoft.com/office/drawing/2014/main" xmlns:p14="http://schemas.microsoft.com/office/powerpoint/2010/main" xmlns:a14="http://schemas.microsoft.com/office/drawing/2010/main" w="9525">
                   <a:solidFill>
                     <a:srgbClr val="000000"/>
                   </a:solidFill>
@@ -24915,7 +24993,7 @@
             </a:ln>
             <a:extLst>
               <a:ext uri="{91240B29-F687-4f45-9708-019B960494DF}">
-                <a14:hiddenLine xmlns:a14="http://schemas.microsoft.com/office/drawing/2010/main" xmlns:p14="http://schemas.microsoft.com/office/powerpoint/2010/main" xmlns:a16="http://schemas.microsoft.com/office/drawing/2014/main" xmlns="" w="9525">
+                <a14:hiddenLine xmlns="" xmlns:a16="http://schemas.microsoft.com/office/drawing/2014/main" xmlns:p14="http://schemas.microsoft.com/office/powerpoint/2010/main" xmlns:a14="http://schemas.microsoft.com/office/drawing/2010/main" w="9525">
                   <a:solidFill>
                     <a:srgbClr val="000000"/>
                   </a:solidFill>
@@ -25002,7 +25080,7 @@
             </a:ln>
             <a:extLst>
               <a:ext uri="{91240B29-F687-4f45-9708-019B960494DF}">
-                <a14:hiddenLine xmlns:a14="http://schemas.microsoft.com/office/drawing/2010/main" xmlns:p14="http://schemas.microsoft.com/office/powerpoint/2010/main" xmlns:a16="http://schemas.microsoft.com/office/drawing/2014/main" xmlns="" w="9525">
+                <a14:hiddenLine xmlns="" xmlns:a16="http://schemas.microsoft.com/office/drawing/2014/main" xmlns:p14="http://schemas.microsoft.com/office/powerpoint/2010/main" xmlns:a14="http://schemas.microsoft.com/office/drawing/2010/main" w="9525">
                   <a:solidFill>
                     <a:srgbClr val="000000"/>
                   </a:solidFill>
@@ -25144,7 +25222,7 @@
             </a:ln>
             <a:extLst>
               <a:ext uri="{91240B29-F687-4f45-9708-019B960494DF}">
-                <a14:hiddenLine xmlns:a14="http://schemas.microsoft.com/office/drawing/2010/main" xmlns:p14="http://schemas.microsoft.com/office/powerpoint/2010/main" xmlns:a16="http://schemas.microsoft.com/office/drawing/2014/main" xmlns="" w="9525">
+                <a14:hiddenLine xmlns="" xmlns:a16="http://schemas.microsoft.com/office/drawing/2014/main" xmlns:p14="http://schemas.microsoft.com/office/powerpoint/2010/main" xmlns:a14="http://schemas.microsoft.com/office/drawing/2010/main" w="9525">
                   <a:solidFill>
                     <a:srgbClr val="000000"/>
                   </a:solidFill>
@@ -25361,7 +25439,7 @@
             </a:ln>
             <a:extLst>
               <a:ext uri="{91240B29-F687-4f45-9708-019B960494DF}">
-                <a14:hiddenLine xmlns:a14="http://schemas.microsoft.com/office/drawing/2010/main" xmlns:p14="http://schemas.microsoft.com/office/powerpoint/2010/main" xmlns:a16="http://schemas.microsoft.com/office/drawing/2014/main" xmlns="" w="9525">
+                <a14:hiddenLine xmlns="" xmlns:a16="http://schemas.microsoft.com/office/drawing/2014/main" xmlns:p14="http://schemas.microsoft.com/office/powerpoint/2010/main" xmlns:a14="http://schemas.microsoft.com/office/drawing/2010/main" w="9525">
                   <a:solidFill>
                     <a:srgbClr val="000000"/>
                   </a:solidFill>
@@ -25498,7 +25576,7 @@
             </a:ln>
             <a:extLst>
               <a:ext uri="{91240B29-F687-4f45-9708-019B960494DF}">
-                <a14:hiddenLine xmlns:a14="http://schemas.microsoft.com/office/drawing/2010/main" xmlns:p14="http://schemas.microsoft.com/office/powerpoint/2010/main" xmlns:a16="http://schemas.microsoft.com/office/drawing/2014/main" xmlns="" w="9525">
+                <a14:hiddenLine xmlns="" xmlns:a16="http://schemas.microsoft.com/office/drawing/2014/main" xmlns:p14="http://schemas.microsoft.com/office/powerpoint/2010/main" xmlns:a14="http://schemas.microsoft.com/office/drawing/2010/main" w="9525">
                   <a:solidFill>
                     <a:srgbClr val="000000"/>
                   </a:solidFill>
@@ -25610,7 +25688,7 @@
             </a:ln>
             <a:extLst>
               <a:ext uri="{91240B29-F687-4f45-9708-019B960494DF}">
-                <a14:hiddenLine xmlns:a14="http://schemas.microsoft.com/office/drawing/2010/main" xmlns:p14="http://schemas.microsoft.com/office/powerpoint/2010/main" xmlns:a16="http://schemas.microsoft.com/office/drawing/2014/main" xmlns="" w="9525">
+                <a14:hiddenLine xmlns="" xmlns:a16="http://schemas.microsoft.com/office/drawing/2014/main" xmlns:p14="http://schemas.microsoft.com/office/powerpoint/2010/main" xmlns:a14="http://schemas.microsoft.com/office/drawing/2010/main" w="9525">
                   <a:solidFill>
                     <a:srgbClr val="000000"/>
                   </a:solidFill>
@@ -25697,7 +25775,7 @@
             </a:ln>
             <a:extLst>
               <a:ext uri="{91240B29-F687-4f45-9708-019B960494DF}">
-                <a14:hiddenLine xmlns:a14="http://schemas.microsoft.com/office/drawing/2010/main" xmlns:p14="http://schemas.microsoft.com/office/powerpoint/2010/main" xmlns:a16="http://schemas.microsoft.com/office/drawing/2014/main" xmlns="" w="9525">
+                <a14:hiddenLine xmlns="" xmlns:a16="http://schemas.microsoft.com/office/drawing/2014/main" xmlns:p14="http://schemas.microsoft.com/office/powerpoint/2010/main" xmlns:a14="http://schemas.microsoft.com/office/drawing/2010/main" w="9525">
                   <a:solidFill>
                     <a:srgbClr val="000000"/>
                   </a:solidFill>
@@ -25809,7 +25887,7 @@
             </a:ln>
             <a:extLst>
               <a:ext uri="{91240B29-F687-4f45-9708-019B960494DF}">
-                <a14:hiddenLine xmlns:a14="http://schemas.microsoft.com/office/drawing/2010/main" xmlns:p14="http://schemas.microsoft.com/office/powerpoint/2010/main" xmlns:a16="http://schemas.microsoft.com/office/drawing/2014/main" xmlns="" w="9525">
+                <a14:hiddenLine xmlns="" xmlns:a16="http://schemas.microsoft.com/office/drawing/2014/main" xmlns:p14="http://schemas.microsoft.com/office/powerpoint/2010/main" xmlns:a14="http://schemas.microsoft.com/office/drawing/2010/main" w="9525">
                   <a:solidFill>
                     <a:srgbClr val="000000"/>
                   </a:solidFill>
@@ -25899,7 +25977,7 @@
             </a:ln>
             <a:extLst>
               <a:ext uri="{91240B29-F687-4f45-9708-019B960494DF}">
-                <a14:hiddenLine xmlns:a14="http://schemas.microsoft.com/office/drawing/2010/main" xmlns:p14="http://schemas.microsoft.com/office/powerpoint/2010/main" xmlns:a16="http://schemas.microsoft.com/office/drawing/2014/main" xmlns="" w="9525">
+                <a14:hiddenLine xmlns="" xmlns:a16="http://schemas.microsoft.com/office/drawing/2014/main" xmlns:p14="http://schemas.microsoft.com/office/powerpoint/2010/main" xmlns:a14="http://schemas.microsoft.com/office/drawing/2010/main" w="9525">
                   <a:solidFill>
                     <a:srgbClr val="000000"/>
                   </a:solidFill>
@@ -26011,7 +26089,7 @@
             </a:ln>
             <a:extLst>
               <a:ext uri="{91240B29-F687-4f45-9708-019B960494DF}">
-                <a14:hiddenLine xmlns:a14="http://schemas.microsoft.com/office/drawing/2010/main" xmlns:p14="http://schemas.microsoft.com/office/powerpoint/2010/main" xmlns:a16="http://schemas.microsoft.com/office/drawing/2014/main" xmlns="" w="9525">
+                <a14:hiddenLine xmlns="" xmlns:a16="http://schemas.microsoft.com/office/drawing/2014/main" xmlns:p14="http://schemas.microsoft.com/office/powerpoint/2010/main" xmlns:a14="http://schemas.microsoft.com/office/drawing/2010/main" w="9525">
                   <a:solidFill>
                     <a:srgbClr val="000000"/>
                   </a:solidFill>
@@ -26101,7 +26179,7 @@
             </a:ln>
             <a:extLst>
               <a:ext uri="{91240B29-F687-4f45-9708-019B960494DF}">
-                <a14:hiddenLine xmlns:a14="http://schemas.microsoft.com/office/drawing/2010/main" xmlns:p14="http://schemas.microsoft.com/office/powerpoint/2010/main" xmlns:a16="http://schemas.microsoft.com/office/drawing/2014/main" xmlns="" w="9525">
+                <a14:hiddenLine xmlns="" xmlns:a16="http://schemas.microsoft.com/office/drawing/2014/main" xmlns:p14="http://schemas.microsoft.com/office/powerpoint/2010/main" xmlns:a14="http://schemas.microsoft.com/office/drawing/2010/main" w="9525">
                   <a:solidFill>
                     <a:srgbClr val="000000"/>
                   </a:solidFill>
@@ -26213,7 +26291,7 @@
             </a:ln>
             <a:extLst>
               <a:ext uri="{91240B29-F687-4f45-9708-019B960494DF}">
-                <a14:hiddenLine xmlns:a14="http://schemas.microsoft.com/office/drawing/2010/main" xmlns:p14="http://schemas.microsoft.com/office/powerpoint/2010/main" xmlns:a16="http://schemas.microsoft.com/office/drawing/2014/main" xmlns="" w="9525">
+                <a14:hiddenLine xmlns="" xmlns:a16="http://schemas.microsoft.com/office/drawing/2014/main" xmlns:p14="http://schemas.microsoft.com/office/powerpoint/2010/main" xmlns:a14="http://schemas.microsoft.com/office/drawing/2010/main" w="9525">
                   <a:solidFill>
                     <a:srgbClr val="000000"/>
                   </a:solidFill>
@@ -26269,7 +26347,7 @@
             </a:ln>
             <a:extLst>
               <a:ext uri="{91240B29-F687-4f45-9708-019B960494DF}">
-                <a14:hiddenLine xmlns:a14="http://schemas.microsoft.com/office/drawing/2010/main" xmlns:p14="http://schemas.microsoft.com/office/powerpoint/2010/main" xmlns:a16="http://schemas.microsoft.com/office/drawing/2014/main" xmlns="" w="9525">
+                <a14:hiddenLine xmlns="" xmlns:a16="http://schemas.microsoft.com/office/drawing/2014/main" xmlns:p14="http://schemas.microsoft.com/office/powerpoint/2010/main" xmlns:a14="http://schemas.microsoft.com/office/drawing/2010/main" w="9525">
                   <a:solidFill>
                     <a:srgbClr val="000000"/>
                   </a:solidFill>
@@ -26378,25 +26456,17 @@
           <a:p>
             <a:r>
               <a:rPr lang="en-MY" dirty="0"/>
-              <a:t>What is a rest </a:t>
-            </a:r>
-            <a:r>
-              <a:rPr lang="en-MY" dirty="0" err="1"/>
-              <a:t>api</a:t>
-            </a:r>
-            <a:r>
-              <a:rPr lang="en-MY" dirty="0"/>
-              <a:t>?</a:t>
+              <a:t>Get all games – http get</a:t>
             </a:r>
           </a:p>
         </p:txBody>
       </p:sp>
       <p:pic>
         <p:nvPicPr>
-          <p:cNvPr id="5" name="Content Placeholder 4">
+          <p:cNvPr id="9" name="Content Placeholder 8">
             <a:extLst>
               <a:ext uri="{FF2B5EF4-FFF2-40B4-BE49-F238E27FC236}">
-                <a16:creationId xmlns:a16="http://schemas.microsoft.com/office/drawing/2014/main" id="{EF13D18A-C37D-2ECB-502F-1464B9D8DA7A}"/>
+                <a16:creationId xmlns:a16="http://schemas.microsoft.com/office/drawing/2014/main" id="{804D3C30-49E0-8FAD-A0C7-D64D9D8E269C}"/>
               </a:ext>
             </a:extLst>
           </p:cNvPr>
@@ -26415,18 +26485,1923 @@
         </p:blipFill>
         <p:spPr>
           <a:xfrm>
-            <a:off x="3015666" y="2629573"/>
-            <a:ext cx="6157494" cy="2781541"/>
+            <a:off x="2485156" y="2249488"/>
+            <a:ext cx="7218514" cy="3541712"/>
+          </a:xfrm>
+        </p:spPr>
+      </p:pic>
+      <p:sp>
+        <p:nvSpPr>
+          <p:cNvPr id="10" name="Speech Bubble: Rectangle with Corners Rounded 9">
+            <a:extLst>
+              <a:ext uri="{FF2B5EF4-FFF2-40B4-BE49-F238E27FC236}">
+                <a16:creationId xmlns:a16="http://schemas.microsoft.com/office/drawing/2014/main" id="{743CF8C7-4683-AE07-F3B8-DC8CB7690541}"/>
+              </a:ext>
+            </a:extLst>
+          </p:cNvPr>
+          <p:cNvSpPr/>
+          <p:nvPr/>
+        </p:nvSpPr>
+        <p:spPr>
+          <a:xfrm>
+            <a:off x="1030588" y="5791200"/>
+            <a:ext cx="2026078" cy="792480"/>
+          </a:xfrm>
+          <a:prstGeom prst="wedgeRoundRectCallout">
+            <a:avLst>
+              <a:gd name="adj1" fmla="val 35385"/>
+              <a:gd name="adj2" fmla="val -70335"/>
+              <a:gd name="adj3" fmla="val 16667"/>
+            </a:avLst>
+          </a:prstGeom>
+        </p:spPr>
+        <p:style>
+          <a:lnRef idx="2">
+            <a:schemeClr val="accent1">
+              <a:shade val="15000"/>
+            </a:schemeClr>
+          </a:lnRef>
+          <a:fillRef idx="1">
+            <a:schemeClr val="accent1"/>
+          </a:fillRef>
+          <a:effectRef idx="0">
+            <a:schemeClr val="accent1"/>
+          </a:effectRef>
+          <a:fontRef idx="minor">
+            <a:schemeClr val="lt1"/>
+          </a:fontRef>
+        </p:style>
+        <p:txBody>
+          <a:bodyPr rtlCol="0" anchor="ctr"/>
+          <a:lstStyle/>
+          <a:p>
+            <a:pPr algn="ctr"/>
+            <a:r>
+              <a:rPr lang="en-US" dirty="0"/>
+              <a:t>Other status that returned</a:t>
+            </a:r>
+            <a:endParaRPr lang="en-MY" dirty="0"/>
+          </a:p>
+        </p:txBody>
+      </p:sp>
+    </p:spTree>
+    <p:extLst>
+      <p:ext uri="{BB962C8B-B14F-4D97-AF65-F5344CB8AC3E}">
+        <p14:creationId xmlns:p14="http://schemas.microsoft.com/office/powerpoint/2010/main" val="1441508812"/>
+      </p:ext>
+    </p:extLst>
+  </p:cSld>
+  <p:clrMapOvr>
+    <a:masterClrMapping/>
+  </p:clrMapOvr>
+</p:sld>
+</file>
+
+<file path=ppt/slides/slide21.xml><?xml version="1.0" encoding="utf-8"?>
+<p:sld xmlns:a="http://schemas.openxmlformats.org/drawingml/2006/main" xmlns:r="http://schemas.openxmlformats.org/officeDocument/2006/relationships" xmlns:p="http://schemas.openxmlformats.org/presentationml/2006/main">
+  <p:cSld>
+    <p:spTree>
+      <p:nvGrpSpPr>
+        <p:cNvPr id="1" name=""/>
+        <p:cNvGrpSpPr/>
+        <p:nvPr/>
+      </p:nvGrpSpPr>
+      <p:grpSpPr>
+        <a:xfrm>
+          <a:off x="0" y="0"/>
+          <a:ext cx="0" cy="0"/>
+          <a:chOff x="0" y="0"/>
+          <a:chExt cx="0" cy="0"/>
+        </a:xfrm>
+      </p:grpSpPr>
+      <p:pic>
+        <p:nvPicPr>
+          <p:cNvPr id="12" name="Content Placeholder 11">
+            <a:extLst>
+              <a:ext uri="{FF2B5EF4-FFF2-40B4-BE49-F238E27FC236}">
+                <a16:creationId xmlns:a16="http://schemas.microsoft.com/office/drawing/2014/main" id="{C5D284CF-D4A8-84E1-5838-7CFC4EDFF002}"/>
+              </a:ext>
+            </a:extLst>
+          </p:cNvPr>
+          <p:cNvPicPr>
+            <a:picLocks noGrp="1" noChangeAspect="1"/>
+          </p:cNvPicPr>
+          <p:nvPr>
+            <p:ph idx="1"/>
+          </p:nvPr>
+        </p:nvPicPr>
+        <p:blipFill>
+          <a:blip r:embed="rId2"/>
+          <a:stretch>
+            <a:fillRect/>
+          </a:stretch>
+        </p:blipFill>
+        <p:spPr>
+          <a:xfrm>
+            <a:off x="1141413" y="2561393"/>
+            <a:ext cx="9906000" cy="2917902"/>
+          </a:xfrm>
+        </p:spPr>
+      </p:pic>
+      <p:sp>
+        <p:nvSpPr>
+          <p:cNvPr id="2" name="Title 1">
+            <a:extLst>
+              <a:ext uri="{FF2B5EF4-FFF2-40B4-BE49-F238E27FC236}">
+                <a16:creationId xmlns:a16="http://schemas.microsoft.com/office/drawing/2014/main" id="{6270F995-3D0A-C2F9-94A9-BF45E22277A7}"/>
+              </a:ext>
+            </a:extLst>
+          </p:cNvPr>
+          <p:cNvSpPr>
+            <a:spLocks noGrp="1"/>
+          </p:cNvSpPr>
+          <p:nvPr>
+            <p:ph type="title"/>
+          </p:nvPr>
+        </p:nvSpPr>
+        <p:spPr/>
+        <p:txBody>
+          <a:bodyPr/>
+          <a:lstStyle/>
+          <a:p>
+            <a:r>
+              <a:rPr lang="en-MY" dirty="0"/>
+              <a:t>Get a specific game – http get</a:t>
+            </a:r>
+          </a:p>
+        </p:txBody>
+      </p:sp>
+      <p:sp>
+        <p:nvSpPr>
+          <p:cNvPr id="6" name="Speech Bubble: Rectangle with Corners Rounded 5">
+            <a:extLst>
+              <a:ext uri="{FF2B5EF4-FFF2-40B4-BE49-F238E27FC236}">
+                <a16:creationId xmlns:a16="http://schemas.microsoft.com/office/drawing/2014/main" id="{B1AC39AF-3D13-3AA5-5B2B-E0BB17150929}"/>
+              </a:ext>
+            </a:extLst>
+          </p:cNvPr>
+          <p:cNvSpPr/>
+          <p:nvPr/>
+        </p:nvSpPr>
+        <p:spPr>
+          <a:xfrm>
+            <a:off x="7061472" y="1700848"/>
+            <a:ext cx="2026078" cy="792480"/>
+          </a:xfrm>
+          <a:prstGeom prst="wedgeRoundRectCallout">
+            <a:avLst>
+              <a:gd name="adj1" fmla="val -41339"/>
+              <a:gd name="adj2" fmla="val 99857"/>
+              <a:gd name="adj3" fmla="val 16667"/>
+            </a:avLst>
+          </a:prstGeom>
+        </p:spPr>
+        <p:style>
+          <a:lnRef idx="2">
+            <a:schemeClr val="accent1">
+              <a:shade val="15000"/>
+            </a:schemeClr>
+          </a:lnRef>
+          <a:fillRef idx="1">
+            <a:schemeClr val="accent1"/>
+          </a:fillRef>
+          <a:effectRef idx="0">
+            <a:schemeClr val="accent1"/>
+          </a:effectRef>
+          <a:fontRef idx="minor">
+            <a:schemeClr val="lt1"/>
+          </a:fontRef>
+        </p:style>
+        <p:txBody>
+          <a:bodyPr rtlCol="0" anchor="ctr"/>
+          <a:lstStyle/>
+          <a:p>
+            <a:pPr algn="ctr"/>
+            <a:r>
+              <a:rPr lang="en-US" dirty="0"/>
+              <a:t>Id of the game</a:t>
+            </a:r>
+            <a:endParaRPr lang="en-MY" dirty="0"/>
+          </a:p>
+        </p:txBody>
+      </p:sp>
+    </p:spTree>
+    <p:extLst>
+      <p:ext uri="{BB962C8B-B14F-4D97-AF65-F5344CB8AC3E}">
+        <p14:creationId xmlns:p14="http://schemas.microsoft.com/office/powerpoint/2010/main" val="4240138414"/>
+      </p:ext>
+    </p:extLst>
+  </p:cSld>
+  <p:clrMapOvr>
+    <a:masterClrMapping/>
+  </p:clrMapOvr>
+</p:sld>
+</file>
+
+<file path=ppt/slides/slide22.xml><?xml version="1.0" encoding="utf-8"?>
+<p:sld xmlns:a="http://schemas.openxmlformats.org/drawingml/2006/main" xmlns:r="http://schemas.openxmlformats.org/officeDocument/2006/relationships" xmlns:p="http://schemas.openxmlformats.org/presentationml/2006/main">
+  <p:cSld>
+    <p:spTree>
+      <p:nvGrpSpPr>
+        <p:cNvPr id="1" name=""/>
+        <p:cNvGrpSpPr/>
+        <p:nvPr/>
+      </p:nvGrpSpPr>
+      <p:grpSpPr>
+        <a:xfrm>
+          <a:off x="0" y="0"/>
+          <a:ext cx="0" cy="0"/>
+          <a:chOff x="0" y="0"/>
+          <a:chExt cx="0" cy="0"/>
+        </a:xfrm>
+      </p:grpSpPr>
+      <p:sp>
+        <p:nvSpPr>
+          <p:cNvPr id="2" name="Title 1">
+            <a:extLst>
+              <a:ext uri="{FF2B5EF4-FFF2-40B4-BE49-F238E27FC236}">
+                <a16:creationId xmlns:a16="http://schemas.microsoft.com/office/drawing/2014/main" id="{C85A6174-3B05-3D56-87DC-3A621F6EDF7F}"/>
+              </a:ext>
+            </a:extLst>
+          </p:cNvPr>
+          <p:cNvSpPr>
+            <a:spLocks noGrp="1"/>
+          </p:cNvSpPr>
+          <p:nvPr>
+            <p:ph type="title"/>
+          </p:nvPr>
+        </p:nvSpPr>
+        <p:spPr/>
+        <p:txBody>
+          <a:bodyPr/>
+          <a:lstStyle/>
+          <a:p>
+            <a:r>
+              <a:rPr lang="en-MY" dirty="0"/>
+              <a:t>Create a game – http post</a:t>
+            </a:r>
+          </a:p>
+        </p:txBody>
+      </p:sp>
+      <p:pic>
+        <p:nvPicPr>
+          <p:cNvPr id="5" name="Content Placeholder 4">
+            <a:extLst>
+              <a:ext uri="{FF2B5EF4-FFF2-40B4-BE49-F238E27FC236}">
+                <a16:creationId xmlns:a16="http://schemas.microsoft.com/office/drawing/2014/main" id="{81A421FD-A1FD-F88C-34BA-D5339395ADB0}"/>
+              </a:ext>
+            </a:extLst>
+          </p:cNvPr>
+          <p:cNvPicPr>
+            <a:picLocks noGrp="1" noChangeAspect="1"/>
+          </p:cNvPicPr>
+          <p:nvPr>
+            <p:ph idx="1"/>
+          </p:nvPr>
+        </p:nvPicPr>
+        <p:blipFill>
+          <a:blip r:embed="rId2"/>
+          <a:stretch>
+            <a:fillRect/>
+          </a:stretch>
+        </p:blipFill>
+        <p:spPr>
+          <a:xfrm>
+            <a:off x="1971226" y="2249488"/>
+            <a:ext cx="8246374" cy="3541712"/>
+          </a:xfrm>
+        </p:spPr>
+      </p:pic>
+    </p:spTree>
+    <p:extLst>
+      <p:ext uri="{BB962C8B-B14F-4D97-AF65-F5344CB8AC3E}">
+        <p14:creationId xmlns:p14="http://schemas.microsoft.com/office/powerpoint/2010/main" val="1116610212"/>
+      </p:ext>
+    </p:extLst>
+  </p:cSld>
+  <p:clrMapOvr>
+    <a:masterClrMapping/>
+  </p:clrMapOvr>
+</p:sld>
+</file>
+
+<file path=ppt/slides/slide23.xml><?xml version="1.0" encoding="utf-8"?>
+<p:sld xmlns:a="http://schemas.openxmlformats.org/drawingml/2006/main" xmlns:r="http://schemas.openxmlformats.org/officeDocument/2006/relationships" xmlns:p="http://schemas.openxmlformats.org/presentationml/2006/main">
+  <p:cSld>
+    <p:spTree>
+      <p:nvGrpSpPr>
+        <p:cNvPr id="1" name=""/>
+        <p:cNvGrpSpPr/>
+        <p:nvPr/>
+      </p:nvGrpSpPr>
+      <p:grpSpPr>
+        <a:xfrm>
+          <a:off x="0" y="0"/>
+          <a:ext cx="0" cy="0"/>
+          <a:chOff x="0" y="0"/>
+          <a:chExt cx="0" cy="0"/>
+        </a:xfrm>
+      </p:grpSpPr>
+      <p:sp>
+        <p:nvSpPr>
+          <p:cNvPr id="2" name="Title 1">
+            <a:extLst>
+              <a:ext uri="{FF2B5EF4-FFF2-40B4-BE49-F238E27FC236}">
+                <a16:creationId xmlns:a16="http://schemas.microsoft.com/office/drawing/2014/main" id="{C1431F09-69C1-B36E-EB77-3C4541A5CFB7}"/>
+              </a:ext>
+            </a:extLst>
+          </p:cNvPr>
+          <p:cNvSpPr>
+            <a:spLocks noGrp="1"/>
+          </p:cNvSpPr>
+          <p:nvPr>
+            <p:ph type="title"/>
+          </p:nvPr>
+        </p:nvSpPr>
+        <p:spPr/>
+        <p:txBody>
+          <a:bodyPr/>
+          <a:lstStyle/>
+          <a:p>
+            <a:r>
+              <a:rPr lang="en-MY" dirty="0"/>
+              <a:t>Update a game – http put</a:t>
+            </a:r>
+          </a:p>
+        </p:txBody>
+      </p:sp>
+      <p:pic>
+        <p:nvPicPr>
+          <p:cNvPr id="5" name="Content Placeholder 4">
+            <a:extLst>
+              <a:ext uri="{FF2B5EF4-FFF2-40B4-BE49-F238E27FC236}">
+                <a16:creationId xmlns:a16="http://schemas.microsoft.com/office/drawing/2014/main" id="{5A7FE10C-7533-D6D9-D390-2360CCAEAD56}"/>
+              </a:ext>
+            </a:extLst>
+          </p:cNvPr>
+          <p:cNvPicPr>
+            <a:picLocks noGrp="1" noChangeAspect="1"/>
+          </p:cNvPicPr>
+          <p:nvPr>
+            <p:ph idx="1"/>
+          </p:nvPr>
+        </p:nvPicPr>
+        <p:blipFill>
+          <a:blip r:embed="rId2"/>
+          <a:stretch>
+            <a:fillRect/>
+          </a:stretch>
+        </p:blipFill>
+        <p:spPr>
+          <a:xfrm>
+            <a:off x="1141413" y="2354043"/>
+            <a:ext cx="9906000" cy="3332602"/>
+          </a:xfrm>
+        </p:spPr>
+      </p:pic>
+    </p:spTree>
+    <p:extLst>
+      <p:ext uri="{BB962C8B-B14F-4D97-AF65-F5344CB8AC3E}">
+        <p14:creationId xmlns:p14="http://schemas.microsoft.com/office/powerpoint/2010/main" val="3267571049"/>
+      </p:ext>
+    </p:extLst>
+  </p:cSld>
+  <p:clrMapOvr>
+    <a:masterClrMapping/>
+  </p:clrMapOvr>
+</p:sld>
+</file>
+
+<file path=ppt/slides/slide24.xml><?xml version="1.0" encoding="utf-8"?>
+<p:sld xmlns:a="http://schemas.openxmlformats.org/drawingml/2006/main" xmlns:r="http://schemas.openxmlformats.org/officeDocument/2006/relationships" xmlns:p="http://schemas.openxmlformats.org/presentationml/2006/main">
+  <p:cSld>
+    <p:spTree>
+      <p:nvGrpSpPr>
+        <p:cNvPr id="1" name=""/>
+        <p:cNvGrpSpPr/>
+        <p:nvPr/>
+      </p:nvGrpSpPr>
+      <p:grpSpPr>
+        <a:xfrm>
+          <a:off x="0" y="0"/>
+          <a:ext cx="0" cy="0"/>
+          <a:chOff x="0" y="0"/>
+          <a:chExt cx="0" cy="0"/>
+        </a:xfrm>
+      </p:grpSpPr>
+      <p:sp>
+        <p:nvSpPr>
+          <p:cNvPr id="2" name="Title 1">
+            <a:extLst>
+              <a:ext uri="{FF2B5EF4-FFF2-40B4-BE49-F238E27FC236}">
+                <a16:creationId xmlns:a16="http://schemas.microsoft.com/office/drawing/2014/main" id="{DF1DDB77-F38F-EC88-7E8D-EB29FCB44572}"/>
+              </a:ext>
+            </a:extLst>
+          </p:cNvPr>
+          <p:cNvSpPr>
+            <a:spLocks noGrp="1"/>
+          </p:cNvSpPr>
+          <p:nvPr>
+            <p:ph type="title"/>
+          </p:nvPr>
+        </p:nvSpPr>
+        <p:spPr/>
+        <p:txBody>
+          <a:bodyPr/>
+          <a:lstStyle/>
+          <a:p>
+            <a:r>
+              <a:rPr lang="en-MY" dirty="0"/>
+              <a:t>Delete a game – http delete</a:t>
+            </a:r>
+          </a:p>
+        </p:txBody>
+      </p:sp>
+      <p:pic>
+        <p:nvPicPr>
+          <p:cNvPr id="5" name="Content Placeholder 4">
+            <a:extLst>
+              <a:ext uri="{FF2B5EF4-FFF2-40B4-BE49-F238E27FC236}">
+                <a16:creationId xmlns:a16="http://schemas.microsoft.com/office/drawing/2014/main" id="{FEA3D513-74A5-90B2-C268-4103877E656E}"/>
+              </a:ext>
+            </a:extLst>
+          </p:cNvPr>
+          <p:cNvPicPr>
+            <a:picLocks noGrp="1" noChangeAspect="1"/>
+          </p:cNvPicPr>
+          <p:nvPr>
+            <p:ph idx="1"/>
+          </p:nvPr>
+        </p:nvPicPr>
+        <p:blipFill>
+          <a:blip r:embed="rId2"/>
+          <a:stretch>
+            <a:fillRect/>
+          </a:stretch>
+        </p:blipFill>
+        <p:spPr>
+          <a:xfrm>
+            <a:off x="1141413" y="2904305"/>
+            <a:ext cx="9906000" cy="2232078"/>
+          </a:xfrm>
+        </p:spPr>
+      </p:pic>
+    </p:spTree>
+    <p:extLst>
+      <p:ext uri="{BB962C8B-B14F-4D97-AF65-F5344CB8AC3E}">
+        <p14:creationId xmlns:p14="http://schemas.microsoft.com/office/powerpoint/2010/main" val="98222803"/>
+      </p:ext>
+    </p:extLst>
+  </p:cSld>
+  <p:clrMapOvr>
+    <a:masterClrMapping/>
+  </p:clrMapOvr>
+</p:sld>
+</file>
+
+<file path=ppt/slides/slide25.xml><?xml version="1.0" encoding="utf-8"?>
+<p:sld xmlns:a="http://schemas.openxmlformats.org/drawingml/2006/main" xmlns:r="http://schemas.openxmlformats.org/officeDocument/2006/relationships" xmlns:p="http://schemas.openxmlformats.org/presentationml/2006/main">
+  <p:cSld>
+    <p:spTree>
+      <p:nvGrpSpPr>
+        <p:cNvPr id="1" name=""/>
+        <p:cNvGrpSpPr/>
+        <p:nvPr/>
+      </p:nvGrpSpPr>
+      <p:grpSpPr>
+        <a:xfrm>
+          <a:off x="0" y="0"/>
+          <a:ext cx="0" cy="0"/>
+          <a:chOff x="0" y="0"/>
+          <a:chExt cx="0" cy="0"/>
+        </a:xfrm>
+      </p:grpSpPr>
+      <p:sp>
+        <p:nvSpPr>
+          <p:cNvPr id="2" name="Title 1">
+            <a:extLst>
+              <a:ext uri="{FF2B5EF4-FFF2-40B4-BE49-F238E27FC236}">
+                <a16:creationId xmlns:a16="http://schemas.microsoft.com/office/drawing/2014/main" id="{DF1DDB77-F38F-EC88-7E8D-EB29FCB44572}"/>
+              </a:ext>
+            </a:extLst>
+          </p:cNvPr>
+          <p:cNvSpPr>
+            <a:spLocks noGrp="1"/>
+          </p:cNvSpPr>
+          <p:nvPr>
+            <p:ph type="title"/>
+          </p:nvPr>
+        </p:nvSpPr>
+        <p:spPr/>
+        <p:txBody>
+          <a:bodyPr/>
+          <a:lstStyle/>
+          <a:p>
+            <a:r>
+              <a:rPr lang="en-MY" dirty="0"/>
+              <a:t>Summary of Games rest </a:t>
+            </a:r>
+            <a:r>
+              <a:rPr lang="en-MY" dirty="0" err="1"/>
+              <a:t>api</a:t>
+            </a:r>
+            <a:endParaRPr lang="en-MY" dirty="0"/>
+          </a:p>
+        </p:txBody>
+      </p:sp>
+      <p:pic>
+        <p:nvPicPr>
+          <p:cNvPr id="5" name="Content Placeholder 4">
+            <a:extLst>
+              <a:ext uri="{FF2B5EF4-FFF2-40B4-BE49-F238E27FC236}">
+                <a16:creationId xmlns:a16="http://schemas.microsoft.com/office/drawing/2014/main" id="{2473F804-B063-50E4-7F8F-AB9621A38F9C}"/>
+              </a:ext>
+            </a:extLst>
+          </p:cNvPr>
+          <p:cNvPicPr>
+            <a:picLocks noGrp="1" noChangeAspect="1"/>
+          </p:cNvPicPr>
+          <p:nvPr>
+            <p:ph idx="1"/>
+          </p:nvPr>
+        </p:nvPicPr>
+        <p:blipFill>
+          <a:blip r:embed="rId2"/>
+          <a:stretch>
+            <a:fillRect/>
+          </a:stretch>
+        </p:blipFill>
+        <p:spPr>
+          <a:xfrm>
+            <a:off x="1326718" y="2097088"/>
+            <a:ext cx="4381500" cy="3476625"/>
+          </a:xfrm>
+        </p:spPr>
+      </p:pic>
+      <p:sp>
+        <p:nvSpPr>
+          <p:cNvPr id="6" name="TextBox 5">
+            <a:extLst>
+              <a:ext uri="{FF2B5EF4-FFF2-40B4-BE49-F238E27FC236}">
+                <a16:creationId xmlns:a16="http://schemas.microsoft.com/office/drawing/2014/main" id="{D63BE31C-9DA5-B1E6-5B87-800C5D8208CA}"/>
+              </a:ext>
+            </a:extLst>
+          </p:cNvPr>
+          <p:cNvSpPr txBox="1"/>
+          <p:nvPr/>
+        </p:nvSpPr>
+        <p:spPr>
+          <a:xfrm>
+            <a:off x="6094412" y="2305917"/>
+            <a:ext cx="1492909" cy="369332"/>
+          </a:xfrm>
+          <a:prstGeom prst="rect">
+            <a:avLst/>
+          </a:prstGeom>
+        </p:spPr>
+        <p:style>
+          <a:lnRef idx="2">
+            <a:schemeClr val="accent1"/>
+          </a:lnRef>
+          <a:fillRef idx="1">
+            <a:schemeClr val="lt1"/>
+          </a:fillRef>
+          <a:effectRef idx="0">
+            <a:schemeClr val="accent1"/>
+          </a:effectRef>
+          <a:fontRef idx="minor">
+            <a:schemeClr val="dk1"/>
+          </a:fontRef>
+        </p:style>
+        <p:txBody>
+          <a:bodyPr wrap="none" rtlCol="0">
+            <a:spAutoFit/>
+          </a:bodyPr>
+          <a:lstStyle/>
+          <a:p>
+            <a:r>
+              <a:rPr lang="en-MY" dirty="0"/>
+              <a:t>Get all games</a:t>
+            </a:r>
+          </a:p>
+        </p:txBody>
+      </p:sp>
+      <p:sp>
+        <p:nvSpPr>
+          <p:cNvPr id="7" name="TextBox 6">
+            <a:extLst>
+              <a:ext uri="{FF2B5EF4-FFF2-40B4-BE49-F238E27FC236}">
+                <a16:creationId xmlns:a16="http://schemas.microsoft.com/office/drawing/2014/main" id="{A23677C3-0A7B-2818-C7BA-FB33E84E3724}"/>
+              </a:ext>
+            </a:extLst>
+          </p:cNvPr>
+          <p:cNvSpPr txBox="1"/>
+          <p:nvPr/>
+        </p:nvSpPr>
+        <p:spPr>
+          <a:xfrm>
+            <a:off x="6094412" y="3059668"/>
+            <a:ext cx="1861600" cy="369332"/>
+          </a:xfrm>
+          <a:prstGeom prst="rect">
+            <a:avLst/>
+          </a:prstGeom>
+        </p:spPr>
+        <p:style>
+          <a:lnRef idx="2">
+            <a:schemeClr val="accent1"/>
+          </a:lnRef>
+          <a:fillRef idx="1">
+            <a:schemeClr val="lt1"/>
+          </a:fillRef>
+          <a:effectRef idx="0">
+            <a:schemeClr val="accent1"/>
+          </a:effectRef>
+          <a:fontRef idx="minor">
+            <a:schemeClr val="dk1"/>
+          </a:fontRef>
+        </p:style>
+        <p:txBody>
+          <a:bodyPr wrap="none" rtlCol="0">
+            <a:spAutoFit/>
+          </a:bodyPr>
+          <a:lstStyle/>
+          <a:p>
+            <a:r>
+              <a:rPr lang="en-MY" dirty="0"/>
+              <a:t>Get specific game</a:t>
+            </a:r>
+          </a:p>
+        </p:txBody>
+      </p:sp>
+      <p:sp>
+        <p:nvSpPr>
+          <p:cNvPr id="8" name="TextBox 7">
+            <a:extLst>
+              <a:ext uri="{FF2B5EF4-FFF2-40B4-BE49-F238E27FC236}">
+                <a16:creationId xmlns:a16="http://schemas.microsoft.com/office/drawing/2014/main" id="{49A27A1D-222D-905C-0B9E-D5C01353C413}"/>
+              </a:ext>
+            </a:extLst>
+          </p:cNvPr>
+          <p:cNvSpPr txBox="1"/>
+          <p:nvPr/>
+        </p:nvSpPr>
+        <p:spPr>
+          <a:xfrm>
+            <a:off x="6094412" y="3659815"/>
+            <a:ext cx="1832938" cy="369332"/>
+          </a:xfrm>
+          <a:prstGeom prst="rect">
+            <a:avLst/>
+          </a:prstGeom>
+        </p:spPr>
+        <p:style>
+          <a:lnRef idx="2">
+            <a:schemeClr val="accent1"/>
+          </a:lnRef>
+          <a:fillRef idx="1">
+            <a:schemeClr val="lt1"/>
+          </a:fillRef>
+          <a:effectRef idx="0">
+            <a:schemeClr val="accent1"/>
+          </a:effectRef>
+          <a:fontRef idx="minor">
+            <a:schemeClr val="dk1"/>
+          </a:fontRef>
+        </p:style>
+        <p:txBody>
+          <a:bodyPr wrap="none" rtlCol="0">
+            <a:spAutoFit/>
+          </a:bodyPr>
+          <a:lstStyle/>
+          <a:p>
+            <a:r>
+              <a:rPr lang="en-MY" dirty="0"/>
+              <a:t>Create new game</a:t>
+            </a:r>
+          </a:p>
+        </p:txBody>
+      </p:sp>
+      <p:sp>
+        <p:nvSpPr>
+          <p:cNvPr id="9" name="TextBox 8">
+            <a:extLst>
+              <a:ext uri="{FF2B5EF4-FFF2-40B4-BE49-F238E27FC236}">
+                <a16:creationId xmlns:a16="http://schemas.microsoft.com/office/drawing/2014/main" id="{463391CA-5024-B64A-BC8A-32E319FB3B29}"/>
+              </a:ext>
+            </a:extLst>
+          </p:cNvPr>
+          <p:cNvSpPr txBox="1"/>
+          <p:nvPr/>
+        </p:nvSpPr>
+        <p:spPr>
+          <a:xfrm>
+            <a:off x="6065750" y="4259963"/>
+            <a:ext cx="2203039" cy="369332"/>
+          </a:xfrm>
+          <a:prstGeom prst="rect">
+            <a:avLst/>
+          </a:prstGeom>
+        </p:spPr>
+        <p:style>
+          <a:lnRef idx="2">
+            <a:schemeClr val="accent1"/>
+          </a:lnRef>
+          <a:fillRef idx="1">
+            <a:schemeClr val="lt1"/>
+          </a:fillRef>
+          <a:effectRef idx="0">
+            <a:schemeClr val="accent1"/>
+          </a:effectRef>
+          <a:fontRef idx="minor">
+            <a:schemeClr val="dk1"/>
+          </a:fontRef>
+        </p:style>
+        <p:txBody>
+          <a:bodyPr wrap="none" rtlCol="0">
+            <a:spAutoFit/>
+          </a:bodyPr>
+          <a:lstStyle/>
+          <a:p>
+            <a:r>
+              <a:rPr lang="en-MY" dirty="0"/>
+              <a:t>Update specific game</a:t>
+            </a:r>
+          </a:p>
+        </p:txBody>
+      </p:sp>
+      <p:sp>
+        <p:nvSpPr>
+          <p:cNvPr id="10" name="TextBox 9">
+            <a:extLst>
+              <a:ext uri="{FF2B5EF4-FFF2-40B4-BE49-F238E27FC236}">
+                <a16:creationId xmlns:a16="http://schemas.microsoft.com/office/drawing/2014/main" id="{75107639-34C0-2C1F-9ABA-88FD1C1A3267}"/>
+              </a:ext>
+            </a:extLst>
+          </p:cNvPr>
+          <p:cNvSpPr txBox="1"/>
+          <p:nvPr/>
+        </p:nvSpPr>
+        <p:spPr>
+          <a:xfrm>
+            <a:off x="6065750" y="4914385"/>
+            <a:ext cx="2105256" cy="369332"/>
+          </a:xfrm>
+          <a:prstGeom prst="rect">
+            <a:avLst/>
+          </a:prstGeom>
+        </p:spPr>
+        <p:style>
+          <a:lnRef idx="2">
+            <a:schemeClr val="accent1"/>
+          </a:lnRef>
+          <a:fillRef idx="1">
+            <a:schemeClr val="lt1"/>
+          </a:fillRef>
+          <a:effectRef idx="0">
+            <a:schemeClr val="accent1"/>
+          </a:effectRef>
+          <a:fontRef idx="minor">
+            <a:schemeClr val="dk1"/>
+          </a:fontRef>
+        </p:style>
+        <p:txBody>
+          <a:bodyPr wrap="none" rtlCol="0">
+            <a:spAutoFit/>
+          </a:bodyPr>
+          <a:lstStyle/>
+          <a:p>
+            <a:r>
+              <a:rPr lang="en-MY" dirty="0"/>
+              <a:t>Delete specific game</a:t>
+            </a:r>
+          </a:p>
+        </p:txBody>
+      </p:sp>
+    </p:spTree>
+    <p:extLst>
+      <p:ext uri="{BB962C8B-B14F-4D97-AF65-F5344CB8AC3E}">
+        <p14:creationId xmlns:p14="http://schemas.microsoft.com/office/powerpoint/2010/main" val="1799819877"/>
+      </p:ext>
+    </p:extLst>
+  </p:cSld>
+  <p:clrMapOvr>
+    <a:masterClrMapping/>
+  </p:clrMapOvr>
+</p:sld>
+</file>
+
+<file path=ppt/slides/slide26.xml><?xml version="1.0" encoding="utf-8"?>
+<p:sld xmlns:a="http://schemas.openxmlformats.org/drawingml/2006/main" xmlns:r="http://schemas.openxmlformats.org/officeDocument/2006/relationships" xmlns:p="http://schemas.openxmlformats.org/presentationml/2006/main">
+  <p:cSld>
+    <p:spTree>
+      <p:nvGrpSpPr>
+        <p:cNvPr id="1" name=""/>
+        <p:cNvGrpSpPr/>
+        <p:nvPr/>
+      </p:nvGrpSpPr>
+      <p:grpSpPr>
+        <a:xfrm>
+          <a:off x="0" y="0"/>
+          <a:ext cx="0" cy="0"/>
+          <a:chOff x="0" y="0"/>
+          <a:chExt cx="0" cy="0"/>
+        </a:xfrm>
+      </p:grpSpPr>
+      <p:sp>
+        <p:nvSpPr>
+          <p:cNvPr id="2" name="Title 1">
+            <a:extLst>
+              <a:ext uri="{FF2B5EF4-FFF2-40B4-BE49-F238E27FC236}">
+                <a16:creationId xmlns:a16="http://schemas.microsoft.com/office/drawing/2014/main" id="{A191CCD2-9817-A698-FEBC-AF94A00D68AF}"/>
+              </a:ext>
+            </a:extLst>
+          </p:cNvPr>
+          <p:cNvSpPr>
+            <a:spLocks noGrp="1"/>
+          </p:cNvSpPr>
+          <p:nvPr>
+            <p:ph type="title"/>
+          </p:nvPr>
+        </p:nvSpPr>
+        <p:spPr/>
+        <p:txBody>
+          <a:bodyPr/>
+          <a:lstStyle/>
+          <a:p>
+            <a:r>
+              <a:rPr lang="en-MY" dirty="0"/>
+              <a:t>Installing extension: rest client</a:t>
+            </a:r>
+          </a:p>
+        </p:txBody>
+      </p:sp>
+      <p:pic>
+        <p:nvPicPr>
+          <p:cNvPr id="5" name="Content Placeholder 4">
+            <a:extLst>
+              <a:ext uri="{FF2B5EF4-FFF2-40B4-BE49-F238E27FC236}">
+                <a16:creationId xmlns:a16="http://schemas.microsoft.com/office/drawing/2014/main" id="{8416E184-0438-5EE9-A653-2409C99C0FA8}"/>
+              </a:ext>
+            </a:extLst>
+          </p:cNvPr>
+          <p:cNvPicPr>
+            <a:picLocks noGrp="1" noChangeAspect="1"/>
+          </p:cNvPicPr>
+          <p:nvPr>
+            <p:ph idx="1"/>
+          </p:nvPr>
+        </p:nvPicPr>
+        <p:blipFill>
+          <a:blip r:embed="rId2"/>
+          <a:stretch>
+            <a:fillRect/>
+          </a:stretch>
+        </p:blipFill>
+        <p:spPr>
+          <a:xfrm>
+            <a:off x="1636713" y="2772569"/>
+            <a:ext cx="8915400" cy="2495550"/>
+          </a:xfrm>
+        </p:spPr>
+      </p:pic>
+      <p:sp>
+        <p:nvSpPr>
+          <p:cNvPr id="6" name="Speech Bubble: Rectangle with Corners Rounded 5">
+            <a:extLst>
+              <a:ext uri="{FF2B5EF4-FFF2-40B4-BE49-F238E27FC236}">
+                <a16:creationId xmlns:a16="http://schemas.microsoft.com/office/drawing/2014/main" id="{74867857-B9ED-74AC-1993-2C9DD2BBC21B}"/>
+              </a:ext>
+            </a:extLst>
+          </p:cNvPr>
+          <p:cNvSpPr/>
+          <p:nvPr/>
+        </p:nvSpPr>
+        <p:spPr>
+          <a:xfrm>
+            <a:off x="993074" y="5447002"/>
+            <a:ext cx="2026078" cy="792480"/>
+          </a:xfrm>
+          <a:prstGeom prst="wedgeRoundRectCallout">
+            <a:avLst>
+              <a:gd name="adj1" fmla="val -15381"/>
+              <a:gd name="adj2" fmla="val -82317"/>
+              <a:gd name="adj3" fmla="val 16667"/>
+            </a:avLst>
+          </a:prstGeom>
+        </p:spPr>
+        <p:style>
+          <a:lnRef idx="2">
+            <a:schemeClr val="accent1">
+              <a:shade val="15000"/>
+            </a:schemeClr>
+          </a:lnRef>
+          <a:fillRef idx="1">
+            <a:schemeClr val="accent1"/>
+          </a:fillRef>
+          <a:effectRef idx="0">
+            <a:schemeClr val="accent1"/>
+          </a:effectRef>
+          <a:fontRef idx="minor">
+            <a:schemeClr val="lt1"/>
+          </a:fontRef>
+        </p:style>
+        <p:txBody>
+          <a:bodyPr rtlCol="0" anchor="ctr"/>
+          <a:lstStyle/>
+          <a:p>
+            <a:pPr algn="ctr"/>
+            <a:r>
+              <a:rPr lang="en-MY" dirty="0"/>
+              <a:t>1. Click on the extension icon</a:t>
+            </a:r>
+          </a:p>
+        </p:txBody>
+      </p:sp>
+      <p:sp>
+        <p:nvSpPr>
+          <p:cNvPr id="7" name="Speech Bubble: Rectangle with Corners Rounded 6">
+            <a:extLst>
+              <a:ext uri="{FF2B5EF4-FFF2-40B4-BE49-F238E27FC236}">
+                <a16:creationId xmlns:a16="http://schemas.microsoft.com/office/drawing/2014/main" id="{D6971C8F-C7DF-98EF-3D08-C169644C9409}"/>
+              </a:ext>
+            </a:extLst>
+          </p:cNvPr>
+          <p:cNvSpPr/>
+          <p:nvPr/>
+        </p:nvSpPr>
+        <p:spPr>
+          <a:xfrm>
+            <a:off x="2903022" y="1890648"/>
+            <a:ext cx="2026078" cy="792480"/>
+          </a:xfrm>
+          <a:prstGeom prst="wedgeRoundRectCallout">
+            <a:avLst>
+              <a:gd name="adj1" fmla="val -44101"/>
+              <a:gd name="adj2" fmla="val 160440"/>
+              <a:gd name="adj3" fmla="val 16667"/>
+            </a:avLst>
+          </a:prstGeom>
+        </p:spPr>
+        <p:style>
+          <a:lnRef idx="2">
+            <a:schemeClr val="accent1">
+              <a:shade val="15000"/>
+            </a:schemeClr>
+          </a:lnRef>
+          <a:fillRef idx="1">
+            <a:schemeClr val="accent1"/>
+          </a:fillRef>
+          <a:effectRef idx="0">
+            <a:schemeClr val="accent1"/>
+          </a:effectRef>
+          <a:fontRef idx="minor">
+            <a:schemeClr val="lt1"/>
+          </a:fontRef>
+        </p:style>
+        <p:txBody>
+          <a:bodyPr rtlCol="0" anchor="ctr"/>
+          <a:lstStyle/>
+          <a:p>
+            <a:pPr algn="ctr"/>
+            <a:r>
+              <a:rPr lang="en-MY" dirty="0"/>
+              <a:t>2. Search for REST Client</a:t>
+            </a:r>
+          </a:p>
+        </p:txBody>
+      </p:sp>
+      <p:sp>
+        <p:nvSpPr>
+          <p:cNvPr id="8" name="Speech Bubble: Rectangle with Corners Rounded 7">
+            <a:extLst>
+              <a:ext uri="{FF2B5EF4-FFF2-40B4-BE49-F238E27FC236}">
+                <a16:creationId xmlns:a16="http://schemas.microsoft.com/office/drawing/2014/main" id="{ADF31486-620C-7B83-2982-7C7D58742E72}"/>
+              </a:ext>
+            </a:extLst>
+          </p:cNvPr>
+          <p:cNvSpPr/>
+          <p:nvPr/>
+        </p:nvSpPr>
+        <p:spPr>
+          <a:xfrm>
+            <a:off x="5236824" y="2043649"/>
+            <a:ext cx="2026078" cy="792480"/>
+          </a:xfrm>
+          <a:prstGeom prst="wedgeRoundRectCallout">
+            <a:avLst>
+              <a:gd name="adj1" fmla="val -100955"/>
+              <a:gd name="adj2" fmla="val 220380"/>
+              <a:gd name="adj3" fmla="val 16667"/>
+            </a:avLst>
+          </a:prstGeom>
+        </p:spPr>
+        <p:style>
+          <a:lnRef idx="2">
+            <a:schemeClr val="accent1">
+              <a:shade val="15000"/>
+            </a:schemeClr>
+          </a:lnRef>
+          <a:fillRef idx="1">
+            <a:schemeClr val="accent1"/>
+          </a:fillRef>
+          <a:effectRef idx="0">
+            <a:schemeClr val="accent1"/>
+          </a:effectRef>
+          <a:fontRef idx="minor">
+            <a:schemeClr val="lt1"/>
+          </a:fontRef>
+        </p:style>
+        <p:txBody>
+          <a:bodyPr rtlCol="0" anchor="ctr"/>
+          <a:lstStyle/>
+          <a:p>
+            <a:pPr algn="ctr"/>
+            <a:r>
+              <a:rPr lang="en-MY" dirty="0"/>
+              <a:t>3. Click on this</a:t>
+            </a:r>
+          </a:p>
+        </p:txBody>
+      </p:sp>
+      <p:sp>
+        <p:nvSpPr>
+          <p:cNvPr id="9" name="Speech Bubble: Rectangle with Corners Rounded 8">
+            <a:extLst>
+              <a:ext uri="{FF2B5EF4-FFF2-40B4-BE49-F238E27FC236}">
+                <a16:creationId xmlns:a16="http://schemas.microsoft.com/office/drawing/2014/main" id="{67E73A64-24A4-9CFC-22E6-BED4239B063A}"/>
+              </a:ext>
+            </a:extLst>
+          </p:cNvPr>
+          <p:cNvSpPr/>
+          <p:nvPr/>
+        </p:nvSpPr>
+        <p:spPr>
+          <a:xfrm>
+            <a:off x="7352310" y="2286888"/>
+            <a:ext cx="2026078" cy="792480"/>
+          </a:xfrm>
+          <a:prstGeom prst="wedgeRoundRectCallout">
+            <a:avLst>
+              <a:gd name="adj1" fmla="val -56995"/>
+              <a:gd name="adj2" fmla="val 235365"/>
+              <a:gd name="adj3" fmla="val 16667"/>
+            </a:avLst>
+          </a:prstGeom>
+        </p:spPr>
+        <p:style>
+          <a:lnRef idx="2">
+            <a:schemeClr val="accent1">
+              <a:shade val="15000"/>
+            </a:schemeClr>
+          </a:lnRef>
+          <a:fillRef idx="1">
+            <a:schemeClr val="accent1"/>
+          </a:fillRef>
+          <a:effectRef idx="0">
+            <a:schemeClr val="accent1"/>
+          </a:effectRef>
+          <a:fontRef idx="minor">
+            <a:schemeClr val="lt1"/>
+          </a:fontRef>
+        </p:style>
+        <p:txBody>
+          <a:bodyPr rtlCol="0" anchor="ctr"/>
+          <a:lstStyle/>
+          <a:p>
+            <a:pPr algn="ctr"/>
+            <a:r>
+              <a:rPr lang="en-MY" dirty="0"/>
+              <a:t>4. Click for install</a:t>
+            </a:r>
+          </a:p>
+        </p:txBody>
+      </p:sp>
+    </p:spTree>
+    <p:extLst>
+      <p:ext uri="{BB962C8B-B14F-4D97-AF65-F5344CB8AC3E}">
+        <p14:creationId xmlns:p14="http://schemas.microsoft.com/office/powerpoint/2010/main" val="169925372"/>
+      </p:ext>
+    </p:extLst>
+  </p:cSld>
+  <p:clrMapOvr>
+    <a:masterClrMapping/>
+  </p:clrMapOvr>
+</p:sld>
+</file>
+
+<file path=ppt/slides/slide27.xml><?xml version="1.0" encoding="utf-8"?>
+<p:sld xmlns:a="http://schemas.openxmlformats.org/drawingml/2006/main" xmlns:r="http://schemas.openxmlformats.org/officeDocument/2006/relationships" xmlns:p="http://schemas.openxmlformats.org/presentationml/2006/main">
+  <p:cSld>
+    <p:spTree>
+      <p:nvGrpSpPr>
+        <p:cNvPr id="1" name=""/>
+        <p:cNvGrpSpPr/>
+        <p:nvPr/>
+      </p:nvGrpSpPr>
+      <p:grpSpPr>
+        <a:xfrm>
+          <a:off x="0" y="0"/>
+          <a:ext cx="0" cy="0"/>
+          <a:chOff x="0" y="0"/>
+          <a:chExt cx="0" cy="0"/>
+        </a:xfrm>
+      </p:grpSpPr>
+      <p:sp>
+        <p:nvSpPr>
+          <p:cNvPr id="2" name="Title 1">
+            <a:extLst>
+              <a:ext uri="{FF2B5EF4-FFF2-40B4-BE49-F238E27FC236}">
+                <a16:creationId xmlns:a16="http://schemas.microsoft.com/office/drawing/2014/main" id="{A191CCD2-9817-A698-FEBC-AF94A00D68AF}"/>
+              </a:ext>
+            </a:extLst>
+          </p:cNvPr>
+          <p:cNvSpPr>
+            <a:spLocks noGrp="1"/>
+          </p:cNvSpPr>
+          <p:nvPr>
+            <p:ph type="title"/>
+          </p:nvPr>
+        </p:nvSpPr>
+        <p:spPr/>
+        <p:txBody>
+          <a:bodyPr/>
+          <a:lstStyle/>
+          <a:p>
+            <a:r>
+              <a:rPr lang="en-MY" dirty="0"/>
+              <a:t>How to use the extension</a:t>
+            </a:r>
+          </a:p>
+        </p:txBody>
+      </p:sp>
+      <p:pic>
+        <p:nvPicPr>
+          <p:cNvPr id="5" name="Content Placeholder 4">
+            <a:extLst>
+              <a:ext uri="{FF2B5EF4-FFF2-40B4-BE49-F238E27FC236}">
+                <a16:creationId xmlns:a16="http://schemas.microsoft.com/office/drawing/2014/main" id="{CF7324F4-FA37-729E-0F03-4094B21A4B47}"/>
+              </a:ext>
+            </a:extLst>
+          </p:cNvPr>
+          <p:cNvPicPr>
+            <a:picLocks noGrp="1" noChangeAspect="1"/>
+          </p:cNvPicPr>
+          <p:nvPr>
+            <p:ph idx="1"/>
+          </p:nvPr>
+        </p:nvPicPr>
+        <p:blipFill>
+          <a:blip r:embed="rId2"/>
+          <a:stretch>
+            <a:fillRect/>
+          </a:stretch>
+        </p:blipFill>
+        <p:spPr>
+          <a:xfrm>
+            <a:off x="1015732" y="1800225"/>
+            <a:ext cx="6096000" cy="3257550"/>
+          </a:xfrm>
+        </p:spPr>
+      </p:pic>
+      <p:pic>
+        <p:nvPicPr>
+          <p:cNvPr id="7" name="Picture 6">
+            <a:extLst>
+              <a:ext uri="{FF2B5EF4-FFF2-40B4-BE49-F238E27FC236}">
+                <a16:creationId xmlns:a16="http://schemas.microsoft.com/office/drawing/2014/main" id="{FBC0769A-73D0-0965-5332-73CDCB393FAB}"/>
+              </a:ext>
+            </a:extLst>
+          </p:cNvPr>
+          <p:cNvPicPr>
+            <a:picLocks noChangeAspect="1"/>
+          </p:cNvPicPr>
+          <p:nvPr/>
+        </p:nvPicPr>
+        <p:blipFill>
+          <a:blip r:embed="rId3"/>
+          <a:stretch>
+            <a:fillRect/>
+          </a:stretch>
+        </p:blipFill>
+        <p:spPr>
+          <a:xfrm>
+            <a:off x="5262314" y="3429000"/>
+            <a:ext cx="5514975" cy="2514600"/>
           </a:xfrm>
           <a:prstGeom prst="rect">
             <a:avLst/>
           </a:prstGeom>
         </p:spPr>
       </p:pic>
+      <p:sp>
+        <p:nvSpPr>
+          <p:cNvPr id="8" name="Speech Bubble: Rectangle with Corners Rounded 7">
+            <a:extLst>
+              <a:ext uri="{FF2B5EF4-FFF2-40B4-BE49-F238E27FC236}">
+                <a16:creationId xmlns:a16="http://schemas.microsoft.com/office/drawing/2014/main" id="{0F1B3741-7106-8517-A5D7-27D2F359575B}"/>
+              </a:ext>
+            </a:extLst>
+          </p:cNvPr>
+          <p:cNvSpPr/>
+          <p:nvPr/>
+        </p:nvSpPr>
+        <p:spPr>
+          <a:xfrm>
+            <a:off x="993074" y="5447002"/>
+            <a:ext cx="2026078" cy="792480"/>
+          </a:xfrm>
+          <a:prstGeom prst="wedgeRoundRectCallout">
+            <a:avLst>
+              <a:gd name="adj1" fmla="val -15967"/>
+              <a:gd name="adj2" fmla="val -197702"/>
+              <a:gd name="adj3" fmla="val 16667"/>
+            </a:avLst>
+          </a:prstGeom>
+        </p:spPr>
+        <p:style>
+          <a:lnRef idx="2">
+            <a:schemeClr val="accent1">
+              <a:shade val="15000"/>
+            </a:schemeClr>
+          </a:lnRef>
+          <a:fillRef idx="1">
+            <a:schemeClr val="accent1"/>
+          </a:fillRef>
+          <a:effectRef idx="0">
+            <a:schemeClr val="accent1"/>
+          </a:effectRef>
+          <a:fontRef idx="minor">
+            <a:schemeClr val="lt1"/>
+          </a:fontRef>
+        </p:style>
+        <p:txBody>
+          <a:bodyPr rtlCol="0" anchor="ctr"/>
+          <a:lstStyle/>
+          <a:p>
+            <a:pPr algn="ctr"/>
+            <a:r>
+              <a:rPr lang="en-MY" dirty="0"/>
+              <a:t>1. Create the </a:t>
+            </a:r>
+            <a:r>
+              <a:rPr lang="en-MY" dirty="0" err="1"/>
+              <a:t>Games.http</a:t>
+            </a:r>
+            <a:r>
+              <a:rPr lang="en-MY" dirty="0"/>
+              <a:t> file</a:t>
+            </a:r>
+          </a:p>
+        </p:txBody>
+      </p:sp>
+      <p:sp>
+        <p:nvSpPr>
+          <p:cNvPr id="9" name="Speech Bubble: Rectangle with Corners Rounded 8">
+            <a:extLst>
+              <a:ext uri="{FF2B5EF4-FFF2-40B4-BE49-F238E27FC236}">
+                <a16:creationId xmlns:a16="http://schemas.microsoft.com/office/drawing/2014/main" id="{921407F1-4C7B-D016-E474-901AEDD415BB}"/>
+              </a:ext>
+            </a:extLst>
+          </p:cNvPr>
+          <p:cNvSpPr/>
+          <p:nvPr/>
+        </p:nvSpPr>
+        <p:spPr>
+          <a:xfrm>
+            <a:off x="7771906" y="1745785"/>
+            <a:ext cx="2026078" cy="792480"/>
+          </a:xfrm>
+          <a:prstGeom prst="wedgeRoundRectCallout">
+            <a:avLst>
+              <a:gd name="adj1" fmla="val -89819"/>
+              <a:gd name="adj2" fmla="val 99001"/>
+              <a:gd name="adj3" fmla="val 16667"/>
+            </a:avLst>
+          </a:prstGeom>
+        </p:spPr>
+        <p:style>
+          <a:lnRef idx="2">
+            <a:schemeClr val="accent1">
+              <a:shade val="15000"/>
+            </a:schemeClr>
+          </a:lnRef>
+          <a:fillRef idx="1">
+            <a:schemeClr val="accent1"/>
+          </a:fillRef>
+          <a:effectRef idx="0">
+            <a:schemeClr val="accent1"/>
+          </a:effectRef>
+          <a:fontRef idx="minor">
+            <a:schemeClr val="lt1"/>
+          </a:fontRef>
+        </p:style>
+        <p:txBody>
+          <a:bodyPr rtlCol="0" anchor="ctr"/>
+          <a:lstStyle/>
+          <a:p>
+            <a:pPr algn="ctr"/>
+            <a:r>
+              <a:rPr lang="en-MY" dirty="0"/>
+              <a:t>2. Write this line</a:t>
+            </a:r>
+          </a:p>
+        </p:txBody>
+      </p:sp>
+      <p:sp>
+        <p:nvSpPr>
+          <p:cNvPr id="10" name="Rectangle 9">
+            <a:extLst>
+              <a:ext uri="{FF2B5EF4-FFF2-40B4-BE49-F238E27FC236}">
+                <a16:creationId xmlns:a16="http://schemas.microsoft.com/office/drawing/2014/main" id="{289129B4-169C-8D04-2BCF-1CBECFE9A7AF}"/>
+              </a:ext>
+            </a:extLst>
+          </p:cNvPr>
+          <p:cNvSpPr/>
+          <p:nvPr/>
+        </p:nvSpPr>
+        <p:spPr>
+          <a:xfrm>
+            <a:off x="7659584" y="5213268"/>
+            <a:ext cx="1840676" cy="233734"/>
+          </a:xfrm>
+          <a:prstGeom prst="rect">
+            <a:avLst/>
+          </a:prstGeom>
+          <a:noFill/>
+          <a:ln w="28575">
+            <a:solidFill>
+              <a:srgbClr val="FF0000"/>
+            </a:solidFill>
+          </a:ln>
+        </p:spPr>
+        <p:style>
+          <a:lnRef idx="2">
+            <a:schemeClr val="accent1">
+              <a:shade val="15000"/>
+            </a:schemeClr>
+          </a:lnRef>
+          <a:fillRef idx="1">
+            <a:schemeClr val="accent1"/>
+          </a:fillRef>
+          <a:effectRef idx="0">
+            <a:schemeClr val="accent1"/>
+          </a:effectRef>
+          <a:fontRef idx="minor">
+            <a:schemeClr val="lt1"/>
+          </a:fontRef>
+        </p:style>
+        <p:txBody>
+          <a:bodyPr rtlCol="0" anchor="ctr"/>
+          <a:lstStyle/>
+          <a:p>
+            <a:pPr algn="ctr"/>
+            <a:endParaRPr lang="en-MY"/>
+          </a:p>
+        </p:txBody>
+      </p:sp>
+      <p:cxnSp>
+        <p:nvCxnSpPr>
+          <p:cNvPr id="11" name="Straight Arrow Connector 10">
+            <a:extLst>
+              <a:ext uri="{FF2B5EF4-FFF2-40B4-BE49-F238E27FC236}">
+                <a16:creationId xmlns:a16="http://schemas.microsoft.com/office/drawing/2014/main" id="{AAB53AB4-889E-2E8F-6B83-D50F5BA03CA4}"/>
+              </a:ext>
+            </a:extLst>
+          </p:cNvPr>
+          <p:cNvCxnSpPr>
+            <a:cxnSpLocks/>
+            <a:stCxn id="10" idx="0"/>
+          </p:cNvCxnSpPr>
+          <p:nvPr/>
+        </p:nvCxnSpPr>
+        <p:spPr>
+          <a:xfrm flipH="1" flipV="1">
+            <a:off x="6096000" y="3016332"/>
+            <a:ext cx="2483922" cy="2196936"/>
+          </a:xfrm>
+          <a:prstGeom prst="straightConnector1">
+            <a:avLst/>
+          </a:prstGeom>
+          <a:ln w="28575">
+            <a:solidFill>
+              <a:srgbClr val="FF0000"/>
+            </a:solidFill>
+            <a:tailEnd type="triangle"/>
+          </a:ln>
+        </p:spPr>
+        <p:style>
+          <a:lnRef idx="1">
+            <a:schemeClr val="accent1"/>
+          </a:lnRef>
+          <a:fillRef idx="0">
+            <a:schemeClr val="accent1"/>
+          </a:fillRef>
+          <a:effectRef idx="0">
+            <a:schemeClr val="accent1"/>
+          </a:effectRef>
+          <a:fontRef idx="minor">
+            <a:schemeClr val="tx1"/>
+          </a:fontRef>
+        </p:style>
+      </p:cxnSp>
     </p:spTree>
     <p:extLst>
       <p:ext uri="{BB962C8B-B14F-4D97-AF65-F5344CB8AC3E}">
-        <p14:creationId xmlns:p14="http://schemas.microsoft.com/office/powerpoint/2010/main" val="1441508812"/>
+        <p14:creationId xmlns:p14="http://schemas.microsoft.com/office/powerpoint/2010/main" val="1735939173"/>
+      </p:ext>
+    </p:extLst>
+  </p:cSld>
+  <p:clrMapOvr>
+    <a:masterClrMapping/>
+  </p:clrMapOvr>
+</p:sld>
+</file>
+
+<file path=ppt/slides/slide28.xml><?xml version="1.0" encoding="utf-8"?>
+<p:sld xmlns:a="http://schemas.openxmlformats.org/drawingml/2006/main" xmlns:r="http://schemas.openxmlformats.org/officeDocument/2006/relationships" xmlns:p="http://schemas.openxmlformats.org/presentationml/2006/main">
+  <p:cSld>
+    <p:spTree>
+      <p:nvGrpSpPr>
+        <p:cNvPr id="1" name=""/>
+        <p:cNvGrpSpPr/>
+        <p:nvPr/>
+      </p:nvGrpSpPr>
+      <p:grpSpPr>
+        <a:xfrm>
+          <a:off x="0" y="0"/>
+          <a:ext cx="0" cy="0"/>
+          <a:chOff x="0" y="0"/>
+          <a:chExt cx="0" cy="0"/>
+        </a:xfrm>
+      </p:grpSpPr>
+      <p:sp>
+        <p:nvSpPr>
+          <p:cNvPr id="2" name="Title 1">
+            <a:extLst>
+              <a:ext uri="{FF2B5EF4-FFF2-40B4-BE49-F238E27FC236}">
+                <a16:creationId xmlns:a16="http://schemas.microsoft.com/office/drawing/2014/main" id="{A191CCD2-9817-A698-FEBC-AF94A00D68AF}"/>
+              </a:ext>
+            </a:extLst>
+          </p:cNvPr>
+          <p:cNvSpPr>
+            <a:spLocks noGrp="1"/>
+          </p:cNvSpPr>
+          <p:nvPr>
+            <p:ph type="title"/>
+          </p:nvPr>
+        </p:nvSpPr>
+        <p:spPr/>
+        <p:txBody>
+          <a:bodyPr/>
+          <a:lstStyle/>
+          <a:p>
+            <a:r>
+              <a:rPr lang="en-MY" dirty="0"/>
+              <a:t>How to use the extension Continue…</a:t>
+            </a:r>
+          </a:p>
+        </p:txBody>
+      </p:sp>
+      <p:pic>
+        <p:nvPicPr>
+          <p:cNvPr id="5" name="Content Placeholder 4">
+            <a:extLst>
+              <a:ext uri="{FF2B5EF4-FFF2-40B4-BE49-F238E27FC236}">
+                <a16:creationId xmlns:a16="http://schemas.microsoft.com/office/drawing/2014/main" id="{7AA8B2BC-05FB-AB9E-5528-E22C93DD1B02}"/>
+              </a:ext>
+            </a:extLst>
+          </p:cNvPr>
+          <p:cNvPicPr>
+            <a:picLocks noGrp="1" noChangeAspect="1"/>
+          </p:cNvPicPr>
+          <p:nvPr>
+            <p:ph idx="1"/>
+          </p:nvPr>
+        </p:nvPicPr>
+        <p:blipFill>
+          <a:blip r:embed="rId2"/>
+          <a:stretch>
+            <a:fillRect/>
+          </a:stretch>
+        </p:blipFill>
+        <p:spPr>
+          <a:xfrm>
+            <a:off x="1141413" y="1865468"/>
+            <a:ext cx="7620000" cy="2362200"/>
+          </a:xfrm>
+        </p:spPr>
+      </p:pic>
+      <p:pic>
+        <p:nvPicPr>
+          <p:cNvPr id="7" name="Picture 6">
+            <a:extLst>
+              <a:ext uri="{FF2B5EF4-FFF2-40B4-BE49-F238E27FC236}">
+                <a16:creationId xmlns:a16="http://schemas.microsoft.com/office/drawing/2014/main" id="{6D29A59C-40AA-6317-24A5-FCED865ABABA}"/>
+              </a:ext>
+            </a:extLst>
+          </p:cNvPr>
+          <p:cNvPicPr>
+            <a:picLocks noChangeAspect="1"/>
+          </p:cNvPicPr>
+          <p:nvPr/>
+        </p:nvPicPr>
+        <p:blipFill>
+          <a:blip r:embed="rId3"/>
+          <a:stretch>
+            <a:fillRect/>
+          </a:stretch>
+        </p:blipFill>
+        <p:spPr>
+          <a:xfrm>
+            <a:off x="1141413" y="4345905"/>
+            <a:ext cx="7324725" cy="2257425"/>
+          </a:xfrm>
+          <a:prstGeom prst="rect">
+            <a:avLst/>
+          </a:prstGeom>
+        </p:spPr>
+      </p:pic>
+      <p:sp>
+        <p:nvSpPr>
+          <p:cNvPr id="8" name="Speech Bubble: Rectangle with Corners Rounded 7">
+            <a:extLst>
+              <a:ext uri="{FF2B5EF4-FFF2-40B4-BE49-F238E27FC236}">
+                <a16:creationId xmlns:a16="http://schemas.microsoft.com/office/drawing/2014/main" id="{BFF2807A-1CAA-9569-07B6-0776BEC7DD35}"/>
+              </a:ext>
+            </a:extLst>
+          </p:cNvPr>
+          <p:cNvSpPr/>
+          <p:nvPr/>
+        </p:nvSpPr>
+        <p:spPr>
+          <a:xfrm>
+            <a:off x="8971924" y="2636520"/>
+            <a:ext cx="1502112" cy="792480"/>
+          </a:xfrm>
+          <a:prstGeom prst="wedgeRoundRectCallout">
+            <a:avLst>
+              <a:gd name="adj1" fmla="val -86657"/>
+              <a:gd name="adj2" fmla="val -91309"/>
+              <a:gd name="adj3" fmla="val 16667"/>
+            </a:avLst>
+          </a:prstGeom>
+        </p:spPr>
+        <p:style>
+          <a:lnRef idx="2">
+            <a:schemeClr val="accent1">
+              <a:shade val="15000"/>
+            </a:schemeClr>
+          </a:lnRef>
+          <a:fillRef idx="1">
+            <a:schemeClr val="accent1"/>
+          </a:fillRef>
+          <a:effectRef idx="0">
+            <a:schemeClr val="accent1"/>
+          </a:effectRef>
+          <a:fontRef idx="minor">
+            <a:schemeClr val="lt1"/>
+          </a:fontRef>
+        </p:style>
+        <p:txBody>
+          <a:bodyPr rtlCol="0" anchor="ctr"/>
+          <a:lstStyle/>
+          <a:p>
+            <a:pPr algn="ctr"/>
+            <a:r>
+              <a:rPr lang="en-MY" dirty="0"/>
+              <a:t>3. Perform dotnet run</a:t>
+            </a:r>
+          </a:p>
+        </p:txBody>
+      </p:sp>
+      <p:sp>
+        <p:nvSpPr>
+          <p:cNvPr id="9" name="Speech Bubble: Rectangle with Corners Rounded 8">
+            <a:extLst>
+              <a:ext uri="{FF2B5EF4-FFF2-40B4-BE49-F238E27FC236}">
+                <a16:creationId xmlns:a16="http://schemas.microsoft.com/office/drawing/2014/main" id="{9859B02A-539F-27AA-2E5C-6B4290CAC7E1}"/>
+              </a:ext>
+            </a:extLst>
+          </p:cNvPr>
+          <p:cNvSpPr/>
+          <p:nvPr/>
+        </p:nvSpPr>
+        <p:spPr>
+          <a:xfrm>
+            <a:off x="965976" y="5474617"/>
+            <a:ext cx="1502112" cy="792480"/>
+          </a:xfrm>
+          <a:prstGeom prst="wedgeRoundRectCallout">
+            <a:avLst>
+              <a:gd name="adj1" fmla="val -3647"/>
+              <a:gd name="adj2" fmla="val -121279"/>
+              <a:gd name="adj3" fmla="val 16667"/>
+            </a:avLst>
+          </a:prstGeom>
+        </p:spPr>
+        <p:style>
+          <a:lnRef idx="2">
+            <a:schemeClr val="accent1">
+              <a:shade val="15000"/>
+            </a:schemeClr>
+          </a:lnRef>
+          <a:fillRef idx="1">
+            <a:schemeClr val="accent1"/>
+          </a:fillRef>
+          <a:effectRef idx="0">
+            <a:schemeClr val="accent1"/>
+          </a:effectRef>
+          <a:fontRef idx="minor">
+            <a:schemeClr val="lt1"/>
+          </a:fontRef>
+        </p:style>
+        <p:txBody>
+          <a:bodyPr rtlCol="0" anchor="ctr"/>
+          <a:lstStyle/>
+          <a:p>
+            <a:pPr algn="ctr"/>
+            <a:r>
+              <a:rPr lang="en-MY" dirty="0"/>
+              <a:t>4. Click the Send Request</a:t>
+            </a:r>
+          </a:p>
+        </p:txBody>
+      </p:sp>
+      <p:sp>
+        <p:nvSpPr>
+          <p:cNvPr id="10" name="Speech Bubble: Rectangle with Corners Rounded 9">
+            <a:extLst>
+              <a:ext uri="{FF2B5EF4-FFF2-40B4-BE49-F238E27FC236}">
+                <a16:creationId xmlns:a16="http://schemas.microsoft.com/office/drawing/2014/main" id="{ACD119E8-B648-3EA2-A0B9-B93EF890AC00}"/>
+              </a:ext>
+            </a:extLst>
+          </p:cNvPr>
+          <p:cNvSpPr/>
+          <p:nvPr/>
+        </p:nvSpPr>
+        <p:spPr>
+          <a:xfrm>
+            <a:off x="8971924" y="4794697"/>
+            <a:ext cx="1502112" cy="792480"/>
+          </a:xfrm>
+          <a:prstGeom prst="wedgeRoundRectCallout">
+            <a:avLst>
+              <a:gd name="adj1" fmla="val -99307"/>
+              <a:gd name="adj2" fmla="val -80819"/>
+              <a:gd name="adj3" fmla="val 16667"/>
+            </a:avLst>
+          </a:prstGeom>
+        </p:spPr>
+        <p:style>
+          <a:lnRef idx="2">
+            <a:schemeClr val="accent1">
+              <a:shade val="15000"/>
+            </a:schemeClr>
+          </a:lnRef>
+          <a:fillRef idx="1">
+            <a:schemeClr val="accent1"/>
+          </a:fillRef>
+          <a:effectRef idx="0">
+            <a:schemeClr val="accent1"/>
+          </a:effectRef>
+          <a:fontRef idx="minor">
+            <a:schemeClr val="lt1"/>
+          </a:fontRef>
+        </p:style>
+        <p:txBody>
+          <a:bodyPr rtlCol="0" anchor="ctr"/>
+          <a:lstStyle/>
+          <a:p>
+            <a:pPr algn="ctr"/>
+            <a:r>
+              <a:rPr lang="en-MY" dirty="0"/>
+              <a:t>5. Response is showing here</a:t>
+            </a:r>
+          </a:p>
+        </p:txBody>
+      </p:sp>
+    </p:spTree>
+    <p:extLst>
+      <p:ext uri="{BB962C8B-B14F-4D97-AF65-F5344CB8AC3E}">
+        <p14:creationId xmlns:p14="http://schemas.microsoft.com/office/powerpoint/2010/main" val="435440660"/>
+      </p:ext>
+    </p:extLst>
+  </p:cSld>
+  <p:clrMapOvr>
+    <a:masterClrMapping/>
+  </p:clrMapOvr>
+</p:sld>
+</file>
+
+<file path=ppt/slides/slide29.xml><?xml version="1.0" encoding="utf-8"?>
+<p:sld xmlns:a="http://schemas.openxmlformats.org/drawingml/2006/main" xmlns:r="http://schemas.openxmlformats.org/officeDocument/2006/relationships" xmlns:p="http://schemas.openxmlformats.org/presentationml/2006/main">
+  <p:cSld>
+    <p:spTree>
+      <p:nvGrpSpPr>
+        <p:cNvPr id="1" name=""/>
+        <p:cNvGrpSpPr/>
+        <p:nvPr/>
+      </p:nvGrpSpPr>
+      <p:grpSpPr>
+        <a:xfrm>
+          <a:off x="0" y="0"/>
+          <a:ext cx="0" cy="0"/>
+          <a:chOff x="0" y="0"/>
+          <a:chExt cx="0" cy="0"/>
+        </a:xfrm>
+      </p:grpSpPr>
+      <p:sp>
+        <p:nvSpPr>
+          <p:cNvPr id="2" name="Title 1">
+            <a:extLst>
+              <a:ext uri="{FF2B5EF4-FFF2-40B4-BE49-F238E27FC236}">
+                <a16:creationId xmlns:a16="http://schemas.microsoft.com/office/drawing/2014/main" id="{A191CCD2-9817-A698-FEBC-AF94A00D68AF}"/>
+              </a:ext>
+            </a:extLst>
+          </p:cNvPr>
+          <p:cNvSpPr>
+            <a:spLocks noGrp="1"/>
+          </p:cNvSpPr>
+          <p:nvPr>
+            <p:ph type="title"/>
+          </p:nvPr>
+        </p:nvSpPr>
+        <p:spPr/>
+        <p:txBody>
+          <a:bodyPr/>
+          <a:lstStyle/>
+          <a:p>
+            <a:r>
+              <a:rPr lang="en-MY" dirty="0"/>
+              <a:t>Creating DTOs</a:t>
+            </a:r>
+          </a:p>
+        </p:txBody>
+      </p:sp>
+      <p:pic>
+        <p:nvPicPr>
+          <p:cNvPr id="5" name="Content Placeholder 4">
+            <a:extLst>
+              <a:ext uri="{FF2B5EF4-FFF2-40B4-BE49-F238E27FC236}">
+                <a16:creationId xmlns:a16="http://schemas.microsoft.com/office/drawing/2014/main" id="{BD8C6420-6F23-9F3F-FBA1-84DAF3199C9C}"/>
+              </a:ext>
+            </a:extLst>
+          </p:cNvPr>
+          <p:cNvPicPr>
+            <a:picLocks noGrp="1" noChangeAspect="1"/>
+          </p:cNvPicPr>
+          <p:nvPr>
+            <p:ph idx="1"/>
+          </p:nvPr>
+        </p:nvPicPr>
+        <p:blipFill>
+          <a:blip r:embed="rId2"/>
+          <a:stretch>
+            <a:fillRect/>
+          </a:stretch>
+        </p:blipFill>
+        <p:spPr>
+          <a:xfrm>
+            <a:off x="2255838" y="2372519"/>
+            <a:ext cx="7677150" cy="3295650"/>
+          </a:xfrm>
+        </p:spPr>
+      </p:pic>
+      <p:sp>
+        <p:nvSpPr>
+          <p:cNvPr id="6" name="Speech Bubble: Rectangle with Corners Rounded 5">
+            <a:extLst>
+              <a:ext uri="{FF2B5EF4-FFF2-40B4-BE49-F238E27FC236}">
+                <a16:creationId xmlns:a16="http://schemas.microsoft.com/office/drawing/2014/main" id="{30173431-500E-F10C-B01F-8390768239F2}"/>
+              </a:ext>
+            </a:extLst>
+          </p:cNvPr>
+          <p:cNvSpPr/>
+          <p:nvPr/>
+        </p:nvSpPr>
+        <p:spPr>
+          <a:xfrm>
+            <a:off x="181069" y="4760913"/>
+            <a:ext cx="1855138" cy="792480"/>
+          </a:xfrm>
+          <a:prstGeom prst="wedgeRoundRectCallout">
+            <a:avLst>
+              <a:gd name="adj1" fmla="val 101846"/>
+              <a:gd name="adj2" fmla="val -43327"/>
+              <a:gd name="adj3" fmla="val 16667"/>
+            </a:avLst>
+          </a:prstGeom>
+        </p:spPr>
+        <p:style>
+          <a:lnRef idx="2">
+            <a:schemeClr val="accent1">
+              <a:shade val="15000"/>
+            </a:schemeClr>
+          </a:lnRef>
+          <a:fillRef idx="1">
+            <a:schemeClr val="accent1"/>
+          </a:fillRef>
+          <a:effectRef idx="0">
+            <a:schemeClr val="accent1"/>
+          </a:effectRef>
+          <a:fontRef idx="minor">
+            <a:schemeClr val="lt1"/>
+          </a:fontRef>
+        </p:style>
+        <p:txBody>
+          <a:bodyPr rtlCol="0" anchor="ctr"/>
+          <a:lstStyle/>
+          <a:p>
+            <a:pPr algn="ctr"/>
+            <a:r>
+              <a:rPr lang="en-MY" dirty="0"/>
+              <a:t>1. Add </a:t>
+            </a:r>
+            <a:r>
+              <a:rPr lang="en-MY" dirty="0" err="1"/>
+              <a:t>Dtos</a:t>
+            </a:r>
+            <a:r>
+              <a:rPr lang="en-MY" dirty="0"/>
+              <a:t> folder at Solution explorer</a:t>
+            </a:r>
+          </a:p>
+        </p:txBody>
+      </p:sp>
+      <p:sp>
+        <p:nvSpPr>
+          <p:cNvPr id="7" name="Speech Bubble: Rectangle with Corners Rounded 6">
+            <a:extLst>
+              <a:ext uri="{FF2B5EF4-FFF2-40B4-BE49-F238E27FC236}">
+                <a16:creationId xmlns:a16="http://schemas.microsoft.com/office/drawing/2014/main" id="{EDD7B563-3C27-7966-A8CC-48591487675F}"/>
+              </a:ext>
+            </a:extLst>
+          </p:cNvPr>
+          <p:cNvSpPr/>
+          <p:nvPr/>
+        </p:nvSpPr>
+        <p:spPr>
+          <a:xfrm>
+            <a:off x="7440439" y="1509210"/>
+            <a:ext cx="2934832" cy="792480"/>
+          </a:xfrm>
+          <a:prstGeom prst="wedgeRoundRectCallout">
+            <a:avLst>
+              <a:gd name="adj1" fmla="val 9334"/>
+              <a:gd name="adj2" fmla="val 116612"/>
+              <a:gd name="adj3" fmla="val 16667"/>
+            </a:avLst>
+          </a:prstGeom>
+        </p:spPr>
+        <p:style>
+          <a:lnRef idx="2">
+            <a:schemeClr val="accent1">
+              <a:shade val="15000"/>
+            </a:schemeClr>
+          </a:lnRef>
+          <a:fillRef idx="1">
+            <a:schemeClr val="accent1"/>
+          </a:fillRef>
+          <a:effectRef idx="0">
+            <a:schemeClr val="accent1"/>
+          </a:effectRef>
+          <a:fontRef idx="minor">
+            <a:schemeClr val="lt1"/>
+          </a:fontRef>
+        </p:style>
+        <p:txBody>
+          <a:bodyPr rtlCol="0" anchor="ctr"/>
+          <a:lstStyle/>
+          <a:p>
+            <a:pPr algn="ctr"/>
+            <a:r>
+              <a:rPr lang="en-MY" dirty="0"/>
+              <a:t>2. Right click </a:t>
+            </a:r>
+            <a:r>
+              <a:rPr lang="en-MY" dirty="0" err="1"/>
+              <a:t>Dtos</a:t>
+            </a:r>
+            <a:r>
+              <a:rPr lang="en-MY" dirty="0"/>
+              <a:t> folder and add new file of record template (</a:t>
+            </a:r>
+            <a:r>
+              <a:rPr lang="en-MY" dirty="0" err="1"/>
+              <a:t>GameDto.cs</a:t>
+            </a:r>
+            <a:r>
+              <a:rPr lang="en-MY" dirty="0"/>
+              <a:t>)</a:t>
+            </a:r>
+          </a:p>
+        </p:txBody>
+      </p:sp>
+    </p:spTree>
+    <p:extLst>
+      <p:ext uri="{BB962C8B-B14F-4D97-AF65-F5344CB8AC3E}">
+        <p14:creationId xmlns:p14="http://schemas.microsoft.com/office/powerpoint/2010/main" val="772521411"/>
       </p:ext>
     </p:extLst>
   </p:cSld>
@@ -26600,7 +28575,7 @@
           <a:noFill/>
           <a:extLst>
             <a:ext uri="{909E8E84-426E-40dd-AFC4-6F175D3DCCD1}">
-              <a14:hiddenFill xmlns="" xmlns:a16="http://schemas.microsoft.com/office/drawing/2014/main" xmlns:p14="http://schemas.microsoft.com/office/powerpoint/2010/main" xmlns:a14="http://schemas.microsoft.com/office/drawing/2010/main">
+              <a14:hiddenFill xmlns:a14="http://schemas.microsoft.com/office/drawing/2010/main" xmlns:p14="http://schemas.microsoft.com/office/powerpoint/2010/main" xmlns:a16="http://schemas.microsoft.com/office/drawing/2014/main" xmlns="">
                 <a:solidFill>
                   <a:srgbClr val="FFFFFF"/>
                 </a:solidFill>
@@ -26682,7 +28657,7 @@
             </a:ln>
             <a:extLst>
               <a:ext uri="{91240B29-F687-4f45-9708-019B960494DF}">
-                <a14:hiddenLine xmlns="" xmlns:a16="http://schemas.microsoft.com/office/drawing/2014/main" xmlns:p14="http://schemas.microsoft.com/office/powerpoint/2010/main" xmlns:a14="http://schemas.microsoft.com/office/drawing/2010/main" w="9525">
+                <a14:hiddenLine xmlns:a14="http://schemas.microsoft.com/office/drawing/2010/main" xmlns:p14="http://schemas.microsoft.com/office/powerpoint/2010/main" xmlns:a16="http://schemas.microsoft.com/office/drawing/2014/main" xmlns="" w="9525">
                   <a:solidFill>
                     <a:srgbClr val="000000"/>
                   </a:solidFill>
@@ -26794,7 +28769,7 @@
             </a:ln>
             <a:extLst>
               <a:ext uri="{91240B29-F687-4f45-9708-019B960494DF}">
-                <a14:hiddenLine xmlns="" xmlns:a16="http://schemas.microsoft.com/office/drawing/2014/main" xmlns:p14="http://schemas.microsoft.com/office/powerpoint/2010/main" xmlns:a14="http://schemas.microsoft.com/office/drawing/2010/main" w="9525">
+                <a14:hiddenLine xmlns:a14="http://schemas.microsoft.com/office/drawing/2010/main" xmlns:p14="http://schemas.microsoft.com/office/powerpoint/2010/main" xmlns:a16="http://schemas.microsoft.com/office/drawing/2014/main" xmlns="" w="9525">
                   <a:solidFill>
                     <a:srgbClr val="000000"/>
                   </a:solidFill>
@@ -26906,7 +28881,7 @@
             </a:ln>
             <a:extLst>
               <a:ext uri="{91240B29-F687-4f45-9708-019B960494DF}">
-                <a14:hiddenLine xmlns="" xmlns:a16="http://schemas.microsoft.com/office/drawing/2014/main" xmlns:p14="http://schemas.microsoft.com/office/powerpoint/2010/main" xmlns:a14="http://schemas.microsoft.com/office/drawing/2010/main" w="9525">
+                <a14:hiddenLine xmlns:a14="http://schemas.microsoft.com/office/drawing/2010/main" xmlns:p14="http://schemas.microsoft.com/office/powerpoint/2010/main" xmlns:a16="http://schemas.microsoft.com/office/drawing/2014/main" xmlns="" w="9525">
                   <a:solidFill>
                     <a:srgbClr val="000000"/>
                   </a:solidFill>
@@ -26990,7 +28965,7 @@
             </a:ln>
             <a:extLst>
               <a:ext uri="{91240B29-F687-4f45-9708-019B960494DF}">
-                <a14:hiddenLine xmlns="" xmlns:a16="http://schemas.microsoft.com/office/drawing/2014/main" xmlns:p14="http://schemas.microsoft.com/office/powerpoint/2010/main" xmlns:a14="http://schemas.microsoft.com/office/drawing/2010/main" w="9525">
+                <a14:hiddenLine xmlns:a14="http://schemas.microsoft.com/office/drawing/2010/main" xmlns:p14="http://schemas.microsoft.com/office/powerpoint/2010/main" xmlns:a16="http://schemas.microsoft.com/office/drawing/2014/main" xmlns="" w="9525">
                   <a:solidFill>
                     <a:srgbClr val="000000"/>
                   </a:solidFill>
@@ -27102,7 +29077,7 @@
             </a:ln>
             <a:extLst>
               <a:ext uri="{91240B29-F687-4f45-9708-019B960494DF}">
-                <a14:hiddenLine xmlns="" xmlns:a16="http://schemas.microsoft.com/office/drawing/2014/main" xmlns:p14="http://schemas.microsoft.com/office/powerpoint/2010/main" xmlns:a14="http://schemas.microsoft.com/office/drawing/2010/main" w="9525">
+                <a14:hiddenLine xmlns:a14="http://schemas.microsoft.com/office/drawing/2010/main" xmlns:p14="http://schemas.microsoft.com/office/powerpoint/2010/main" xmlns:a16="http://schemas.microsoft.com/office/drawing/2014/main" xmlns="" w="9525">
                   <a:solidFill>
                     <a:srgbClr val="000000"/>
                   </a:solidFill>
@@ -27186,7 +29161,7 @@
             </a:ln>
             <a:extLst>
               <a:ext uri="{91240B29-F687-4f45-9708-019B960494DF}">
-                <a14:hiddenLine xmlns="" xmlns:a16="http://schemas.microsoft.com/office/drawing/2014/main" xmlns:p14="http://schemas.microsoft.com/office/powerpoint/2010/main" xmlns:a14="http://schemas.microsoft.com/office/drawing/2010/main" w="9525">
+                <a14:hiddenLine xmlns:a14="http://schemas.microsoft.com/office/drawing/2010/main" xmlns:p14="http://schemas.microsoft.com/office/powerpoint/2010/main" xmlns:a16="http://schemas.microsoft.com/office/drawing/2014/main" xmlns="" w="9525">
                   <a:solidFill>
                     <a:srgbClr val="000000"/>
                   </a:solidFill>
@@ -27270,7 +29245,7 @@
             </a:ln>
             <a:extLst>
               <a:ext uri="{91240B29-F687-4f45-9708-019B960494DF}">
-                <a14:hiddenLine xmlns="" xmlns:a16="http://schemas.microsoft.com/office/drawing/2014/main" xmlns:p14="http://schemas.microsoft.com/office/powerpoint/2010/main" xmlns:a14="http://schemas.microsoft.com/office/drawing/2010/main" w="9525">
+                <a14:hiddenLine xmlns:a14="http://schemas.microsoft.com/office/drawing/2010/main" xmlns:p14="http://schemas.microsoft.com/office/powerpoint/2010/main" xmlns:a16="http://schemas.microsoft.com/office/drawing/2014/main" xmlns="" w="9525">
                   <a:solidFill>
                     <a:srgbClr val="000000"/>
                   </a:solidFill>
@@ -27382,7 +29357,7 @@
             </a:ln>
             <a:extLst>
               <a:ext uri="{91240B29-F687-4f45-9708-019B960494DF}">
-                <a14:hiddenLine xmlns="" xmlns:a16="http://schemas.microsoft.com/office/drawing/2014/main" xmlns:p14="http://schemas.microsoft.com/office/powerpoint/2010/main" xmlns:a14="http://schemas.microsoft.com/office/drawing/2010/main" w="9525">
+                <a14:hiddenLine xmlns:a14="http://schemas.microsoft.com/office/drawing/2010/main" xmlns:p14="http://schemas.microsoft.com/office/powerpoint/2010/main" xmlns:a16="http://schemas.microsoft.com/office/drawing/2014/main" xmlns="" w="9525">
                   <a:solidFill>
                     <a:srgbClr val="000000"/>
                   </a:solidFill>
@@ -27494,7 +29469,7 @@
             </a:ln>
             <a:extLst>
               <a:ext uri="{91240B29-F687-4f45-9708-019B960494DF}">
-                <a14:hiddenLine xmlns="" xmlns:a16="http://schemas.microsoft.com/office/drawing/2014/main" xmlns:p14="http://schemas.microsoft.com/office/powerpoint/2010/main" xmlns:a14="http://schemas.microsoft.com/office/drawing/2010/main" w="9525">
+                <a14:hiddenLine xmlns:a14="http://schemas.microsoft.com/office/drawing/2010/main" xmlns:p14="http://schemas.microsoft.com/office/powerpoint/2010/main" xmlns:a16="http://schemas.microsoft.com/office/drawing/2014/main" xmlns="" w="9525">
                   <a:solidFill>
                     <a:srgbClr val="000000"/>
                   </a:solidFill>
@@ -27578,7 +29553,7 @@
             </a:ln>
             <a:extLst>
               <a:ext uri="{91240B29-F687-4f45-9708-019B960494DF}">
-                <a14:hiddenLine xmlns="" xmlns:a16="http://schemas.microsoft.com/office/drawing/2014/main" xmlns:p14="http://schemas.microsoft.com/office/powerpoint/2010/main" xmlns:a14="http://schemas.microsoft.com/office/drawing/2010/main" w="9525">
+                <a14:hiddenLine xmlns:a14="http://schemas.microsoft.com/office/drawing/2010/main" xmlns:p14="http://schemas.microsoft.com/office/powerpoint/2010/main" xmlns:a16="http://schemas.microsoft.com/office/drawing/2014/main" xmlns="" w="9525">
                   <a:solidFill>
                     <a:srgbClr val="000000"/>
                   </a:solidFill>
@@ -27710,7 +29685,7 @@
             </a:ln>
             <a:extLst>
               <a:ext uri="{91240B29-F687-4f45-9708-019B960494DF}">
-                <a14:hiddenLine xmlns="" xmlns:a16="http://schemas.microsoft.com/office/drawing/2014/main" xmlns:p14="http://schemas.microsoft.com/office/powerpoint/2010/main" xmlns:a14="http://schemas.microsoft.com/office/drawing/2010/main" w="9525">
+                <a14:hiddenLine xmlns:a14="http://schemas.microsoft.com/office/drawing/2010/main" xmlns:p14="http://schemas.microsoft.com/office/powerpoint/2010/main" xmlns:a16="http://schemas.microsoft.com/office/drawing/2014/main" xmlns="" w="9525">
                   <a:solidFill>
                     <a:srgbClr val="000000"/>
                   </a:solidFill>
@@ -27838,7 +29813,7 @@
             </a:ln>
             <a:extLst>
               <a:ext uri="{91240B29-F687-4f45-9708-019B960494DF}">
-                <a14:hiddenLine xmlns="" xmlns:a16="http://schemas.microsoft.com/office/drawing/2014/main" xmlns:p14="http://schemas.microsoft.com/office/powerpoint/2010/main" xmlns:a14="http://schemas.microsoft.com/office/drawing/2010/main" w="9525">
+                <a14:hiddenLine xmlns:a14="http://schemas.microsoft.com/office/drawing/2010/main" xmlns:p14="http://schemas.microsoft.com/office/powerpoint/2010/main" xmlns:a16="http://schemas.microsoft.com/office/drawing/2014/main" xmlns="" w="9525">
                   <a:solidFill>
                     <a:srgbClr val="000000"/>
                   </a:solidFill>
@@ -27922,7 +29897,7 @@
             </a:ln>
             <a:extLst>
               <a:ext uri="{91240B29-F687-4f45-9708-019B960494DF}">
-                <a14:hiddenLine xmlns="" xmlns:a16="http://schemas.microsoft.com/office/drawing/2014/main" xmlns:p14="http://schemas.microsoft.com/office/powerpoint/2010/main" xmlns:a14="http://schemas.microsoft.com/office/drawing/2010/main" w="9525">
+                <a14:hiddenLine xmlns:a14="http://schemas.microsoft.com/office/drawing/2010/main" xmlns:p14="http://schemas.microsoft.com/office/powerpoint/2010/main" xmlns:a16="http://schemas.microsoft.com/office/drawing/2014/main" xmlns="" w="9525">
                   <a:solidFill>
                     <a:srgbClr val="000000"/>
                   </a:solidFill>
@@ -28006,7 +29981,7 @@
             </a:ln>
             <a:extLst>
               <a:ext uri="{91240B29-F687-4f45-9708-019B960494DF}">
-                <a14:hiddenLine xmlns="" xmlns:a16="http://schemas.microsoft.com/office/drawing/2014/main" xmlns:p14="http://schemas.microsoft.com/office/powerpoint/2010/main" xmlns:a14="http://schemas.microsoft.com/office/drawing/2010/main" w="9525">
+                <a14:hiddenLine xmlns:a14="http://schemas.microsoft.com/office/drawing/2010/main" xmlns:p14="http://schemas.microsoft.com/office/powerpoint/2010/main" xmlns:a16="http://schemas.microsoft.com/office/drawing/2014/main" xmlns="" w="9525">
                   <a:solidFill>
                     <a:srgbClr val="000000"/>
                   </a:solidFill>
@@ -28118,7 +30093,7 @@
             </a:ln>
             <a:extLst>
               <a:ext uri="{91240B29-F687-4f45-9708-019B960494DF}">
-                <a14:hiddenLine xmlns="" xmlns:a16="http://schemas.microsoft.com/office/drawing/2014/main" xmlns:p14="http://schemas.microsoft.com/office/powerpoint/2010/main" xmlns:a14="http://schemas.microsoft.com/office/drawing/2010/main" w="9525">
+                <a14:hiddenLine xmlns:a14="http://schemas.microsoft.com/office/drawing/2010/main" xmlns:p14="http://schemas.microsoft.com/office/powerpoint/2010/main" xmlns:a16="http://schemas.microsoft.com/office/drawing/2014/main" xmlns="" w="9525">
                   <a:solidFill>
                     <a:srgbClr val="000000"/>
                   </a:solidFill>
@@ -28174,7 +30149,7 @@
             </a:ln>
             <a:extLst>
               <a:ext uri="{91240B29-F687-4f45-9708-019B960494DF}">
-                <a14:hiddenLine xmlns="" xmlns:a16="http://schemas.microsoft.com/office/drawing/2014/main" xmlns:p14="http://schemas.microsoft.com/office/powerpoint/2010/main" xmlns:a14="http://schemas.microsoft.com/office/drawing/2010/main" w="9525">
+                <a14:hiddenLine xmlns:a14="http://schemas.microsoft.com/office/drawing/2010/main" xmlns:p14="http://schemas.microsoft.com/office/powerpoint/2010/main" xmlns:a16="http://schemas.microsoft.com/office/drawing/2014/main" xmlns="" w="9525">
                   <a:solidFill>
                     <a:srgbClr val="000000"/>
                   </a:solidFill>
@@ -28261,7 +30236,7 @@
             </a:ln>
             <a:extLst>
               <a:ext uri="{91240B29-F687-4f45-9708-019B960494DF}">
-                <a14:hiddenLine xmlns="" xmlns:a16="http://schemas.microsoft.com/office/drawing/2014/main" xmlns:p14="http://schemas.microsoft.com/office/powerpoint/2010/main" xmlns:a14="http://schemas.microsoft.com/office/drawing/2010/main" w="9525">
+                <a14:hiddenLine xmlns:a14="http://schemas.microsoft.com/office/drawing/2010/main" xmlns:p14="http://schemas.microsoft.com/office/powerpoint/2010/main" xmlns:a16="http://schemas.microsoft.com/office/drawing/2014/main" xmlns="" w="9525">
                   <a:solidFill>
                     <a:srgbClr val="000000"/>
                   </a:solidFill>
@@ -28373,7 +30348,7 @@
             </a:ln>
             <a:extLst>
               <a:ext uri="{91240B29-F687-4f45-9708-019B960494DF}">
-                <a14:hiddenLine xmlns="" xmlns:a16="http://schemas.microsoft.com/office/drawing/2014/main" xmlns:p14="http://schemas.microsoft.com/office/powerpoint/2010/main" xmlns:a14="http://schemas.microsoft.com/office/drawing/2010/main" w="9525">
+                <a14:hiddenLine xmlns:a14="http://schemas.microsoft.com/office/drawing/2010/main" xmlns:p14="http://schemas.microsoft.com/office/powerpoint/2010/main" xmlns:a16="http://schemas.microsoft.com/office/drawing/2014/main" xmlns="" w="9525">
                   <a:solidFill>
                     <a:srgbClr val="000000"/>
                   </a:solidFill>
@@ -28457,7 +30432,7 @@
             </a:ln>
             <a:extLst>
               <a:ext uri="{91240B29-F687-4f45-9708-019B960494DF}">
-                <a14:hiddenLine xmlns="" xmlns:a16="http://schemas.microsoft.com/office/drawing/2014/main" xmlns:p14="http://schemas.microsoft.com/office/powerpoint/2010/main" xmlns:a14="http://schemas.microsoft.com/office/drawing/2010/main" w="9525">
+                <a14:hiddenLine xmlns:a14="http://schemas.microsoft.com/office/drawing/2010/main" xmlns:p14="http://schemas.microsoft.com/office/powerpoint/2010/main" xmlns:a16="http://schemas.microsoft.com/office/drawing/2014/main" xmlns="" w="9525">
                   <a:solidFill>
                     <a:srgbClr val="000000"/>
                   </a:solidFill>
@@ -28569,7 +30544,7 @@
             </a:ln>
             <a:extLst>
               <a:ext uri="{91240B29-F687-4f45-9708-019B960494DF}">
-                <a14:hiddenLine xmlns="" xmlns:a16="http://schemas.microsoft.com/office/drawing/2014/main" xmlns:p14="http://schemas.microsoft.com/office/powerpoint/2010/main" xmlns:a14="http://schemas.microsoft.com/office/drawing/2010/main" w="9525">
+                <a14:hiddenLine xmlns:a14="http://schemas.microsoft.com/office/drawing/2010/main" xmlns:p14="http://schemas.microsoft.com/office/powerpoint/2010/main" xmlns:a16="http://schemas.microsoft.com/office/drawing/2014/main" xmlns="" w="9525">
                   <a:solidFill>
                     <a:srgbClr val="000000"/>
                   </a:solidFill>
@@ -28656,7 +30631,7 @@
             </a:ln>
             <a:extLst>
               <a:ext uri="{91240B29-F687-4f45-9708-019B960494DF}">
-                <a14:hiddenLine xmlns="" xmlns:a16="http://schemas.microsoft.com/office/drawing/2014/main" xmlns:p14="http://schemas.microsoft.com/office/powerpoint/2010/main" xmlns:a14="http://schemas.microsoft.com/office/drawing/2010/main" w="9525">
+                <a14:hiddenLine xmlns:a14="http://schemas.microsoft.com/office/drawing/2010/main" xmlns:p14="http://schemas.microsoft.com/office/powerpoint/2010/main" xmlns:a16="http://schemas.microsoft.com/office/drawing/2014/main" xmlns="" w="9525">
                   <a:solidFill>
                     <a:srgbClr val="000000"/>
                   </a:solidFill>
@@ -28740,7 +30715,7 @@
             </a:ln>
             <a:extLst>
               <a:ext uri="{91240B29-F687-4f45-9708-019B960494DF}">
-                <a14:hiddenLine xmlns="" xmlns:a16="http://schemas.microsoft.com/office/drawing/2014/main" xmlns:p14="http://schemas.microsoft.com/office/powerpoint/2010/main" xmlns:a14="http://schemas.microsoft.com/office/drawing/2010/main" w="9525">
+                <a14:hiddenLine xmlns:a14="http://schemas.microsoft.com/office/drawing/2010/main" xmlns:p14="http://schemas.microsoft.com/office/powerpoint/2010/main" xmlns:a16="http://schemas.microsoft.com/office/drawing/2014/main" xmlns="" w="9525">
                   <a:solidFill>
                     <a:srgbClr val="000000"/>
                   </a:solidFill>
@@ -28852,7 +30827,7 @@
             </a:ln>
             <a:extLst>
               <a:ext uri="{91240B29-F687-4f45-9708-019B960494DF}">
-                <a14:hiddenLine xmlns="" xmlns:a16="http://schemas.microsoft.com/office/drawing/2014/main" xmlns:p14="http://schemas.microsoft.com/office/powerpoint/2010/main" xmlns:a14="http://schemas.microsoft.com/office/drawing/2010/main" w="9525">
+                <a14:hiddenLine xmlns:a14="http://schemas.microsoft.com/office/drawing/2010/main" xmlns:p14="http://schemas.microsoft.com/office/powerpoint/2010/main" xmlns:a16="http://schemas.microsoft.com/office/drawing/2014/main" xmlns="" w="9525">
                   <a:solidFill>
                     <a:srgbClr val="000000"/>
                   </a:solidFill>
@@ -28964,7 +30939,7 @@
             </a:ln>
             <a:extLst>
               <a:ext uri="{91240B29-F687-4f45-9708-019B960494DF}">
-                <a14:hiddenLine xmlns="" xmlns:a16="http://schemas.microsoft.com/office/drawing/2014/main" xmlns:p14="http://schemas.microsoft.com/office/powerpoint/2010/main" xmlns:a14="http://schemas.microsoft.com/office/drawing/2010/main" w="9525">
+                <a14:hiddenLine xmlns:a14="http://schemas.microsoft.com/office/drawing/2010/main" xmlns:p14="http://schemas.microsoft.com/office/powerpoint/2010/main" xmlns:a16="http://schemas.microsoft.com/office/drawing/2014/main" xmlns="" w="9525">
                   <a:solidFill>
                     <a:srgbClr val="000000"/>
                   </a:solidFill>
@@ -29051,7 +31026,7 @@
             </a:ln>
             <a:extLst>
               <a:ext uri="{91240B29-F687-4f45-9708-019B960494DF}">
-                <a14:hiddenLine xmlns="" xmlns:a16="http://schemas.microsoft.com/office/drawing/2014/main" xmlns:p14="http://schemas.microsoft.com/office/powerpoint/2010/main" xmlns:a14="http://schemas.microsoft.com/office/drawing/2010/main" w="9525">
+                <a14:hiddenLine xmlns:a14="http://schemas.microsoft.com/office/drawing/2010/main" xmlns:p14="http://schemas.microsoft.com/office/powerpoint/2010/main" xmlns:a16="http://schemas.microsoft.com/office/drawing/2014/main" xmlns="" w="9525">
                   <a:solidFill>
                     <a:srgbClr val="000000"/>
                   </a:solidFill>
@@ -29193,7 +31168,7 @@
             </a:ln>
             <a:extLst>
               <a:ext uri="{91240B29-F687-4f45-9708-019B960494DF}">
-                <a14:hiddenLine xmlns="" xmlns:a16="http://schemas.microsoft.com/office/drawing/2014/main" xmlns:p14="http://schemas.microsoft.com/office/powerpoint/2010/main" xmlns:a14="http://schemas.microsoft.com/office/drawing/2010/main" w="9525">
+                <a14:hiddenLine xmlns:a14="http://schemas.microsoft.com/office/drawing/2010/main" xmlns:p14="http://schemas.microsoft.com/office/powerpoint/2010/main" xmlns:a16="http://schemas.microsoft.com/office/drawing/2014/main" xmlns="" w="9525">
                   <a:solidFill>
                     <a:srgbClr val="000000"/>
                   </a:solidFill>
@@ -29385,7 +31360,7 @@
             </a:ln>
             <a:extLst>
               <a:ext uri="{91240B29-F687-4f45-9708-019B960494DF}">
-                <a14:hiddenLine xmlns="" xmlns:a16="http://schemas.microsoft.com/office/drawing/2014/main" xmlns:p14="http://schemas.microsoft.com/office/powerpoint/2010/main" xmlns:a14="http://schemas.microsoft.com/office/drawing/2010/main" w="9525">
+                <a14:hiddenLine xmlns:a14="http://schemas.microsoft.com/office/drawing/2010/main" xmlns:p14="http://schemas.microsoft.com/office/powerpoint/2010/main" xmlns:a16="http://schemas.microsoft.com/office/drawing/2014/main" xmlns="" w="9525">
                   <a:solidFill>
                     <a:srgbClr val="000000"/>
                   </a:solidFill>
@@ -29522,7 +31497,7 @@
             </a:ln>
             <a:extLst>
               <a:ext uri="{91240B29-F687-4f45-9708-019B960494DF}">
-                <a14:hiddenLine xmlns="" xmlns:a16="http://schemas.microsoft.com/office/drawing/2014/main" xmlns:p14="http://schemas.microsoft.com/office/powerpoint/2010/main" xmlns:a14="http://schemas.microsoft.com/office/drawing/2010/main" w="9525">
+                <a14:hiddenLine xmlns:a14="http://schemas.microsoft.com/office/drawing/2010/main" xmlns:p14="http://schemas.microsoft.com/office/powerpoint/2010/main" xmlns:a16="http://schemas.microsoft.com/office/drawing/2014/main" xmlns="" w="9525">
                   <a:solidFill>
                     <a:srgbClr val="000000"/>
                   </a:solidFill>
@@ -29634,7 +31609,7 @@
             </a:ln>
             <a:extLst>
               <a:ext uri="{91240B29-F687-4f45-9708-019B960494DF}">
-                <a14:hiddenLine xmlns="" xmlns:a16="http://schemas.microsoft.com/office/drawing/2014/main" xmlns:p14="http://schemas.microsoft.com/office/powerpoint/2010/main" xmlns:a14="http://schemas.microsoft.com/office/drawing/2010/main" w="9525">
+                <a14:hiddenLine xmlns:a14="http://schemas.microsoft.com/office/drawing/2010/main" xmlns:p14="http://schemas.microsoft.com/office/powerpoint/2010/main" xmlns:a16="http://schemas.microsoft.com/office/drawing/2014/main" xmlns="" w="9525">
                   <a:solidFill>
                     <a:srgbClr val="000000"/>
                   </a:solidFill>
@@ -29721,7 +31696,7 @@
             </a:ln>
             <a:extLst>
               <a:ext uri="{91240B29-F687-4f45-9708-019B960494DF}">
-                <a14:hiddenLine xmlns="" xmlns:a16="http://schemas.microsoft.com/office/drawing/2014/main" xmlns:p14="http://schemas.microsoft.com/office/powerpoint/2010/main" xmlns:a14="http://schemas.microsoft.com/office/drawing/2010/main" w="9525">
+                <a14:hiddenLine xmlns:a14="http://schemas.microsoft.com/office/drawing/2010/main" xmlns:p14="http://schemas.microsoft.com/office/powerpoint/2010/main" xmlns:a16="http://schemas.microsoft.com/office/drawing/2014/main" xmlns="" w="9525">
                   <a:solidFill>
                     <a:srgbClr val="000000"/>
                   </a:solidFill>
@@ -29833,7 +31808,7 @@
             </a:ln>
             <a:extLst>
               <a:ext uri="{91240B29-F687-4f45-9708-019B960494DF}">
-                <a14:hiddenLine xmlns="" xmlns:a16="http://schemas.microsoft.com/office/drawing/2014/main" xmlns:p14="http://schemas.microsoft.com/office/powerpoint/2010/main" xmlns:a14="http://schemas.microsoft.com/office/drawing/2010/main" w="9525">
+                <a14:hiddenLine xmlns:a14="http://schemas.microsoft.com/office/drawing/2010/main" xmlns:p14="http://schemas.microsoft.com/office/powerpoint/2010/main" xmlns:a16="http://schemas.microsoft.com/office/drawing/2014/main" xmlns="" w="9525">
                   <a:solidFill>
                     <a:srgbClr val="000000"/>
                   </a:solidFill>
@@ -29923,7 +31898,7 @@
             </a:ln>
             <a:extLst>
               <a:ext uri="{91240B29-F687-4f45-9708-019B960494DF}">
-                <a14:hiddenLine xmlns="" xmlns:a16="http://schemas.microsoft.com/office/drawing/2014/main" xmlns:p14="http://schemas.microsoft.com/office/powerpoint/2010/main" xmlns:a14="http://schemas.microsoft.com/office/drawing/2010/main" w="9525">
+                <a14:hiddenLine xmlns:a14="http://schemas.microsoft.com/office/drawing/2010/main" xmlns:p14="http://schemas.microsoft.com/office/powerpoint/2010/main" xmlns:a16="http://schemas.microsoft.com/office/drawing/2014/main" xmlns="" w="9525">
                   <a:solidFill>
                     <a:srgbClr val="000000"/>
                   </a:solidFill>
@@ -30035,7 +32010,7 @@
             </a:ln>
             <a:extLst>
               <a:ext uri="{91240B29-F687-4f45-9708-019B960494DF}">
-                <a14:hiddenLine xmlns="" xmlns:a16="http://schemas.microsoft.com/office/drawing/2014/main" xmlns:p14="http://schemas.microsoft.com/office/powerpoint/2010/main" xmlns:a14="http://schemas.microsoft.com/office/drawing/2010/main" w="9525">
+                <a14:hiddenLine xmlns:a14="http://schemas.microsoft.com/office/drawing/2010/main" xmlns:p14="http://schemas.microsoft.com/office/powerpoint/2010/main" xmlns:a16="http://schemas.microsoft.com/office/drawing/2014/main" xmlns="" w="9525">
                   <a:solidFill>
                     <a:srgbClr val="000000"/>
                   </a:solidFill>
@@ -30125,7 +32100,7 @@
             </a:ln>
             <a:extLst>
               <a:ext uri="{91240B29-F687-4f45-9708-019B960494DF}">
-                <a14:hiddenLine xmlns="" xmlns:a16="http://schemas.microsoft.com/office/drawing/2014/main" xmlns:p14="http://schemas.microsoft.com/office/powerpoint/2010/main" xmlns:a14="http://schemas.microsoft.com/office/drawing/2010/main" w="9525">
+                <a14:hiddenLine xmlns:a14="http://schemas.microsoft.com/office/drawing/2010/main" xmlns:p14="http://schemas.microsoft.com/office/powerpoint/2010/main" xmlns:a16="http://schemas.microsoft.com/office/drawing/2014/main" xmlns="" w="9525">
                   <a:solidFill>
                     <a:srgbClr val="000000"/>
                   </a:solidFill>
@@ -30237,7 +32212,7 @@
             </a:ln>
             <a:extLst>
               <a:ext uri="{91240B29-F687-4f45-9708-019B960494DF}">
-                <a14:hiddenLine xmlns="" xmlns:a16="http://schemas.microsoft.com/office/drawing/2014/main" xmlns:p14="http://schemas.microsoft.com/office/powerpoint/2010/main" xmlns:a14="http://schemas.microsoft.com/office/drawing/2010/main" w="9525">
+                <a14:hiddenLine xmlns:a14="http://schemas.microsoft.com/office/drawing/2010/main" xmlns:p14="http://schemas.microsoft.com/office/powerpoint/2010/main" xmlns:a16="http://schemas.microsoft.com/office/drawing/2014/main" xmlns="" w="9525">
                   <a:solidFill>
                     <a:srgbClr val="000000"/>
                   </a:solidFill>
@@ -30293,7 +32268,7 @@
             </a:ln>
             <a:extLst>
               <a:ext uri="{91240B29-F687-4f45-9708-019B960494DF}">
-                <a14:hiddenLine xmlns="" xmlns:a16="http://schemas.microsoft.com/office/drawing/2014/main" xmlns:p14="http://schemas.microsoft.com/office/powerpoint/2010/main" xmlns:a14="http://schemas.microsoft.com/office/drawing/2010/main" w="9525">
+                <a14:hiddenLine xmlns:a14="http://schemas.microsoft.com/office/drawing/2010/main" xmlns:p14="http://schemas.microsoft.com/office/powerpoint/2010/main" xmlns:a16="http://schemas.microsoft.com/office/drawing/2014/main" xmlns="" w="9525">
                   <a:solidFill>
                     <a:srgbClr val="000000"/>
                   </a:solidFill>
@@ -30538,6 +32513,1056 @@
 </p:sld>
 </file>
 
+<file path=ppt/slides/slide30.xml><?xml version="1.0" encoding="utf-8"?>
+<p:sld xmlns:a="http://schemas.openxmlformats.org/drawingml/2006/main" xmlns:r="http://schemas.openxmlformats.org/officeDocument/2006/relationships" xmlns:p="http://schemas.openxmlformats.org/presentationml/2006/main">
+  <p:cSld>
+    <p:spTree>
+      <p:nvGrpSpPr>
+        <p:cNvPr id="1" name=""/>
+        <p:cNvGrpSpPr/>
+        <p:nvPr/>
+      </p:nvGrpSpPr>
+      <p:grpSpPr>
+        <a:xfrm>
+          <a:off x="0" y="0"/>
+          <a:ext cx="0" cy="0"/>
+          <a:chOff x="0" y="0"/>
+          <a:chExt cx="0" cy="0"/>
+        </a:xfrm>
+      </p:grpSpPr>
+      <p:sp>
+        <p:nvSpPr>
+          <p:cNvPr id="2" name="Title 1">
+            <a:extLst>
+              <a:ext uri="{FF2B5EF4-FFF2-40B4-BE49-F238E27FC236}">
+                <a16:creationId xmlns:a16="http://schemas.microsoft.com/office/drawing/2014/main" id="{A191CCD2-9817-A698-FEBC-AF94A00D68AF}"/>
+              </a:ext>
+            </a:extLst>
+          </p:cNvPr>
+          <p:cNvSpPr>
+            <a:spLocks noGrp="1"/>
+          </p:cNvSpPr>
+          <p:nvPr>
+            <p:ph type="title"/>
+          </p:nvPr>
+        </p:nvSpPr>
+        <p:spPr/>
+        <p:txBody>
+          <a:bodyPr/>
+          <a:lstStyle/>
+          <a:p>
+            <a:r>
+              <a:rPr lang="en-MY" dirty="0"/>
+              <a:t>Data transfer object (</a:t>
+            </a:r>
+            <a:r>
+              <a:rPr lang="en-MY" dirty="0" err="1"/>
+              <a:t>dto</a:t>
+            </a:r>
+            <a:r>
+              <a:rPr lang="en-MY" dirty="0"/>
+              <a:t>)</a:t>
+            </a:r>
+          </a:p>
+        </p:txBody>
+      </p:sp>
+      <p:pic>
+        <p:nvPicPr>
+          <p:cNvPr id="9" name="Content Placeholder 8">
+            <a:extLst>
+              <a:ext uri="{FF2B5EF4-FFF2-40B4-BE49-F238E27FC236}">
+                <a16:creationId xmlns:a16="http://schemas.microsoft.com/office/drawing/2014/main" id="{C31723D9-044A-393D-870E-8610B271F13F}"/>
+              </a:ext>
+            </a:extLst>
+          </p:cNvPr>
+          <p:cNvPicPr>
+            <a:picLocks noGrp="1" noChangeAspect="1"/>
+          </p:cNvPicPr>
+          <p:nvPr>
+            <p:ph idx="1"/>
+          </p:nvPr>
+        </p:nvPicPr>
+        <p:blipFill>
+          <a:blip r:embed="rId2"/>
+          <a:stretch>
+            <a:fillRect/>
+          </a:stretch>
+        </p:blipFill>
+        <p:spPr>
+          <a:xfrm>
+            <a:off x="1141413" y="1923340"/>
+            <a:ext cx="6000750" cy="2686050"/>
+          </a:xfrm>
+        </p:spPr>
+      </p:pic>
+    </p:spTree>
+    <p:extLst>
+      <p:ext uri="{BB962C8B-B14F-4D97-AF65-F5344CB8AC3E}">
+        <p14:creationId xmlns:p14="http://schemas.microsoft.com/office/powerpoint/2010/main" val="912024172"/>
+      </p:ext>
+    </p:extLst>
+  </p:cSld>
+  <p:clrMapOvr>
+    <a:masterClrMapping/>
+  </p:clrMapOvr>
+</p:sld>
+</file>
+
+<file path=ppt/slides/slide31.xml><?xml version="1.0" encoding="utf-8"?>
+<p:sld xmlns:a="http://schemas.openxmlformats.org/drawingml/2006/main" xmlns:r="http://schemas.openxmlformats.org/officeDocument/2006/relationships" xmlns:p="http://schemas.openxmlformats.org/presentationml/2006/main">
+  <p:cSld>
+    <p:spTree>
+      <p:nvGrpSpPr>
+        <p:cNvPr id="1" name=""/>
+        <p:cNvGrpSpPr/>
+        <p:nvPr/>
+      </p:nvGrpSpPr>
+      <p:grpSpPr>
+        <a:xfrm>
+          <a:off x="0" y="0"/>
+          <a:ext cx="0" cy="0"/>
+          <a:chOff x="0" y="0"/>
+          <a:chExt cx="0" cy="0"/>
+        </a:xfrm>
+      </p:grpSpPr>
+      <p:sp>
+        <p:nvSpPr>
+          <p:cNvPr id="2" name="Title 1">
+            <a:extLst>
+              <a:ext uri="{FF2B5EF4-FFF2-40B4-BE49-F238E27FC236}">
+                <a16:creationId xmlns:a16="http://schemas.microsoft.com/office/drawing/2014/main" id="{A6DD36C2-2B04-B897-9B16-FE4B291BBB47}"/>
+              </a:ext>
+            </a:extLst>
+          </p:cNvPr>
+          <p:cNvSpPr>
+            <a:spLocks noGrp="1"/>
+          </p:cNvSpPr>
+          <p:nvPr>
+            <p:ph type="title"/>
+          </p:nvPr>
+        </p:nvSpPr>
+        <p:spPr/>
+        <p:txBody>
+          <a:bodyPr/>
+          <a:lstStyle/>
+          <a:p>
+            <a:r>
+              <a:rPr lang="en-MY" dirty="0"/>
+              <a:t>Create a list of games</a:t>
+            </a:r>
+          </a:p>
+        </p:txBody>
+      </p:sp>
+      <p:pic>
+        <p:nvPicPr>
+          <p:cNvPr id="5" name="Content Placeholder 4">
+            <a:extLst>
+              <a:ext uri="{FF2B5EF4-FFF2-40B4-BE49-F238E27FC236}">
+                <a16:creationId xmlns:a16="http://schemas.microsoft.com/office/drawing/2014/main" id="{D3167437-8BDE-21F7-57DA-FCD1E373994E}"/>
+              </a:ext>
+            </a:extLst>
+          </p:cNvPr>
+          <p:cNvPicPr>
+            <a:picLocks noGrp="1" noChangeAspect="1"/>
+          </p:cNvPicPr>
+          <p:nvPr>
+            <p:ph idx="1"/>
+          </p:nvPr>
+        </p:nvPicPr>
+        <p:blipFill>
+          <a:blip r:embed="rId2"/>
+          <a:stretch>
+            <a:fillRect/>
+          </a:stretch>
+        </p:blipFill>
+        <p:spPr>
+          <a:xfrm>
+            <a:off x="1141413" y="2563807"/>
+            <a:ext cx="9906000" cy="2913074"/>
+          </a:xfrm>
+        </p:spPr>
+      </p:pic>
+      <p:sp>
+        <p:nvSpPr>
+          <p:cNvPr id="6" name="Speech Bubble: Rectangle with Corners Rounded 5">
+            <a:extLst>
+              <a:ext uri="{FF2B5EF4-FFF2-40B4-BE49-F238E27FC236}">
+                <a16:creationId xmlns:a16="http://schemas.microsoft.com/office/drawing/2014/main" id="{E3AA29F2-764A-B712-16D6-1FF448C0142D}"/>
+              </a:ext>
+            </a:extLst>
+          </p:cNvPr>
+          <p:cNvSpPr/>
+          <p:nvPr/>
+        </p:nvSpPr>
+        <p:spPr>
+          <a:xfrm>
+            <a:off x="7626330" y="3429000"/>
+            <a:ext cx="1493920" cy="792480"/>
+          </a:xfrm>
+          <a:prstGeom prst="wedgeRoundRectCallout">
+            <a:avLst>
+              <a:gd name="adj1" fmla="val -88617"/>
+              <a:gd name="adj2" fmla="val 81049"/>
+              <a:gd name="adj3" fmla="val 16667"/>
+            </a:avLst>
+          </a:prstGeom>
+        </p:spPr>
+        <p:style>
+          <a:lnRef idx="2">
+            <a:schemeClr val="accent1">
+              <a:shade val="15000"/>
+            </a:schemeClr>
+          </a:lnRef>
+          <a:fillRef idx="1">
+            <a:schemeClr val="accent1"/>
+          </a:fillRef>
+          <a:effectRef idx="0">
+            <a:schemeClr val="accent1"/>
+          </a:effectRef>
+          <a:fontRef idx="minor">
+            <a:schemeClr val="lt1"/>
+          </a:fontRef>
+        </p:style>
+        <p:txBody>
+          <a:bodyPr rtlCol="0" anchor="ctr"/>
+          <a:lstStyle/>
+          <a:p>
+            <a:pPr algn="ctr"/>
+            <a:r>
+              <a:rPr lang="en-MY" dirty="0"/>
+              <a:t>Sample data</a:t>
+            </a:r>
+          </a:p>
+        </p:txBody>
+      </p:sp>
+    </p:spTree>
+    <p:extLst>
+      <p:ext uri="{BB962C8B-B14F-4D97-AF65-F5344CB8AC3E}">
+        <p14:creationId xmlns:p14="http://schemas.microsoft.com/office/powerpoint/2010/main" val="1146438064"/>
+      </p:ext>
+    </p:extLst>
+  </p:cSld>
+  <p:clrMapOvr>
+    <a:masterClrMapping/>
+  </p:clrMapOvr>
+</p:sld>
+</file>
+
+<file path=ppt/slides/slide32.xml><?xml version="1.0" encoding="utf-8"?>
+<p:sld xmlns:a="http://schemas.openxmlformats.org/drawingml/2006/main" xmlns:r="http://schemas.openxmlformats.org/officeDocument/2006/relationships" xmlns:p="http://schemas.openxmlformats.org/presentationml/2006/main">
+  <p:cSld>
+    <p:spTree>
+      <p:nvGrpSpPr>
+        <p:cNvPr id="1" name=""/>
+        <p:cNvGrpSpPr/>
+        <p:nvPr/>
+      </p:nvGrpSpPr>
+      <p:grpSpPr>
+        <a:xfrm>
+          <a:off x="0" y="0"/>
+          <a:ext cx="0" cy="0"/>
+          <a:chOff x="0" y="0"/>
+          <a:chExt cx="0" cy="0"/>
+        </a:xfrm>
+      </p:grpSpPr>
+      <p:sp>
+        <p:nvSpPr>
+          <p:cNvPr id="2" name="Title 1">
+            <a:extLst>
+              <a:ext uri="{FF2B5EF4-FFF2-40B4-BE49-F238E27FC236}">
+                <a16:creationId xmlns:a16="http://schemas.microsoft.com/office/drawing/2014/main" id="{5BA6ACEA-E101-D1FF-CC86-AA373AD63A6D}"/>
+              </a:ext>
+            </a:extLst>
+          </p:cNvPr>
+          <p:cNvSpPr>
+            <a:spLocks noGrp="1"/>
+          </p:cNvSpPr>
+          <p:nvPr>
+            <p:ph type="title"/>
+          </p:nvPr>
+        </p:nvSpPr>
+        <p:spPr/>
+        <p:txBody>
+          <a:bodyPr/>
+          <a:lstStyle/>
+          <a:p>
+            <a:r>
+              <a:rPr lang="en-MY" dirty="0"/>
+              <a:t>Game Endpoints</a:t>
+            </a:r>
+          </a:p>
+        </p:txBody>
+      </p:sp>
+      <p:pic>
+        <p:nvPicPr>
+          <p:cNvPr id="5" name="Content Placeholder 4">
+            <a:extLst>
+              <a:ext uri="{FF2B5EF4-FFF2-40B4-BE49-F238E27FC236}">
+                <a16:creationId xmlns:a16="http://schemas.microsoft.com/office/drawing/2014/main" id="{0B2ECB69-72DB-DAE1-A6FB-C86AF1256C5D}"/>
+              </a:ext>
+            </a:extLst>
+          </p:cNvPr>
+          <p:cNvPicPr>
+            <a:picLocks noGrp="1" noChangeAspect="1"/>
+          </p:cNvPicPr>
+          <p:nvPr>
+            <p:ph idx="1"/>
+          </p:nvPr>
+        </p:nvPicPr>
+        <p:blipFill>
+          <a:blip r:embed="rId2"/>
+          <a:stretch>
+            <a:fillRect/>
+          </a:stretch>
+        </p:blipFill>
+        <p:spPr>
+          <a:xfrm>
+            <a:off x="1141413" y="2439502"/>
+            <a:ext cx="6153150" cy="2924175"/>
+          </a:xfrm>
+        </p:spPr>
+      </p:pic>
+      <p:sp>
+        <p:nvSpPr>
+          <p:cNvPr id="8" name="TextBox 7">
+            <a:extLst>
+              <a:ext uri="{FF2B5EF4-FFF2-40B4-BE49-F238E27FC236}">
+                <a16:creationId xmlns:a16="http://schemas.microsoft.com/office/drawing/2014/main" id="{DD07F851-497B-E3E8-F4A3-99CE6FD4C6D9}"/>
+              </a:ext>
+            </a:extLst>
+          </p:cNvPr>
+          <p:cNvSpPr txBox="1"/>
+          <p:nvPr/>
+        </p:nvSpPr>
+        <p:spPr>
+          <a:xfrm>
+            <a:off x="7633293" y="3059668"/>
+            <a:ext cx="1492909" cy="369332"/>
+          </a:xfrm>
+          <a:prstGeom prst="rect">
+            <a:avLst/>
+          </a:prstGeom>
+        </p:spPr>
+        <p:style>
+          <a:lnRef idx="2">
+            <a:schemeClr val="accent1"/>
+          </a:lnRef>
+          <a:fillRef idx="1">
+            <a:schemeClr val="lt1"/>
+          </a:fillRef>
+          <a:effectRef idx="0">
+            <a:schemeClr val="accent1"/>
+          </a:effectRef>
+          <a:fontRef idx="minor">
+            <a:schemeClr val="dk1"/>
+          </a:fontRef>
+        </p:style>
+        <p:txBody>
+          <a:bodyPr wrap="none" rtlCol="0">
+            <a:spAutoFit/>
+          </a:bodyPr>
+          <a:lstStyle/>
+          <a:p>
+            <a:r>
+              <a:rPr lang="en-MY" dirty="0"/>
+              <a:t>Get all games</a:t>
+            </a:r>
+          </a:p>
+        </p:txBody>
+      </p:sp>
+      <p:sp>
+        <p:nvSpPr>
+          <p:cNvPr id="9" name="TextBox 8">
+            <a:extLst>
+              <a:ext uri="{FF2B5EF4-FFF2-40B4-BE49-F238E27FC236}">
+                <a16:creationId xmlns:a16="http://schemas.microsoft.com/office/drawing/2014/main" id="{EBDBBA28-97AA-2785-5A7C-B946DCE851F1}"/>
+              </a:ext>
+            </a:extLst>
+          </p:cNvPr>
+          <p:cNvSpPr txBox="1"/>
+          <p:nvPr/>
+        </p:nvSpPr>
+        <p:spPr>
+          <a:xfrm>
+            <a:off x="7633293" y="3901589"/>
+            <a:ext cx="2398349" cy="369332"/>
+          </a:xfrm>
+          <a:prstGeom prst="rect">
+            <a:avLst/>
+          </a:prstGeom>
+        </p:spPr>
+        <p:style>
+          <a:lnRef idx="2">
+            <a:schemeClr val="accent1"/>
+          </a:lnRef>
+          <a:fillRef idx="1">
+            <a:schemeClr val="lt1"/>
+          </a:fillRef>
+          <a:effectRef idx="0">
+            <a:schemeClr val="accent1"/>
+          </a:effectRef>
+          <a:fontRef idx="minor">
+            <a:schemeClr val="dk1"/>
+          </a:fontRef>
+        </p:style>
+        <p:txBody>
+          <a:bodyPr wrap="none" rtlCol="0">
+            <a:spAutoFit/>
+          </a:bodyPr>
+          <a:lstStyle/>
+          <a:p>
+            <a:r>
+              <a:rPr lang="en-MY" dirty="0"/>
+              <a:t>Get specific game by Id</a:t>
+            </a:r>
+          </a:p>
+        </p:txBody>
+      </p:sp>
+    </p:spTree>
+    <p:extLst>
+      <p:ext uri="{BB962C8B-B14F-4D97-AF65-F5344CB8AC3E}">
+        <p14:creationId xmlns:p14="http://schemas.microsoft.com/office/powerpoint/2010/main" val="3529764817"/>
+      </p:ext>
+    </p:extLst>
+  </p:cSld>
+  <p:clrMapOvr>
+    <a:masterClrMapping/>
+  </p:clrMapOvr>
+</p:sld>
+</file>
+
+<file path=ppt/slides/slide33.xml><?xml version="1.0" encoding="utf-8"?>
+<p:sld xmlns:a="http://schemas.openxmlformats.org/drawingml/2006/main" xmlns:r="http://schemas.openxmlformats.org/officeDocument/2006/relationships" xmlns:p="http://schemas.openxmlformats.org/presentationml/2006/main">
+  <p:cSld>
+    <p:spTree>
+      <p:nvGrpSpPr>
+        <p:cNvPr id="1" name=""/>
+        <p:cNvGrpSpPr/>
+        <p:nvPr/>
+      </p:nvGrpSpPr>
+      <p:grpSpPr>
+        <a:xfrm>
+          <a:off x="0" y="0"/>
+          <a:ext cx="0" cy="0"/>
+          <a:chOff x="0" y="0"/>
+          <a:chExt cx="0" cy="0"/>
+        </a:xfrm>
+      </p:grpSpPr>
+      <p:sp>
+        <p:nvSpPr>
+          <p:cNvPr id="2" name="Title 1">
+            <a:extLst>
+              <a:ext uri="{FF2B5EF4-FFF2-40B4-BE49-F238E27FC236}">
+                <a16:creationId xmlns:a16="http://schemas.microsoft.com/office/drawing/2014/main" id="{9D792EA4-D536-B23A-6C4F-50AF4B2CE121}"/>
+              </a:ext>
+            </a:extLst>
+          </p:cNvPr>
+          <p:cNvSpPr>
+            <a:spLocks noGrp="1"/>
+          </p:cNvSpPr>
+          <p:nvPr>
+            <p:ph type="title"/>
+          </p:nvPr>
+        </p:nvSpPr>
+        <p:spPr/>
+        <p:txBody>
+          <a:bodyPr/>
+          <a:lstStyle/>
+          <a:p>
+            <a:r>
+              <a:rPr lang="en-MY" dirty="0"/>
+              <a:t>Game Endpoints continue</a:t>
+            </a:r>
+          </a:p>
+        </p:txBody>
+      </p:sp>
+      <p:pic>
+        <p:nvPicPr>
+          <p:cNvPr id="5" name="Content Placeholder 4">
+            <a:extLst>
+              <a:ext uri="{FF2B5EF4-FFF2-40B4-BE49-F238E27FC236}">
+                <a16:creationId xmlns:a16="http://schemas.microsoft.com/office/drawing/2014/main" id="{E971BC88-9274-A49F-633F-1192126774FD}"/>
+              </a:ext>
+            </a:extLst>
+          </p:cNvPr>
+          <p:cNvPicPr>
+            <a:picLocks noGrp="1" noChangeAspect="1"/>
+          </p:cNvPicPr>
+          <p:nvPr>
+            <p:ph idx="1"/>
+          </p:nvPr>
+        </p:nvPicPr>
+        <p:blipFill>
+          <a:blip r:embed="rId2"/>
+          <a:stretch>
+            <a:fillRect/>
+          </a:stretch>
+        </p:blipFill>
+        <p:spPr>
+          <a:xfrm>
+            <a:off x="1141413" y="2392002"/>
+            <a:ext cx="7639050" cy="2924175"/>
+          </a:xfrm>
+        </p:spPr>
+      </p:pic>
+      <p:sp>
+        <p:nvSpPr>
+          <p:cNvPr id="6" name="TextBox 5">
+            <a:extLst>
+              <a:ext uri="{FF2B5EF4-FFF2-40B4-BE49-F238E27FC236}">
+                <a16:creationId xmlns:a16="http://schemas.microsoft.com/office/drawing/2014/main" id="{0CDCB255-C39D-0BD2-B4B7-4D464876C791}"/>
+              </a:ext>
+            </a:extLst>
+          </p:cNvPr>
+          <p:cNvSpPr txBox="1"/>
+          <p:nvPr/>
+        </p:nvSpPr>
+        <p:spPr>
+          <a:xfrm>
+            <a:off x="8987080" y="2489652"/>
+            <a:ext cx="1832938" cy="369332"/>
+          </a:xfrm>
+          <a:prstGeom prst="rect">
+            <a:avLst/>
+          </a:prstGeom>
+        </p:spPr>
+        <p:style>
+          <a:lnRef idx="2">
+            <a:schemeClr val="accent1"/>
+          </a:lnRef>
+          <a:fillRef idx="1">
+            <a:schemeClr val="lt1"/>
+          </a:fillRef>
+          <a:effectRef idx="0">
+            <a:schemeClr val="accent1"/>
+          </a:effectRef>
+          <a:fontRef idx="minor">
+            <a:schemeClr val="dk1"/>
+          </a:fontRef>
+        </p:style>
+        <p:txBody>
+          <a:bodyPr wrap="none" rtlCol="0">
+            <a:spAutoFit/>
+          </a:bodyPr>
+          <a:lstStyle/>
+          <a:p>
+            <a:r>
+              <a:rPr lang="en-MY" dirty="0"/>
+              <a:t>Create new game</a:t>
+            </a:r>
+          </a:p>
+        </p:txBody>
+      </p:sp>
+    </p:spTree>
+    <p:extLst>
+      <p:ext uri="{BB962C8B-B14F-4D97-AF65-F5344CB8AC3E}">
+        <p14:creationId xmlns:p14="http://schemas.microsoft.com/office/powerpoint/2010/main" val="3655937900"/>
+      </p:ext>
+    </p:extLst>
+  </p:cSld>
+  <p:clrMapOvr>
+    <a:masterClrMapping/>
+  </p:clrMapOvr>
+</p:sld>
+</file>
+
+<file path=ppt/slides/slide34.xml><?xml version="1.0" encoding="utf-8"?>
+<p:sld xmlns:a="http://schemas.openxmlformats.org/drawingml/2006/main" xmlns:r="http://schemas.openxmlformats.org/officeDocument/2006/relationships" xmlns:p="http://schemas.openxmlformats.org/presentationml/2006/main">
+  <p:cSld>
+    <p:spTree>
+      <p:nvGrpSpPr>
+        <p:cNvPr id="1" name=""/>
+        <p:cNvGrpSpPr/>
+        <p:nvPr/>
+      </p:nvGrpSpPr>
+      <p:grpSpPr>
+        <a:xfrm>
+          <a:off x="0" y="0"/>
+          <a:ext cx="0" cy="0"/>
+          <a:chOff x="0" y="0"/>
+          <a:chExt cx="0" cy="0"/>
+        </a:xfrm>
+      </p:grpSpPr>
+      <p:sp>
+        <p:nvSpPr>
+          <p:cNvPr id="2" name="Title 1">
+            <a:extLst>
+              <a:ext uri="{FF2B5EF4-FFF2-40B4-BE49-F238E27FC236}">
+                <a16:creationId xmlns:a16="http://schemas.microsoft.com/office/drawing/2014/main" id="{DC14C763-0CB8-466B-4E33-5F8B7AB9A816}"/>
+              </a:ext>
+            </a:extLst>
+          </p:cNvPr>
+          <p:cNvSpPr>
+            <a:spLocks noGrp="1"/>
+          </p:cNvSpPr>
+          <p:nvPr>
+            <p:ph type="title"/>
+          </p:nvPr>
+        </p:nvSpPr>
+        <p:spPr/>
+        <p:txBody>
+          <a:bodyPr/>
+          <a:lstStyle/>
+          <a:p>
+            <a:r>
+              <a:rPr lang="en-MY" dirty="0"/>
+              <a:t>Game endpoints continue</a:t>
+            </a:r>
+          </a:p>
+        </p:txBody>
+      </p:sp>
+      <p:pic>
+        <p:nvPicPr>
+          <p:cNvPr id="5" name="Content Placeholder 4">
+            <a:extLst>
+              <a:ext uri="{FF2B5EF4-FFF2-40B4-BE49-F238E27FC236}">
+                <a16:creationId xmlns:a16="http://schemas.microsoft.com/office/drawing/2014/main" id="{8CEAC50E-E332-FBEE-FF82-3F73FFCC670A}"/>
+              </a:ext>
+            </a:extLst>
+          </p:cNvPr>
+          <p:cNvPicPr>
+            <a:picLocks noGrp="1" noChangeAspect="1"/>
+          </p:cNvPicPr>
+          <p:nvPr>
+            <p:ph idx="1"/>
+          </p:nvPr>
+        </p:nvPicPr>
+        <p:blipFill>
+          <a:blip r:embed="rId2"/>
+          <a:stretch>
+            <a:fillRect/>
+          </a:stretch>
+        </p:blipFill>
+        <p:spPr>
+          <a:xfrm>
+            <a:off x="1141413" y="1869478"/>
+            <a:ext cx="4829607" cy="3541712"/>
+          </a:xfrm>
+        </p:spPr>
+      </p:pic>
+      <p:sp>
+        <p:nvSpPr>
+          <p:cNvPr id="6" name="TextBox 5">
+            <a:extLst>
+              <a:ext uri="{FF2B5EF4-FFF2-40B4-BE49-F238E27FC236}">
+                <a16:creationId xmlns:a16="http://schemas.microsoft.com/office/drawing/2014/main" id="{1BD2AF95-9B88-C0EA-266F-5C12757B4042}"/>
+              </a:ext>
+            </a:extLst>
+          </p:cNvPr>
+          <p:cNvSpPr txBox="1"/>
+          <p:nvPr/>
+        </p:nvSpPr>
+        <p:spPr>
+          <a:xfrm>
+            <a:off x="6374509" y="1912422"/>
+            <a:ext cx="2273123" cy="369332"/>
+          </a:xfrm>
+          <a:prstGeom prst="rect">
+            <a:avLst/>
+          </a:prstGeom>
+        </p:spPr>
+        <p:style>
+          <a:lnRef idx="2">
+            <a:schemeClr val="accent1"/>
+          </a:lnRef>
+          <a:fillRef idx="1">
+            <a:schemeClr val="lt1"/>
+          </a:fillRef>
+          <a:effectRef idx="0">
+            <a:schemeClr val="accent1"/>
+          </a:effectRef>
+          <a:fontRef idx="minor">
+            <a:schemeClr val="dk1"/>
+          </a:fontRef>
+        </p:style>
+        <p:txBody>
+          <a:bodyPr wrap="none" rtlCol="0">
+            <a:spAutoFit/>
+          </a:bodyPr>
+          <a:lstStyle/>
+          <a:p>
+            <a:r>
+              <a:rPr lang="en-MY" dirty="0"/>
+              <a:t>Update existing game</a:t>
+            </a:r>
+          </a:p>
+        </p:txBody>
+      </p:sp>
+    </p:spTree>
+    <p:extLst>
+      <p:ext uri="{BB962C8B-B14F-4D97-AF65-F5344CB8AC3E}">
+        <p14:creationId xmlns:p14="http://schemas.microsoft.com/office/powerpoint/2010/main" val="2106410127"/>
+      </p:ext>
+    </p:extLst>
+  </p:cSld>
+  <p:clrMapOvr>
+    <a:masterClrMapping/>
+  </p:clrMapOvr>
+</p:sld>
+</file>
+
+<file path=ppt/slides/slide35.xml><?xml version="1.0" encoding="utf-8"?>
+<p:sld xmlns:a="http://schemas.openxmlformats.org/drawingml/2006/main" xmlns:r="http://schemas.openxmlformats.org/officeDocument/2006/relationships" xmlns:p="http://schemas.openxmlformats.org/presentationml/2006/main">
+  <p:cSld>
+    <p:spTree>
+      <p:nvGrpSpPr>
+        <p:cNvPr id="1" name=""/>
+        <p:cNvGrpSpPr/>
+        <p:nvPr/>
+      </p:nvGrpSpPr>
+      <p:grpSpPr>
+        <a:xfrm>
+          <a:off x="0" y="0"/>
+          <a:ext cx="0" cy="0"/>
+          <a:chOff x="0" y="0"/>
+          <a:chExt cx="0" cy="0"/>
+        </a:xfrm>
+      </p:grpSpPr>
+      <p:sp>
+        <p:nvSpPr>
+          <p:cNvPr id="2" name="Title 1">
+            <a:extLst>
+              <a:ext uri="{FF2B5EF4-FFF2-40B4-BE49-F238E27FC236}">
+                <a16:creationId xmlns:a16="http://schemas.microsoft.com/office/drawing/2014/main" id="{DE1BD74C-F140-40FB-CBF7-75F82337748F}"/>
+              </a:ext>
+            </a:extLst>
+          </p:cNvPr>
+          <p:cNvSpPr>
+            <a:spLocks noGrp="1"/>
+          </p:cNvSpPr>
+          <p:nvPr>
+            <p:ph type="title"/>
+          </p:nvPr>
+        </p:nvSpPr>
+        <p:spPr/>
+        <p:txBody>
+          <a:bodyPr/>
+          <a:lstStyle/>
+          <a:p>
+            <a:r>
+              <a:rPr lang="en-MY" dirty="0"/>
+              <a:t>Game endpoints continue</a:t>
+            </a:r>
+          </a:p>
+        </p:txBody>
+      </p:sp>
+      <p:pic>
+        <p:nvPicPr>
+          <p:cNvPr id="5" name="Content Placeholder 4">
+            <a:extLst>
+              <a:ext uri="{FF2B5EF4-FFF2-40B4-BE49-F238E27FC236}">
+                <a16:creationId xmlns:a16="http://schemas.microsoft.com/office/drawing/2014/main" id="{914D60A6-C34D-38F3-3E56-D0F45B9A8850}"/>
+              </a:ext>
+            </a:extLst>
+          </p:cNvPr>
+          <p:cNvPicPr>
+            <a:picLocks noGrp="1" noChangeAspect="1"/>
+          </p:cNvPicPr>
+          <p:nvPr>
+            <p:ph idx="1"/>
+          </p:nvPr>
+        </p:nvPicPr>
+        <p:blipFill>
+          <a:blip r:embed="rId2"/>
+          <a:stretch>
+            <a:fillRect/>
+          </a:stretch>
+        </p:blipFill>
+        <p:spPr>
+          <a:xfrm>
+            <a:off x="1160462" y="1872580"/>
+            <a:ext cx="4933950" cy="2371725"/>
+          </a:xfrm>
+        </p:spPr>
+      </p:pic>
+      <p:sp>
+        <p:nvSpPr>
+          <p:cNvPr id="6" name="TextBox 5">
+            <a:extLst>
+              <a:ext uri="{FF2B5EF4-FFF2-40B4-BE49-F238E27FC236}">
+                <a16:creationId xmlns:a16="http://schemas.microsoft.com/office/drawing/2014/main" id="{27DE3862-6048-A187-2EB4-41E9C461796A}"/>
+              </a:ext>
+            </a:extLst>
+          </p:cNvPr>
+          <p:cNvSpPr txBox="1"/>
+          <p:nvPr/>
+        </p:nvSpPr>
+        <p:spPr>
+          <a:xfrm>
+            <a:off x="6374509" y="1912422"/>
+            <a:ext cx="1903021" cy="369332"/>
+          </a:xfrm>
+          <a:prstGeom prst="rect">
+            <a:avLst/>
+          </a:prstGeom>
+        </p:spPr>
+        <p:style>
+          <a:lnRef idx="2">
+            <a:schemeClr val="accent1"/>
+          </a:lnRef>
+          <a:fillRef idx="1">
+            <a:schemeClr val="lt1"/>
+          </a:fillRef>
+          <a:effectRef idx="0">
+            <a:schemeClr val="accent1"/>
+          </a:effectRef>
+          <a:fontRef idx="minor">
+            <a:schemeClr val="dk1"/>
+          </a:fontRef>
+        </p:style>
+        <p:txBody>
+          <a:bodyPr wrap="none" rtlCol="0">
+            <a:spAutoFit/>
+          </a:bodyPr>
+          <a:lstStyle/>
+          <a:p>
+            <a:r>
+              <a:rPr lang="en-MY" dirty="0"/>
+              <a:t>Delete game by id</a:t>
+            </a:r>
+          </a:p>
+        </p:txBody>
+      </p:sp>
+    </p:spTree>
+    <p:extLst>
+      <p:ext uri="{BB962C8B-B14F-4D97-AF65-F5344CB8AC3E}">
+        <p14:creationId xmlns:p14="http://schemas.microsoft.com/office/powerpoint/2010/main" val="801746956"/>
+      </p:ext>
+    </p:extLst>
+  </p:cSld>
+  <p:clrMapOvr>
+    <a:masterClrMapping/>
+  </p:clrMapOvr>
+</p:sld>
+</file>
+
+<file path=ppt/slides/slide36.xml><?xml version="1.0" encoding="utf-8"?>
+<p:sld xmlns:a="http://schemas.openxmlformats.org/drawingml/2006/main" xmlns:r="http://schemas.openxmlformats.org/officeDocument/2006/relationships" xmlns:p="http://schemas.openxmlformats.org/presentationml/2006/main">
+  <p:cSld>
+    <p:spTree>
+      <p:nvGrpSpPr>
+        <p:cNvPr id="1" name=""/>
+        <p:cNvGrpSpPr/>
+        <p:nvPr/>
+      </p:nvGrpSpPr>
+      <p:grpSpPr>
+        <a:xfrm>
+          <a:off x="0" y="0"/>
+          <a:ext cx="0" cy="0"/>
+          <a:chOff x="0" y="0"/>
+          <a:chExt cx="0" cy="0"/>
+        </a:xfrm>
+      </p:grpSpPr>
+      <p:sp>
+        <p:nvSpPr>
+          <p:cNvPr id="2" name="Title 1">
+            <a:extLst>
+              <a:ext uri="{FF2B5EF4-FFF2-40B4-BE49-F238E27FC236}">
+                <a16:creationId xmlns:a16="http://schemas.microsoft.com/office/drawing/2014/main" id="{6A23D232-B6B6-9FE3-3908-B545FAF6F6C0}"/>
+              </a:ext>
+            </a:extLst>
+          </p:cNvPr>
+          <p:cNvSpPr>
+            <a:spLocks noGrp="1"/>
+          </p:cNvSpPr>
+          <p:nvPr>
+            <p:ph type="title"/>
+          </p:nvPr>
+        </p:nvSpPr>
+        <p:spPr/>
+        <p:txBody>
+          <a:bodyPr/>
+          <a:lstStyle/>
+          <a:p>
+            <a:r>
+              <a:rPr lang="en-MY" dirty="0"/>
+              <a:t>Rest client update</a:t>
+            </a:r>
+          </a:p>
+        </p:txBody>
+      </p:sp>
+      <p:pic>
+        <p:nvPicPr>
+          <p:cNvPr id="5" name="Content Placeholder 4">
+            <a:extLst>
+              <a:ext uri="{FF2B5EF4-FFF2-40B4-BE49-F238E27FC236}">
+                <a16:creationId xmlns:a16="http://schemas.microsoft.com/office/drawing/2014/main" id="{FEFCA6ED-F2FA-3E63-643F-B39569FFF580}"/>
+              </a:ext>
+            </a:extLst>
+          </p:cNvPr>
+          <p:cNvPicPr>
+            <a:picLocks noGrp="1" noChangeAspect="1"/>
+          </p:cNvPicPr>
+          <p:nvPr>
+            <p:ph idx="1"/>
+          </p:nvPr>
+        </p:nvPicPr>
+        <p:blipFill>
+          <a:blip r:embed="rId2"/>
+          <a:stretch>
+            <a:fillRect/>
+          </a:stretch>
+        </p:blipFill>
+        <p:spPr>
+          <a:xfrm>
+            <a:off x="1227621" y="1750723"/>
+            <a:ext cx="3475007" cy="4761779"/>
+          </a:xfrm>
+        </p:spPr>
+      </p:pic>
+      <p:sp>
+        <p:nvSpPr>
+          <p:cNvPr id="6" name="Speech Bubble: Rectangle with Corners Rounded 5">
+            <a:extLst>
+              <a:ext uri="{FF2B5EF4-FFF2-40B4-BE49-F238E27FC236}">
+                <a16:creationId xmlns:a16="http://schemas.microsoft.com/office/drawing/2014/main" id="{658B9521-B713-85CE-9238-9B469AC554CA}"/>
+              </a:ext>
+            </a:extLst>
+          </p:cNvPr>
+          <p:cNvSpPr/>
+          <p:nvPr/>
+        </p:nvSpPr>
+        <p:spPr>
+          <a:xfrm>
+            <a:off x="4923807" y="3116075"/>
+            <a:ext cx="2026078" cy="792480"/>
+          </a:xfrm>
+          <a:prstGeom prst="wedgeRoundRectCallout">
+            <a:avLst>
+              <a:gd name="adj1" fmla="val -132606"/>
+              <a:gd name="adj2" fmla="val -13386"/>
+              <a:gd name="adj3" fmla="val 16667"/>
+            </a:avLst>
+          </a:prstGeom>
+        </p:spPr>
+        <p:style>
+          <a:lnRef idx="2">
+            <a:schemeClr val="accent1">
+              <a:shade val="15000"/>
+            </a:schemeClr>
+          </a:lnRef>
+          <a:fillRef idx="1">
+            <a:schemeClr val="accent1"/>
+          </a:fillRef>
+          <a:effectRef idx="0">
+            <a:schemeClr val="accent1"/>
+          </a:effectRef>
+          <a:fontRef idx="minor">
+            <a:schemeClr val="lt1"/>
+          </a:fontRef>
+        </p:style>
+        <p:txBody>
+          <a:bodyPr rtlCol="0" anchor="ctr"/>
+          <a:lstStyle/>
+          <a:p>
+            <a:pPr algn="ctr"/>
+            <a:r>
+              <a:rPr lang="en-MY" dirty="0"/>
+              <a:t>Need have one empty row</a:t>
+            </a:r>
+          </a:p>
+        </p:txBody>
+      </p:sp>
+    </p:spTree>
+    <p:extLst>
+      <p:ext uri="{BB962C8B-B14F-4D97-AF65-F5344CB8AC3E}">
+        <p14:creationId xmlns:p14="http://schemas.microsoft.com/office/powerpoint/2010/main" val="2158533447"/>
+      </p:ext>
+    </p:extLst>
+  </p:cSld>
+  <p:clrMapOvr>
+    <a:masterClrMapping/>
+  </p:clrMapOvr>
+</p:sld>
+</file>
+
+<file path=ppt/slides/slide37.xml><?xml version="1.0" encoding="utf-8"?>
+<p:sld xmlns:a="http://schemas.openxmlformats.org/drawingml/2006/main" xmlns:r="http://schemas.openxmlformats.org/officeDocument/2006/relationships" xmlns:p="http://schemas.openxmlformats.org/presentationml/2006/main">
+  <p:cSld>
+    <p:spTree>
+      <p:nvGrpSpPr>
+        <p:cNvPr id="1" name=""/>
+        <p:cNvGrpSpPr/>
+        <p:nvPr/>
+      </p:nvGrpSpPr>
+      <p:grpSpPr>
+        <a:xfrm>
+          <a:off x="0" y="0"/>
+          <a:ext cx="0" cy="0"/>
+          <a:chOff x="0" y="0"/>
+          <a:chExt cx="0" cy="0"/>
+        </a:xfrm>
+      </p:grpSpPr>
+      <p:sp>
+        <p:nvSpPr>
+          <p:cNvPr id="2" name="Title 1">
+            <a:extLst>
+              <a:ext uri="{FF2B5EF4-FFF2-40B4-BE49-F238E27FC236}">
+                <a16:creationId xmlns:a16="http://schemas.microsoft.com/office/drawing/2014/main" id="{B79A4110-D488-BE28-1607-6CD751EFFF21}"/>
+              </a:ext>
+            </a:extLst>
+          </p:cNvPr>
+          <p:cNvSpPr>
+            <a:spLocks noGrp="1"/>
+          </p:cNvSpPr>
+          <p:nvPr>
+            <p:ph type="title"/>
+          </p:nvPr>
+        </p:nvSpPr>
+        <p:spPr/>
+        <p:txBody>
+          <a:bodyPr/>
+          <a:lstStyle/>
+          <a:p>
+            <a:r>
+              <a:rPr lang="en-MY" dirty="0"/>
+              <a:t>Adding </a:t>
+            </a:r>
+            <a:r>
+              <a:rPr lang="en-MY"/>
+              <a:t>validation on input</a:t>
+            </a:r>
+          </a:p>
+        </p:txBody>
+      </p:sp>
+      <p:sp>
+        <p:nvSpPr>
+          <p:cNvPr id="3" name="Content Placeholder 2">
+            <a:extLst>
+              <a:ext uri="{FF2B5EF4-FFF2-40B4-BE49-F238E27FC236}">
+                <a16:creationId xmlns:a16="http://schemas.microsoft.com/office/drawing/2014/main" id="{B6F7E445-DC68-AFF2-9BCA-CC495C67E329}"/>
+              </a:ext>
+            </a:extLst>
+          </p:cNvPr>
+          <p:cNvSpPr>
+            <a:spLocks noGrp="1"/>
+          </p:cNvSpPr>
+          <p:nvPr>
+            <p:ph idx="1"/>
+          </p:nvPr>
+        </p:nvSpPr>
+        <p:spPr/>
+        <p:txBody>
+          <a:bodyPr/>
+          <a:lstStyle/>
+          <a:p>
+            <a:endParaRPr lang="en-MY"/>
+          </a:p>
+        </p:txBody>
+      </p:sp>
+    </p:spTree>
+    <p:extLst>
+      <p:ext uri="{BB962C8B-B14F-4D97-AF65-F5344CB8AC3E}">
+        <p14:creationId xmlns:p14="http://schemas.microsoft.com/office/powerpoint/2010/main" val="1716285008"/>
+      </p:ext>
+    </p:extLst>
+  </p:cSld>
+  <p:clrMapOvr>
+    <a:masterClrMapping/>
+  </p:clrMapOvr>
+</p:sld>
+</file>
+
 <file path=ppt/slides/slide4.xml><?xml version="1.0" encoding="utf-8"?>
 <p:sld xmlns:a="http://schemas.openxmlformats.org/drawingml/2006/main" xmlns:r="http://schemas.openxmlformats.org/officeDocument/2006/relationships" xmlns:p="http://schemas.openxmlformats.org/presentationml/2006/main">
   <p:cSld>
@@ -30696,7 +33721,7 @@
           <a:noFill/>
           <a:extLst>
             <a:ext uri="{909E8E84-426E-40dd-AFC4-6F175D3DCCD1}">
-              <a14:hiddenFill xmlns:a14="http://schemas.microsoft.com/office/drawing/2010/main" xmlns:p14="http://schemas.microsoft.com/office/powerpoint/2010/main" xmlns:a16="http://schemas.microsoft.com/office/drawing/2014/main" xmlns="">
+              <a14:hiddenFill xmlns="" xmlns:a16="http://schemas.microsoft.com/office/drawing/2014/main" xmlns:p14="http://schemas.microsoft.com/office/powerpoint/2010/main" xmlns:a14="http://schemas.microsoft.com/office/drawing/2010/main">
                 <a:solidFill>
                   <a:srgbClr val="FFFFFF"/>
                 </a:solidFill>
@@ -30778,7 +33803,7 @@
             </a:ln>
             <a:extLst>
               <a:ext uri="{91240B29-F687-4f45-9708-019B960494DF}">
-                <a14:hiddenLine xmlns:a14="http://schemas.microsoft.com/office/drawing/2010/main" xmlns:p14="http://schemas.microsoft.com/office/powerpoint/2010/main" xmlns:a16="http://schemas.microsoft.com/office/drawing/2014/main" xmlns="" w="9525">
+                <a14:hiddenLine xmlns="" xmlns:a16="http://schemas.microsoft.com/office/drawing/2014/main" xmlns:p14="http://schemas.microsoft.com/office/powerpoint/2010/main" xmlns:a14="http://schemas.microsoft.com/office/drawing/2010/main" w="9525">
                   <a:solidFill>
                     <a:srgbClr val="000000"/>
                   </a:solidFill>
@@ -30890,7 +33915,7 @@
             </a:ln>
             <a:extLst>
               <a:ext uri="{91240B29-F687-4f45-9708-019B960494DF}">
-                <a14:hiddenLine xmlns:a14="http://schemas.microsoft.com/office/drawing/2010/main" xmlns:p14="http://schemas.microsoft.com/office/powerpoint/2010/main" xmlns:a16="http://schemas.microsoft.com/office/drawing/2014/main" xmlns="" w="9525">
+                <a14:hiddenLine xmlns="" xmlns:a16="http://schemas.microsoft.com/office/drawing/2014/main" xmlns:p14="http://schemas.microsoft.com/office/powerpoint/2010/main" xmlns:a14="http://schemas.microsoft.com/office/drawing/2010/main" w="9525">
                   <a:solidFill>
                     <a:srgbClr val="000000"/>
                   </a:solidFill>
@@ -31002,7 +34027,7 @@
             </a:ln>
             <a:extLst>
               <a:ext uri="{91240B29-F687-4f45-9708-019B960494DF}">
-                <a14:hiddenLine xmlns:a14="http://schemas.microsoft.com/office/drawing/2010/main" xmlns:p14="http://schemas.microsoft.com/office/powerpoint/2010/main" xmlns:a16="http://schemas.microsoft.com/office/drawing/2014/main" xmlns="" w="9525">
+                <a14:hiddenLine xmlns="" xmlns:a16="http://schemas.microsoft.com/office/drawing/2014/main" xmlns:p14="http://schemas.microsoft.com/office/powerpoint/2010/main" xmlns:a14="http://schemas.microsoft.com/office/drawing/2010/main" w="9525">
                   <a:solidFill>
                     <a:srgbClr val="000000"/>
                   </a:solidFill>
@@ -31086,7 +34111,7 @@
             </a:ln>
             <a:extLst>
               <a:ext uri="{91240B29-F687-4f45-9708-019B960494DF}">
-                <a14:hiddenLine xmlns:a14="http://schemas.microsoft.com/office/drawing/2010/main" xmlns:p14="http://schemas.microsoft.com/office/powerpoint/2010/main" xmlns:a16="http://schemas.microsoft.com/office/drawing/2014/main" xmlns="" w="9525">
+                <a14:hiddenLine xmlns="" xmlns:a16="http://schemas.microsoft.com/office/drawing/2014/main" xmlns:p14="http://schemas.microsoft.com/office/powerpoint/2010/main" xmlns:a14="http://schemas.microsoft.com/office/drawing/2010/main" w="9525">
                   <a:solidFill>
                     <a:srgbClr val="000000"/>
                   </a:solidFill>
@@ -31198,7 +34223,7 @@
             </a:ln>
             <a:extLst>
               <a:ext uri="{91240B29-F687-4f45-9708-019B960494DF}">
-                <a14:hiddenLine xmlns:a14="http://schemas.microsoft.com/office/drawing/2010/main" xmlns:p14="http://schemas.microsoft.com/office/powerpoint/2010/main" xmlns:a16="http://schemas.microsoft.com/office/drawing/2014/main" xmlns="" w="9525">
+                <a14:hiddenLine xmlns="" xmlns:a16="http://schemas.microsoft.com/office/drawing/2014/main" xmlns:p14="http://schemas.microsoft.com/office/powerpoint/2010/main" xmlns:a14="http://schemas.microsoft.com/office/drawing/2010/main" w="9525">
                   <a:solidFill>
                     <a:srgbClr val="000000"/>
                   </a:solidFill>
@@ -31282,7 +34307,7 @@
             </a:ln>
             <a:extLst>
               <a:ext uri="{91240B29-F687-4f45-9708-019B960494DF}">
-                <a14:hiddenLine xmlns:a14="http://schemas.microsoft.com/office/drawing/2010/main" xmlns:p14="http://schemas.microsoft.com/office/powerpoint/2010/main" xmlns:a16="http://schemas.microsoft.com/office/drawing/2014/main" xmlns="" w="9525">
+                <a14:hiddenLine xmlns="" xmlns:a16="http://schemas.microsoft.com/office/drawing/2014/main" xmlns:p14="http://schemas.microsoft.com/office/powerpoint/2010/main" xmlns:a14="http://schemas.microsoft.com/office/drawing/2010/main" w="9525">
                   <a:solidFill>
                     <a:srgbClr val="000000"/>
                   </a:solidFill>
@@ -31366,7 +34391,7 @@
             </a:ln>
             <a:extLst>
               <a:ext uri="{91240B29-F687-4f45-9708-019B960494DF}">
-                <a14:hiddenLine xmlns:a14="http://schemas.microsoft.com/office/drawing/2010/main" xmlns:p14="http://schemas.microsoft.com/office/powerpoint/2010/main" xmlns:a16="http://schemas.microsoft.com/office/drawing/2014/main" xmlns="" w="9525">
+                <a14:hiddenLine xmlns="" xmlns:a16="http://schemas.microsoft.com/office/drawing/2014/main" xmlns:p14="http://schemas.microsoft.com/office/powerpoint/2010/main" xmlns:a14="http://schemas.microsoft.com/office/drawing/2010/main" w="9525">
                   <a:solidFill>
                     <a:srgbClr val="000000"/>
                   </a:solidFill>
@@ -31478,7 +34503,7 @@
             </a:ln>
             <a:extLst>
               <a:ext uri="{91240B29-F687-4f45-9708-019B960494DF}">
-                <a14:hiddenLine xmlns:a14="http://schemas.microsoft.com/office/drawing/2010/main" xmlns:p14="http://schemas.microsoft.com/office/powerpoint/2010/main" xmlns:a16="http://schemas.microsoft.com/office/drawing/2014/main" xmlns="" w="9525">
+                <a14:hiddenLine xmlns="" xmlns:a16="http://schemas.microsoft.com/office/drawing/2014/main" xmlns:p14="http://schemas.microsoft.com/office/powerpoint/2010/main" xmlns:a14="http://schemas.microsoft.com/office/drawing/2010/main" w="9525">
                   <a:solidFill>
                     <a:srgbClr val="000000"/>
                   </a:solidFill>
@@ -31590,7 +34615,7 @@
             </a:ln>
             <a:extLst>
               <a:ext uri="{91240B29-F687-4f45-9708-019B960494DF}">
-                <a14:hiddenLine xmlns:a14="http://schemas.microsoft.com/office/drawing/2010/main" xmlns:p14="http://schemas.microsoft.com/office/powerpoint/2010/main" xmlns:a16="http://schemas.microsoft.com/office/drawing/2014/main" xmlns="" w="9525">
+                <a14:hiddenLine xmlns="" xmlns:a16="http://schemas.microsoft.com/office/drawing/2014/main" xmlns:p14="http://schemas.microsoft.com/office/powerpoint/2010/main" xmlns:a14="http://schemas.microsoft.com/office/drawing/2010/main" w="9525">
                   <a:solidFill>
                     <a:srgbClr val="000000"/>
                   </a:solidFill>
@@ -31674,7 +34699,7 @@
             </a:ln>
             <a:extLst>
               <a:ext uri="{91240B29-F687-4f45-9708-019B960494DF}">
-                <a14:hiddenLine xmlns:a14="http://schemas.microsoft.com/office/drawing/2010/main" xmlns:p14="http://schemas.microsoft.com/office/powerpoint/2010/main" xmlns:a16="http://schemas.microsoft.com/office/drawing/2014/main" xmlns="" w="9525">
+                <a14:hiddenLine xmlns="" xmlns:a16="http://schemas.microsoft.com/office/drawing/2014/main" xmlns:p14="http://schemas.microsoft.com/office/powerpoint/2010/main" xmlns:a14="http://schemas.microsoft.com/office/drawing/2010/main" w="9525">
                   <a:solidFill>
                     <a:srgbClr val="000000"/>
                   </a:solidFill>
@@ -31806,7 +34831,7 @@
             </a:ln>
             <a:extLst>
               <a:ext uri="{91240B29-F687-4f45-9708-019B960494DF}">
-                <a14:hiddenLine xmlns:a14="http://schemas.microsoft.com/office/drawing/2010/main" xmlns:p14="http://schemas.microsoft.com/office/powerpoint/2010/main" xmlns:a16="http://schemas.microsoft.com/office/drawing/2014/main" xmlns="" w="9525">
+                <a14:hiddenLine xmlns="" xmlns:a16="http://schemas.microsoft.com/office/drawing/2014/main" xmlns:p14="http://schemas.microsoft.com/office/powerpoint/2010/main" xmlns:a14="http://schemas.microsoft.com/office/drawing/2010/main" w="9525">
                   <a:solidFill>
                     <a:srgbClr val="000000"/>
                   </a:solidFill>
@@ -31934,7 +34959,7 @@
             </a:ln>
             <a:extLst>
               <a:ext uri="{91240B29-F687-4f45-9708-019B960494DF}">
-                <a14:hiddenLine xmlns:a14="http://schemas.microsoft.com/office/drawing/2010/main" xmlns:p14="http://schemas.microsoft.com/office/powerpoint/2010/main" xmlns:a16="http://schemas.microsoft.com/office/drawing/2014/main" xmlns="" w="9525">
+                <a14:hiddenLine xmlns="" xmlns:a16="http://schemas.microsoft.com/office/drawing/2014/main" xmlns:p14="http://schemas.microsoft.com/office/powerpoint/2010/main" xmlns:a14="http://schemas.microsoft.com/office/drawing/2010/main" w="9525">
                   <a:solidFill>
                     <a:srgbClr val="000000"/>
                   </a:solidFill>
@@ -32018,7 +35043,7 @@
             </a:ln>
             <a:extLst>
               <a:ext uri="{91240B29-F687-4f45-9708-019B960494DF}">
-                <a14:hiddenLine xmlns:a14="http://schemas.microsoft.com/office/drawing/2010/main" xmlns:p14="http://schemas.microsoft.com/office/powerpoint/2010/main" xmlns:a16="http://schemas.microsoft.com/office/drawing/2014/main" xmlns="" w="9525">
+                <a14:hiddenLine xmlns="" xmlns:a16="http://schemas.microsoft.com/office/drawing/2014/main" xmlns:p14="http://schemas.microsoft.com/office/powerpoint/2010/main" xmlns:a14="http://schemas.microsoft.com/office/drawing/2010/main" w="9525">
                   <a:solidFill>
                     <a:srgbClr val="000000"/>
                   </a:solidFill>
@@ -32102,7 +35127,7 @@
             </a:ln>
             <a:extLst>
               <a:ext uri="{91240B29-F687-4f45-9708-019B960494DF}">
-                <a14:hiddenLine xmlns:a14="http://schemas.microsoft.com/office/drawing/2010/main" xmlns:p14="http://schemas.microsoft.com/office/powerpoint/2010/main" xmlns:a16="http://schemas.microsoft.com/office/drawing/2014/main" xmlns="" w="9525">
+                <a14:hiddenLine xmlns="" xmlns:a16="http://schemas.microsoft.com/office/drawing/2014/main" xmlns:p14="http://schemas.microsoft.com/office/powerpoint/2010/main" xmlns:a14="http://schemas.microsoft.com/office/drawing/2010/main" w="9525">
                   <a:solidFill>
                     <a:srgbClr val="000000"/>
                   </a:solidFill>
@@ -32214,7 +35239,7 @@
             </a:ln>
             <a:extLst>
               <a:ext uri="{91240B29-F687-4f45-9708-019B960494DF}">
-                <a14:hiddenLine xmlns:a14="http://schemas.microsoft.com/office/drawing/2010/main" xmlns:p14="http://schemas.microsoft.com/office/powerpoint/2010/main" xmlns:a16="http://schemas.microsoft.com/office/drawing/2014/main" xmlns="" w="9525">
+                <a14:hiddenLine xmlns="" xmlns:a16="http://schemas.microsoft.com/office/drawing/2014/main" xmlns:p14="http://schemas.microsoft.com/office/powerpoint/2010/main" xmlns:a14="http://schemas.microsoft.com/office/drawing/2010/main" w="9525">
                   <a:solidFill>
                     <a:srgbClr val="000000"/>
                   </a:solidFill>
@@ -32270,7 +35295,7 @@
             </a:ln>
             <a:extLst>
               <a:ext uri="{91240B29-F687-4f45-9708-019B960494DF}">
-                <a14:hiddenLine xmlns:a14="http://schemas.microsoft.com/office/drawing/2010/main" xmlns:p14="http://schemas.microsoft.com/office/powerpoint/2010/main" xmlns:a16="http://schemas.microsoft.com/office/drawing/2014/main" xmlns="" w="9525">
+                <a14:hiddenLine xmlns="" xmlns:a16="http://schemas.microsoft.com/office/drawing/2014/main" xmlns:p14="http://schemas.microsoft.com/office/powerpoint/2010/main" xmlns:a14="http://schemas.microsoft.com/office/drawing/2010/main" w="9525">
                   <a:solidFill>
                     <a:srgbClr val="000000"/>
                   </a:solidFill>
@@ -32357,7 +35382,7 @@
             </a:ln>
             <a:extLst>
               <a:ext uri="{91240B29-F687-4f45-9708-019B960494DF}">
-                <a14:hiddenLine xmlns:a14="http://schemas.microsoft.com/office/drawing/2010/main" xmlns:p14="http://schemas.microsoft.com/office/powerpoint/2010/main" xmlns:a16="http://schemas.microsoft.com/office/drawing/2014/main" xmlns="" w="9525">
+                <a14:hiddenLine xmlns="" xmlns:a16="http://schemas.microsoft.com/office/drawing/2014/main" xmlns:p14="http://schemas.microsoft.com/office/powerpoint/2010/main" xmlns:a14="http://schemas.microsoft.com/office/drawing/2010/main" w="9525">
                   <a:solidFill>
                     <a:srgbClr val="000000"/>
                   </a:solidFill>
@@ -32469,7 +35494,7 @@
             </a:ln>
             <a:extLst>
               <a:ext uri="{91240B29-F687-4f45-9708-019B960494DF}">
-                <a14:hiddenLine xmlns:a14="http://schemas.microsoft.com/office/drawing/2010/main" xmlns:p14="http://schemas.microsoft.com/office/powerpoint/2010/main" xmlns:a16="http://schemas.microsoft.com/office/drawing/2014/main" xmlns="" w="9525">
+                <a14:hiddenLine xmlns="" xmlns:a16="http://schemas.microsoft.com/office/drawing/2014/main" xmlns:p14="http://schemas.microsoft.com/office/powerpoint/2010/main" xmlns:a14="http://schemas.microsoft.com/office/drawing/2010/main" w="9525">
                   <a:solidFill>
                     <a:srgbClr val="000000"/>
                   </a:solidFill>
@@ -32553,7 +35578,7 @@
             </a:ln>
             <a:extLst>
               <a:ext uri="{91240B29-F687-4f45-9708-019B960494DF}">
-                <a14:hiddenLine xmlns:a14="http://schemas.microsoft.com/office/drawing/2010/main" xmlns:p14="http://schemas.microsoft.com/office/powerpoint/2010/main" xmlns:a16="http://schemas.microsoft.com/office/drawing/2014/main" xmlns="" w="9525">
+                <a14:hiddenLine xmlns="" xmlns:a16="http://schemas.microsoft.com/office/drawing/2014/main" xmlns:p14="http://schemas.microsoft.com/office/powerpoint/2010/main" xmlns:a14="http://schemas.microsoft.com/office/drawing/2010/main" w="9525">
                   <a:solidFill>
                     <a:srgbClr val="000000"/>
                   </a:solidFill>
@@ -32665,7 +35690,7 @@
             </a:ln>
             <a:extLst>
               <a:ext uri="{91240B29-F687-4f45-9708-019B960494DF}">
-                <a14:hiddenLine xmlns:a14="http://schemas.microsoft.com/office/drawing/2010/main" xmlns:p14="http://schemas.microsoft.com/office/powerpoint/2010/main" xmlns:a16="http://schemas.microsoft.com/office/drawing/2014/main" xmlns="" w="9525">
+                <a14:hiddenLine xmlns="" xmlns:a16="http://schemas.microsoft.com/office/drawing/2014/main" xmlns:p14="http://schemas.microsoft.com/office/powerpoint/2010/main" xmlns:a14="http://schemas.microsoft.com/office/drawing/2010/main" w="9525">
                   <a:solidFill>
                     <a:srgbClr val="000000"/>
                   </a:solidFill>
@@ -32752,7 +35777,7 @@
             </a:ln>
             <a:extLst>
               <a:ext uri="{91240B29-F687-4f45-9708-019B960494DF}">
-                <a14:hiddenLine xmlns:a14="http://schemas.microsoft.com/office/drawing/2010/main" xmlns:p14="http://schemas.microsoft.com/office/powerpoint/2010/main" xmlns:a16="http://schemas.microsoft.com/office/drawing/2014/main" xmlns="" w="9525">
+                <a14:hiddenLine xmlns="" xmlns:a16="http://schemas.microsoft.com/office/drawing/2014/main" xmlns:p14="http://schemas.microsoft.com/office/powerpoint/2010/main" xmlns:a14="http://schemas.microsoft.com/office/drawing/2010/main" w="9525">
                   <a:solidFill>
                     <a:srgbClr val="000000"/>
                   </a:solidFill>
@@ -32836,7 +35861,7 @@
             </a:ln>
             <a:extLst>
               <a:ext uri="{91240B29-F687-4f45-9708-019B960494DF}">
-                <a14:hiddenLine xmlns:a14="http://schemas.microsoft.com/office/drawing/2010/main" xmlns:p14="http://schemas.microsoft.com/office/powerpoint/2010/main" xmlns:a16="http://schemas.microsoft.com/office/drawing/2014/main" xmlns="" w="9525">
+                <a14:hiddenLine xmlns="" xmlns:a16="http://schemas.microsoft.com/office/drawing/2014/main" xmlns:p14="http://schemas.microsoft.com/office/powerpoint/2010/main" xmlns:a14="http://schemas.microsoft.com/office/drawing/2010/main" w="9525">
                   <a:solidFill>
                     <a:srgbClr val="000000"/>
                   </a:solidFill>
@@ -32948,7 +35973,7 @@
             </a:ln>
             <a:extLst>
               <a:ext uri="{91240B29-F687-4f45-9708-019B960494DF}">
-                <a14:hiddenLine xmlns:a14="http://schemas.microsoft.com/office/drawing/2010/main" xmlns:p14="http://schemas.microsoft.com/office/powerpoint/2010/main" xmlns:a16="http://schemas.microsoft.com/office/drawing/2014/main" xmlns="" w="9525">
+                <a14:hiddenLine xmlns="" xmlns:a16="http://schemas.microsoft.com/office/drawing/2014/main" xmlns:p14="http://schemas.microsoft.com/office/powerpoint/2010/main" xmlns:a14="http://schemas.microsoft.com/office/drawing/2010/main" w="9525">
                   <a:solidFill>
                     <a:srgbClr val="000000"/>
                   </a:solidFill>
@@ -33060,7 +36085,7 @@
             </a:ln>
             <a:extLst>
               <a:ext uri="{91240B29-F687-4f45-9708-019B960494DF}">
-                <a14:hiddenLine xmlns:a14="http://schemas.microsoft.com/office/drawing/2010/main" xmlns:p14="http://schemas.microsoft.com/office/powerpoint/2010/main" xmlns:a16="http://schemas.microsoft.com/office/drawing/2014/main" xmlns="" w="9525">
+                <a14:hiddenLine xmlns="" xmlns:a16="http://schemas.microsoft.com/office/drawing/2014/main" xmlns:p14="http://schemas.microsoft.com/office/powerpoint/2010/main" xmlns:a14="http://schemas.microsoft.com/office/drawing/2010/main" w="9525">
                   <a:solidFill>
                     <a:srgbClr val="000000"/>
                   </a:solidFill>
@@ -33147,7 +36172,7 @@
             </a:ln>
             <a:extLst>
               <a:ext uri="{91240B29-F687-4f45-9708-019B960494DF}">
-                <a14:hiddenLine xmlns:a14="http://schemas.microsoft.com/office/drawing/2010/main" xmlns:p14="http://schemas.microsoft.com/office/powerpoint/2010/main" xmlns:a16="http://schemas.microsoft.com/office/drawing/2014/main" xmlns="" w="9525">
+                <a14:hiddenLine xmlns="" xmlns:a16="http://schemas.microsoft.com/office/drawing/2014/main" xmlns:p14="http://schemas.microsoft.com/office/powerpoint/2010/main" xmlns:a14="http://schemas.microsoft.com/office/drawing/2010/main" w="9525">
                   <a:solidFill>
                     <a:srgbClr val="000000"/>
                   </a:solidFill>
@@ -33289,7 +36314,7 @@
             </a:ln>
             <a:extLst>
               <a:ext uri="{91240B29-F687-4f45-9708-019B960494DF}">
-                <a14:hiddenLine xmlns:a14="http://schemas.microsoft.com/office/drawing/2010/main" xmlns:p14="http://schemas.microsoft.com/office/powerpoint/2010/main" xmlns:a16="http://schemas.microsoft.com/office/drawing/2014/main" xmlns="" w="9525">
+                <a14:hiddenLine xmlns="" xmlns:a16="http://schemas.microsoft.com/office/drawing/2014/main" xmlns:p14="http://schemas.microsoft.com/office/powerpoint/2010/main" xmlns:a14="http://schemas.microsoft.com/office/drawing/2010/main" w="9525">
                   <a:solidFill>
                     <a:srgbClr val="000000"/>
                   </a:solidFill>
@@ -33549,7 +36574,7 @@
             </a:ln>
             <a:extLst>
               <a:ext uri="{91240B29-F687-4f45-9708-019B960494DF}">
-                <a14:hiddenLine xmlns:a14="http://schemas.microsoft.com/office/drawing/2010/main" xmlns:p14="http://schemas.microsoft.com/office/powerpoint/2010/main" xmlns:a16="http://schemas.microsoft.com/office/drawing/2014/main" xmlns="" w="9525">
+                <a14:hiddenLine xmlns="" xmlns:a16="http://schemas.microsoft.com/office/drawing/2014/main" xmlns:p14="http://schemas.microsoft.com/office/powerpoint/2010/main" xmlns:a14="http://schemas.microsoft.com/office/drawing/2010/main" w="9525">
                   <a:solidFill>
                     <a:srgbClr val="000000"/>
                   </a:solidFill>
@@ -33686,7 +36711,7 @@
             </a:ln>
             <a:extLst>
               <a:ext uri="{91240B29-F687-4f45-9708-019B960494DF}">
-                <a14:hiddenLine xmlns:a14="http://schemas.microsoft.com/office/drawing/2010/main" xmlns:p14="http://schemas.microsoft.com/office/powerpoint/2010/main" xmlns:a16="http://schemas.microsoft.com/office/drawing/2014/main" xmlns="" w="9525">
+                <a14:hiddenLine xmlns="" xmlns:a16="http://schemas.microsoft.com/office/drawing/2014/main" xmlns:p14="http://schemas.microsoft.com/office/powerpoint/2010/main" xmlns:a14="http://schemas.microsoft.com/office/drawing/2010/main" w="9525">
                   <a:solidFill>
                     <a:srgbClr val="000000"/>
                   </a:solidFill>
@@ -33798,7 +36823,7 @@
             </a:ln>
             <a:extLst>
               <a:ext uri="{91240B29-F687-4f45-9708-019B960494DF}">
-                <a14:hiddenLine xmlns:a14="http://schemas.microsoft.com/office/drawing/2010/main" xmlns:p14="http://schemas.microsoft.com/office/powerpoint/2010/main" xmlns:a16="http://schemas.microsoft.com/office/drawing/2014/main" xmlns="" w="9525">
+                <a14:hiddenLine xmlns="" xmlns:a16="http://schemas.microsoft.com/office/drawing/2014/main" xmlns:p14="http://schemas.microsoft.com/office/powerpoint/2010/main" xmlns:a14="http://schemas.microsoft.com/office/drawing/2010/main" w="9525">
                   <a:solidFill>
                     <a:srgbClr val="000000"/>
                   </a:solidFill>
@@ -33885,7 +36910,7 @@
             </a:ln>
             <a:extLst>
               <a:ext uri="{91240B29-F687-4f45-9708-019B960494DF}">
-                <a14:hiddenLine xmlns:a14="http://schemas.microsoft.com/office/drawing/2010/main" xmlns:p14="http://schemas.microsoft.com/office/powerpoint/2010/main" xmlns:a16="http://schemas.microsoft.com/office/drawing/2014/main" xmlns="" w="9525">
+                <a14:hiddenLine xmlns="" xmlns:a16="http://schemas.microsoft.com/office/drawing/2014/main" xmlns:p14="http://schemas.microsoft.com/office/powerpoint/2010/main" xmlns:a14="http://schemas.microsoft.com/office/drawing/2010/main" w="9525">
                   <a:solidFill>
                     <a:srgbClr val="000000"/>
                   </a:solidFill>
@@ -33997,7 +37022,7 @@
             </a:ln>
             <a:extLst>
               <a:ext uri="{91240B29-F687-4f45-9708-019B960494DF}">
-                <a14:hiddenLine xmlns:a14="http://schemas.microsoft.com/office/drawing/2010/main" xmlns:p14="http://schemas.microsoft.com/office/powerpoint/2010/main" xmlns:a16="http://schemas.microsoft.com/office/drawing/2014/main" xmlns="" w="9525">
+                <a14:hiddenLine xmlns="" xmlns:a16="http://schemas.microsoft.com/office/drawing/2014/main" xmlns:p14="http://schemas.microsoft.com/office/powerpoint/2010/main" xmlns:a14="http://schemas.microsoft.com/office/drawing/2010/main" w="9525">
                   <a:solidFill>
                     <a:srgbClr val="000000"/>
                   </a:solidFill>
@@ -34087,7 +37112,7 @@
             </a:ln>
             <a:extLst>
               <a:ext uri="{91240B29-F687-4f45-9708-019B960494DF}">
-                <a14:hiddenLine xmlns:a14="http://schemas.microsoft.com/office/drawing/2010/main" xmlns:p14="http://schemas.microsoft.com/office/powerpoint/2010/main" xmlns:a16="http://schemas.microsoft.com/office/drawing/2014/main" xmlns="" w="9525">
+                <a14:hiddenLine xmlns="" xmlns:a16="http://schemas.microsoft.com/office/drawing/2014/main" xmlns:p14="http://schemas.microsoft.com/office/powerpoint/2010/main" xmlns:a14="http://schemas.microsoft.com/office/drawing/2010/main" w="9525">
                   <a:solidFill>
                     <a:srgbClr val="000000"/>
                   </a:solidFill>
@@ -34199,7 +37224,7 @@
             </a:ln>
             <a:extLst>
               <a:ext uri="{91240B29-F687-4f45-9708-019B960494DF}">
-                <a14:hiddenLine xmlns:a14="http://schemas.microsoft.com/office/drawing/2010/main" xmlns:p14="http://schemas.microsoft.com/office/powerpoint/2010/main" xmlns:a16="http://schemas.microsoft.com/office/drawing/2014/main" xmlns="" w="9525">
+                <a14:hiddenLine xmlns="" xmlns:a16="http://schemas.microsoft.com/office/drawing/2014/main" xmlns:p14="http://schemas.microsoft.com/office/powerpoint/2010/main" xmlns:a14="http://schemas.microsoft.com/office/drawing/2010/main" w="9525">
                   <a:solidFill>
                     <a:srgbClr val="000000"/>
                   </a:solidFill>
@@ -34289,7 +37314,7 @@
             </a:ln>
             <a:extLst>
               <a:ext uri="{91240B29-F687-4f45-9708-019B960494DF}">
-                <a14:hiddenLine xmlns:a14="http://schemas.microsoft.com/office/drawing/2010/main" xmlns:p14="http://schemas.microsoft.com/office/powerpoint/2010/main" xmlns:a16="http://schemas.microsoft.com/office/drawing/2014/main" xmlns="" w="9525">
+                <a14:hiddenLine xmlns="" xmlns:a16="http://schemas.microsoft.com/office/drawing/2014/main" xmlns:p14="http://schemas.microsoft.com/office/powerpoint/2010/main" xmlns:a14="http://schemas.microsoft.com/office/drawing/2010/main" w="9525">
                   <a:solidFill>
                     <a:srgbClr val="000000"/>
                   </a:solidFill>
@@ -34401,7 +37426,7 @@
             </a:ln>
             <a:extLst>
               <a:ext uri="{91240B29-F687-4f45-9708-019B960494DF}">
-                <a14:hiddenLine xmlns:a14="http://schemas.microsoft.com/office/drawing/2010/main" xmlns:p14="http://schemas.microsoft.com/office/powerpoint/2010/main" xmlns:a16="http://schemas.microsoft.com/office/drawing/2014/main" xmlns="" w="9525">
+                <a14:hiddenLine xmlns="" xmlns:a16="http://schemas.microsoft.com/office/drawing/2014/main" xmlns:p14="http://schemas.microsoft.com/office/powerpoint/2010/main" xmlns:a14="http://schemas.microsoft.com/office/drawing/2010/main" w="9525">
                   <a:solidFill>
                     <a:srgbClr val="000000"/>
                   </a:solidFill>
@@ -34457,7 +37482,7 @@
             </a:ln>
             <a:extLst>
               <a:ext uri="{91240B29-F687-4f45-9708-019B960494DF}">
-                <a14:hiddenLine xmlns:a14="http://schemas.microsoft.com/office/drawing/2010/main" xmlns:p14="http://schemas.microsoft.com/office/powerpoint/2010/main" xmlns:a16="http://schemas.microsoft.com/office/drawing/2014/main" xmlns="" w="9525">
+                <a14:hiddenLine xmlns="" xmlns:a16="http://schemas.microsoft.com/office/drawing/2014/main" xmlns:p14="http://schemas.microsoft.com/office/powerpoint/2010/main" xmlns:a14="http://schemas.microsoft.com/office/drawing/2010/main" w="9525">
                   <a:solidFill>
                     <a:srgbClr val="000000"/>
                   </a:solidFill>
@@ -34654,7 +37679,7 @@
           <a:noFill/>
           <a:extLst>
             <a:ext uri="{909E8E84-426E-40dd-AFC4-6F175D3DCCD1}">
-              <a14:hiddenFill xmlns="" xmlns:a16="http://schemas.microsoft.com/office/drawing/2014/main" xmlns:p14="http://schemas.microsoft.com/office/powerpoint/2010/main" xmlns:a14="http://schemas.microsoft.com/office/drawing/2010/main">
+              <a14:hiddenFill xmlns:a14="http://schemas.microsoft.com/office/drawing/2010/main" xmlns:p14="http://schemas.microsoft.com/office/powerpoint/2010/main" xmlns:a16="http://schemas.microsoft.com/office/drawing/2014/main" xmlns="">
                 <a:solidFill>
                   <a:srgbClr val="FFFFFF"/>
                 </a:solidFill>
@@ -34736,7 +37761,7 @@
             </a:ln>
             <a:extLst>
               <a:ext uri="{91240B29-F687-4f45-9708-019B960494DF}">
-                <a14:hiddenLine xmlns="" xmlns:a16="http://schemas.microsoft.com/office/drawing/2014/main" xmlns:p14="http://schemas.microsoft.com/office/powerpoint/2010/main" xmlns:a14="http://schemas.microsoft.com/office/drawing/2010/main" w="9525">
+                <a14:hiddenLine xmlns:a14="http://schemas.microsoft.com/office/drawing/2010/main" xmlns:p14="http://schemas.microsoft.com/office/powerpoint/2010/main" xmlns:a16="http://schemas.microsoft.com/office/drawing/2014/main" xmlns="" w="9525">
                   <a:solidFill>
                     <a:srgbClr val="000000"/>
                   </a:solidFill>
@@ -34848,7 +37873,7 @@
             </a:ln>
             <a:extLst>
               <a:ext uri="{91240B29-F687-4f45-9708-019B960494DF}">
-                <a14:hiddenLine xmlns="" xmlns:a16="http://schemas.microsoft.com/office/drawing/2014/main" xmlns:p14="http://schemas.microsoft.com/office/powerpoint/2010/main" xmlns:a14="http://schemas.microsoft.com/office/drawing/2010/main" w="9525">
+                <a14:hiddenLine xmlns:a14="http://schemas.microsoft.com/office/drawing/2010/main" xmlns:p14="http://schemas.microsoft.com/office/powerpoint/2010/main" xmlns:a16="http://schemas.microsoft.com/office/drawing/2014/main" xmlns="" w="9525">
                   <a:solidFill>
                     <a:srgbClr val="000000"/>
                   </a:solidFill>
@@ -34960,7 +37985,7 @@
             </a:ln>
             <a:extLst>
               <a:ext uri="{91240B29-F687-4f45-9708-019B960494DF}">
-                <a14:hiddenLine xmlns="" xmlns:a16="http://schemas.microsoft.com/office/drawing/2014/main" xmlns:p14="http://schemas.microsoft.com/office/powerpoint/2010/main" xmlns:a14="http://schemas.microsoft.com/office/drawing/2010/main" w="9525">
+                <a14:hiddenLine xmlns:a14="http://schemas.microsoft.com/office/drawing/2010/main" xmlns:p14="http://schemas.microsoft.com/office/powerpoint/2010/main" xmlns:a16="http://schemas.microsoft.com/office/drawing/2014/main" xmlns="" w="9525">
                   <a:solidFill>
                     <a:srgbClr val="000000"/>
                   </a:solidFill>
@@ -35044,7 +38069,7 @@
             </a:ln>
             <a:extLst>
               <a:ext uri="{91240B29-F687-4f45-9708-019B960494DF}">
-                <a14:hiddenLine xmlns="" xmlns:a16="http://schemas.microsoft.com/office/drawing/2014/main" xmlns:p14="http://schemas.microsoft.com/office/powerpoint/2010/main" xmlns:a14="http://schemas.microsoft.com/office/drawing/2010/main" w="9525">
+                <a14:hiddenLine xmlns:a14="http://schemas.microsoft.com/office/drawing/2010/main" xmlns:p14="http://schemas.microsoft.com/office/powerpoint/2010/main" xmlns:a16="http://schemas.microsoft.com/office/drawing/2014/main" xmlns="" w="9525">
                   <a:solidFill>
                     <a:srgbClr val="000000"/>
                   </a:solidFill>
@@ -35156,7 +38181,7 @@
             </a:ln>
             <a:extLst>
               <a:ext uri="{91240B29-F687-4f45-9708-019B960494DF}">
-                <a14:hiddenLine xmlns="" xmlns:a16="http://schemas.microsoft.com/office/drawing/2014/main" xmlns:p14="http://schemas.microsoft.com/office/powerpoint/2010/main" xmlns:a14="http://schemas.microsoft.com/office/drawing/2010/main" w="9525">
+                <a14:hiddenLine xmlns:a14="http://schemas.microsoft.com/office/drawing/2010/main" xmlns:p14="http://schemas.microsoft.com/office/powerpoint/2010/main" xmlns:a16="http://schemas.microsoft.com/office/drawing/2014/main" xmlns="" w="9525">
                   <a:solidFill>
                     <a:srgbClr val="000000"/>
                   </a:solidFill>
@@ -35240,7 +38265,7 @@
             </a:ln>
             <a:extLst>
               <a:ext uri="{91240B29-F687-4f45-9708-019B960494DF}">
-                <a14:hiddenLine xmlns="" xmlns:a16="http://schemas.microsoft.com/office/drawing/2014/main" xmlns:p14="http://schemas.microsoft.com/office/powerpoint/2010/main" xmlns:a14="http://schemas.microsoft.com/office/drawing/2010/main" w="9525">
+                <a14:hiddenLine xmlns:a14="http://schemas.microsoft.com/office/drawing/2010/main" xmlns:p14="http://schemas.microsoft.com/office/powerpoint/2010/main" xmlns:a16="http://schemas.microsoft.com/office/drawing/2014/main" xmlns="" w="9525">
                   <a:solidFill>
                     <a:srgbClr val="000000"/>
                   </a:solidFill>
@@ -35324,7 +38349,7 @@
             </a:ln>
             <a:extLst>
               <a:ext uri="{91240B29-F687-4f45-9708-019B960494DF}">
-                <a14:hiddenLine xmlns="" xmlns:a16="http://schemas.microsoft.com/office/drawing/2014/main" xmlns:p14="http://schemas.microsoft.com/office/powerpoint/2010/main" xmlns:a14="http://schemas.microsoft.com/office/drawing/2010/main" w="9525">
+                <a14:hiddenLine xmlns:a14="http://schemas.microsoft.com/office/drawing/2010/main" xmlns:p14="http://schemas.microsoft.com/office/powerpoint/2010/main" xmlns:a16="http://schemas.microsoft.com/office/drawing/2014/main" xmlns="" w="9525">
                   <a:solidFill>
                     <a:srgbClr val="000000"/>
                   </a:solidFill>
@@ -35436,7 +38461,7 @@
             </a:ln>
             <a:extLst>
               <a:ext uri="{91240B29-F687-4f45-9708-019B960494DF}">
-                <a14:hiddenLine xmlns="" xmlns:a16="http://schemas.microsoft.com/office/drawing/2014/main" xmlns:p14="http://schemas.microsoft.com/office/powerpoint/2010/main" xmlns:a14="http://schemas.microsoft.com/office/drawing/2010/main" w="9525">
+                <a14:hiddenLine xmlns:a14="http://schemas.microsoft.com/office/drawing/2010/main" xmlns:p14="http://schemas.microsoft.com/office/powerpoint/2010/main" xmlns:a16="http://schemas.microsoft.com/office/drawing/2014/main" xmlns="" w="9525">
                   <a:solidFill>
                     <a:srgbClr val="000000"/>
                   </a:solidFill>
@@ -35548,7 +38573,7 @@
             </a:ln>
             <a:extLst>
               <a:ext uri="{91240B29-F687-4f45-9708-019B960494DF}">
-                <a14:hiddenLine xmlns="" xmlns:a16="http://schemas.microsoft.com/office/drawing/2014/main" xmlns:p14="http://schemas.microsoft.com/office/powerpoint/2010/main" xmlns:a14="http://schemas.microsoft.com/office/drawing/2010/main" w="9525">
+                <a14:hiddenLine xmlns:a14="http://schemas.microsoft.com/office/drawing/2010/main" xmlns:p14="http://schemas.microsoft.com/office/powerpoint/2010/main" xmlns:a16="http://schemas.microsoft.com/office/drawing/2014/main" xmlns="" w="9525">
                   <a:solidFill>
                     <a:srgbClr val="000000"/>
                   </a:solidFill>
@@ -35632,7 +38657,7 @@
             </a:ln>
             <a:extLst>
               <a:ext uri="{91240B29-F687-4f45-9708-019B960494DF}">
-                <a14:hiddenLine xmlns="" xmlns:a16="http://schemas.microsoft.com/office/drawing/2014/main" xmlns:p14="http://schemas.microsoft.com/office/powerpoint/2010/main" xmlns:a14="http://schemas.microsoft.com/office/drawing/2010/main" w="9525">
+                <a14:hiddenLine xmlns:a14="http://schemas.microsoft.com/office/drawing/2010/main" xmlns:p14="http://schemas.microsoft.com/office/powerpoint/2010/main" xmlns:a16="http://schemas.microsoft.com/office/drawing/2014/main" xmlns="" w="9525">
                   <a:solidFill>
                     <a:srgbClr val="000000"/>
                   </a:solidFill>
@@ -35764,7 +38789,7 @@
             </a:ln>
             <a:extLst>
               <a:ext uri="{91240B29-F687-4f45-9708-019B960494DF}">
-                <a14:hiddenLine xmlns="" xmlns:a16="http://schemas.microsoft.com/office/drawing/2014/main" xmlns:p14="http://schemas.microsoft.com/office/powerpoint/2010/main" xmlns:a14="http://schemas.microsoft.com/office/drawing/2010/main" w="9525">
+                <a14:hiddenLine xmlns:a14="http://schemas.microsoft.com/office/drawing/2010/main" xmlns:p14="http://schemas.microsoft.com/office/powerpoint/2010/main" xmlns:a16="http://schemas.microsoft.com/office/drawing/2014/main" xmlns="" w="9525">
                   <a:solidFill>
                     <a:srgbClr val="000000"/>
                   </a:solidFill>
@@ -35892,7 +38917,7 @@
             </a:ln>
             <a:extLst>
               <a:ext uri="{91240B29-F687-4f45-9708-019B960494DF}">
-                <a14:hiddenLine xmlns="" xmlns:a16="http://schemas.microsoft.com/office/drawing/2014/main" xmlns:p14="http://schemas.microsoft.com/office/powerpoint/2010/main" xmlns:a14="http://schemas.microsoft.com/office/drawing/2010/main" w="9525">
+                <a14:hiddenLine xmlns:a14="http://schemas.microsoft.com/office/drawing/2010/main" xmlns:p14="http://schemas.microsoft.com/office/powerpoint/2010/main" xmlns:a16="http://schemas.microsoft.com/office/drawing/2014/main" xmlns="" w="9525">
                   <a:solidFill>
                     <a:srgbClr val="000000"/>
                   </a:solidFill>
@@ -35976,7 +39001,7 @@
             </a:ln>
             <a:extLst>
               <a:ext uri="{91240B29-F687-4f45-9708-019B960494DF}">
-                <a14:hiddenLine xmlns="" xmlns:a16="http://schemas.microsoft.com/office/drawing/2014/main" xmlns:p14="http://schemas.microsoft.com/office/powerpoint/2010/main" xmlns:a14="http://schemas.microsoft.com/office/drawing/2010/main" w="9525">
+                <a14:hiddenLine xmlns:a14="http://schemas.microsoft.com/office/drawing/2010/main" xmlns:p14="http://schemas.microsoft.com/office/powerpoint/2010/main" xmlns:a16="http://schemas.microsoft.com/office/drawing/2014/main" xmlns="" w="9525">
                   <a:solidFill>
                     <a:srgbClr val="000000"/>
                   </a:solidFill>
@@ -36060,7 +39085,7 @@
             </a:ln>
             <a:extLst>
               <a:ext uri="{91240B29-F687-4f45-9708-019B960494DF}">
-                <a14:hiddenLine xmlns="" xmlns:a16="http://schemas.microsoft.com/office/drawing/2014/main" xmlns:p14="http://schemas.microsoft.com/office/powerpoint/2010/main" xmlns:a14="http://schemas.microsoft.com/office/drawing/2010/main" w="9525">
+                <a14:hiddenLine xmlns:a14="http://schemas.microsoft.com/office/drawing/2010/main" xmlns:p14="http://schemas.microsoft.com/office/powerpoint/2010/main" xmlns:a16="http://schemas.microsoft.com/office/drawing/2014/main" xmlns="" w="9525">
                   <a:solidFill>
                     <a:srgbClr val="000000"/>
                   </a:solidFill>
@@ -36172,7 +39197,7 @@
             </a:ln>
             <a:extLst>
               <a:ext uri="{91240B29-F687-4f45-9708-019B960494DF}">
-                <a14:hiddenLine xmlns="" xmlns:a16="http://schemas.microsoft.com/office/drawing/2014/main" xmlns:p14="http://schemas.microsoft.com/office/powerpoint/2010/main" xmlns:a14="http://schemas.microsoft.com/office/drawing/2010/main" w="9525">
+                <a14:hiddenLine xmlns:a14="http://schemas.microsoft.com/office/drawing/2010/main" xmlns:p14="http://schemas.microsoft.com/office/powerpoint/2010/main" xmlns:a16="http://schemas.microsoft.com/office/drawing/2014/main" xmlns="" w="9525">
                   <a:solidFill>
                     <a:srgbClr val="000000"/>
                   </a:solidFill>
@@ -36228,7 +39253,7 @@
             </a:ln>
             <a:extLst>
               <a:ext uri="{91240B29-F687-4f45-9708-019B960494DF}">
-                <a14:hiddenLine xmlns="" xmlns:a16="http://schemas.microsoft.com/office/drawing/2014/main" xmlns:p14="http://schemas.microsoft.com/office/powerpoint/2010/main" xmlns:a14="http://schemas.microsoft.com/office/drawing/2010/main" w="9525">
+                <a14:hiddenLine xmlns:a14="http://schemas.microsoft.com/office/drawing/2010/main" xmlns:p14="http://schemas.microsoft.com/office/powerpoint/2010/main" xmlns:a16="http://schemas.microsoft.com/office/drawing/2014/main" xmlns="" w="9525">
                   <a:solidFill>
                     <a:srgbClr val="000000"/>
                   </a:solidFill>
@@ -36315,7 +39340,7 @@
             </a:ln>
             <a:extLst>
               <a:ext uri="{91240B29-F687-4f45-9708-019B960494DF}">
-                <a14:hiddenLine xmlns="" xmlns:a16="http://schemas.microsoft.com/office/drawing/2014/main" xmlns:p14="http://schemas.microsoft.com/office/powerpoint/2010/main" xmlns:a14="http://schemas.microsoft.com/office/drawing/2010/main" w="9525">
+                <a14:hiddenLine xmlns:a14="http://schemas.microsoft.com/office/drawing/2010/main" xmlns:p14="http://schemas.microsoft.com/office/powerpoint/2010/main" xmlns:a16="http://schemas.microsoft.com/office/drawing/2014/main" xmlns="" w="9525">
                   <a:solidFill>
                     <a:srgbClr val="000000"/>
                   </a:solidFill>
@@ -36427,7 +39452,7 @@
             </a:ln>
             <a:extLst>
               <a:ext uri="{91240B29-F687-4f45-9708-019B960494DF}">
-                <a14:hiddenLine xmlns="" xmlns:a16="http://schemas.microsoft.com/office/drawing/2014/main" xmlns:p14="http://schemas.microsoft.com/office/powerpoint/2010/main" xmlns:a14="http://schemas.microsoft.com/office/drawing/2010/main" w="9525">
+                <a14:hiddenLine xmlns:a14="http://schemas.microsoft.com/office/drawing/2010/main" xmlns:p14="http://schemas.microsoft.com/office/powerpoint/2010/main" xmlns:a16="http://schemas.microsoft.com/office/drawing/2014/main" xmlns="" w="9525">
                   <a:solidFill>
                     <a:srgbClr val="000000"/>
                   </a:solidFill>
@@ -36511,7 +39536,7 @@
             </a:ln>
             <a:extLst>
               <a:ext uri="{91240B29-F687-4f45-9708-019B960494DF}">
-                <a14:hiddenLine xmlns="" xmlns:a16="http://schemas.microsoft.com/office/drawing/2014/main" xmlns:p14="http://schemas.microsoft.com/office/powerpoint/2010/main" xmlns:a14="http://schemas.microsoft.com/office/drawing/2010/main" w="9525">
+                <a14:hiddenLine xmlns:a14="http://schemas.microsoft.com/office/drawing/2010/main" xmlns:p14="http://schemas.microsoft.com/office/powerpoint/2010/main" xmlns:a16="http://schemas.microsoft.com/office/drawing/2014/main" xmlns="" w="9525">
                   <a:solidFill>
                     <a:srgbClr val="000000"/>
                   </a:solidFill>
@@ -36623,7 +39648,7 @@
             </a:ln>
             <a:extLst>
               <a:ext uri="{91240B29-F687-4f45-9708-019B960494DF}">
-                <a14:hiddenLine xmlns="" xmlns:a16="http://schemas.microsoft.com/office/drawing/2014/main" xmlns:p14="http://schemas.microsoft.com/office/powerpoint/2010/main" xmlns:a14="http://schemas.microsoft.com/office/drawing/2010/main" w="9525">
+                <a14:hiddenLine xmlns:a14="http://schemas.microsoft.com/office/drawing/2010/main" xmlns:p14="http://schemas.microsoft.com/office/powerpoint/2010/main" xmlns:a16="http://schemas.microsoft.com/office/drawing/2014/main" xmlns="" w="9525">
                   <a:solidFill>
                     <a:srgbClr val="000000"/>
                   </a:solidFill>
@@ -36710,7 +39735,7 @@
             </a:ln>
             <a:extLst>
               <a:ext uri="{91240B29-F687-4f45-9708-019B960494DF}">
-                <a14:hiddenLine xmlns="" xmlns:a16="http://schemas.microsoft.com/office/drawing/2014/main" xmlns:p14="http://schemas.microsoft.com/office/powerpoint/2010/main" xmlns:a14="http://schemas.microsoft.com/office/drawing/2010/main" w="9525">
+                <a14:hiddenLine xmlns:a14="http://schemas.microsoft.com/office/drawing/2010/main" xmlns:p14="http://schemas.microsoft.com/office/powerpoint/2010/main" xmlns:a16="http://schemas.microsoft.com/office/drawing/2014/main" xmlns="" w="9525">
                   <a:solidFill>
                     <a:srgbClr val="000000"/>
                   </a:solidFill>
@@ -36794,7 +39819,7 @@
             </a:ln>
             <a:extLst>
               <a:ext uri="{91240B29-F687-4f45-9708-019B960494DF}">
-                <a14:hiddenLine xmlns="" xmlns:a16="http://schemas.microsoft.com/office/drawing/2014/main" xmlns:p14="http://schemas.microsoft.com/office/powerpoint/2010/main" xmlns:a14="http://schemas.microsoft.com/office/drawing/2010/main" w="9525">
+                <a14:hiddenLine xmlns:a14="http://schemas.microsoft.com/office/drawing/2010/main" xmlns:p14="http://schemas.microsoft.com/office/powerpoint/2010/main" xmlns:a16="http://schemas.microsoft.com/office/drawing/2014/main" xmlns="" w="9525">
                   <a:solidFill>
                     <a:srgbClr val="000000"/>
                   </a:solidFill>
@@ -36906,7 +39931,7 @@
             </a:ln>
             <a:extLst>
               <a:ext uri="{91240B29-F687-4f45-9708-019B960494DF}">
-                <a14:hiddenLine xmlns="" xmlns:a16="http://schemas.microsoft.com/office/drawing/2014/main" xmlns:p14="http://schemas.microsoft.com/office/powerpoint/2010/main" xmlns:a14="http://schemas.microsoft.com/office/drawing/2010/main" w="9525">
+                <a14:hiddenLine xmlns:a14="http://schemas.microsoft.com/office/drawing/2010/main" xmlns:p14="http://schemas.microsoft.com/office/powerpoint/2010/main" xmlns:a16="http://schemas.microsoft.com/office/drawing/2014/main" xmlns="" w="9525">
                   <a:solidFill>
                     <a:srgbClr val="000000"/>
                   </a:solidFill>
@@ -37018,7 +40043,7 @@
             </a:ln>
             <a:extLst>
               <a:ext uri="{91240B29-F687-4f45-9708-019B960494DF}">
-                <a14:hiddenLine xmlns="" xmlns:a16="http://schemas.microsoft.com/office/drawing/2014/main" xmlns:p14="http://schemas.microsoft.com/office/powerpoint/2010/main" xmlns:a14="http://schemas.microsoft.com/office/drawing/2010/main" w="9525">
+                <a14:hiddenLine xmlns:a14="http://schemas.microsoft.com/office/drawing/2010/main" xmlns:p14="http://schemas.microsoft.com/office/powerpoint/2010/main" xmlns:a16="http://schemas.microsoft.com/office/drawing/2014/main" xmlns="" w="9525">
                   <a:solidFill>
                     <a:srgbClr val="000000"/>
                   </a:solidFill>
@@ -37105,7 +40130,7 @@
             </a:ln>
             <a:extLst>
               <a:ext uri="{91240B29-F687-4f45-9708-019B960494DF}">
-                <a14:hiddenLine xmlns="" xmlns:a16="http://schemas.microsoft.com/office/drawing/2014/main" xmlns:p14="http://schemas.microsoft.com/office/powerpoint/2010/main" xmlns:a14="http://schemas.microsoft.com/office/drawing/2010/main" w="9525">
+                <a14:hiddenLine xmlns:a14="http://schemas.microsoft.com/office/drawing/2010/main" xmlns:p14="http://schemas.microsoft.com/office/powerpoint/2010/main" xmlns:a16="http://schemas.microsoft.com/office/drawing/2014/main" xmlns="" w="9525">
                   <a:solidFill>
                     <a:srgbClr val="000000"/>
                   </a:solidFill>
@@ -37247,7 +40272,7 @@
             </a:ln>
             <a:extLst>
               <a:ext uri="{91240B29-F687-4f45-9708-019B960494DF}">
-                <a14:hiddenLine xmlns="" xmlns:a16="http://schemas.microsoft.com/office/drawing/2014/main" xmlns:p14="http://schemas.microsoft.com/office/powerpoint/2010/main" xmlns:a14="http://schemas.microsoft.com/office/drawing/2010/main" w="9525">
+                <a14:hiddenLine xmlns:a14="http://schemas.microsoft.com/office/drawing/2010/main" xmlns:p14="http://schemas.microsoft.com/office/powerpoint/2010/main" xmlns:a16="http://schemas.microsoft.com/office/drawing/2014/main" xmlns="" w="9525">
                   <a:solidFill>
                     <a:srgbClr val="000000"/>
                   </a:solidFill>
@@ -37415,7 +40440,7 @@
             </a:ln>
             <a:extLst>
               <a:ext uri="{91240B29-F687-4f45-9708-019B960494DF}">
-                <a14:hiddenLine xmlns="" xmlns:a16="http://schemas.microsoft.com/office/drawing/2014/main" xmlns:p14="http://schemas.microsoft.com/office/powerpoint/2010/main" xmlns:a14="http://schemas.microsoft.com/office/drawing/2010/main" w="9525">
+                <a14:hiddenLine xmlns:a14="http://schemas.microsoft.com/office/drawing/2010/main" xmlns:p14="http://schemas.microsoft.com/office/powerpoint/2010/main" xmlns:a16="http://schemas.microsoft.com/office/drawing/2014/main" xmlns="" w="9525">
                   <a:solidFill>
                     <a:srgbClr val="000000"/>
                   </a:solidFill>
@@ -37552,7 +40577,7 @@
             </a:ln>
             <a:extLst>
               <a:ext uri="{91240B29-F687-4f45-9708-019B960494DF}">
-                <a14:hiddenLine xmlns="" xmlns:a16="http://schemas.microsoft.com/office/drawing/2014/main" xmlns:p14="http://schemas.microsoft.com/office/powerpoint/2010/main" xmlns:a14="http://schemas.microsoft.com/office/drawing/2010/main" w="9525">
+                <a14:hiddenLine xmlns:a14="http://schemas.microsoft.com/office/drawing/2010/main" xmlns:p14="http://schemas.microsoft.com/office/powerpoint/2010/main" xmlns:a16="http://schemas.microsoft.com/office/drawing/2014/main" xmlns="" w="9525">
                   <a:solidFill>
                     <a:srgbClr val="000000"/>
                   </a:solidFill>
@@ -37664,7 +40689,7 @@
             </a:ln>
             <a:extLst>
               <a:ext uri="{91240B29-F687-4f45-9708-019B960494DF}">
-                <a14:hiddenLine xmlns="" xmlns:a16="http://schemas.microsoft.com/office/drawing/2014/main" xmlns:p14="http://schemas.microsoft.com/office/powerpoint/2010/main" xmlns:a14="http://schemas.microsoft.com/office/drawing/2010/main" w="9525">
+                <a14:hiddenLine xmlns:a14="http://schemas.microsoft.com/office/drawing/2010/main" xmlns:p14="http://schemas.microsoft.com/office/powerpoint/2010/main" xmlns:a16="http://schemas.microsoft.com/office/drawing/2014/main" xmlns="" w="9525">
                   <a:solidFill>
                     <a:srgbClr val="000000"/>
                   </a:solidFill>
@@ -37751,7 +40776,7 @@
             </a:ln>
             <a:extLst>
               <a:ext uri="{91240B29-F687-4f45-9708-019B960494DF}">
-                <a14:hiddenLine xmlns="" xmlns:a16="http://schemas.microsoft.com/office/drawing/2014/main" xmlns:p14="http://schemas.microsoft.com/office/powerpoint/2010/main" xmlns:a14="http://schemas.microsoft.com/office/drawing/2010/main" w="9525">
+                <a14:hiddenLine xmlns:a14="http://schemas.microsoft.com/office/drawing/2010/main" xmlns:p14="http://schemas.microsoft.com/office/powerpoint/2010/main" xmlns:a16="http://schemas.microsoft.com/office/drawing/2014/main" xmlns="" w="9525">
                   <a:solidFill>
                     <a:srgbClr val="000000"/>
                   </a:solidFill>
@@ -37863,7 +40888,7 @@
             </a:ln>
             <a:extLst>
               <a:ext uri="{91240B29-F687-4f45-9708-019B960494DF}">
-                <a14:hiddenLine xmlns="" xmlns:a16="http://schemas.microsoft.com/office/drawing/2014/main" xmlns:p14="http://schemas.microsoft.com/office/powerpoint/2010/main" xmlns:a14="http://schemas.microsoft.com/office/drawing/2010/main" w="9525">
+                <a14:hiddenLine xmlns:a14="http://schemas.microsoft.com/office/drawing/2010/main" xmlns:p14="http://schemas.microsoft.com/office/powerpoint/2010/main" xmlns:a16="http://schemas.microsoft.com/office/drawing/2014/main" xmlns="" w="9525">
                   <a:solidFill>
                     <a:srgbClr val="000000"/>
                   </a:solidFill>
@@ -37953,7 +40978,7 @@
             </a:ln>
             <a:extLst>
               <a:ext uri="{91240B29-F687-4f45-9708-019B960494DF}">
-                <a14:hiddenLine xmlns="" xmlns:a16="http://schemas.microsoft.com/office/drawing/2014/main" xmlns:p14="http://schemas.microsoft.com/office/powerpoint/2010/main" xmlns:a14="http://schemas.microsoft.com/office/drawing/2010/main" w="9525">
+                <a14:hiddenLine xmlns:a14="http://schemas.microsoft.com/office/drawing/2010/main" xmlns:p14="http://schemas.microsoft.com/office/powerpoint/2010/main" xmlns:a16="http://schemas.microsoft.com/office/drawing/2014/main" xmlns="" w="9525">
                   <a:solidFill>
                     <a:srgbClr val="000000"/>
                   </a:solidFill>
@@ -38065,7 +41090,7 @@
             </a:ln>
             <a:extLst>
               <a:ext uri="{91240B29-F687-4f45-9708-019B960494DF}">
-                <a14:hiddenLine xmlns="" xmlns:a16="http://schemas.microsoft.com/office/drawing/2014/main" xmlns:p14="http://schemas.microsoft.com/office/powerpoint/2010/main" xmlns:a14="http://schemas.microsoft.com/office/drawing/2010/main" w="9525">
+                <a14:hiddenLine xmlns:a14="http://schemas.microsoft.com/office/drawing/2010/main" xmlns:p14="http://schemas.microsoft.com/office/powerpoint/2010/main" xmlns:a16="http://schemas.microsoft.com/office/drawing/2014/main" xmlns="" w="9525">
                   <a:solidFill>
                     <a:srgbClr val="000000"/>
                   </a:solidFill>
@@ -38155,7 +41180,7 @@
             </a:ln>
             <a:extLst>
               <a:ext uri="{91240B29-F687-4f45-9708-019B960494DF}">
-                <a14:hiddenLine xmlns="" xmlns:a16="http://schemas.microsoft.com/office/drawing/2014/main" xmlns:p14="http://schemas.microsoft.com/office/powerpoint/2010/main" xmlns:a14="http://schemas.microsoft.com/office/drawing/2010/main" w="9525">
+                <a14:hiddenLine xmlns:a14="http://schemas.microsoft.com/office/drawing/2010/main" xmlns:p14="http://schemas.microsoft.com/office/powerpoint/2010/main" xmlns:a16="http://schemas.microsoft.com/office/drawing/2014/main" xmlns="" w="9525">
                   <a:solidFill>
                     <a:srgbClr val="000000"/>
                   </a:solidFill>
@@ -38267,7 +41292,7 @@
             </a:ln>
             <a:extLst>
               <a:ext uri="{91240B29-F687-4f45-9708-019B960494DF}">
-                <a14:hiddenLine xmlns="" xmlns:a16="http://schemas.microsoft.com/office/drawing/2014/main" xmlns:p14="http://schemas.microsoft.com/office/powerpoint/2010/main" xmlns:a14="http://schemas.microsoft.com/office/drawing/2010/main" w="9525">
+                <a14:hiddenLine xmlns:a14="http://schemas.microsoft.com/office/drawing/2010/main" xmlns:p14="http://schemas.microsoft.com/office/powerpoint/2010/main" xmlns:a16="http://schemas.microsoft.com/office/drawing/2014/main" xmlns="" w="9525">
                   <a:solidFill>
                     <a:srgbClr val="000000"/>
                   </a:solidFill>
@@ -38323,7 +41348,7 @@
             </a:ln>
             <a:extLst>
               <a:ext uri="{91240B29-F687-4f45-9708-019B960494DF}">
-                <a14:hiddenLine xmlns="" xmlns:a16="http://schemas.microsoft.com/office/drawing/2014/main" xmlns:p14="http://schemas.microsoft.com/office/powerpoint/2010/main" xmlns:a14="http://schemas.microsoft.com/office/drawing/2010/main" w="9525">
+                <a14:hiddenLine xmlns:a14="http://schemas.microsoft.com/office/drawing/2010/main" xmlns:p14="http://schemas.microsoft.com/office/powerpoint/2010/main" xmlns:a16="http://schemas.microsoft.com/office/drawing/2014/main" xmlns="" w="9525">
                   <a:solidFill>
                     <a:srgbClr val="000000"/>
                   </a:solidFill>
@@ -38848,7 +41873,7 @@
           <a:noFill/>
           <a:extLst>
             <a:ext uri="{909E8E84-426E-40dd-AFC4-6F175D3DCCD1}">
-              <a14:hiddenFill xmlns:a14="http://schemas.microsoft.com/office/drawing/2010/main" xmlns:p14="http://schemas.microsoft.com/office/powerpoint/2010/main" xmlns:a16="http://schemas.microsoft.com/office/drawing/2014/main" xmlns="">
+              <a14:hiddenFill xmlns="" xmlns:a16="http://schemas.microsoft.com/office/drawing/2014/main" xmlns:p14="http://schemas.microsoft.com/office/powerpoint/2010/main" xmlns:a14="http://schemas.microsoft.com/office/drawing/2010/main">
                 <a:solidFill>
                   <a:srgbClr val="FFFFFF"/>
                 </a:solidFill>
@@ -38930,7 +41955,7 @@
             </a:ln>
             <a:extLst>
               <a:ext uri="{91240B29-F687-4f45-9708-019B960494DF}">
-                <a14:hiddenLine xmlns:a14="http://schemas.microsoft.com/office/drawing/2010/main" xmlns:p14="http://schemas.microsoft.com/office/powerpoint/2010/main" xmlns:a16="http://schemas.microsoft.com/office/drawing/2014/main" xmlns="" w="9525">
+                <a14:hiddenLine xmlns="" xmlns:a16="http://schemas.microsoft.com/office/drawing/2014/main" xmlns:p14="http://schemas.microsoft.com/office/powerpoint/2010/main" xmlns:a14="http://schemas.microsoft.com/office/drawing/2010/main" w="9525">
                   <a:solidFill>
                     <a:srgbClr val="000000"/>
                   </a:solidFill>
@@ -39042,7 +42067,7 @@
             </a:ln>
             <a:extLst>
               <a:ext uri="{91240B29-F687-4f45-9708-019B960494DF}">
-                <a14:hiddenLine xmlns:a14="http://schemas.microsoft.com/office/drawing/2010/main" xmlns:p14="http://schemas.microsoft.com/office/powerpoint/2010/main" xmlns:a16="http://schemas.microsoft.com/office/drawing/2014/main" xmlns="" w="9525">
+                <a14:hiddenLine xmlns="" xmlns:a16="http://schemas.microsoft.com/office/drawing/2014/main" xmlns:p14="http://schemas.microsoft.com/office/powerpoint/2010/main" xmlns:a14="http://schemas.microsoft.com/office/drawing/2010/main" w="9525">
                   <a:solidFill>
                     <a:srgbClr val="000000"/>
                   </a:solidFill>
@@ -39154,7 +42179,7 @@
             </a:ln>
             <a:extLst>
               <a:ext uri="{91240B29-F687-4f45-9708-019B960494DF}">
-                <a14:hiddenLine xmlns:a14="http://schemas.microsoft.com/office/drawing/2010/main" xmlns:p14="http://schemas.microsoft.com/office/powerpoint/2010/main" xmlns:a16="http://schemas.microsoft.com/office/drawing/2014/main" xmlns="" w="9525">
+                <a14:hiddenLine xmlns="" xmlns:a16="http://schemas.microsoft.com/office/drawing/2014/main" xmlns:p14="http://schemas.microsoft.com/office/powerpoint/2010/main" xmlns:a14="http://schemas.microsoft.com/office/drawing/2010/main" w="9525">
                   <a:solidFill>
                     <a:srgbClr val="000000"/>
                   </a:solidFill>
@@ -39238,7 +42263,7 @@
             </a:ln>
             <a:extLst>
               <a:ext uri="{91240B29-F687-4f45-9708-019B960494DF}">
-                <a14:hiddenLine xmlns:a14="http://schemas.microsoft.com/office/drawing/2010/main" xmlns:p14="http://schemas.microsoft.com/office/powerpoint/2010/main" xmlns:a16="http://schemas.microsoft.com/office/drawing/2014/main" xmlns="" w="9525">
+                <a14:hiddenLine xmlns="" xmlns:a16="http://schemas.microsoft.com/office/drawing/2014/main" xmlns:p14="http://schemas.microsoft.com/office/powerpoint/2010/main" xmlns:a14="http://schemas.microsoft.com/office/drawing/2010/main" w="9525">
                   <a:solidFill>
                     <a:srgbClr val="000000"/>
                   </a:solidFill>
@@ -39350,7 +42375,7 @@
             </a:ln>
             <a:extLst>
               <a:ext uri="{91240B29-F687-4f45-9708-019B960494DF}">
-                <a14:hiddenLine xmlns:a14="http://schemas.microsoft.com/office/drawing/2010/main" xmlns:p14="http://schemas.microsoft.com/office/powerpoint/2010/main" xmlns:a16="http://schemas.microsoft.com/office/drawing/2014/main" xmlns="" w="9525">
+                <a14:hiddenLine xmlns="" xmlns:a16="http://schemas.microsoft.com/office/drawing/2014/main" xmlns:p14="http://schemas.microsoft.com/office/powerpoint/2010/main" xmlns:a14="http://schemas.microsoft.com/office/drawing/2010/main" w="9525">
                   <a:solidFill>
                     <a:srgbClr val="000000"/>
                   </a:solidFill>
@@ -39434,7 +42459,7 @@
             </a:ln>
             <a:extLst>
               <a:ext uri="{91240B29-F687-4f45-9708-019B960494DF}">
-                <a14:hiddenLine xmlns:a14="http://schemas.microsoft.com/office/drawing/2010/main" xmlns:p14="http://schemas.microsoft.com/office/powerpoint/2010/main" xmlns:a16="http://schemas.microsoft.com/office/drawing/2014/main" xmlns="" w="9525">
+                <a14:hiddenLine xmlns="" xmlns:a16="http://schemas.microsoft.com/office/drawing/2014/main" xmlns:p14="http://schemas.microsoft.com/office/powerpoint/2010/main" xmlns:a14="http://schemas.microsoft.com/office/drawing/2010/main" w="9525">
                   <a:solidFill>
                     <a:srgbClr val="000000"/>
                   </a:solidFill>
@@ -39518,7 +42543,7 @@
             </a:ln>
             <a:extLst>
               <a:ext uri="{91240B29-F687-4f45-9708-019B960494DF}">
-                <a14:hiddenLine xmlns:a14="http://schemas.microsoft.com/office/drawing/2010/main" xmlns:p14="http://schemas.microsoft.com/office/powerpoint/2010/main" xmlns:a16="http://schemas.microsoft.com/office/drawing/2014/main" xmlns="" w="9525">
+                <a14:hiddenLine xmlns="" xmlns:a16="http://schemas.microsoft.com/office/drawing/2014/main" xmlns:p14="http://schemas.microsoft.com/office/powerpoint/2010/main" xmlns:a14="http://schemas.microsoft.com/office/drawing/2010/main" w="9525">
                   <a:solidFill>
                     <a:srgbClr val="000000"/>
                   </a:solidFill>
@@ -39630,7 +42655,7 @@
             </a:ln>
             <a:extLst>
               <a:ext uri="{91240B29-F687-4f45-9708-019B960494DF}">
-                <a14:hiddenLine xmlns:a14="http://schemas.microsoft.com/office/drawing/2010/main" xmlns:p14="http://schemas.microsoft.com/office/powerpoint/2010/main" xmlns:a16="http://schemas.microsoft.com/office/drawing/2014/main" xmlns="" w="9525">
+                <a14:hiddenLine xmlns="" xmlns:a16="http://schemas.microsoft.com/office/drawing/2014/main" xmlns:p14="http://schemas.microsoft.com/office/powerpoint/2010/main" xmlns:a14="http://schemas.microsoft.com/office/drawing/2010/main" w="9525">
                   <a:solidFill>
                     <a:srgbClr val="000000"/>
                   </a:solidFill>
@@ -39742,7 +42767,7 @@
             </a:ln>
             <a:extLst>
               <a:ext uri="{91240B29-F687-4f45-9708-019B960494DF}">
-                <a14:hiddenLine xmlns:a14="http://schemas.microsoft.com/office/drawing/2010/main" xmlns:p14="http://schemas.microsoft.com/office/powerpoint/2010/main" xmlns:a16="http://schemas.microsoft.com/office/drawing/2014/main" xmlns="" w="9525">
+                <a14:hiddenLine xmlns="" xmlns:a16="http://schemas.microsoft.com/office/drawing/2014/main" xmlns:p14="http://schemas.microsoft.com/office/powerpoint/2010/main" xmlns:a14="http://schemas.microsoft.com/office/drawing/2010/main" w="9525">
                   <a:solidFill>
                     <a:srgbClr val="000000"/>
                   </a:solidFill>
@@ -39826,7 +42851,7 @@
             </a:ln>
             <a:extLst>
               <a:ext uri="{91240B29-F687-4f45-9708-019B960494DF}">
-                <a14:hiddenLine xmlns:a14="http://schemas.microsoft.com/office/drawing/2010/main" xmlns:p14="http://schemas.microsoft.com/office/powerpoint/2010/main" xmlns:a16="http://schemas.microsoft.com/office/drawing/2014/main" xmlns="" w="9525">
+                <a14:hiddenLine xmlns="" xmlns:a16="http://schemas.microsoft.com/office/drawing/2014/main" xmlns:p14="http://schemas.microsoft.com/office/powerpoint/2010/main" xmlns:a14="http://schemas.microsoft.com/office/drawing/2010/main" w="9525">
                   <a:solidFill>
                     <a:srgbClr val="000000"/>
                   </a:solidFill>
@@ -39958,7 +42983,7 @@
             </a:ln>
             <a:extLst>
               <a:ext uri="{91240B29-F687-4f45-9708-019B960494DF}">
-                <a14:hiddenLine xmlns:a14="http://schemas.microsoft.com/office/drawing/2010/main" xmlns:p14="http://schemas.microsoft.com/office/powerpoint/2010/main" xmlns:a16="http://schemas.microsoft.com/office/drawing/2014/main" xmlns="" w="9525">
+                <a14:hiddenLine xmlns="" xmlns:a16="http://schemas.microsoft.com/office/drawing/2014/main" xmlns:p14="http://schemas.microsoft.com/office/powerpoint/2010/main" xmlns:a14="http://schemas.microsoft.com/office/drawing/2010/main" w="9525">
                   <a:solidFill>
                     <a:srgbClr val="000000"/>
                   </a:solidFill>
@@ -40086,7 +43111,7 @@
             </a:ln>
             <a:extLst>
               <a:ext uri="{91240B29-F687-4f45-9708-019B960494DF}">
-                <a14:hiddenLine xmlns:a14="http://schemas.microsoft.com/office/drawing/2010/main" xmlns:p14="http://schemas.microsoft.com/office/powerpoint/2010/main" xmlns:a16="http://schemas.microsoft.com/office/drawing/2014/main" xmlns="" w="9525">
+                <a14:hiddenLine xmlns="" xmlns:a16="http://schemas.microsoft.com/office/drawing/2014/main" xmlns:p14="http://schemas.microsoft.com/office/powerpoint/2010/main" xmlns:a14="http://schemas.microsoft.com/office/drawing/2010/main" w="9525">
                   <a:solidFill>
                     <a:srgbClr val="000000"/>
                   </a:solidFill>
@@ -40170,7 +43195,7 @@
             </a:ln>
             <a:extLst>
               <a:ext uri="{91240B29-F687-4f45-9708-019B960494DF}">
-                <a14:hiddenLine xmlns:a14="http://schemas.microsoft.com/office/drawing/2010/main" xmlns:p14="http://schemas.microsoft.com/office/powerpoint/2010/main" xmlns:a16="http://schemas.microsoft.com/office/drawing/2014/main" xmlns="" w="9525">
+                <a14:hiddenLine xmlns="" xmlns:a16="http://schemas.microsoft.com/office/drawing/2014/main" xmlns:p14="http://schemas.microsoft.com/office/powerpoint/2010/main" xmlns:a14="http://schemas.microsoft.com/office/drawing/2010/main" w="9525">
                   <a:solidFill>
                     <a:srgbClr val="000000"/>
                   </a:solidFill>
@@ -40254,7 +43279,7 @@
             </a:ln>
             <a:extLst>
               <a:ext uri="{91240B29-F687-4f45-9708-019B960494DF}">
-                <a14:hiddenLine xmlns:a14="http://schemas.microsoft.com/office/drawing/2010/main" xmlns:p14="http://schemas.microsoft.com/office/powerpoint/2010/main" xmlns:a16="http://schemas.microsoft.com/office/drawing/2014/main" xmlns="" w="9525">
+                <a14:hiddenLine xmlns="" xmlns:a16="http://schemas.microsoft.com/office/drawing/2014/main" xmlns:p14="http://schemas.microsoft.com/office/powerpoint/2010/main" xmlns:a14="http://schemas.microsoft.com/office/drawing/2010/main" w="9525">
                   <a:solidFill>
                     <a:srgbClr val="000000"/>
                   </a:solidFill>
@@ -40366,7 +43391,7 @@
             </a:ln>
             <a:extLst>
               <a:ext uri="{91240B29-F687-4f45-9708-019B960494DF}">
-                <a14:hiddenLine xmlns:a14="http://schemas.microsoft.com/office/drawing/2010/main" xmlns:p14="http://schemas.microsoft.com/office/powerpoint/2010/main" xmlns:a16="http://schemas.microsoft.com/office/drawing/2014/main" xmlns="" w="9525">
+                <a14:hiddenLine xmlns="" xmlns:a16="http://schemas.microsoft.com/office/drawing/2014/main" xmlns:p14="http://schemas.microsoft.com/office/powerpoint/2010/main" xmlns:a14="http://schemas.microsoft.com/office/drawing/2010/main" w="9525">
                   <a:solidFill>
                     <a:srgbClr val="000000"/>
                   </a:solidFill>
@@ -40422,7 +43447,7 @@
             </a:ln>
             <a:extLst>
               <a:ext uri="{91240B29-F687-4f45-9708-019B960494DF}">
-                <a14:hiddenLine xmlns:a14="http://schemas.microsoft.com/office/drawing/2010/main" xmlns:p14="http://schemas.microsoft.com/office/powerpoint/2010/main" xmlns:a16="http://schemas.microsoft.com/office/drawing/2014/main" xmlns="" w="9525">
+                <a14:hiddenLine xmlns="" xmlns:a16="http://schemas.microsoft.com/office/drawing/2014/main" xmlns:p14="http://schemas.microsoft.com/office/powerpoint/2010/main" xmlns:a14="http://schemas.microsoft.com/office/drawing/2010/main" w="9525">
                   <a:solidFill>
                     <a:srgbClr val="000000"/>
                   </a:solidFill>
@@ -40509,7 +43534,7 @@
             </a:ln>
             <a:extLst>
               <a:ext uri="{91240B29-F687-4f45-9708-019B960494DF}">
-                <a14:hiddenLine xmlns:a14="http://schemas.microsoft.com/office/drawing/2010/main" xmlns:p14="http://schemas.microsoft.com/office/powerpoint/2010/main" xmlns:a16="http://schemas.microsoft.com/office/drawing/2014/main" xmlns="" w="9525">
+                <a14:hiddenLine xmlns="" xmlns:a16="http://schemas.microsoft.com/office/drawing/2014/main" xmlns:p14="http://schemas.microsoft.com/office/powerpoint/2010/main" xmlns:a14="http://schemas.microsoft.com/office/drawing/2010/main" w="9525">
                   <a:solidFill>
                     <a:srgbClr val="000000"/>
                   </a:solidFill>
@@ -40621,7 +43646,7 @@
             </a:ln>
             <a:extLst>
               <a:ext uri="{91240B29-F687-4f45-9708-019B960494DF}">
-                <a14:hiddenLine xmlns:a14="http://schemas.microsoft.com/office/drawing/2010/main" xmlns:p14="http://schemas.microsoft.com/office/powerpoint/2010/main" xmlns:a16="http://schemas.microsoft.com/office/drawing/2014/main" xmlns="" w="9525">
+                <a14:hiddenLine xmlns="" xmlns:a16="http://schemas.microsoft.com/office/drawing/2014/main" xmlns:p14="http://schemas.microsoft.com/office/powerpoint/2010/main" xmlns:a14="http://schemas.microsoft.com/office/drawing/2010/main" w="9525">
                   <a:solidFill>
                     <a:srgbClr val="000000"/>
                   </a:solidFill>
@@ -40705,7 +43730,7 @@
             </a:ln>
             <a:extLst>
               <a:ext uri="{91240B29-F687-4f45-9708-019B960494DF}">
-                <a14:hiddenLine xmlns:a14="http://schemas.microsoft.com/office/drawing/2010/main" xmlns:p14="http://schemas.microsoft.com/office/powerpoint/2010/main" xmlns:a16="http://schemas.microsoft.com/office/drawing/2014/main" xmlns="" w="9525">
+                <a14:hiddenLine xmlns="" xmlns:a16="http://schemas.microsoft.com/office/drawing/2014/main" xmlns:p14="http://schemas.microsoft.com/office/powerpoint/2010/main" xmlns:a14="http://schemas.microsoft.com/office/drawing/2010/main" w="9525">
                   <a:solidFill>
                     <a:srgbClr val="000000"/>
                   </a:solidFill>
@@ -40817,7 +43842,7 @@
             </a:ln>
             <a:extLst>
               <a:ext uri="{91240B29-F687-4f45-9708-019B960494DF}">
-                <a14:hiddenLine xmlns:a14="http://schemas.microsoft.com/office/drawing/2010/main" xmlns:p14="http://schemas.microsoft.com/office/powerpoint/2010/main" xmlns:a16="http://schemas.microsoft.com/office/drawing/2014/main" xmlns="" w="9525">
+                <a14:hiddenLine xmlns="" xmlns:a16="http://schemas.microsoft.com/office/drawing/2014/main" xmlns:p14="http://schemas.microsoft.com/office/powerpoint/2010/main" xmlns:a14="http://schemas.microsoft.com/office/drawing/2010/main" w="9525">
                   <a:solidFill>
                     <a:srgbClr val="000000"/>
                   </a:solidFill>
@@ -40904,7 +43929,7 @@
             </a:ln>
             <a:extLst>
               <a:ext uri="{91240B29-F687-4f45-9708-019B960494DF}">
-                <a14:hiddenLine xmlns:a14="http://schemas.microsoft.com/office/drawing/2010/main" xmlns:p14="http://schemas.microsoft.com/office/powerpoint/2010/main" xmlns:a16="http://schemas.microsoft.com/office/drawing/2014/main" xmlns="" w="9525">
+                <a14:hiddenLine xmlns="" xmlns:a16="http://schemas.microsoft.com/office/drawing/2014/main" xmlns:p14="http://schemas.microsoft.com/office/powerpoint/2010/main" xmlns:a14="http://schemas.microsoft.com/office/drawing/2010/main" w="9525">
                   <a:solidFill>
                     <a:srgbClr val="000000"/>
                   </a:solidFill>
@@ -40988,7 +44013,7 @@
             </a:ln>
             <a:extLst>
               <a:ext uri="{91240B29-F687-4f45-9708-019B960494DF}">
-                <a14:hiddenLine xmlns:a14="http://schemas.microsoft.com/office/drawing/2010/main" xmlns:p14="http://schemas.microsoft.com/office/powerpoint/2010/main" xmlns:a16="http://schemas.microsoft.com/office/drawing/2014/main" xmlns="" w="9525">
+                <a14:hiddenLine xmlns="" xmlns:a16="http://schemas.microsoft.com/office/drawing/2014/main" xmlns:p14="http://schemas.microsoft.com/office/powerpoint/2010/main" xmlns:a14="http://schemas.microsoft.com/office/drawing/2010/main" w="9525">
                   <a:solidFill>
                     <a:srgbClr val="000000"/>
                   </a:solidFill>
@@ -41100,7 +44125,7 @@
             </a:ln>
             <a:extLst>
               <a:ext uri="{91240B29-F687-4f45-9708-019B960494DF}">
-                <a14:hiddenLine xmlns:a14="http://schemas.microsoft.com/office/drawing/2010/main" xmlns:p14="http://schemas.microsoft.com/office/powerpoint/2010/main" xmlns:a16="http://schemas.microsoft.com/office/drawing/2014/main" xmlns="" w="9525">
+                <a14:hiddenLine xmlns="" xmlns:a16="http://schemas.microsoft.com/office/drawing/2014/main" xmlns:p14="http://schemas.microsoft.com/office/powerpoint/2010/main" xmlns:a14="http://schemas.microsoft.com/office/drawing/2010/main" w="9525">
                   <a:solidFill>
                     <a:srgbClr val="000000"/>
                   </a:solidFill>
@@ -41212,7 +44237,7 @@
             </a:ln>
             <a:extLst>
               <a:ext uri="{91240B29-F687-4f45-9708-019B960494DF}">
-                <a14:hiddenLine xmlns:a14="http://schemas.microsoft.com/office/drawing/2010/main" xmlns:p14="http://schemas.microsoft.com/office/powerpoint/2010/main" xmlns:a16="http://schemas.microsoft.com/office/drawing/2014/main" xmlns="" w="9525">
+                <a14:hiddenLine xmlns="" xmlns:a16="http://schemas.microsoft.com/office/drawing/2014/main" xmlns:p14="http://schemas.microsoft.com/office/powerpoint/2010/main" xmlns:a14="http://schemas.microsoft.com/office/drawing/2010/main" w="9525">
                   <a:solidFill>
                     <a:srgbClr val="000000"/>
                   </a:solidFill>
@@ -41299,7 +44324,7 @@
             </a:ln>
             <a:extLst>
               <a:ext uri="{91240B29-F687-4f45-9708-019B960494DF}">
-                <a14:hiddenLine xmlns:a14="http://schemas.microsoft.com/office/drawing/2010/main" xmlns:p14="http://schemas.microsoft.com/office/powerpoint/2010/main" xmlns:a16="http://schemas.microsoft.com/office/drawing/2014/main" xmlns="" w="9525">
+                <a14:hiddenLine xmlns="" xmlns:a16="http://schemas.microsoft.com/office/drawing/2014/main" xmlns:p14="http://schemas.microsoft.com/office/powerpoint/2010/main" xmlns:a14="http://schemas.microsoft.com/office/drawing/2010/main" w="9525">
                   <a:solidFill>
                     <a:srgbClr val="000000"/>
                   </a:solidFill>
@@ -41441,7 +44466,7 @@
             </a:ln>
             <a:extLst>
               <a:ext uri="{91240B29-F687-4f45-9708-019B960494DF}">
-                <a14:hiddenLine xmlns:a14="http://schemas.microsoft.com/office/drawing/2010/main" xmlns:p14="http://schemas.microsoft.com/office/powerpoint/2010/main" xmlns:a16="http://schemas.microsoft.com/office/drawing/2014/main" xmlns="" w="9525">
+                <a14:hiddenLine xmlns="" xmlns:a16="http://schemas.microsoft.com/office/drawing/2014/main" xmlns:p14="http://schemas.microsoft.com/office/powerpoint/2010/main" xmlns:a14="http://schemas.microsoft.com/office/drawing/2010/main" w="9525">
                   <a:solidFill>
                     <a:srgbClr val="000000"/>
                   </a:solidFill>
@@ -41609,7 +44634,7 @@
             </a:ln>
             <a:extLst>
               <a:ext uri="{91240B29-F687-4f45-9708-019B960494DF}">
-                <a14:hiddenLine xmlns:a14="http://schemas.microsoft.com/office/drawing/2010/main" xmlns:p14="http://schemas.microsoft.com/office/powerpoint/2010/main" xmlns:a16="http://schemas.microsoft.com/office/drawing/2014/main" xmlns="" w="9525">
+                <a14:hiddenLine xmlns="" xmlns:a16="http://schemas.microsoft.com/office/drawing/2014/main" xmlns:p14="http://schemas.microsoft.com/office/powerpoint/2010/main" xmlns:a14="http://schemas.microsoft.com/office/drawing/2010/main" w="9525">
                   <a:solidFill>
                     <a:srgbClr val="000000"/>
                   </a:solidFill>
@@ -41746,7 +44771,7 @@
             </a:ln>
             <a:extLst>
               <a:ext uri="{91240B29-F687-4f45-9708-019B960494DF}">
-                <a14:hiddenLine xmlns:a14="http://schemas.microsoft.com/office/drawing/2010/main" xmlns:p14="http://schemas.microsoft.com/office/powerpoint/2010/main" xmlns:a16="http://schemas.microsoft.com/office/drawing/2014/main" xmlns="" w="9525">
+                <a14:hiddenLine xmlns="" xmlns:a16="http://schemas.microsoft.com/office/drawing/2014/main" xmlns:p14="http://schemas.microsoft.com/office/powerpoint/2010/main" xmlns:a14="http://schemas.microsoft.com/office/drawing/2010/main" w="9525">
                   <a:solidFill>
                     <a:srgbClr val="000000"/>
                   </a:solidFill>
@@ -41858,7 +44883,7 @@
             </a:ln>
             <a:extLst>
               <a:ext uri="{91240B29-F687-4f45-9708-019B960494DF}">
-                <a14:hiddenLine xmlns:a14="http://schemas.microsoft.com/office/drawing/2010/main" xmlns:p14="http://schemas.microsoft.com/office/powerpoint/2010/main" xmlns:a16="http://schemas.microsoft.com/office/drawing/2014/main" xmlns="" w="9525">
+                <a14:hiddenLine xmlns="" xmlns:a16="http://schemas.microsoft.com/office/drawing/2014/main" xmlns:p14="http://schemas.microsoft.com/office/powerpoint/2010/main" xmlns:a14="http://schemas.microsoft.com/office/drawing/2010/main" w="9525">
                   <a:solidFill>
                     <a:srgbClr val="000000"/>
                   </a:solidFill>
@@ -41945,7 +44970,7 @@
             </a:ln>
             <a:extLst>
               <a:ext uri="{91240B29-F687-4f45-9708-019B960494DF}">
-                <a14:hiddenLine xmlns:a14="http://schemas.microsoft.com/office/drawing/2010/main" xmlns:p14="http://schemas.microsoft.com/office/powerpoint/2010/main" xmlns:a16="http://schemas.microsoft.com/office/drawing/2014/main" xmlns="" w="9525">
+                <a14:hiddenLine xmlns="" xmlns:a16="http://schemas.microsoft.com/office/drawing/2014/main" xmlns:p14="http://schemas.microsoft.com/office/powerpoint/2010/main" xmlns:a14="http://schemas.microsoft.com/office/drawing/2010/main" w="9525">
                   <a:solidFill>
                     <a:srgbClr val="000000"/>
                   </a:solidFill>
@@ -42057,7 +45082,7 @@
             </a:ln>
             <a:extLst>
               <a:ext uri="{91240B29-F687-4f45-9708-019B960494DF}">
-                <a14:hiddenLine xmlns:a14="http://schemas.microsoft.com/office/drawing/2010/main" xmlns:p14="http://schemas.microsoft.com/office/powerpoint/2010/main" xmlns:a16="http://schemas.microsoft.com/office/drawing/2014/main" xmlns="" w="9525">
+                <a14:hiddenLine xmlns="" xmlns:a16="http://schemas.microsoft.com/office/drawing/2014/main" xmlns:p14="http://schemas.microsoft.com/office/powerpoint/2010/main" xmlns:a14="http://schemas.microsoft.com/office/drawing/2010/main" w="9525">
                   <a:solidFill>
                     <a:srgbClr val="000000"/>
                   </a:solidFill>
@@ -42147,7 +45172,7 @@
             </a:ln>
             <a:extLst>
               <a:ext uri="{91240B29-F687-4f45-9708-019B960494DF}">
-                <a14:hiddenLine xmlns:a14="http://schemas.microsoft.com/office/drawing/2010/main" xmlns:p14="http://schemas.microsoft.com/office/powerpoint/2010/main" xmlns:a16="http://schemas.microsoft.com/office/drawing/2014/main" xmlns="" w="9525">
+                <a14:hiddenLine xmlns="" xmlns:a16="http://schemas.microsoft.com/office/drawing/2014/main" xmlns:p14="http://schemas.microsoft.com/office/powerpoint/2010/main" xmlns:a14="http://schemas.microsoft.com/office/drawing/2010/main" w="9525">
                   <a:solidFill>
                     <a:srgbClr val="000000"/>
                   </a:solidFill>
@@ -42259,7 +45284,7 @@
             </a:ln>
             <a:extLst>
               <a:ext uri="{91240B29-F687-4f45-9708-019B960494DF}">
-                <a14:hiddenLine xmlns:a14="http://schemas.microsoft.com/office/drawing/2010/main" xmlns:p14="http://schemas.microsoft.com/office/powerpoint/2010/main" xmlns:a16="http://schemas.microsoft.com/office/drawing/2014/main" xmlns="" w="9525">
+                <a14:hiddenLine xmlns="" xmlns:a16="http://schemas.microsoft.com/office/drawing/2014/main" xmlns:p14="http://schemas.microsoft.com/office/powerpoint/2010/main" xmlns:a14="http://schemas.microsoft.com/office/drawing/2010/main" w="9525">
                   <a:solidFill>
                     <a:srgbClr val="000000"/>
                   </a:solidFill>
@@ -42349,7 +45374,7 @@
             </a:ln>
             <a:extLst>
               <a:ext uri="{91240B29-F687-4f45-9708-019B960494DF}">
-                <a14:hiddenLine xmlns:a14="http://schemas.microsoft.com/office/drawing/2010/main" xmlns:p14="http://schemas.microsoft.com/office/powerpoint/2010/main" xmlns:a16="http://schemas.microsoft.com/office/drawing/2014/main" xmlns="" w="9525">
+                <a14:hiddenLine xmlns="" xmlns:a16="http://schemas.microsoft.com/office/drawing/2014/main" xmlns:p14="http://schemas.microsoft.com/office/powerpoint/2010/main" xmlns:a14="http://schemas.microsoft.com/office/drawing/2010/main" w="9525">
                   <a:solidFill>
                     <a:srgbClr val="000000"/>
                   </a:solidFill>
@@ -42461,7 +45486,7 @@
             </a:ln>
             <a:extLst>
               <a:ext uri="{91240B29-F687-4f45-9708-019B960494DF}">
-                <a14:hiddenLine xmlns:a14="http://schemas.microsoft.com/office/drawing/2010/main" xmlns:p14="http://schemas.microsoft.com/office/powerpoint/2010/main" xmlns:a16="http://schemas.microsoft.com/office/drawing/2014/main" xmlns="" w="9525">
+                <a14:hiddenLine xmlns="" xmlns:a16="http://schemas.microsoft.com/office/drawing/2014/main" xmlns:p14="http://schemas.microsoft.com/office/powerpoint/2010/main" xmlns:a14="http://schemas.microsoft.com/office/drawing/2010/main" w="9525">
                   <a:solidFill>
                     <a:srgbClr val="000000"/>
                   </a:solidFill>
@@ -42517,7 +45542,7 @@
             </a:ln>
             <a:extLst>
               <a:ext uri="{91240B29-F687-4f45-9708-019B960494DF}">
-                <a14:hiddenLine xmlns:a14="http://schemas.microsoft.com/office/drawing/2010/main" xmlns:p14="http://schemas.microsoft.com/office/powerpoint/2010/main" xmlns:a16="http://schemas.microsoft.com/office/drawing/2014/main" xmlns="" w="9525">
+                <a14:hiddenLine xmlns="" xmlns:a16="http://schemas.microsoft.com/office/drawing/2014/main" xmlns:p14="http://schemas.microsoft.com/office/powerpoint/2010/main" xmlns:a14="http://schemas.microsoft.com/office/drawing/2010/main" w="9525">
                   <a:solidFill>
                     <a:srgbClr val="000000"/>
                   </a:solidFill>
@@ -42921,7 +45946,7 @@
           <a:noFill/>
           <a:extLst>
             <a:ext uri="{909E8E84-426E-40dd-AFC4-6F175D3DCCD1}">
-              <a14:hiddenFill xmlns:a14="http://schemas.microsoft.com/office/drawing/2010/main" xmlns:p14="http://schemas.microsoft.com/office/powerpoint/2010/main" xmlns:a16="http://schemas.microsoft.com/office/drawing/2014/main" xmlns="">
+              <a14:hiddenFill xmlns="" xmlns:a16="http://schemas.microsoft.com/office/drawing/2014/main" xmlns:p14="http://schemas.microsoft.com/office/powerpoint/2010/main" xmlns:a14="http://schemas.microsoft.com/office/drawing/2010/main">
                 <a:solidFill>
                   <a:srgbClr val="FFFFFF"/>
                 </a:solidFill>
@@ -43003,7 +46028,7 @@
             </a:ln>
             <a:extLst>
               <a:ext uri="{91240B29-F687-4f45-9708-019B960494DF}">
-                <a14:hiddenLine xmlns:a14="http://schemas.microsoft.com/office/drawing/2010/main" xmlns:p14="http://schemas.microsoft.com/office/powerpoint/2010/main" xmlns:a16="http://schemas.microsoft.com/office/drawing/2014/main" xmlns="" w="9525">
+                <a14:hiddenLine xmlns="" xmlns:a16="http://schemas.microsoft.com/office/drawing/2014/main" xmlns:p14="http://schemas.microsoft.com/office/powerpoint/2010/main" xmlns:a14="http://schemas.microsoft.com/office/drawing/2010/main" w="9525">
                   <a:solidFill>
                     <a:srgbClr val="000000"/>
                   </a:solidFill>
@@ -43115,7 +46140,7 @@
             </a:ln>
             <a:extLst>
               <a:ext uri="{91240B29-F687-4f45-9708-019B960494DF}">
-                <a14:hiddenLine xmlns:a14="http://schemas.microsoft.com/office/drawing/2010/main" xmlns:p14="http://schemas.microsoft.com/office/powerpoint/2010/main" xmlns:a16="http://schemas.microsoft.com/office/drawing/2014/main" xmlns="" w="9525">
+                <a14:hiddenLine xmlns="" xmlns:a16="http://schemas.microsoft.com/office/drawing/2014/main" xmlns:p14="http://schemas.microsoft.com/office/powerpoint/2010/main" xmlns:a14="http://schemas.microsoft.com/office/drawing/2010/main" w="9525">
                   <a:solidFill>
                     <a:srgbClr val="000000"/>
                   </a:solidFill>
@@ -43227,7 +46252,7 @@
             </a:ln>
             <a:extLst>
               <a:ext uri="{91240B29-F687-4f45-9708-019B960494DF}">
-                <a14:hiddenLine xmlns:a14="http://schemas.microsoft.com/office/drawing/2010/main" xmlns:p14="http://schemas.microsoft.com/office/powerpoint/2010/main" xmlns:a16="http://schemas.microsoft.com/office/drawing/2014/main" xmlns="" w="9525">
+                <a14:hiddenLine xmlns="" xmlns:a16="http://schemas.microsoft.com/office/drawing/2014/main" xmlns:p14="http://schemas.microsoft.com/office/powerpoint/2010/main" xmlns:a14="http://schemas.microsoft.com/office/drawing/2010/main" w="9525">
                   <a:solidFill>
                     <a:srgbClr val="000000"/>
                   </a:solidFill>
@@ -43311,7 +46336,7 @@
             </a:ln>
             <a:extLst>
               <a:ext uri="{91240B29-F687-4f45-9708-019B960494DF}">
-                <a14:hiddenLine xmlns:a14="http://schemas.microsoft.com/office/drawing/2010/main" xmlns:p14="http://schemas.microsoft.com/office/powerpoint/2010/main" xmlns:a16="http://schemas.microsoft.com/office/drawing/2014/main" xmlns="" w="9525">
+                <a14:hiddenLine xmlns="" xmlns:a16="http://schemas.microsoft.com/office/drawing/2014/main" xmlns:p14="http://schemas.microsoft.com/office/powerpoint/2010/main" xmlns:a14="http://schemas.microsoft.com/office/drawing/2010/main" w="9525">
                   <a:solidFill>
                     <a:srgbClr val="000000"/>
                   </a:solidFill>
@@ -43423,7 +46448,7 @@
             </a:ln>
             <a:extLst>
               <a:ext uri="{91240B29-F687-4f45-9708-019B960494DF}">
-                <a14:hiddenLine xmlns:a14="http://schemas.microsoft.com/office/drawing/2010/main" xmlns:p14="http://schemas.microsoft.com/office/powerpoint/2010/main" xmlns:a16="http://schemas.microsoft.com/office/drawing/2014/main" xmlns="" w="9525">
+                <a14:hiddenLine xmlns="" xmlns:a16="http://schemas.microsoft.com/office/drawing/2014/main" xmlns:p14="http://schemas.microsoft.com/office/powerpoint/2010/main" xmlns:a14="http://schemas.microsoft.com/office/drawing/2010/main" w="9525">
                   <a:solidFill>
                     <a:srgbClr val="000000"/>
                   </a:solidFill>
@@ -43507,7 +46532,7 @@
             </a:ln>
             <a:extLst>
               <a:ext uri="{91240B29-F687-4f45-9708-019B960494DF}">
-                <a14:hiddenLine xmlns:a14="http://schemas.microsoft.com/office/drawing/2010/main" xmlns:p14="http://schemas.microsoft.com/office/powerpoint/2010/main" xmlns:a16="http://schemas.microsoft.com/office/drawing/2014/main" xmlns="" w="9525">
+                <a14:hiddenLine xmlns="" xmlns:a16="http://schemas.microsoft.com/office/drawing/2014/main" xmlns:p14="http://schemas.microsoft.com/office/powerpoint/2010/main" xmlns:a14="http://schemas.microsoft.com/office/drawing/2010/main" w="9525">
                   <a:solidFill>
                     <a:srgbClr val="000000"/>
                   </a:solidFill>
@@ -43591,7 +46616,7 @@
             </a:ln>
             <a:extLst>
               <a:ext uri="{91240B29-F687-4f45-9708-019B960494DF}">
-                <a14:hiddenLine xmlns:a14="http://schemas.microsoft.com/office/drawing/2010/main" xmlns:p14="http://schemas.microsoft.com/office/powerpoint/2010/main" xmlns:a16="http://schemas.microsoft.com/office/drawing/2014/main" xmlns="" w="9525">
+                <a14:hiddenLine xmlns="" xmlns:a16="http://schemas.microsoft.com/office/drawing/2014/main" xmlns:p14="http://schemas.microsoft.com/office/powerpoint/2010/main" xmlns:a14="http://schemas.microsoft.com/office/drawing/2010/main" w="9525">
                   <a:solidFill>
                     <a:srgbClr val="000000"/>
                   </a:solidFill>
@@ -43703,7 +46728,7 @@
             </a:ln>
             <a:extLst>
               <a:ext uri="{91240B29-F687-4f45-9708-019B960494DF}">
-                <a14:hiddenLine xmlns:a14="http://schemas.microsoft.com/office/drawing/2010/main" xmlns:p14="http://schemas.microsoft.com/office/powerpoint/2010/main" xmlns:a16="http://schemas.microsoft.com/office/drawing/2014/main" xmlns="" w="9525">
+                <a14:hiddenLine xmlns="" xmlns:a16="http://schemas.microsoft.com/office/drawing/2014/main" xmlns:p14="http://schemas.microsoft.com/office/powerpoint/2010/main" xmlns:a14="http://schemas.microsoft.com/office/drawing/2010/main" w="9525">
                   <a:solidFill>
                     <a:srgbClr val="000000"/>
                   </a:solidFill>
@@ -43815,7 +46840,7 @@
             </a:ln>
             <a:extLst>
               <a:ext uri="{91240B29-F687-4f45-9708-019B960494DF}">
-                <a14:hiddenLine xmlns:a14="http://schemas.microsoft.com/office/drawing/2010/main" xmlns:p14="http://schemas.microsoft.com/office/powerpoint/2010/main" xmlns:a16="http://schemas.microsoft.com/office/drawing/2014/main" xmlns="" w="9525">
+                <a14:hiddenLine xmlns="" xmlns:a16="http://schemas.microsoft.com/office/drawing/2014/main" xmlns:p14="http://schemas.microsoft.com/office/powerpoint/2010/main" xmlns:a14="http://schemas.microsoft.com/office/drawing/2010/main" w="9525">
                   <a:solidFill>
                     <a:srgbClr val="000000"/>
                   </a:solidFill>
@@ -43899,7 +46924,7 @@
             </a:ln>
             <a:extLst>
               <a:ext uri="{91240B29-F687-4f45-9708-019B960494DF}">
-                <a14:hiddenLine xmlns:a14="http://schemas.microsoft.com/office/drawing/2010/main" xmlns:p14="http://schemas.microsoft.com/office/powerpoint/2010/main" xmlns:a16="http://schemas.microsoft.com/office/drawing/2014/main" xmlns="" w="9525">
+                <a14:hiddenLine xmlns="" xmlns:a16="http://schemas.microsoft.com/office/drawing/2014/main" xmlns:p14="http://schemas.microsoft.com/office/powerpoint/2010/main" xmlns:a14="http://schemas.microsoft.com/office/drawing/2010/main" w="9525">
                   <a:solidFill>
                     <a:srgbClr val="000000"/>
                   </a:solidFill>
@@ -44031,7 +47056,7 @@
             </a:ln>
             <a:extLst>
               <a:ext uri="{91240B29-F687-4f45-9708-019B960494DF}">
-                <a14:hiddenLine xmlns:a14="http://schemas.microsoft.com/office/drawing/2010/main" xmlns:p14="http://schemas.microsoft.com/office/powerpoint/2010/main" xmlns:a16="http://schemas.microsoft.com/office/drawing/2014/main" xmlns="" w="9525">
+                <a14:hiddenLine xmlns="" xmlns:a16="http://schemas.microsoft.com/office/drawing/2014/main" xmlns:p14="http://schemas.microsoft.com/office/powerpoint/2010/main" xmlns:a14="http://schemas.microsoft.com/office/drawing/2010/main" w="9525">
                   <a:solidFill>
                     <a:srgbClr val="000000"/>
                   </a:solidFill>
@@ -44159,7 +47184,7 @@
             </a:ln>
             <a:extLst>
               <a:ext uri="{91240B29-F687-4f45-9708-019B960494DF}">
-                <a14:hiddenLine xmlns:a14="http://schemas.microsoft.com/office/drawing/2010/main" xmlns:p14="http://schemas.microsoft.com/office/powerpoint/2010/main" xmlns:a16="http://schemas.microsoft.com/office/drawing/2014/main" xmlns="" w="9525">
+                <a14:hiddenLine xmlns="" xmlns:a16="http://schemas.microsoft.com/office/drawing/2014/main" xmlns:p14="http://schemas.microsoft.com/office/powerpoint/2010/main" xmlns:a14="http://schemas.microsoft.com/office/drawing/2010/main" w="9525">
                   <a:solidFill>
                     <a:srgbClr val="000000"/>
                   </a:solidFill>
@@ -44243,7 +47268,7 @@
             </a:ln>
             <a:extLst>
               <a:ext uri="{91240B29-F687-4f45-9708-019B960494DF}">
-                <a14:hiddenLine xmlns:a14="http://schemas.microsoft.com/office/drawing/2010/main" xmlns:p14="http://schemas.microsoft.com/office/powerpoint/2010/main" xmlns:a16="http://schemas.microsoft.com/office/drawing/2014/main" xmlns="" w="9525">
+                <a14:hiddenLine xmlns="" xmlns:a16="http://schemas.microsoft.com/office/drawing/2014/main" xmlns:p14="http://schemas.microsoft.com/office/powerpoint/2010/main" xmlns:a14="http://schemas.microsoft.com/office/drawing/2010/main" w="9525">
                   <a:solidFill>
                     <a:srgbClr val="000000"/>
                   </a:solidFill>
@@ -44327,7 +47352,7 @@
             </a:ln>
             <a:extLst>
               <a:ext uri="{91240B29-F687-4f45-9708-019B960494DF}">
-                <a14:hiddenLine xmlns:a14="http://schemas.microsoft.com/office/drawing/2010/main" xmlns:p14="http://schemas.microsoft.com/office/powerpoint/2010/main" xmlns:a16="http://schemas.microsoft.com/office/drawing/2014/main" xmlns="" w="9525">
+                <a14:hiddenLine xmlns="" xmlns:a16="http://schemas.microsoft.com/office/drawing/2014/main" xmlns:p14="http://schemas.microsoft.com/office/powerpoint/2010/main" xmlns:a14="http://schemas.microsoft.com/office/drawing/2010/main" w="9525">
                   <a:solidFill>
                     <a:srgbClr val="000000"/>
                   </a:solidFill>
@@ -44439,7 +47464,7 @@
             </a:ln>
             <a:extLst>
               <a:ext uri="{91240B29-F687-4f45-9708-019B960494DF}">
-                <a14:hiddenLine xmlns:a14="http://schemas.microsoft.com/office/drawing/2010/main" xmlns:p14="http://schemas.microsoft.com/office/powerpoint/2010/main" xmlns:a16="http://schemas.microsoft.com/office/drawing/2014/main" xmlns="" w="9525">
+                <a14:hiddenLine xmlns="" xmlns:a16="http://schemas.microsoft.com/office/drawing/2014/main" xmlns:p14="http://schemas.microsoft.com/office/powerpoint/2010/main" xmlns:a14="http://schemas.microsoft.com/office/drawing/2010/main" w="9525">
                   <a:solidFill>
                     <a:srgbClr val="000000"/>
                   </a:solidFill>
@@ -44495,7 +47520,7 @@
             </a:ln>
             <a:extLst>
               <a:ext uri="{91240B29-F687-4f45-9708-019B960494DF}">
-                <a14:hiddenLine xmlns:a14="http://schemas.microsoft.com/office/drawing/2010/main" xmlns:p14="http://schemas.microsoft.com/office/powerpoint/2010/main" xmlns:a16="http://schemas.microsoft.com/office/drawing/2014/main" xmlns="" w="9525">
+                <a14:hiddenLine xmlns="" xmlns:a16="http://schemas.microsoft.com/office/drawing/2014/main" xmlns:p14="http://schemas.microsoft.com/office/powerpoint/2010/main" xmlns:a14="http://schemas.microsoft.com/office/drawing/2010/main" w="9525">
                   <a:solidFill>
                     <a:srgbClr val="000000"/>
                   </a:solidFill>
@@ -44582,7 +47607,7 @@
             </a:ln>
             <a:extLst>
               <a:ext uri="{91240B29-F687-4f45-9708-019B960494DF}">
-                <a14:hiddenLine xmlns:a14="http://schemas.microsoft.com/office/drawing/2010/main" xmlns:p14="http://schemas.microsoft.com/office/powerpoint/2010/main" xmlns:a16="http://schemas.microsoft.com/office/drawing/2014/main" xmlns="" w="9525">
+                <a14:hiddenLine xmlns="" xmlns:a16="http://schemas.microsoft.com/office/drawing/2014/main" xmlns:p14="http://schemas.microsoft.com/office/powerpoint/2010/main" xmlns:a14="http://schemas.microsoft.com/office/drawing/2010/main" w="9525">
                   <a:solidFill>
                     <a:srgbClr val="000000"/>
                   </a:solidFill>
@@ -44694,7 +47719,7 @@
             </a:ln>
             <a:extLst>
               <a:ext uri="{91240B29-F687-4f45-9708-019B960494DF}">
-                <a14:hiddenLine xmlns:a14="http://schemas.microsoft.com/office/drawing/2010/main" xmlns:p14="http://schemas.microsoft.com/office/powerpoint/2010/main" xmlns:a16="http://schemas.microsoft.com/office/drawing/2014/main" xmlns="" w="9525">
+                <a14:hiddenLine xmlns="" xmlns:a16="http://schemas.microsoft.com/office/drawing/2014/main" xmlns:p14="http://schemas.microsoft.com/office/powerpoint/2010/main" xmlns:a14="http://schemas.microsoft.com/office/drawing/2010/main" w="9525">
                   <a:solidFill>
                     <a:srgbClr val="000000"/>
                   </a:solidFill>
@@ -44778,7 +47803,7 @@
             </a:ln>
             <a:extLst>
               <a:ext uri="{91240B29-F687-4f45-9708-019B960494DF}">
-                <a14:hiddenLine xmlns:a14="http://schemas.microsoft.com/office/drawing/2010/main" xmlns:p14="http://schemas.microsoft.com/office/powerpoint/2010/main" xmlns:a16="http://schemas.microsoft.com/office/drawing/2014/main" xmlns="" w="9525">
+                <a14:hiddenLine xmlns="" xmlns:a16="http://schemas.microsoft.com/office/drawing/2014/main" xmlns:p14="http://schemas.microsoft.com/office/powerpoint/2010/main" xmlns:a14="http://schemas.microsoft.com/office/drawing/2010/main" w="9525">
                   <a:solidFill>
                     <a:srgbClr val="000000"/>
                   </a:solidFill>
@@ -44890,7 +47915,7 @@
             </a:ln>
             <a:extLst>
               <a:ext uri="{91240B29-F687-4f45-9708-019B960494DF}">
-                <a14:hiddenLine xmlns:a14="http://schemas.microsoft.com/office/drawing/2010/main" xmlns:p14="http://schemas.microsoft.com/office/powerpoint/2010/main" xmlns:a16="http://schemas.microsoft.com/office/drawing/2014/main" xmlns="" w="9525">
+                <a14:hiddenLine xmlns="" xmlns:a16="http://schemas.microsoft.com/office/drawing/2014/main" xmlns:p14="http://schemas.microsoft.com/office/powerpoint/2010/main" xmlns:a14="http://schemas.microsoft.com/office/drawing/2010/main" w="9525">
                   <a:solidFill>
                     <a:srgbClr val="000000"/>
                   </a:solidFill>
@@ -44977,7 +48002,7 @@
             </a:ln>
             <a:extLst>
               <a:ext uri="{91240B29-F687-4f45-9708-019B960494DF}">
-                <a14:hiddenLine xmlns:a14="http://schemas.microsoft.com/office/drawing/2010/main" xmlns:p14="http://schemas.microsoft.com/office/powerpoint/2010/main" xmlns:a16="http://schemas.microsoft.com/office/drawing/2014/main" xmlns="" w="9525">
+                <a14:hiddenLine xmlns="" xmlns:a16="http://schemas.microsoft.com/office/drawing/2014/main" xmlns:p14="http://schemas.microsoft.com/office/powerpoint/2010/main" xmlns:a14="http://schemas.microsoft.com/office/drawing/2010/main" w="9525">
                   <a:solidFill>
                     <a:srgbClr val="000000"/>
                   </a:solidFill>
@@ -45061,7 +48086,7 @@
             </a:ln>
             <a:extLst>
               <a:ext uri="{91240B29-F687-4f45-9708-019B960494DF}">
-                <a14:hiddenLine xmlns:a14="http://schemas.microsoft.com/office/drawing/2010/main" xmlns:p14="http://schemas.microsoft.com/office/powerpoint/2010/main" xmlns:a16="http://schemas.microsoft.com/office/drawing/2014/main" xmlns="" w="9525">
+                <a14:hiddenLine xmlns="" xmlns:a16="http://schemas.microsoft.com/office/drawing/2014/main" xmlns:p14="http://schemas.microsoft.com/office/powerpoint/2010/main" xmlns:a14="http://schemas.microsoft.com/office/drawing/2010/main" w="9525">
                   <a:solidFill>
                     <a:srgbClr val="000000"/>
                   </a:solidFill>
@@ -45173,7 +48198,7 @@
             </a:ln>
             <a:extLst>
               <a:ext uri="{91240B29-F687-4f45-9708-019B960494DF}">
-                <a14:hiddenLine xmlns:a14="http://schemas.microsoft.com/office/drawing/2010/main" xmlns:p14="http://schemas.microsoft.com/office/powerpoint/2010/main" xmlns:a16="http://schemas.microsoft.com/office/drawing/2014/main" xmlns="" w="9525">
+                <a14:hiddenLine xmlns="" xmlns:a16="http://schemas.microsoft.com/office/drawing/2014/main" xmlns:p14="http://schemas.microsoft.com/office/powerpoint/2010/main" xmlns:a14="http://schemas.microsoft.com/office/drawing/2010/main" w="9525">
                   <a:solidFill>
                     <a:srgbClr val="000000"/>
                   </a:solidFill>
@@ -45285,7 +48310,7 @@
             </a:ln>
             <a:extLst>
               <a:ext uri="{91240B29-F687-4f45-9708-019B960494DF}">
-                <a14:hiddenLine xmlns:a14="http://schemas.microsoft.com/office/drawing/2010/main" xmlns:p14="http://schemas.microsoft.com/office/powerpoint/2010/main" xmlns:a16="http://schemas.microsoft.com/office/drawing/2014/main" xmlns="" w="9525">
+                <a14:hiddenLine xmlns="" xmlns:a16="http://schemas.microsoft.com/office/drawing/2014/main" xmlns:p14="http://schemas.microsoft.com/office/powerpoint/2010/main" xmlns:a14="http://schemas.microsoft.com/office/drawing/2010/main" w="9525">
                   <a:solidFill>
                     <a:srgbClr val="000000"/>
                   </a:solidFill>
@@ -45372,7 +48397,7 @@
             </a:ln>
             <a:extLst>
               <a:ext uri="{91240B29-F687-4f45-9708-019B960494DF}">
-                <a14:hiddenLine xmlns:a14="http://schemas.microsoft.com/office/drawing/2010/main" xmlns:p14="http://schemas.microsoft.com/office/powerpoint/2010/main" xmlns:a16="http://schemas.microsoft.com/office/drawing/2014/main" xmlns="" w="9525">
+                <a14:hiddenLine xmlns="" xmlns:a16="http://schemas.microsoft.com/office/drawing/2014/main" xmlns:p14="http://schemas.microsoft.com/office/powerpoint/2010/main" xmlns:a14="http://schemas.microsoft.com/office/drawing/2010/main" w="9525">
                   <a:solidFill>
                     <a:srgbClr val="000000"/>
                   </a:solidFill>
@@ -45514,7 +48539,7 @@
             </a:ln>
             <a:extLst>
               <a:ext uri="{91240B29-F687-4f45-9708-019B960494DF}">
-                <a14:hiddenLine xmlns:a14="http://schemas.microsoft.com/office/drawing/2010/main" xmlns:p14="http://schemas.microsoft.com/office/powerpoint/2010/main" xmlns:a16="http://schemas.microsoft.com/office/drawing/2014/main" xmlns="" w="9525">
+                <a14:hiddenLine xmlns="" xmlns:a16="http://schemas.microsoft.com/office/drawing/2014/main" xmlns:p14="http://schemas.microsoft.com/office/powerpoint/2010/main" xmlns:a14="http://schemas.microsoft.com/office/drawing/2010/main" w="9525">
                   <a:solidFill>
                     <a:srgbClr val="000000"/>
                   </a:solidFill>
@@ -45682,7 +48707,7 @@
             </a:ln>
             <a:extLst>
               <a:ext uri="{91240B29-F687-4f45-9708-019B960494DF}">
-                <a14:hiddenLine xmlns:a14="http://schemas.microsoft.com/office/drawing/2010/main" xmlns:p14="http://schemas.microsoft.com/office/powerpoint/2010/main" xmlns:a16="http://schemas.microsoft.com/office/drawing/2014/main" xmlns="" w="9525">
+                <a14:hiddenLine xmlns="" xmlns:a16="http://schemas.microsoft.com/office/drawing/2014/main" xmlns:p14="http://schemas.microsoft.com/office/powerpoint/2010/main" xmlns:a14="http://schemas.microsoft.com/office/drawing/2010/main" w="9525">
                   <a:solidFill>
                     <a:srgbClr val="000000"/>
                   </a:solidFill>
@@ -45819,7 +48844,7 @@
             </a:ln>
             <a:extLst>
               <a:ext uri="{91240B29-F687-4f45-9708-019B960494DF}">
-                <a14:hiddenLine xmlns:a14="http://schemas.microsoft.com/office/drawing/2010/main" xmlns:p14="http://schemas.microsoft.com/office/powerpoint/2010/main" xmlns:a16="http://schemas.microsoft.com/office/drawing/2014/main" xmlns="" w="9525">
+                <a14:hiddenLine xmlns="" xmlns:a16="http://schemas.microsoft.com/office/drawing/2014/main" xmlns:p14="http://schemas.microsoft.com/office/powerpoint/2010/main" xmlns:a14="http://schemas.microsoft.com/office/drawing/2010/main" w="9525">
                   <a:solidFill>
                     <a:srgbClr val="000000"/>
                   </a:solidFill>
@@ -45931,7 +48956,7 @@
             </a:ln>
             <a:extLst>
               <a:ext uri="{91240B29-F687-4f45-9708-019B960494DF}">
-                <a14:hiddenLine xmlns:a14="http://schemas.microsoft.com/office/drawing/2010/main" xmlns:p14="http://schemas.microsoft.com/office/powerpoint/2010/main" xmlns:a16="http://schemas.microsoft.com/office/drawing/2014/main" xmlns="" w="9525">
+                <a14:hiddenLine xmlns="" xmlns:a16="http://schemas.microsoft.com/office/drawing/2014/main" xmlns:p14="http://schemas.microsoft.com/office/powerpoint/2010/main" xmlns:a14="http://schemas.microsoft.com/office/drawing/2010/main" w="9525">
                   <a:solidFill>
                     <a:srgbClr val="000000"/>
                   </a:solidFill>
@@ -46018,7 +49043,7 @@
             </a:ln>
             <a:extLst>
               <a:ext uri="{91240B29-F687-4f45-9708-019B960494DF}">
-                <a14:hiddenLine xmlns:a14="http://schemas.microsoft.com/office/drawing/2010/main" xmlns:p14="http://schemas.microsoft.com/office/powerpoint/2010/main" xmlns:a16="http://schemas.microsoft.com/office/drawing/2014/main" xmlns="" w="9525">
+                <a14:hiddenLine xmlns="" xmlns:a16="http://schemas.microsoft.com/office/drawing/2014/main" xmlns:p14="http://schemas.microsoft.com/office/powerpoint/2010/main" xmlns:a14="http://schemas.microsoft.com/office/drawing/2010/main" w="9525">
                   <a:solidFill>
                     <a:srgbClr val="000000"/>
                   </a:solidFill>
@@ -46130,7 +49155,7 @@
             </a:ln>
             <a:extLst>
               <a:ext uri="{91240B29-F687-4f45-9708-019B960494DF}">
-                <a14:hiddenLine xmlns:a14="http://schemas.microsoft.com/office/drawing/2010/main" xmlns:p14="http://schemas.microsoft.com/office/powerpoint/2010/main" xmlns:a16="http://schemas.microsoft.com/office/drawing/2014/main" xmlns="" w="9525">
+                <a14:hiddenLine xmlns="" xmlns:a16="http://schemas.microsoft.com/office/drawing/2014/main" xmlns:p14="http://schemas.microsoft.com/office/powerpoint/2010/main" xmlns:a14="http://schemas.microsoft.com/office/drawing/2010/main" w="9525">
                   <a:solidFill>
                     <a:srgbClr val="000000"/>
                   </a:solidFill>
@@ -46220,7 +49245,7 @@
             </a:ln>
             <a:extLst>
               <a:ext uri="{91240B29-F687-4f45-9708-019B960494DF}">
-                <a14:hiddenLine xmlns:a14="http://schemas.microsoft.com/office/drawing/2010/main" xmlns:p14="http://schemas.microsoft.com/office/powerpoint/2010/main" xmlns:a16="http://schemas.microsoft.com/office/drawing/2014/main" xmlns="" w="9525">
+                <a14:hiddenLine xmlns="" xmlns:a16="http://schemas.microsoft.com/office/drawing/2014/main" xmlns:p14="http://schemas.microsoft.com/office/powerpoint/2010/main" xmlns:a14="http://schemas.microsoft.com/office/drawing/2010/main" w="9525">
                   <a:solidFill>
                     <a:srgbClr val="000000"/>
                   </a:solidFill>
@@ -46332,7 +49357,7 @@
             </a:ln>
             <a:extLst>
               <a:ext uri="{91240B29-F687-4f45-9708-019B960494DF}">
-                <a14:hiddenLine xmlns:a14="http://schemas.microsoft.com/office/drawing/2010/main" xmlns:p14="http://schemas.microsoft.com/office/powerpoint/2010/main" xmlns:a16="http://schemas.microsoft.com/office/drawing/2014/main" xmlns="" w="9525">
+                <a14:hiddenLine xmlns="" xmlns:a16="http://schemas.microsoft.com/office/drawing/2014/main" xmlns:p14="http://schemas.microsoft.com/office/powerpoint/2010/main" xmlns:a14="http://schemas.microsoft.com/office/drawing/2010/main" w="9525">
                   <a:solidFill>
                     <a:srgbClr val="000000"/>
                   </a:solidFill>
@@ -46422,7 +49447,7 @@
             </a:ln>
             <a:extLst>
               <a:ext uri="{91240B29-F687-4f45-9708-019B960494DF}">
-                <a14:hiddenLine xmlns:a14="http://schemas.microsoft.com/office/drawing/2010/main" xmlns:p14="http://schemas.microsoft.com/office/powerpoint/2010/main" xmlns:a16="http://schemas.microsoft.com/office/drawing/2014/main" xmlns="" w="9525">
+                <a14:hiddenLine xmlns="" xmlns:a16="http://schemas.microsoft.com/office/drawing/2014/main" xmlns:p14="http://schemas.microsoft.com/office/powerpoint/2010/main" xmlns:a14="http://schemas.microsoft.com/office/drawing/2010/main" w="9525">
                   <a:solidFill>
                     <a:srgbClr val="000000"/>
                   </a:solidFill>
@@ -46534,7 +49559,7 @@
             </a:ln>
             <a:extLst>
               <a:ext uri="{91240B29-F687-4f45-9708-019B960494DF}">
-                <a14:hiddenLine xmlns:a14="http://schemas.microsoft.com/office/drawing/2010/main" xmlns:p14="http://schemas.microsoft.com/office/powerpoint/2010/main" xmlns:a16="http://schemas.microsoft.com/office/drawing/2014/main" xmlns="" w="9525">
+                <a14:hiddenLine xmlns="" xmlns:a16="http://schemas.microsoft.com/office/drawing/2014/main" xmlns:p14="http://schemas.microsoft.com/office/powerpoint/2010/main" xmlns:a14="http://schemas.microsoft.com/office/drawing/2010/main" w="9525">
                   <a:solidFill>
                     <a:srgbClr val="000000"/>
                   </a:solidFill>
@@ -46590,7 +49615,7 @@
             </a:ln>
             <a:extLst>
               <a:ext uri="{91240B29-F687-4f45-9708-019B960494DF}">
-                <a14:hiddenLine xmlns:a14="http://schemas.microsoft.com/office/drawing/2010/main" xmlns:p14="http://schemas.microsoft.com/office/powerpoint/2010/main" xmlns:a16="http://schemas.microsoft.com/office/drawing/2014/main" xmlns="" w="9525">
+                <a14:hiddenLine xmlns="" xmlns:a16="http://schemas.microsoft.com/office/drawing/2014/main" xmlns:p14="http://schemas.microsoft.com/office/powerpoint/2010/main" xmlns:a14="http://schemas.microsoft.com/office/drawing/2010/main" w="9525">
                   <a:solidFill>
                     <a:srgbClr val="000000"/>
                   </a:solidFill>
@@ -46991,7 +50016,7 @@
           <a:noFill/>
           <a:extLst>
             <a:ext uri="{909E8E84-426E-40dd-AFC4-6F175D3DCCD1}">
-              <a14:hiddenFill xmlns="" xmlns:a16="http://schemas.microsoft.com/office/drawing/2014/main" xmlns:p14="http://schemas.microsoft.com/office/powerpoint/2010/main" xmlns:a14="http://schemas.microsoft.com/office/drawing/2010/main">
+              <a14:hiddenFill xmlns:a14="http://schemas.microsoft.com/office/drawing/2010/main" xmlns:p14="http://schemas.microsoft.com/office/powerpoint/2010/main" xmlns:a16="http://schemas.microsoft.com/office/drawing/2014/main" xmlns="">
                 <a:solidFill>
                   <a:srgbClr val="FFFFFF"/>
                 </a:solidFill>
@@ -47073,7 +50098,7 @@
             </a:ln>
             <a:extLst>
               <a:ext uri="{91240B29-F687-4f45-9708-019B960494DF}">
-                <a14:hiddenLine xmlns="" xmlns:a16="http://schemas.microsoft.com/office/drawing/2014/main" xmlns:p14="http://schemas.microsoft.com/office/powerpoint/2010/main" xmlns:a14="http://schemas.microsoft.com/office/drawing/2010/main" w="9525">
+                <a14:hiddenLine xmlns:a14="http://schemas.microsoft.com/office/drawing/2010/main" xmlns:p14="http://schemas.microsoft.com/office/powerpoint/2010/main" xmlns:a16="http://schemas.microsoft.com/office/drawing/2014/main" xmlns="" w="9525">
                   <a:solidFill>
                     <a:srgbClr val="000000"/>
                   </a:solidFill>
@@ -47185,7 +50210,7 @@
             </a:ln>
             <a:extLst>
               <a:ext uri="{91240B29-F687-4f45-9708-019B960494DF}">
-                <a14:hiddenLine xmlns="" xmlns:a16="http://schemas.microsoft.com/office/drawing/2014/main" xmlns:p14="http://schemas.microsoft.com/office/powerpoint/2010/main" xmlns:a14="http://schemas.microsoft.com/office/drawing/2010/main" w="9525">
+                <a14:hiddenLine xmlns:a14="http://schemas.microsoft.com/office/drawing/2010/main" xmlns:p14="http://schemas.microsoft.com/office/powerpoint/2010/main" xmlns:a16="http://schemas.microsoft.com/office/drawing/2014/main" xmlns="" w="9525">
                   <a:solidFill>
                     <a:srgbClr val="000000"/>
                   </a:solidFill>
@@ -47297,7 +50322,7 @@
             </a:ln>
             <a:extLst>
               <a:ext uri="{91240B29-F687-4f45-9708-019B960494DF}">
-                <a14:hiddenLine xmlns="" xmlns:a16="http://schemas.microsoft.com/office/drawing/2014/main" xmlns:p14="http://schemas.microsoft.com/office/powerpoint/2010/main" xmlns:a14="http://schemas.microsoft.com/office/drawing/2010/main" w="9525">
+                <a14:hiddenLine xmlns:a14="http://schemas.microsoft.com/office/drawing/2010/main" xmlns:p14="http://schemas.microsoft.com/office/powerpoint/2010/main" xmlns:a16="http://schemas.microsoft.com/office/drawing/2014/main" xmlns="" w="9525">
                   <a:solidFill>
                     <a:srgbClr val="000000"/>
                   </a:solidFill>
@@ -47381,7 +50406,7 @@
             </a:ln>
             <a:extLst>
               <a:ext uri="{91240B29-F687-4f45-9708-019B960494DF}">
-                <a14:hiddenLine xmlns="" xmlns:a16="http://schemas.microsoft.com/office/drawing/2014/main" xmlns:p14="http://schemas.microsoft.com/office/powerpoint/2010/main" xmlns:a14="http://schemas.microsoft.com/office/drawing/2010/main" w="9525">
+                <a14:hiddenLine xmlns:a14="http://schemas.microsoft.com/office/drawing/2010/main" xmlns:p14="http://schemas.microsoft.com/office/powerpoint/2010/main" xmlns:a16="http://schemas.microsoft.com/office/drawing/2014/main" xmlns="" w="9525">
                   <a:solidFill>
                     <a:srgbClr val="000000"/>
                   </a:solidFill>
@@ -47493,7 +50518,7 @@
             </a:ln>
             <a:extLst>
               <a:ext uri="{91240B29-F687-4f45-9708-019B960494DF}">
-                <a14:hiddenLine xmlns="" xmlns:a16="http://schemas.microsoft.com/office/drawing/2014/main" xmlns:p14="http://schemas.microsoft.com/office/powerpoint/2010/main" xmlns:a14="http://schemas.microsoft.com/office/drawing/2010/main" w="9525">
+                <a14:hiddenLine xmlns:a14="http://schemas.microsoft.com/office/drawing/2010/main" xmlns:p14="http://schemas.microsoft.com/office/powerpoint/2010/main" xmlns:a16="http://schemas.microsoft.com/office/drawing/2014/main" xmlns="" w="9525">
                   <a:solidFill>
                     <a:srgbClr val="000000"/>
                   </a:solidFill>
@@ -47577,7 +50602,7 @@
             </a:ln>
             <a:extLst>
               <a:ext uri="{91240B29-F687-4f45-9708-019B960494DF}">
-                <a14:hiddenLine xmlns="" xmlns:a16="http://schemas.microsoft.com/office/drawing/2014/main" xmlns:p14="http://schemas.microsoft.com/office/powerpoint/2010/main" xmlns:a14="http://schemas.microsoft.com/office/drawing/2010/main" w="9525">
+                <a14:hiddenLine xmlns:a14="http://schemas.microsoft.com/office/drawing/2010/main" xmlns:p14="http://schemas.microsoft.com/office/powerpoint/2010/main" xmlns:a16="http://schemas.microsoft.com/office/drawing/2014/main" xmlns="" w="9525">
                   <a:solidFill>
                     <a:srgbClr val="000000"/>
                   </a:solidFill>
@@ -47661,7 +50686,7 @@
             </a:ln>
             <a:extLst>
               <a:ext uri="{91240B29-F687-4f45-9708-019B960494DF}">
-                <a14:hiddenLine xmlns="" xmlns:a16="http://schemas.microsoft.com/office/drawing/2014/main" xmlns:p14="http://schemas.microsoft.com/office/powerpoint/2010/main" xmlns:a14="http://schemas.microsoft.com/office/drawing/2010/main" w="9525">
+                <a14:hiddenLine xmlns:a14="http://schemas.microsoft.com/office/drawing/2010/main" xmlns:p14="http://schemas.microsoft.com/office/powerpoint/2010/main" xmlns:a16="http://schemas.microsoft.com/office/drawing/2014/main" xmlns="" w="9525">
                   <a:solidFill>
                     <a:srgbClr val="000000"/>
                   </a:solidFill>
@@ -47773,7 +50798,7 @@
             </a:ln>
             <a:extLst>
               <a:ext uri="{91240B29-F687-4f45-9708-019B960494DF}">
-                <a14:hiddenLine xmlns="" xmlns:a16="http://schemas.microsoft.com/office/drawing/2014/main" xmlns:p14="http://schemas.microsoft.com/office/powerpoint/2010/main" xmlns:a14="http://schemas.microsoft.com/office/drawing/2010/main" w="9525">
+                <a14:hiddenLine xmlns:a14="http://schemas.microsoft.com/office/drawing/2010/main" xmlns:p14="http://schemas.microsoft.com/office/powerpoint/2010/main" xmlns:a16="http://schemas.microsoft.com/office/drawing/2014/main" xmlns="" w="9525">
                   <a:solidFill>
                     <a:srgbClr val="000000"/>
                   </a:solidFill>
@@ -47885,7 +50910,7 @@
             </a:ln>
             <a:extLst>
               <a:ext uri="{91240B29-F687-4f45-9708-019B960494DF}">
-                <a14:hiddenLine xmlns="" xmlns:a16="http://schemas.microsoft.com/office/drawing/2014/main" xmlns:p14="http://schemas.microsoft.com/office/powerpoint/2010/main" xmlns:a14="http://schemas.microsoft.com/office/drawing/2010/main" w="9525">
+                <a14:hiddenLine xmlns:a14="http://schemas.microsoft.com/office/drawing/2010/main" xmlns:p14="http://schemas.microsoft.com/office/powerpoint/2010/main" xmlns:a16="http://schemas.microsoft.com/office/drawing/2014/main" xmlns="" w="9525">
                   <a:solidFill>
                     <a:srgbClr val="000000"/>
                   </a:solidFill>
@@ -47969,7 +50994,7 @@
             </a:ln>
             <a:extLst>
               <a:ext uri="{91240B29-F687-4f45-9708-019B960494DF}">
-                <a14:hiddenLine xmlns="" xmlns:a16="http://schemas.microsoft.com/office/drawing/2014/main" xmlns:p14="http://schemas.microsoft.com/office/powerpoint/2010/main" xmlns:a14="http://schemas.microsoft.com/office/drawing/2010/main" w="9525">
+                <a14:hiddenLine xmlns:a14="http://schemas.microsoft.com/office/drawing/2010/main" xmlns:p14="http://schemas.microsoft.com/office/powerpoint/2010/main" xmlns:a16="http://schemas.microsoft.com/office/drawing/2014/main" xmlns="" w="9525">
                   <a:solidFill>
                     <a:srgbClr val="000000"/>
                   </a:solidFill>
@@ -48101,7 +51126,7 @@
             </a:ln>
             <a:extLst>
               <a:ext uri="{91240B29-F687-4f45-9708-019B960494DF}">
-                <a14:hiddenLine xmlns="" xmlns:a16="http://schemas.microsoft.com/office/drawing/2014/main" xmlns:p14="http://schemas.microsoft.com/office/powerpoint/2010/main" xmlns:a14="http://schemas.microsoft.com/office/drawing/2010/main" w="9525">
+                <a14:hiddenLine xmlns:a14="http://schemas.microsoft.com/office/drawing/2010/main" xmlns:p14="http://schemas.microsoft.com/office/powerpoint/2010/main" xmlns:a16="http://schemas.microsoft.com/office/drawing/2014/main" xmlns="" w="9525">
                   <a:solidFill>
                     <a:srgbClr val="000000"/>
                   </a:solidFill>
@@ -48229,7 +51254,7 @@
             </a:ln>
             <a:extLst>
               <a:ext uri="{91240B29-F687-4f45-9708-019B960494DF}">
-                <a14:hiddenLine xmlns="" xmlns:a16="http://schemas.microsoft.com/office/drawing/2014/main" xmlns:p14="http://schemas.microsoft.com/office/powerpoint/2010/main" xmlns:a14="http://schemas.microsoft.com/office/drawing/2010/main" w="9525">
+                <a14:hiddenLine xmlns:a14="http://schemas.microsoft.com/office/drawing/2010/main" xmlns:p14="http://schemas.microsoft.com/office/powerpoint/2010/main" xmlns:a16="http://schemas.microsoft.com/office/drawing/2014/main" xmlns="" w="9525">
                   <a:solidFill>
                     <a:srgbClr val="000000"/>
                   </a:solidFill>
@@ -48313,7 +51338,7 @@
             </a:ln>
             <a:extLst>
               <a:ext uri="{91240B29-F687-4f45-9708-019B960494DF}">
-                <a14:hiddenLine xmlns="" xmlns:a16="http://schemas.microsoft.com/office/drawing/2014/main" xmlns:p14="http://schemas.microsoft.com/office/powerpoint/2010/main" xmlns:a14="http://schemas.microsoft.com/office/drawing/2010/main" w="9525">
+                <a14:hiddenLine xmlns:a14="http://schemas.microsoft.com/office/drawing/2010/main" xmlns:p14="http://schemas.microsoft.com/office/powerpoint/2010/main" xmlns:a16="http://schemas.microsoft.com/office/drawing/2014/main" xmlns="" w="9525">
                   <a:solidFill>
                     <a:srgbClr val="000000"/>
                   </a:solidFill>
@@ -48397,7 +51422,7 @@
             </a:ln>
             <a:extLst>
               <a:ext uri="{91240B29-F687-4f45-9708-019B960494DF}">
-                <a14:hiddenLine xmlns="" xmlns:a16="http://schemas.microsoft.com/office/drawing/2014/main" xmlns:p14="http://schemas.microsoft.com/office/powerpoint/2010/main" xmlns:a14="http://schemas.microsoft.com/office/drawing/2010/main" w="9525">
+                <a14:hiddenLine xmlns:a14="http://schemas.microsoft.com/office/drawing/2010/main" xmlns:p14="http://schemas.microsoft.com/office/powerpoint/2010/main" xmlns:a16="http://schemas.microsoft.com/office/drawing/2014/main" xmlns="" w="9525">
                   <a:solidFill>
                     <a:srgbClr val="000000"/>
                   </a:solidFill>
@@ -48509,7 +51534,7 @@
             </a:ln>
             <a:extLst>
               <a:ext uri="{91240B29-F687-4f45-9708-019B960494DF}">
-                <a14:hiddenLine xmlns="" xmlns:a16="http://schemas.microsoft.com/office/drawing/2014/main" xmlns:p14="http://schemas.microsoft.com/office/powerpoint/2010/main" xmlns:a14="http://schemas.microsoft.com/office/drawing/2010/main" w="9525">
+                <a14:hiddenLine xmlns:a14="http://schemas.microsoft.com/office/drawing/2010/main" xmlns:p14="http://schemas.microsoft.com/office/powerpoint/2010/main" xmlns:a16="http://schemas.microsoft.com/office/drawing/2014/main" xmlns="" w="9525">
                   <a:solidFill>
                     <a:srgbClr val="000000"/>
                   </a:solidFill>
@@ -48565,7 +51590,7 @@
             </a:ln>
             <a:extLst>
               <a:ext uri="{91240B29-F687-4f45-9708-019B960494DF}">
-                <a14:hiddenLine xmlns="" xmlns:a16="http://schemas.microsoft.com/office/drawing/2014/main" xmlns:p14="http://schemas.microsoft.com/office/powerpoint/2010/main" xmlns:a14="http://schemas.microsoft.com/office/drawing/2010/main" w="9525">
+                <a14:hiddenLine xmlns:a14="http://schemas.microsoft.com/office/drawing/2010/main" xmlns:p14="http://schemas.microsoft.com/office/powerpoint/2010/main" xmlns:a16="http://schemas.microsoft.com/office/drawing/2014/main" xmlns="" w="9525">
                   <a:solidFill>
                     <a:srgbClr val="000000"/>
                   </a:solidFill>
@@ -48652,7 +51677,7 @@
             </a:ln>
             <a:extLst>
               <a:ext uri="{91240B29-F687-4f45-9708-019B960494DF}">
-                <a14:hiddenLine xmlns="" xmlns:a16="http://schemas.microsoft.com/office/drawing/2014/main" xmlns:p14="http://schemas.microsoft.com/office/powerpoint/2010/main" xmlns:a14="http://schemas.microsoft.com/office/drawing/2010/main" w="9525">
+                <a14:hiddenLine xmlns:a14="http://schemas.microsoft.com/office/drawing/2010/main" xmlns:p14="http://schemas.microsoft.com/office/powerpoint/2010/main" xmlns:a16="http://schemas.microsoft.com/office/drawing/2014/main" xmlns="" w="9525">
                   <a:solidFill>
                     <a:srgbClr val="000000"/>
                   </a:solidFill>
@@ -48764,7 +51789,7 @@
             </a:ln>
             <a:extLst>
               <a:ext uri="{91240B29-F687-4f45-9708-019B960494DF}">
-                <a14:hiddenLine xmlns="" xmlns:a16="http://schemas.microsoft.com/office/drawing/2014/main" xmlns:p14="http://schemas.microsoft.com/office/powerpoint/2010/main" xmlns:a14="http://schemas.microsoft.com/office/drawing/2010/main" w="9525">
+                <a14:hiddenLine xmlns:a14="http://schemas.microsoft.com/office/drawing/2010/main" xmlns:p14="http://schemas.microsoft.com/office/powerpoint/2010/main" xmlns:a16="http://schemas.microsoft.com/office/drawing/2014/main" xmlns="" w="9525">
                   <a:solidFill>
                     <a:srgbClr val="000000"/>
                   </a:solidFill>
@@ -48848,7 +51873,7 @@
             </a:ln>
             <a:extLst>
               <a:ext uri="{91240B29-F687-4f45-9708-019B960494DF}">
-                <a14:hiddenLine xmlns="" xmlns:a16="http://schemas.microsoft.com/office/drawing/2014/main" xmlns:p14="http://schemas.microsoft.com/office/powerpoint/2010/main" xmlns:a14="http://schemas.microsoft.com/office/drawing/2010/main" w="9525">
+                <a14:hiddenLine xmlns:a14="http://schemas.microsoft.com/office/drawing/2010/main" xmlns:p14="http://schemas.microsoft.com/office/powerpoint/2010/main" xmlns:a16="http://schemas.microsoft.com/office/drawing/2014/main" xmlns="" w="9525">
                   <a:solidFill>
                     <a:srgbClr val="000000"/>
                   </a:solidFill>
@@ -48960,7 +51985,7 @@
             </a:ln>
             <a:extLst>
               <a:ext uri="{91240B29-F687-4f45-9708-019B960494DF}">
-                <a14:hiddenLine xmlns="" xmlns:a16="http://schemas.microsoft.com/office/drawing/2014/main" xmlns:p14="http://schemas.microsoft.com/office/powerpoint/2010/main" xmlns:a14="http://schemas.microsoft.com/office/drawing/2010/main" w="9525">
+                <a14:hiddenLine xmlns:a14="http://schemas.microsoft.com/office/drawing/2010/main" xmlns:p14="http://schemas.microsoft.com/office/powerpoint/2010/main" xmlns:a16="http://schemas.microsoft.com/office/drawing/2014/main" xmlns="" w="9525">
                   <a:solidFill>
                     <a:srgbClr val="000000"/>
                   </a:solidFill>
@@ -49047,7 +52072,7 @@
             </a:ln>
             <a:extLst>
               <a:ext uri="{91240B29-F687-4f45-9708-019B960494DF}">
-                <a14:hiddenLine xmlns="" xmlns:a16="http://schemas.microsoft.com/office/drawing/2014/main" xmlns:p14="http://schemas.microsoft.com/office/powerpoint/2010/main" xmlns:a14="http://schemas.microsoft.com/office/drawing/2010/main" w="9525">
+                <a14:hiddenLine xmlns:a14="http://schemas.microsoft.com/office/drawing/2010/main" xmlns:p14="http://schemas.microsoft.com/office/powerpoint/2010/main" xmlns:a16="http://schemas.microsoft.com/office/drawing/2014/main" xmlns="" w="9525">
                   <a:solidFill>
                     <a:srgbClr val="000000"/>
                   </a:solidFill>
@@ -49131,7 +52156,7 @@
             </a:ln>
             <a:extLst>
               <a:ext uri="{91240B29-F687-4f45-9708-019B960494DF}">
-                <a14:hiddenLine xmlns="" xmlns:a16="http://schemas.microsoft.com/office/drawing/2014/main" xmlns:p14="http://schemas.microsoft.com/office/powerpoint/2010/main" xmlns:a14="http://schemas.microsoft.com/office/drawing/2010/main" w="9525">
+                <a14:hiddenLine xmlns:a14="http://schemas.microsoft.com/office/drawing/2010/main" xmlns:p14="http://schemas.microsoft.com/office/powerpoint/2010/main" xmlns:a16="http://schemas.microsoft.com/office/drawing/2014/main" xmlns="" w="9525">
                   <a:solidFill>
                     <a:srgbClr val="000000"/>
                   </a:solidFill>
@@ -49243,7 +52268,7 @@
             </a:ln>
             <a:extLst>
               <a:ext uri="{91240B29-F687-4f45-9708-019B960494DF}">
-                <a14:hiddenLine xmlns="" xmlns:a16="http://schemas.microsoft.com/office/drawing/2014/main" xmlns:p14="http://schemas.microsoft.com/office/powerpoint/2010/main" xmlns:a14="http://schemas.microsoft.com/office/drawing/2010/main" w="9525">
+                <a14:hiddenLine xmlns:a14="http://schemas.microsoft.com/office/drawing/2010/main" xmlns:p14="http://schemas.microsoft.com/office/powerpoint/2010/main" xmlns:a16="http://schemas.microsoft.com/office/drawing/2014/main" xmlns="" w="9525">
                   <a:solidFill>
                     <a:srgbClr val="000000"/>
                   </a:solidFill>
@@ -49355,7 +52380,7 @@
             </a:ln>
             <a:extLst>
               <a:ext uri="{91240B29-F687-4f45-9708-019B960494DF}">
-                <a14:hiddenLine xmlns="" xmlns:a16="http://schemas.microsoft.com/office/drawing/2014/main" xmlns:p14="http://schemas.microsoft.com/office/powerpoint/2010/main" xmlns:a14="http://schemas.microsoft.com/office/drawing/2010/main" w="9525">
+                <a14:hiddenLine xmlns:a14="http://schemas.microsoft.com/office/drawing/2010/main" xmlns:p14="http://schemas.microsoft.com/office/powerpoint/2010/main" xmlns:a16="http://schemas.microsoft.com/office/drawing/2014/main" xmlns="" w="9525">
                   <a:solidFill>
                     <a:srgbClr val="000000"/>
                   </a:solidFill>
@@ -49442,7 +52467,7 @@
             </a:ln>
             <a:extLst>
               <a:ext uri="{91240B29-F687-4f45-9708-019B960494DF}">
-                <a14:hiddenLine xmlns="" xmlns:a16="http://schemas.microsoft.com/office/drawing/2014/main" xmlns:p14="http://schemas.microsoft.com/office/powerpoint/2010/main" xmlns:a14="http://schemas.microsoft.com/office/drawing/2010/main" w="9525">
+                <a14:hiddenLine xmlns:a14="http://schemas.microsoft.com/office/drawing/2010/main" xmlns:p14="http://schemas.microsoft.com/office/powerpoint/2010/main" xmlns:a16="http://schemas.microsoft.com/office/drawing/2014/main" xmlns="" w="9525">
                   <a:solidFill>
                     <a:srgbClr val="000000"/>
                   </a:solidFill>
@@ -49584,7 +52609,7 @@
             </a:ln>
             <a:extLst>
               <a:ext uri="{91240B29-F687-4f45-9708-019B960494DF}">
-                <a14:hiddenLine xmlns="" xmlns:a16="http://schemas.microsoft.com/office/drawing/2014/main" xmlns:p14="http://schemas.microsoft.com/office/powerpoint/2010/main" xmlns:a14="http://schemas.microsoft.com/office/drawing/2010/main" w="9525">
+                <a14:hiddenLine xmlns:a14="http://schemas.microsoft.com/office/drawing/2010/main" xmlns:p14="http://schemas.microsoft.com/office/powerpoint/2010/main" xmlns:a16="http://schemas.microsoft.com/office/drawing/2014/main" xmlns="" w="9525">
                   <a:solidFill>
                     <a:srgbClr val="000000"/>
                   </a:solidFill>
@@ -49752,7 +52777,7 @@
             </a:ln>
             <a:extLst>
               <a:ext uri="{91240B29-F687-4f45-9708-019B960494DF}">
-                <a14:hiddenLine xmlns="" xmlns:a16="http://schemas.microsoft.com/office/drawing/2014/main" xmlns:p14="http://schemas.microsoft.com/office/powerpoint/2010/main" xmlns:a14="http://schemas.microsoft.com/office/drawing/2010/main" w="9525">
+                <a14:hiddenLine xmlns:a14="http://schemas.microsoft.com/office/drawing/2010/main" xmlns:p14="http://schemas.microsoft.com/office/powerpoint/2010/main" xmlns:a16="http://schemas.microsoft.com/office/drawing/2014/main" xmlns="" w="9525">
                   <a:solidFill>
                     <a:srgbClr val="000000"/>
                   </a:solidFill>
@@ -49889,7 +52914,7 @@
             </a:ln>
             <a:extLst>
               <a:ext uri="{91240B29-F687-4f45-9708-019B960494DF}">
-                <a14:hiddenLine xmlns="" xmlns:a16="http://schemas.microsoft.com/office/drawing/2014/main" xmlns:p14="http://schemas.microsoft.com/office/powerpoint/2010/main" xmlns:a14="http://schemas.microsoft.com/office/drawing/2010/main" w="9525">
+                <a14:hiddenLine xmlns:a14="http://schemas.microsoft.com/office/drawing/2010/main" xmlns:p14="http://schemas.microsoft.com/office/powerpoint/2010/main" xmlns:a16="http://schemas.microsoft.com/office/drawing/2014/main" xmlns="" w="9525">
                   <a:solidFill>
                     <a:srgbClr val="000000"/>
                   </a:solidFill>
@@ -50001,7 +53026,7 @@
             </a:ln>
             <a:extLst>
               <a:ext uri="{91240B29-F687-4f45-9708-019B960494DF}">
-                <a14:hiddenLine xmlns="" xmlns:a16="http://schemas.microsoft.com/office/drawing/2014/main" xmlns:p14="http://schemas.microsoft.com/office/powerpoint/2010/main" xmlns:a14="http://schemas.microsoft.com/office/drawing/2010/main" w="9525">
+                <a14:hiddenLine xmlns:a14="http://schemas.microsoft.com/office/drawing/2010/main" xmlns:p14="http://schemas.microsoft.com/office/powerpoint/2010/main" xmlns:a16="http://schemas.microsoft.com/office/drawing/2014/main" xmlns="" w="9525">
                   <a:solidFill>
                     <a:srgbClr val="000000"/>
                   </a:solidFill>
@@ -50088,7 +53113,7 @@
             </a:ln>
             <a:extLst>
               <a:ext uri="{91240B29-F687-4f45-9708-019B960494DF}">
-                <a14:hiddenLine xmlns="" xmlns:a16="http://schemas.microsoft.com/office/drawing/2014/main" xmlns:p14="http://schemas.microsoft.com/office/powerpoint/2010/main" xmlns:a14="http://schemas.microsoft.com/office/drawing/2010/main" w="9525">
+                <a14:hiddenLine xmlns:a14="http://schemas.microsoft.com/office/drawing/2010/main" xmlns:p14="http://schemas.microsoft.com/office/powerpoint/2010/main" xmlns:a16="http://schemas.microsoft.com/office/drawing/2014/main" xmlns="" w="9525">
                   <a:solidFill>
                     <a:srgbClr val="000000"/>
                   </a:solidFill>
@@ -50200,7 +53225,7 @@
             </a:ln>
             <a:extLst>
               <a:ext uri="{91240B29-F687-4f45-9708-019B960494DF}">
-                <a14:hiddenLine xmlns="" xmlns:a16="http://schemas.microsoft.com/office/drawing/2014/main" xmlns:p14="http://schemas.microsoft.com/office/powerpoint/2010/main" xmlns:a14="http://schemas.microsoft.com/office/drawing/2010/main" w="9525">
+                <a14:hiddenLine xmlns:a14="http://schemas.microsoft.com/office/drawing/2010/main" xmlns:p14="http://schemas.microsoft.com/office/powerpoint/2010/main" xmlns:a16="http://schemas.microsoft.com/office/drawing/2014/main" xmlns="" w="9525">
                   <a:solidFill>
                     <a:srgbClr val="000000"/>
                   </a:solidFill>
@@ -50290,7 +53315,7 @@
             </a:ln>
             <a:extLst>
               <a:ext uri="{91240B29-F687-4f45-9708-019B960494DF}">
-                <a14:hiddenLine xmlns="" xmlns:a16="http://schemas.microsoft.com/office/drawing/2014/main" xmlns:p14="http://schemas.microsoft.com/office/powerpoint/2010/main" xmlns:a14="http://schemas.microsoft.com/office/drawing/2010/main" w="9525">
+                <a14:hiddenLine xmlns:a14="http://schemas.microsoft.com/office/drawing/2010/main" xmlns:p14="http://schemas.microsoft.com/office/powerpoint/2010/main" xmlns:a16="http://schemas.microsoft.com/office/drawing/2014/main" xmlns="" w="9525">
                   <a:solidFill>
                     <a:srgbClr val="000000"/>
                   </a:solidFill>
@@ -50402,7 +53427,7 @@
             </a:ln>
             <a:extLst>
               <a:ext uri="{91240B29-F687-4f45-9708-019B960494DF}">
-                <a14:hiddenLine xmlns="" xmlns:a16="http://schemas.microsoft.com/office/drawing/2014/main" xmlns:p14="http://schemas.microsoft.com/office/powerpoint/2010/main" xmlns:a14="http://schemas.microsoft.com/office/drawing/2010/main" w="9525">
+                <a14:hiddenLine xmlns:a14="http://schemas.microsoft.com/office/drawing/2010/main" xmlns:p14="http://schemas.microsoft.com/office/powerpoint/2010/main" xmlns:a16="http://schemas.microsoft.com/office/drawing/2014/main" xmlns="" w="9525">
                   <a:solidFill>
                     <a:srgbClr val="000000"/>
                   </a:solidFill>
@@ -50492,7 +53517,7 @@
             </a:ln>
             <a:extLst>
               <a:ext uri="{91240B29-F687-4f45-9708-019B960494DF}">
-                <a14:hiddenLine xmlns="" xmlns:a16="http://schemas.microsoft.com/office/drawing/2014/main" xmlns:p14="http://schemas.microsoft.com/office/powerpoint/2010/main" xmlns:a14="http://schemas.microsoft.com/office/drawing/2010/main" w="9525">
+                <a14:hiddenLine xmlns:a14="http://schemas.microsoft.com/office/drawing/2010/main" xmlns:p14="http://schemas.microsoft.com/office/powerpoint/2010/main" xmlns:a16="http://schemas.microsoft.com/office/drawing/2014/main" xmlns="" w="9525">
                   <a:solidFill>
                     <a:srgbClr val="000000"/>
                   </a:solidFill>
@@ -50604,7 +53629,7 @@
             </a:ln>
             <a:extLst>
               <a:ext uri="{91240B29-F687-4f45-9708-019B960494DF}">
-                <a14:hiddenLine xmlns="" xmlns:a16="http://schemas.microsoft.com/office/drawing/2014/main" xmlns:p14="http://schemas.microsoft.com/office/powerpoint/2010/main" xmlns:a14="http://schemas.microsoft.com/office/drawing/2010/main" w="9525">
+                <a14:hiddenLine xmlns:a14="http://schemas.microsoft.com/office/drawing/2010/main" xmlns:p14="http://schemas.microsoft.com/office/powerpoint/2010/main" xmlns:a16="http://schemas.microsoft.com/office/drawing/2014/main" xmlns="" w="9525">
                   <a:solidFill>
                     <a:srgbClr val="000000"/>
                   </a:solidFill>
@@ -50660,7 +53685,7 @@
             </a:ln>
             <a:extLst>
               <a:ext uri="{91240B29-F687-4f45-9708-019B960494DF}">
-                <a14:hiddenLine xmlns="" xmlns:a16="http://schemas.microsoft.com/office/drawing/2014/main" xmlns:p14="http://schemas.microsoft.com/office/powerpoint/2010/main" xmlns:a14="http://schemas.microsoft.com/office/drawing/2010/main" w="9525">
+                <a14:hiddenLine xmlns:a14="http://schemas.microsoft.com/office/drawing/2010/main" xmlns:p14="http://schemas.microsoft.com/office/powerpoint/2010/main" xmlns:a16="http://schemas.microsoft.com/office/drawing/2014/main" xmlns="" w="9525">
                   <a:solidFill>
                     <a:srgbClr val="000000"/>
                   </a:solidFill>
